--- a/docs/MetaCost_Presentation.pptx
+++ b/docs/MetaCost_Presentation.pptx
@@ -796,7 +796,7 @@
           <a:lstStyle/>
           <a:p>
             <a:r>
-              <a:t>Run: streamlit run app/streamlit_app.py. Demo order: (1) Data tab: show the 5-day trend. (2) Predict an unseen day: choose Subject 2, Day 5 (MSE 0.093), then drag the calibration slider to 3: MSE falls to 0.016 and the yellow diamonds show the 3 mask readings. (3) What-if: drag the EMG_R4 slider and watch the predicted cost change. (4) Results tab: leaderboard. Backup: python scripts/predict.py --demo --subject S1</a:t>
+              <a:t>Open a terminal in the project folder (cd into ML proj). Run the three commands in order. (1) The paper reproduction prints linear-regression MSE 0.0107 and R2 0.83 for Subject 1. (2) predict.py trains a Gaussian Process on 4 days and predicts each unseen day; errors of about 11-17 %. (3) pytest shows all 10 tests pass. Total under a minute.</a:t>
             </a:r>
           </a:p>
         </p:txBody>
@@ -936,7 +936,7 @@
           <a:lstStyle/>
           <a:p>
             <a:r>
-              <a:t>Mukil: extended study, calibration, dashboard. Likhith: faithful MATLAB-to-Python port and GitHub repo.</a:t>
+              <a:t>Thank the panel and invite questions.</a:t>
             </a:r>
           </a:p>
         </p:txBody>
@@ -6252,7 +6252,7 @@
                 </a:solidFill>
                 <a:latin typeface="Cambria"/>
               </a:rPr>
-              <a:t>Live demo: interactive dashboard</a:t>
+              <a:t>Live demo: the code, running</a:t>
             </a:r>
           </a:p>
         </p:txBody>
@@ -6327,44 +6327,15 @@
           </a:p>
         </p:txBody>
       </p:sp>
-      <p:pic>
-        <p:nvPicPr>
-          <p:cNvPr id="6" name="Picture 5" descr="app_screenshot.jpg"/>
-          <p:cNvPicPr>
-            <a:picLocks noChangeAspect="1"/>
-          </p:cNvPicPr>
-          <p:nvPr/>
-        </p:nvPicPr>
-        <p:blipFill>
-          <a:blip r:embed="rId3"/>
-          <a:stretch>
-            <a:fillRect/>
-          </a:stretch>
-        </p:blipFill>
-        <p:spPr>
-          <a:xfrm>
-            <a:off x="548640" y="1436751"/>
-            <a:ext cx="6949440" cy="4213098"/>
-          </a:xfrm>
-          <a:prstGeom prst="rect">
-            <a:avLst/>
-          </a:prstGeom>
-          <a:ln w="12700">
-            <a:solidFill>
-              <a:srgbClr val="D0D5DD"/>
-            </a:solidFill>
-          </a:ln>
-        </p:spPr>
-      </p:pic>
-      <p:sp>
-        <p:nvSpPr>
-          <p:cNvPr id="7" name="Oval 6"/>
+      <p:sp>
+        <p:nvSpPr>
+          <p:cNvPr id="6" name="Oval 5"/>
           <p:cNvSpPr/>
           <p:nvPr/>
         </p:nvSpPr>
         <p:spPr>
           <a:xfrm>
-            <a:off x="7818120" y="1508760"/>
+            <a:off x="548640" y="1508760"/>
             <a:ext cx="457200" cy="457200"/>
           </a:xfrm>
           <a:prstGeom prst="ellipse">
@@ -6410,14 +6381,14 @@
       </p:sp>
       <p:sp>
         <p:nvSpPr>
-          <p:cNvPr id="8" name="TextBox 7"/>
-          <p:cNvSpPr txBox="1"/>
-          <p:nvPr/>
-        </p:nvSpPr>
-        <p:spPr>
-          <a:xfrm>
-            <a:off x="8412480" y="1463040"/>
-            <a:ext cx="3291840" cy="777240"/>
+          <p:cNvPr id="7" name="TextBox 6"/>
+          <p:cNvSpPr txBox="1"/>
+          <p:nvPr/>
+        </p:nvSpPr>
+        <p:spPr>
+          <a:xfrm>
+            <a:off x="1143000" y="1554480"/>
+            <a:ext cx="2926080" cy="411480"/>
           </a:xfrm>
           <a:prstGeom prst="rect">
             <a:avLst/>
@@ -6432,439 +6403,31 @@
           <a:p>
             <a:pPr algn="l"/>
             <a:r>
-              <a:rPr sz="1600" b="1" i="0">
+              <a:rPr sz="1700" b="1" i="0">
                 <a:solidFill>
                   <a:srgbClr val="0F1B2D"/>
                 </a:solidFill>
                 <a:latin typeface="Calibri"/>
               </a:rPr>
-              <a:t>Data</a:t>
-            </a:r>
-          </a:p>
-          <a:p>
-            <a:pPr algn="l"/>
-            <a:r>
-              <a:rPr sz="1300" b="0" i="0">
-                <a:solidFill>
-                  <a:srgbClr val="555B66"/>
-                </a:solidFill>
-                <a:latin typeface="Calibri"/>
-              </a:rPr>
-              <a:t>5-day trajectories, correlations, raw table</a:t>
-            </a:r>
-          </a:p>
-        </p:txBody>
-      </p:sp>
-      <p:sp>
-        <p:nvSpPr>
-          <p:cNvPr id="9" name="Oval 8"/>
+              <a:t>Paper reproduction</a:t>
+            </a:r>
+          </a:p>
+        </p:txBody>
+      </p:sp>
+      <p:sp>
+        <p:nvSpPr>
+          <p:cNvPr id="8" name="Rounded Rectangle 7"/>
           <p:cNvSpPr/>
           <p:nvPr/>
         </p:nvSpPr>
         <p:spPr>
           <a:xfrm>
-            <a:off x="7818120" y="2359152"/>
-            <a:ext cx="457200" cy="457200"/>
-          </a:xfrm>
-          <a:prstGeom prst="ellipse">
-            <a:avLst/>
-          </a:prstGeom>
-          <a:solidFill>
-            <a:srgbClr val="2A78D6"/>
-          </a:solidFill>
-          <a:ln>
-            <a:noFill/>
-          </a:ln>
-        </p:spPr>
-        <p:style>
-          <a:lnRef idx="1">
-            <a:schemeClr val="accent1"/>
-          </a:lnRef>
-          <a:fillRef idx="3">
-            <a:schemeClr val="accent1"/>
-          </a:fillRef>
-          <a:effectRef idx="2">
-            <a:schemeClr val="accent1"/>
-          </a:effectRef>
-          <a:fontRef idx="minor">
-            <a:schemeClr val="lt1"/>
-          </a:fontRef>
-        </p:style>
-        <p:txBody>
-          <a:bodyPr rtlCol="0" anchor="ctr" lIns="0" rIns="0" tIns="0" bIns="0"/>
-          <a:lstStyle/>
-          <a:p>
-            <a:pPr algn="ctr"/>
-            <a:r>
-              <a:rPr sz="1600" b="1">
-                <a:solidFill>
-                  <a:srgbClr val="FFFFFF"/>
-                </a:solidFill>
-                <a:latin typeface="Calibri"/>
-              </a:rPr>
-              <a:t>2</a:t>
-            </a:r>
-          </a:p>
-        </p:txBody>
-      </p:sp>
-      <p:sp>
-        <p:nvSpPr>
-          <p:cNvPr id="10" name="TextBox 9"/>
-          <p:cNvSpPr txBox="1"/>
-          <p:nvPr/>
-        </p:nvSpPr>
-        <p:spPr>
-          <a:xfrm>
-            <a:off x="8412480" y="2313432"/>
-            <a:ext cx="3291840" cy="777240"/>
-          </a:xfrm>
-          <a:prstGeom prst="rect">
-            <a:avLst/>
-          </a:prstGeom>
-          <a:noFill/>
-        </p:spPr>
-        <p:txBody>
-          <a:bodyPr wrap="square" anchor="t" lIns="0" rIns="0" tIns="0" bIns="0">
-            <a:spAutoFit/>
-          </a:bodyPr>
-          <a:lstStyle/>
-          <a:p>
-            <a:pPr algn="l"/>
-            <a:r>
-              <a:rPr sz="1600" b="1" i="0">
-                <a:solidFill>
-                  <a:srgbClr val="0F1B2D"/>
-                </a:solidFill>
-                <a:latin typeface="Calibri"/>
-              </a:rPr>
-              <a:t>Predict an unseen day</a:t>
-            </a:r>
-          </a:p>
-          <a:p>
-            <a:pPr algn="l"/>
-            <a:r>
-              <a:rPr sz="1300" b="0" i="0">
-                <a:solidFill>
-                  <a:srgbClr val="555B66"/>
-                </a:solidFill>
-                <a:latin typeface="Calibri"/>
-              </a:rPr>
-              <a:t>live retraining on 4 days + calibration slider (S2 day 5: 0.093 → 0.016)</a:t>
-            </a:r>
-          </a:p>
-        </p:txBody>
-      </p:sp>
-      <p:sp>
-        <p:nvSpPr>
-          <p:cNvPr id="11" name="Oval 10"/>
-          <p:cNvSpPr/>
-          <p:nvPr/>
-        </p:nvSpPr>
-        <p:spPr>
-          <a:xfrm>
-            <a:off x="7818120" y="3209544"/>
-            <a:ext cx="457200" cy="457200"/>
-          </a:xfrm>
-          <a:prstGeom prst="ellipse">
-            <a:avLst/>
-          </a:prstGeom>
-          <a:solidFill>
-            <a:srgbClr val="2A78D6"/>
-          </a:solidFill>
-          <a:ln>
-            <a:noFill/>
-          </a:ln>
-        </p:spPr>
-        <p:style>
-          <a:lnRef idx="1">
-            <a:schemeClr val="accent1"/>
-          </a:lnRef>
-          <a:fillRef idx="3">
-            <a:schemeClr val="accent1"/>
-          </a:fillRef>
-          <a:effectRef idx="2">
-            <a:schemeClr val="accent1"/>
-          </a:effectRef>
-          <a:fontRef idx="minor">
-            <a:schemeClr val="lt1"/>
-          </a:fontRef>
-        </p:style>
-        <p:txBody>
-          <a:bodyPr rtlCol="0" anchor="ctr" lIns="0" rIns="0" tIns="0" bIns="0"/>
-          <a:lstStyle/>
-          <a:p>
-            <a:pPr algn="ctr"/>
-            <a:r>
-              <a:rPr sz="1600" b="1">
-                <a:solidFill>
-                  <a:srgbClr val="FFFFFF"/>
-                </a:solidFill>
-                <a:latin typeface="Calibri"/>
-              </a:rPr>
-              <a:t>3</a:t>
-            </a:r>
-          </a:p>
-        </p:txBody>
-      </p:sp>
-      <p:sp>
-        <p:nvSpPr>
-          <p:cNvPr id="12" name="TextBox 11"/>
-          <p:cNvSpPr txBox="1"/>
-          <p:nvPr/>
-        </p:nvSpPr>
-        <p:spPr>
-          <a:xfrm>
-            <a:off x="8412480" y="3163824"/>
-            <a:ext cx="3291840" cy="777240"/>
-          </a:xfrm>
-          <a:prstGeom prst="rect">
-            <a:avLst/>
-          </a:prstGeom>
-          <a:noFill/>
-        </p:spPr>
-        <p:txBody>
-          <a:bodyPr wrap="square" anchor="t" lIns="0" rIns="0" tIns="0" bIns="0">
-            <a:spAutoFit/>
-          </a:bodyPr>
-          <a:lstStyle/>
-          <a:p>
-            <a:pPr algn="l"/>
-            <a:r>
-              <a:rPr sz="1600" b="1" i="0">
-                <a:solidFill>
-                  <a:srgbClr val="0F1B2D"/>
-                </a:solidFill>
-                <a:latin typeface="Calibri"/>
-              </a:rPr>
-              <a:t>What-if simulator</a:t>
-            </a:r>
-          </a:p>
-          <a:p>
-            <a:pPr algn="l"/>
-            <a:r>
-              <a:rPr sz="1300" b="0" i="0">
-                <a:solidFill>
-                  <a:srgbClr val="555B66"/>
-                </a:solidFill>
-                <a:latin typeface="Calibri"/>
-              </a:rPr>
-              <a:t>drag sensor sliders → cost ± uncertainty</a:t>
-            </a:r>
-          </a:p>
-        </p:txBody>
-      </p:sp>
-      <p:sp>
-        <p:nvSpPr>
-          <p:cNvPr id="13" name="Oval 12"/>
-          <p:cNvSpPr/>
-          <p:nvPr/>
-        </p:nvSpPr>
-        <p:spPr>
-          <a:xfrm>
-            <a:off x="7818120" y="4059936"/>
-            <a:ext cx="457200" cy="457200"/>
-          </a:xfrm>
-          <a:prstGeom prst="ellipse">
-            <a:avLst/>
-          </a:prstGeom>
-          <a:solidFill>
-            <a:srgbClr val="2A78D6"/>
-          </a:solidFill>
-          <a:ln>
-            <a:noFill/>
-          </a:ln>
-        </p:spPr>
-        <p:style>
-          <a:lnRef idx="1">
-            <a:schemeClr val="accent1"/>
-          </a:lnRef>
-          <a:fillRef idx="3">
-            <a:schemeClr val="accent1"/>
-          </a:fillRef>
-          <a:effectRef idx="2">
-            <a:schemeClr val="accent1"/>
-          </a:effectRef>
-          <a:fontRef idx="minor">
-            <a:schemeClr val="lt1"/>
-          </a:fontRef>
-        </p:style>
-        <p:txBody>
-          <a:bodyPr rtlCol="0" anchor="ctr" lIns="0" rIns="0" tIns="0" bIns="0"/>
-          <a:lstStyle/>
-          <a:p>
-            <a:pPr algn="ctr"/>
-            <a:r>
-              <a:rPr sz="1600" b="1">
-                <a:solidFill>
-                  <a:srgbClr val="FFFFFF"/>
-                </a:solidFill>
-                <a:latin typeface="Calibri"/>
-              </a:rPr>
-              <a:t>4</a:t>
-            </a:r>
-          </a:p>
-        </p:txBody>
-      </p:sp>
-      <p:sp>
-        <p:nvSpPr>
-          <p:cNvPr id="14" name="TextBox 13"/>
-          <p:cNvSpPr txBox="1"/>
-          <p:nvPr/>
-        </p:nvSpPr>
-        <p:spPr>
-          <a:xfrm>
-            <a:off x="8412480" y="4014216"/>
-            <a:ext cx="3291840" cy="777240"/>
-          </a:xfrm>
-          <a:prstGeom prst="rect">
-            <a:avLst/>
-          </a:prstGeom>
-          <a:noFill/>
-        </p:spPr>
-        <p:txBody>
-          <a:bodyPr wrap="square" anchor="t" lIns="0" rIns="0" tIns="0" bIns="0">
-            <a:spAutoFit/>
-          </a:bodyPr>
-          <a:lstStyle/>
-          <a:p>
-            <a:pPr algn="l"/>
-            <a:r>
-              <a:rPr sz="1600" b="1" i="0">
-                <a:solidFill>
-                  <a:srgbClr val="0F1B2D"/>
-                </a:solidFill>
-                <a:latin typeface="Calibri"/>
-              </a:rPr>
-              <a:t>Results</a:t>
-            </a:r>
-          </a:p>
-          <a:p>
-            <a:pPr algn="l"/>
-            <a:r>
-              <a:rPr sz="1300" b="0" i="0">
-                <a:solidFill>
-                  <a:srgbClr val="555B66"/>
-                </a:solidFill>
-                <a:latin typeface="Calibri"/>
-              </a:rPr>
-              <a:t>leaderboard for both protocols + all figures</a:t>
-            </a:r>
-          </a:p>
-        </p:txBody>
-      </p:sp>
-      <p:sp>
-        <p:nvSpPr>
-          <p:cNvPr id="15" name="Oval 14"/>
-          <p:cNvSpPr/>
-          <p:nvPr/>
-        </p:nvSpPr>
-        <p:spPr>
-          <a:xfrm>
-            <a:off x="7818120" y="4910328"/>
-            <a:ext cx="457200" cy="457200"/>
-          </a:xfrm>
-          <a:prstGeom prst="ellipse">
-            <a:avLst/>
-          </a:prstGeom>
-          <a:solidFill>
-            <a:srgbClr val="2A78D6"/>
-          </a:solidFill>
-          <a:ln>
-            <a:noFill/>
-          </a:ln>
-        </p:spPr>
-        <p:style>
-          <a:lnRef idx="1">
-            <a:schemeClr val="accent1"/>
-          </a:lnRef>
-          <a:fillRef idx="3">
-            <a:schemeClr val="accent1"/>
-          </a:fillRef>
-          <a:effectRef idx="2">
-            <a:schemeClr val="accent1"/>
-          </a:effectRef>
-          <a:fontRef idx="minor">
-            <a:schemeClr val="lt1"/>
-          </a:fontRef>
-        </p:style>
-        <p:txBody>
-          <a:bodyPr rtlCol="0" anchor="ctr" lIns="0" rIns="0" tIns="0" bIns="0"/>
-          <a:lstStyle/>
-          <a:p>
-            <a:pPr algn="ctr"/>
-            <a:r>
-              <a:rPr sz="1600" b="1">
-                <a:solidFill>
-                  <a:srgbClr val="FFFFFF"/>
-                </a:solidFill>
-                <a:latin typeface="Calibri"/>
-              </a:rPr>
-              <a:t>5</a:t>
-            </a:r>
-          </a:p>
-        </p:txBody>
-      </p:sp>
-      <p:sp>
-        <p:nvSpPr>
-          <p:cNvPr id="16" name="TextBox 15"/>
-          <p:cNvSpPr txBox="1"/>
-          <p:nvPr/>
-        </p:nvSpPr>
-        <p:spPr>
-          <a:xfrm>
-            <a:off x="8412480" y="4864608"/>
-            <a:ext cx="3291840" cy="777240"/>
-          </a:xfrm>
-          <a:prstGeom prst="rect">
-            <a:avLst/>
-          </a:prstGeom>
-          <a:noFill/>
-        </p:spPr>
-        <p:txBody>
-          <a:bodyPr wrap="square" anchor="t" lIns="0" rIns="0" tIns="0" bIns="0">
-            <a:spAutoFit/>
-          </a:bodyPr>
-          <a:lstStyle/>
-          <a:p>
-            <a:pPr algn="l"/>
-            <a:r>
-              <a:rPr sz="1600" b="1" i="0">
-                <a:solidFill>
-                  <a:srgbClr val="0F1B2D"/>
-                </a:solidFill>
-                <a:latin typeface="Calibri"/>
-              </a:rPr>
-              <a:t>Batch predict</a:t>
-            </a:r>
-          </a:p>
-          <a:p>
-            <a:pPr algn="l"/>
-            <a:r>
-              <a:rPr sz="1300" b="0" i="0">
-                <a:solidFill>
-                  <a:srgbClr val="555B66"/>
-                </a:solidFill>
-                <a:latin typeface="Calibri"/>
-              </a:rPr>
-              <a:t>upload CSV → download predictions</a:t>
-            </a:r>
-          </a:p>
-        </p:txBody>
-      </p:sp>
-      <p:sp>
-        <p:nvSpPr>
-          <p:cNvPr id="17" name="Rounded Rectangle 16"/>
-          <p:cNvSpPr/>
-          <p:nvPr/>
-        </p:nvSpPr>
-        <p:spPr>
-          <a:xfrm>
-            <a:off x="548640" y="5806440"/>
-            <a:ext cx="6949440" cy="457200"/>
+            <a:off x="548640" y="2148840"/>
+            <a:ext cx="3520440" cy="3566160"/>
           </a:xfrm>
           <a:prstGeom prst="roundRect">
             <a:avLst>
-              <a:gd name="adj" fmla="val 15000"/>
+              <a:gd name="adj" fmla="val 5000"/>
             </a:avLst>
           </a:prstGeom>
           <a:solidFill>
@@ -6899,35 +6462,607 @@
       </p:sp>
       <p:sp>
         <p:nvSpPr>
-          <p:cNvPr id="18" name="TextBox 17"/>
-          <p:cNvSpPr txBox="1"/>
-          <p:nvPr/>
-        </p:nvSpPr>
-        <p:spPr>
-          <a:xfrm>
-            <a:off x="777240" y="5806440"/>
-            <a:ext cx="6583680" cy="457200"/>
-          </a:xfrm>
-          <a:prstGeom prst="rect">
-            <a:avLst/>
-          </a:prstGeom>
-          <a:noFill/>
-        </p:spPr>
-        <p:txBody>
-          <a:bodyPr wrap="square" anchor="ctr" lIns="0" rIns="0" tIns="0" bIns="0">
-            <a:spAutoFit/>
-          </a:bodyPr>
-          <a:lstStyle/>
-          <a:p>
-            <a:pPr algn="l"/>
-            <a:r>
-              <a:rPr sz="1500" b="0" i="0">
+          <p:cNvPr id="9" name="TextBox 8"/>
+          <p:cNvSpPr txBox="1"/>
+          <p:nvPr/>
+        </p:nvSpPr>
+        <p:spPr>
+          <a:xfrm>
+            <a:off x="731520" y="2286000"/>
+            <a:ext cx="3200400" cy="822960"/>
+          </a:xfrm>
+          <a:prstGeom prst="rect">
+            <a:avLst/>
+          </a:prstGeom>
+          <a:noFill/>
+        </p:spPr>
+        <p:txBody>
+          <a:bodyPr wrap="square" anchor="t" lIns="0" rIns="0" tIns="0" bIns="0">
+            <a:spAutoFit/>
+          </a:bodyPr>
+          <a:lstStyle/>
+          <a:p>
+            <a:pPr algn="l"/>
+            <a:r>
+              <a:rPr sz="1200" b="0" i="0">
+                <a:solidFill>
+                  <a:srgbClr val="BFD4F2"/>
+                </a:solidFill>
+                <a:latin typeface="Courier New"/>
+              </a:rPr>
+              <a:t>$ python paper_reproduction/lin_reg_test.py</a:t>
+            </a:r>
+          </a:p>
+        </p:txBody>
+      </p:sp>
+      <p:sp>
+        <p:nvSpPr>
+          <p:cNvPr id="10" name="TextBox 9"/>
+          <p:cNvSpPr txBox="1"/>
+          <p:nvPr/>
+        </p:nvSpPr>
+        <p:spPr>
+          <a:xfrm>
+            <a:off x="731520" y="3154680"/>
+            <a:ext cx="3200400" cy="2468880"/>
+          </a:xfrm>
+          <a:prstGeom prst="rect">
+            <a:avLst/>
+          </a:prstGeom>
+          <a:noFill/>
+        </p:spPr>
+        <p:txBody>
+          <a:bodyPr wrap="square" anchor="t" lIns="0" rIns="0" tIns="0" bIns="0">
+            <a:spAutoFit/>
+          </a:bodyPr>
+          <a:lstStyle/>
+          <a:p>
+            <a:pPr algn="l"/>
+            <a:r>
+              <a:rPr sz="1200" b="0" i="0">
                 <a:solidFill>
                   <a:srgbClr val="FFFFFF"/>
                 </a:solidFill>
                 <a:latin typeface="Courier New"/>
               </a:rPr>
-              <a:t>$  streamlit run app/streamlit_app.py</a:t>
+              <a:t>Linear Regression 5-Fold CV</a:t>
+            </a:r>
+          </a:p>
+          <a:p>
+            <a:pPr algn="l"/>
+            <a:r>
+              <a:rPr sz="1200" b="0" i="0">
+                <a:solidFill>
+                  <a:srgbClr val="FFFFFF"/>
+                </a:solidFill>
+                <a:latin typeface="Courier New"/>
+              </a:rPr>
+              <a:t>Mean MSE: 0.010700</a:t>
+            </a:r>
+          </a:p>
+          <a:p>
+            <a:pPr algn="l"/>
+            <a:r>
+              <a:rPr sz="1200" b="0" i="0">
+                <a:solidFill>
+                  <a:srgbClr val="FFFFFF"/>
+                </a:solidFill>
+                <a:latin typeface="Courier New"/>
+              </a:rPr>
+              <a:t>Mean R² : 0.8349</a:t>
+            </a:r>
+          </a:p>
+        </p:txBody>
+      </p:sp>
+      <p:sp>
+        <p:nvSpPr>
+          <p:cNvPr id="11" name="Oval 10"/>
+          <p:cNvSpPr/>
+          <p:nvPr/>
+        </p:nvSpPr>
+        <p:spPr>
+          <a:xfrm>
+            <a:off x="4297679" y="1508760"/>
+            <a:ext cx="457200" cy="457200"/>
+          </a:xfrm>
+          <a:prstGeom prst="ellipse">
+            <a:avLst/>
+          </a:prstGeom>
+          <a:solidFill>
+            <a:srgbClr val="2A78D6"/>
+          </a:solidFill>
+          <a:ln>
+            <a:noFill/>
+          </a:ln>
+        </p:spPr>
+        <p:style>
+          <a:lnRef idx="1">
+            <a:schemeClr val="accent1"/>
+          </a:lnRef>
+          <a:fillRef idx="3">
+            <a:schemeClr val="accent1"/>
+          </a:fillRef>
+          <a:effectRef idx="2">
+            <a:schemeClr val="accent1"/>
+          </a:effectRef>
+          <a:fontRef idx="minor">
+            <a:schemeClr val="lt1"/>
+          </a:fontRef>
+        </p:style>
+        <p:txBody>
+          <a:bodyPr rtlCol="0" anchor="ctr" lIns="0" rIns="0" tIns="0" bIns="0"/>
+          <a:lstStyle/>
+          <a:p>
+            <a:pPr algn="ctr"/>
+            <a:r>
+              <a:rPr sz="1600" b="1">
+                <a:solidFill>
+                  <a:srgbClr val="FFFFFF"/>
+                </a:solidFill>
+                <a:latin typeface="Calibri"/>
+              </a:rPr>
+              <a:t>2</a:t>
+            </a:r>
+          </a:p>
+        </p:txBody>
+      </p:sp>
+      <p:sp>
+        <p:nvSpPr>
+          <p:cNvPr id="12" name="TextBox 11"/>
+          <p:cNvSpPr txBox="1"/>
+          <p:nvPr/>
+        </p:nvSpPr>
+        <p:spPr>
+          <a:xfrm>
+            <a:off x="4892040" y="1554480"/>
+            <a:ext cx="2926080" cy="411480"/>
+          </a:xfrm>
+          <a:prstGeom prst="rect">
+            <a:avLst/>
+          </a:prstGeom>
+          <a:noFill/>
+        </p:spPr>
+        <p:txBody>
+          <a:bodyPr wrap="square" anchor="t" lIns="0" rIns="0" tIns="0" bIns="0">
+            <a:spAutoFit/>
+          </a:bodyPr>
+          <a:lstStyle/>
+          <a:p>
+            <a:pPr algn="l"/>
+            <a:r>
+              <a:rPr sz="1700" b="1" i="0">
+                <a:solidFill>
+                  <a:srgbClr val="0F1B2D"/>
+                </a:solidFill>
+                <a:latin typeface="Calibri"/>
+              </a:rPr>
+              <a:t>Predict unseen days</a:t>
+            </a:r>
+          </a:p>
+        </p:txBody>
+      </p:sp>
+      <p:sp>
+        <p:nvSpPr>
+          <p:cNvPr id="13" name="Rounded Rectangle 12"/>
+          <p:cNvSpPr/>
+          <p:nvPr/>
+        </p:nvSpPr>
+        <p:spPr>
+          <a:xfrm>
+            <a:off x="4297679" y="2148840"/>
+            <a:ext cx="3520440" cy="3566160"/>
+          </a:xfrm>
+          <a:prstGeom prst="roundRect">
+            <a:avLst>
+              <a:gd name="adj" fmla="val 5000"/>
+            </a:avLst>
+          </a:prstGeom>
+          <a:solidFill>
+            <a:srgbClr val="0F1B2D"/>
+          </a:solidFill>
+          <a:ln>
+            <a:noFill/>
+          </a:ln>
+          <a:effectLst/>
+        </p:spPr>
+        <p:style>
+          <a:lnRef idx="1">
+            <a:schemeClr val="accent1"/>
+          </a:lnRef>
+          <a:fillRef idx="3">
+            <a:schemeClr val="accent1"/>
+          </a:fillRef>
+          <a:effectRef idx="2">
+            <a:schemeClr val="accent1"/>
+          </a:effectRef>
+          <a:fontRef idx="minor">
+            <a:schemeClr val="lt1"/>
+          </a:fontRef>
+        </p:style>
+        <p:txBody>
+          <a:bodyPr rtlCol="0" anchor="ctr"/>
+          <a:lstStyle/>
+          <a:p>
+            <a:pPr algn="ctr"/>
+          </a:p>
+        </p:txBody>
+      </p:sp>
+      <p:sp>
+        <p:nvSpPr>
+          <p:cNvPr id="14" name="TextBox 13"/>
+          <p:cNvSpPr txBox="1"/>
+          <p:nvPr/>
+        </p:nvSpPr>
+        <p:spPr>
+          <a:xfrm>
+            <a:off x="4480559" y="2286000"/>
+            <a:ext cx="3200400" cy="822960"/>
+          </a:xfrm>
+          <a:prstGeom prst="rect">
+            <a:avLst/>
+          </a:prstGeom>
+          <a:noFill/>
+        </p:spPr>
+        <p:txBody>
+          <a:bodyPr wrap="square" anchor="t" lIns="0" rIns="0" tIns="0" bIns="0">
+            <a:spAutoFit/>
+          </a:bodyPr>
+          <a:lstStyle/>
+          <a:p>
+            <a:pPr algn="l"/>
+            <a:r>
+              <a:rPr sz="1200" b="0" i="0">
+                <a:solidFill>
+                  <a:srgbClr val="BFD4F2"/>
+                </a:solidFill>
+                <a:latin typeface="Courier New"/>
+              </a:rPr>
+              <a:t>$ python scripts/predict.py --demo --subject S1</a:t>
+            </a:r>
+          </a:p>
+        </p:txBody>
+      </p:sp>
+      <p:sp>
+        <p:nvSpPr>
+          <p:cNvPr id="15" name="TextBox 14"/>
+          <p:cNvSpPr txBox="1"/>
+          <p:nvPr/>
+        </p:nvSpPr>
+        <p:spPr>
+          <a:xfrm>
+            <a:off x="4480559" y="3154680"/>
+            <a:ext cx="3200400" cy="2468880"/>
+          </a:xfrm>
+          <a:prstGeom prst="rect">
+            <a:avLst/>
+          </a:prstGeom>
+          <a:noFill/>
+        </p:spPr>
+        <p:txBody>
+          <a:bodyPr wrap="square" anchor="t" lIns="0" rIns="0" tIns="0" bIns="0">
+            <a:spAutoFit/>
+          </a:bodyPr>
+          <a:lstStyle/>
+          <a:p>
+            <a:pPr algn="l"/>
+            <a:r>
+              <a:rPr sz="1200" b="0" i="0">
+                <a:solidFill>
+                  <a:srgbClr val="FFFFFF"/>
+                </a:solidFill>
+                <a:latin typeface="Courier New"/>
+              </a:rPr>
+              <a:t>day      MSE   %err      r</a:t>
+            </a:r>
+          </a:p>
+          <a:p>
+            <a:pPr algn="l"/>
+            <a:r>
+              <a:rPr sz="1200" b="0" i="0">
+                <a:solidFill>
+                  <a:srgbClr val="FFFFFF"/>
+                </a:solidFill>
+                <a:latin typeface="Courier New"/>
+              </a:rPr>
+              <a:t>  1   0.0286  16.9%   0.82</a:t>
+            </a:r>
+          </a:p>
+          <a:p>
+            <a:pPr algn="l"/>
+            <a:r>
+              <a:rPr sz="1200" b="0" i="0">
+                <a:solidFill>
+                  <a:srgbClr val="FFFFFF"/>
+                </a:solidFill>
+                <a:latin typeface="Courier New"/>
+              </a:rPr>
+              <a:t>  2   0.0191  13.8%   0.49</a:t>
+            </a:r>
+          </a:p>
+          <a:p>
+            <a:pPr algn="l"/>
+            <a:r>
+              <a:rPr sz="1200" b="0" i="0">
+                <a:solidFill>
+                  <a:srgbClr val="FFFFFF"/>
+                </a:solidFill>
+                <a:latin typeface="Courier New"/>
+              </a:rPr>
+              <a:t>  3   0.0132  11.5%   0.64</a:t>
+            </a:r>
+          </a:p>
+          <a:p>
+            <a:pPr algn="l"/>
+            <a:r>
+              <a:rPr sz="1200" b="0" i="0">
+                <a:solidFill>
+                  <a:srgbClr val="FFFFFF"/>
+                </a:solidFill>
+                <a:latin typeface="Courier New"/>
+              </a:rPr>
+              <a:t>  4   0.0119  10.9%   0.61</a:t>
+            </a:r>
+          </a:p>
+          <a:p>
+            <a:pPr algn="l"/>
+            <a:r>
+              <a:rPr sz="1200" b="0" i="0">
+                <a:solidFill>
+                  <a:srgbClr val="FFFFFF"/>
+                </a:solidFill>
+                <a:latin typeface="Courier New"/>
+              </a:rPr>
+              <a:t>  5   0.0149  12.2%   0.67</a:t>
+            </a:r>
+          </a:p>
+        </p:txBody>
+      </p:sp>
+      <p:sp>
+        <p:nvSpPr>
+          <p:cNvPr id="16" name="Oval 15"/>
+          <p:cNvSpPr/>
+          <p:nvPr/>
+        </p:nvSpPr>
+        <p:spPr>
+          <a:xfrm>
+            <a:off x="8046719" y="1508760"/>
+            <a:ext cx="457200" cy="457200"/>
+          </a:xfrm>
+          <a:prstGeom prst="ellipse">
+            <a:avLst/>
+          </a:prstGeom>
+          <a:solidFill>
+            <a:srgbClr val="2A78D6"/>
+          </a:solidFill>
+          <a:ln>
+            <a:noFill/>
+          </a:ln>
+        </p:spPr>
+        <p:style>
+          <a:lnRef idx="1">
+            <a:schemeClr val="accent1"/>
+          </a:lnRef>
+          <a:fillRef idx="3">
+            <a:schemeClr val="accent1"/>
+          </a:fillRef>
+          <a:effectRef idx="2">
+            <a:schemeClr val="accent1"/>
+          </a:effectRef>
+          <a:fontRef idx="minor">
+            <a:schemeClr val="lt1"/>
+          </a:fontRef>
+        </p:style>
+        <p:txBody>
+          <a:bodyPr rtlCol="0" anchor="ctr" lIns="0" rIns="0" tIns="0" bIns="0"/>
+          <a:lstStyle/>
+          <a:p>
+            <a:pPr algn="ctr"/>
+            <a:r>
+              <a:rPr sz="1600" b="1">
+                <a:solidFill>
+                  <a:srgbClr val="FFFFFF"/>
+                </a:solidFill>
+                <a:latin typeface="Calibri"/>
+              </a:rPr>
+              <a:t>3</a:t>
+            </a:r>
+          </a:p>
+        </p:txBody>
+      </p:sp>
+      <p:sp>
+        <p:nvSpPr>
+          <p:cNvPr id="17" name="TextBox 16"/>
+          <p:cNvSpPr txBox="1"/>
+          <p:nvPr/>
+        </p:nvSpPr>
+        <p:spPr>
+          <a:xfrm>
+            <a:off x="8641080" y="1554480"/>
+            <a:ext cx="2926080" cy="411480"/>
+          </a:xfrm>
+          <a:prstGeom prst="rect">
+            <a:avLst/>
+          </a:prstGeom>
+          <a:noFill/>
+        </p:spPr>
+        <p:txBody>
+          <a:bodyPr wrap="square" anchor="t" lIns="0" rIns="0" tIns="0" bIns="0">
+            <a:spAutoFit/>
+          </a:bodyPr>
+          <a:lstStyle/>
+          <a:p>
+            <a:pPr algn="l"/>
+            <a:r>
+              <a:rPr sz="1700" b="1" i="0">
+                <a:solidFill>
+                  <a:srgbClr val="0F1B2D"/>
+                </a:solidFill>
+                <a:latin typeface="Calibri"/>
+              </a:rPr>
+              <a:t>Automated tests</a:t>
+            </a:r>
+          </a:p>
+        </p:txBody>
+      </p:sp>
+      <p:sp>
+        <p:nvSpPr>
+          <p:cNvPr id="18" name="Rounded Rectangle 17"/>
+          <p:cNvSpPr/>
+          <p:nvPr/>
+        </p:nvSpPr>
+        <p:spPr>
+          <a:xfrm>
+            <a:off x="8046719" y="2148840"/>
+            <a:ext cx="3520440" cy="3566160"/>
+          </a:xfrm>
+          <a:prstGeom prst="roundRect">
+            <a:avLst>
+              <a:gd name="adj" fmla="val 5000"/>
+            </a:avLst>
+          </a:prstGeom>
+          <a:solidFill>
+            <a:srgbClr val="0F1B2D"/>
+          </a:solidFill>
+          <a:ln>
+            <a:noFill/>
+          </a:ln>
+          <a:effectLst/>
+        </p:spPr>
+        <p:style>
+          <a:lnRef idx="1">
+            <a:schemeClr val="accent1"/>
+          </a:lnRef>
+          <a:fillRef idx="3">
+            <a:schemeClr val="accent1"/>
+          </a:fillRef>
+          <a:effectRef idx="2">
+            <a:schemeClr val="accent1"/>
+          </a:effectRef>
+          <a:fontRef idx="minor">
+            <a:schemeClr val="lt1"/>
+          </a:fontRef>
+        </p:style>
+        <p:txBody>
+          <a:bodyPr rtlCol="0" anchor="ctr"/>
+          <a:lstStyle/>
+          <a:p>
+            <a:pPr algn="ctr"/>
+          </a:p>
+        </p:txBody>
+      </p:sp>
+      <p:sp>
+        <p:nvSpPr>
+          <p:cNvPr id="19" name="TextBox 18"/>
+          <p:cNvSpPr txBox="1"/>
+          <p:nvPr/>
+        </p:nvSpPr>
+        <p:spPr>
+          <a:xfrm>
+            <a:off x="8229599" y="2286000"/>
+            <a:ext cx="3200400" cy="822960"/>
+          </a:xfrm>
+          <a:prstGeom prst="rect">
+            <a:avLst/>
+          </a:prstGeom>
+          <a:noFill/>
+        </p:spPr>
+        <p:txBody>
+          <a:bodyPr wrap="square" anchor="t" lIns="0" rIns="0" tIns="0" bIns="0">
+            <a:spAutoFit/>
+          </a:bodyPr>
+          <a:lstStyle/>
+          <a:p>
+            <a:pPr algn="l"/>
+            <a:r>
+              <a:rPr sz="1200" b="0" i="0">
+                <a:solidFill>
+                  <a:srgbClr val="BFD4F2"/>
+                </a:solidFill>
+                <a:latin typeface="Courier New"/>
+              </a:rPr>
+              <a:t>$ python -m pytest -q</a:t>
+            </a:r>
+          </a:p>
+        </p:txBody>
+      </p:sp>
+      <p:sp>
+        <p:nvSpPr>
+          <p:cNvPr id="20" name="TextBox 19"/>
+          <p:cNvSpPr txBox="1"/>
+          <p:nvPr/>
+        </p:nvSpPr>
+        <p:spPr>
+          <a:xfrm>
+            <a:off x="8229599" y="3154680"/>
+            <a:ext cx="3200400" cy="2468880"/>
+          </a:xfrm>
+          <a:prstGeom prst="rect">
+            <a:avLst/>
+          </a:prstGeom>
+          <a:noFill/>
+        </p:spPr>
+        <p:txBody>
+          <a:bodyPr wrap="square" anchor="t" lIns="0" rIns="0" tIns="0" bIns="0">
+            <a:spAutoFit/>
+          </a:bodyPr>
+          <a:lstStyle/>
+          <a:p>
+            <a:pPr algn="l"/>
+            <a:r>
+              <a:rPr sz="1200" b="0" i="0">
+                <a:solidFill>
+                  <a:srgbClr val="FFFFFF"/>
+                </a:solidFill>
+                <a:latin typeface="Courier New"/>
+              </a:rPr>
+              <a:t>..........</a:t>
+            </a:r>
+          </a:p>
+          <a:p>
+            <a:pPr algn="l"/>
+            <a:r>
+              <a:rPr sz="1200" b="0" i="0">
+                <a:solidFill>
+                  <a:srgbClr val="FFFFFF"/>
+                </a:solidFill>
+                <a:latin typeface="Courier New"/>
+              </a:rPr>
+              <a:t>10 passed</a:t>
+            </a:r>
+          </a:p>
+        </p:txBody>
+      </p:sp>
+      <p:sp>
+        <p:nvSpPr>
+          <p:cNvPr id="21" name="TextBox 20"/>
+          <p:cNvSpPr txBox="1"/>
+          <p:nvPr/>
+        </p:nvSpPr>
+        <p:spPr>
+          <a:xfrm>
+            <a:off x="548640" y="5897880"/>
+            <a:ext cx="11064240" cy="365760"/>
+          </a:xfrm>
+          <a:prstGeom prst="rect">
+            <a:avLst/>
+          </a:prstGeom>
+          <a:noFill/>
+        </p:spPr>
+        <p:txBody>
+          <a:bodyPr wrap="square" anchor="t" lIns="0" rIns="0" tIns="0" bIns="0">
+            <a:spAutoFit/>
+          </a:bodyPr>
+          <a:lstStyle/>
+          <a:p>
+            <a:pPr algn="l"/>
+            <a:r>
+              <a:rPr sz="1300" b="0" i="1">
+                <a:solidFill>
+                  <a:srgbClr val="555B66"/>
+                </a:solidFill>
+                <a:latin typeface="Calibri"/>
+              </a:rPr>
+              <a:t>Run from the project folder:  cd "ML proj"   ·   total time under a minute</a:t>
             </a:r>
           </a:p>
         </p:txBody>
@@ -7868,239 +8003,80 @@
       </p:sp>
       <p:sp>
         <p:nvSpPr>
-          <p:cNvPr id="4" name="Rounded Rectangle 3"/>
-          <p:cNvSpPr/>
+          <p:cNvPr id="4" name="TextBox 3"/>
+          <p:cNvSpPr txBox="1"/>
           <p:nvPr/>
         </p:nvSpPr>
         <p:spPr>
           <a:xfrm>
             <a:off x="548640" y="3291840"/>
-            <a:ext cx="5440680" cy="2011680"/>
-          </a:xfrm>
-          <a:prstGeom prst="roundRect">
-            <a:avLst>
-              <a:gd name="adj" fmla="val 8000"/>
-            </a:avLst>
-          </a:prstGeom>
-          <a:solidFill>
-            <a:srgbClr val="1C2C45"/>
-          </a:solidFill>
-          <a:ln>
-            <a:noFill/>
-          </a:ln>
-          <a:effectLst/>
-        </p:spPr>
-        <p:style>
-          <a:lnRef idx="1">
-            <a:schemeClr val="accent1"/>
-          </a:lnRef>
-          <a:fillRef idx="3">
-            <a:schemeClr val="accent1"/>
-          </a:fillRef>
-          <a:effectRef idx="2">
-            <a:schemeClr val="accent1"/>
-          </a:effectRef>
-          <a:fontRef idx="minor">
-            <a:schemeClr val="lt1"/>
-          </a:fontRef>
-        </p:style>
-        <p:txBody>
-          <a:bodyPr rtlCol="0" anchor="ctr"/>
-          <a:lstStyle/>
-          <a:p>
-            <a:pPr algn="ctr"/>
+            <a:ext cx="10972800" cy="914400"/>
+          </a:xfrm>
+          <a:prstGeom prst="rect">
+            <a:avLst/>
+          </a:prstGeom>
+          <a:noFill/>
+        </p:spPr>
+        <p:txBody>
+          <a:bodyPr wrap="square" anchor="t" lIns="0" rIns="0" tIns="0" bIns="0">
+            <a:spAutoFit/>
+          </a:bodyPr>
+          <a:lstStyle/>
+          <a:p>
+            <a:pPr algn="l">
+              <a:spcAft>
+                <a:spcPts val="800"/>
+              </a:spcAft>
+            </a:pPr>
+            <a:r>
+              <a:rPr sz="2000" b="1" i="0">
+                <a:solidFill>
+                  <a:srgbClr val="FFFFFF"/>
+                </a:solidFill>
+                <a:latin typeface="Calibri"/>
+              </a:rPr>
+              <a:t>Mukil Skanda A</a:t>
+            </a:r>
+            <a:r>
+              <a:rPr sz="2000" b="0" i="0">
+                <a:solidFill>
+                  <a:srgbClr val="BFD4F2"/>
+                </a:solidFill>
+                <a:latin typeface="Calibri"/>
+              </a:rPr>
+              <a:t>  ·  PES1UG24CS281</a:t>
+            </a:r>
+          </a:p>
+          <a:p>
+            <a:pPr algn="l">
+              <a:spcAft>
+                <a:spcPts val="800"/>
+              </a:spcAft>
+            </a:pPr>
+            <a:r>
+              <a:rPr sz="2000" b="1" i="0">
+                <a:solidFill>
+                  <a:srgbClr val="FFFFFF"/>
+                </a:solidFill>
+                <a:latin typeface="Calibri"/>
+              </a:rPr>
+              <a:t>Likhith M</a:t>
+            </a:r>
+            <a:r>
+              <a:rPr sz="2000" b="0" i="0">
+                <a:solidFill>
+                  <a:srgbClr val="BFD4F2"/>
+                </a:solidFill>
+                <a:latin typeface="Calibri"/>
+              </a:rPr>
+              <a:t>  ·  PES1UG24CS282</a:t>
+            </a:r>
           </a:p>
         </p:txBody>
       </p:sp>
       <p:sp>
         <p:nvSpPr>
           <p:cNvPr id="5" name="TextBox 4"/>
-          <p:cNvSpPr txBox="1"/>
-          <p:nvPr/>
-        </p:nvSpPr>
-        <p:spPr>
-          <a:xfrm>
-            <a:off x="822959" y="3474720"/>
-            <a:ext cx="4937760" cy="457200"/>
-          </a:xfrm>
-          <a:prstGeom prst="rect">
-            <a:avLst/>
-          </a:prstGeom>
-          <a:noFill/>
-        </p:spPr>
-        <p:txBody>
-          <a:bodyPr wrap="square" anchor="t" lIns="0" rIns="0" tIns="0" bIns="0">
-            <a:spAutoFit/>
-          </a:bodyPr>
-          <a:lstStyle/>
-          <a:p>
-            <a:pPr algn="l"/>
-            <a:r>
-              <a:rPr sz="2000" b="1" i="0">
-                <a:solidFill>
-                  <a:srgbClr val="EB6834"/>
-                </a:solidFill>
-                <a:latin typeface="Calibri"/>
-              </a:rPr>
-              <a:t>Mukil Skanda A · PES1UG24CS281</a:t>
-            </a:r>
-          </a:p>
-        </p:txBody>
-      </p:sp>
-      <p:sp>
-        <p:nvSpPr>
-          <p:cNvPr id="6" name="TextBox 5"/>
-          <p:cNvSpPr txBox="1"/>
-          <p:nvPr/>
-        </p:nvSpPr>
-        <p:spPr>
-          <a:xfrm>
-            <a:off x="822959" y="4023360"/>
-            <a:ext cx="4937760" cy="1188720"/>
-          </a:xfrm>
-          <a:prstGeom prst="rect">
-            <a:avLst/>
-          </a:prstGeom>
-          <a:noFill/>
-        </p:spPr>
-        <p:txBody>
-          <a:bodyPr wrap="square" anchor="t" lIns="0" rIns="0" tIns="0" bIns="0">
-            <a:spAutoFit/>
-          </a:bodyPr>
-          <a:lstStyle/>
-          <a:p>
-            <a:pPr algn="l"/>
-            <a:r>
-              <a:rPr sz="1500" b="0" i="0">
-                <a:solidFill>
-                  <a:srgbClr val="FFFFFF"/>
-                </a:solidFill>
-                <a:latin typeface="Calibri"/>
-              </a:rPr>
-              <a:t>Extended study: Bayesian-regularised NN, 13-model zoo, nested &amp; leave-one-day-out validation, calibration, dashboard, write-up</a:t>
-            </a:r>
-          </a:p>
-        </p:txBody>
-      </p:sp>
-      <p:sp>
-        <p:nvSpPr>
-          <p:cNvPr id="7" name="Rounded Rectangle 6"/>
-          <p:cNvSpPr/>
-          <p:nvPr/>
-        </p:nvSpPr>
-        <p:spPr>
-          <a:xfrm>
-            <a:off x="6217920" y="3291840"/>
-            <a:ext cx="5440680" cy="2011680"/>
-          </a:xfrm>
-          <a:prstGeom prst="roundRect">
-            <a:avLst>
-              <a:gd name="adj" fmla="val 8000"/>
-            </a:avLst>
-          </a:prstGeom>
-          <a:solidFill>
-            <a:srgbClr val="1C2C45"/>
-          </a:solidFill>
-          <a:ln>
-            <a:noFill/>
-          </a:ln>
-          <a:effectLst/>
-        </p:spPr>
-        <p:style>
-          <a:lnRef idx="1">
-            <a:schemeClr val="accent1"/>
-          </a:lnRef>
-          <a:fillRef idx="3">
-            <a:schemeClr val="accent1"/>
-          </a:fillRef>
-          <a:effectRef idx="2">
-            <a:schemeClr val="accent1"/>
-          </a:effectRef>
-          <a:fontRef idx="minor">
-            <a:schemeClr val="lt1"/>
-          </a:fontRef>
-        </p:style>
-        <p:txBody>
-          <a:bodyPr rtlCol="0" anchor="ctr"/>
-          <a:lstStyle/>
-          <a:p>
-            <a:pPr algn="ctr"/>
-          </a:p>
-        </p:txBody>
-      </p:sp>
-      <p:sp>
-        <p:nvSpPr>
-          <p:cNvPr id="8" name="TextBox 7"/>
-          <p:cNvSpPr txBox="1"/>
-          <p:nvPr/>
-        </p:nvSpPr>
-        <p:spPr>
-          <a:xfrm>
-            <a:off x="6492240" y="3474720"/>
-            <a:ext cx="4937760" cy="457200"/>
-          </a:xfrm>
-          <a:prstGeom prst="rect">
-            <a:avLst/>
-          </a:prstGeom>
-          <a:noFill/>
-        </p:spPr>
-        <p:txBody>
-          <a:bodyPr wrap="square" anchor="t" lIns="0" rIns="0" tIns="0" bIns="0">
-            <a:spAutoFit/>
-          </a:bodyPr>
-          <a:lstStyle/>
-          <a:p>
-            <a:pPr algn="l"/>
-            <a:r>
-              <a:rPr sz="2000" b="1" i="0">
-                <a:solidFill>
-                  <a:srgbClr val="EB6834"/>
-                </a:solidFill>
-                <a:latin typeface="Calibri"/>
-              </a:rPr>
-              <a:t>Likhith M · PES1UG24CS282</a:t>
-            </a:r>
-          </a:p>
-        </p:txBody>
-      </p:sp>
-      <p:sp>
-        <p:nvSpPr>
-          <p:cNvPr id="9" name="TextBox 8"/>
-          <p:cNvSpPr txBox="1"/>
-          <p:nvPr/>
-        </p:nvSpPr>
-        <p:spPr>
-          <a:xfrm>
-            <a:off x="6492240" y="4023360"/>
-            <a:ext cx="4937760" cy="1188720"/>
-          </a:xfrm>
-          <a:prstGeom prst="rect">
-            <a:avLst/>
-          </a:prstGeom>
-          <a:noFill/>
-        </p:spPr>
-        <p:txBody>
-          <a:bodyPr wrap="square" anchor="t" lIns="0" rIns="0" tIns="0" bIns="0">
-            <a:spAutoFit/>
-          </a:bodyPr>
-          <a:lstStyle/>
-          <a:p>
-            <a:pPr algn="l"/>
-            <a:r>
-              <a:rPr sz="1500" b="0" i="0">
-                <a:solidFill>
-                  <a:srgbClr val="FFFFFF"/>
-                </a:solidFill>
-                <a:latin typeface="Calibri"/>
-              </a:rPr>
-              <a:t>Faithful MATLAB → Python port of the paper (paper_reproduction/): NN vs linear-regression baseline, 4 feature sets, forward selection, GitHub repo</a:t>
-            </a:r>
-          </a:p>
-        </p:txBody>
-      </p:sp>
-      <p:sp>
-        <p:nvSpPr>
-          <p:cNvPr id="10" name="TextBox 9"/>
           <p:cNvSpPr txBox="1"/>
           <p:nvPr/>
         </p:nvSpPr>

--- a/docs/MetaCost_Presentation.pptx
+++ b/docs/MetaCost_Presentation.pptx
@@ -586,7 +586,7 @@
           <a:lstStyle/>
           <a:p>
             <a:r>
-              <a:t>Left: PCA ignores the target. Supervised PLS with one component matches PCA with 8 on S2, which explains the paper's poor PCA result. Right: train on one person, test on the other: worse than predicting the mean. Per-subject z-scoring cuts the error 3x but is still not useful, so models must be subject-specific (or need many more subjects plus anthropometrics).</a:t>
+              <a:t>Calibration: on a new day, measure k random conditions with the mask and shift that day's predictions by a shrunken offset w * mean residual, with w = k / (k + sigma^2 / tau^2). Both variances are estimated from the training days only (empirical Bayes). S2 trusts calibration (w about 0.87); S1, whose days are already well predicted, trusts it less. 3 of 36 readings: S2 GP 0.046 -&gt; 0.022. Calibrating on the first conditions of a session is biased (cost runs high early on) and hurt S1 at k &gt;= 5; shrinkage limits the damage. Sensors: electrode choice is made inside each training fold, so there is no leakage. Cross-subject recalibration did NOT help: a new person needs their own data.</a:t>
             </a:r>
           </a:p>
         </p:txBody>
@@ -656,7 +656,7 @@
           <a:lstStyle/>
           <a:p>
             <a:r>
-              <a:t>Calibration: the GP's nominal 95% interval covers 94% of unseen-day points for S1, close to perfect. For S2 it covers 77%, so it is over-confident on the harder subject, but the intervals are visibly wider there. Learning curves are still falling for S1 at 144 samples: more sessions should keep improving accuracy.</a:t>
+              <a:t>Open a terminal in the project folder (cd into ML proj). Run the three commands in order. (1) The baseline from our port of the paper prints linear-regression MSE 0.0107 and R2 0.83 for Subject 1. This is the baseline, not our headline result: our best model reaches 0.0079 (slide 6). The paper reports 0.0089; the gap comes from different fold splits on only 180 samples. (2) predict.py trains a Gaussian Process on 4 days and predicts each unseen day; errors of about 11-17 %. (3) pytest shows all 10 tests pass. Total under a minute.</a:t>
             </a:r>
           </a:p>
         </p:txBody>
@@ -726,7 +726,7 @@
           <a:lstStyle/>
           <a:p>
             <a:r>
-              <a:t>Calibration: on a new day, measure k random conditions with the mask and shift that day's predictions by a shrunken offset w * mean residual, with w = k / (k + sigma^2 / tau^2). Both variances are estimated from the training days only (empirical Bayes). S2 trusts calibration (w about 0.87); S1, whose days are already well predicted, trusts it less. 3 of 36 readings: S2 GP 0.046 -&gt; 0.022. Calibrating on the first conditions of a session is biased (cost runs high early on) and hurt S1 at k &gt;= 5; shrinkage limits the damage. Sensors: electrode choice is made inside each training fold, so there is no leakage. Cross-subject recalibration did NOT help: a new person needs their own data.</a:t>
+              <a:t>Central conclusion: EMG and gait signals predict metabolic cost reasonably well within a session. However, unseen-day shifts and individual differences remain important limitations. Limited metabolic spot-checks may improve predictions, but validation on more subjects and real sessions is still needed. Future work: the biggest lever is more people. A daily calibration walk could fix the day-level offset seen in Subject 2. Use the prediction as a prior to speed up the optimiser rather than as a complete replacement for the mask.</a:t>
             </a:r>
           </a:p>
         </p:txBody>
@@ -796,7 +796,7 @@
           <a:lstStyle/>
           <a:p>
             <a:r>
-              <a:t>Open a terminal in the project folder (cd into ML proj). Run the three commands in order. (1) The paper reproduction prints linear-regression MSE 0.0107 and R2 0.83 for Subject 1. (2) predict.py trains a Gaussian Process on 4 days and predicts each unseen day; errors of about 11-17 %. (3) pytest shows all 10 tests pass. Total under a minute.</a:t>
+              <a:t>Thank the panel and invite questions.</a:t>
             </a:r>
           </a:p>
         </p:txBody>
@@ -866,7 +866,7 @@
           <a:lstStyle/>
           <a:p>
             <a:r>
-              <a:t>Recap the four numbers. Future work: the biggest lever is more people. A daily calibration walk could fix the day-level offset seen in Subject 2. Use the prediction as a prior to speed up the optimiser rather than as a complete replacement for the mask.</a:t>
+              <a:t>Left: PCA ignores the target. Supervised PLS with one component matches PCA with 8 on S2, which explains the paper's poor PCA result. Right: train on one person, test on the other: worse than predicting the mean. Per-subject z-scoring cuts the error 3x but is still not useful, so models must be subject-specific (or need many more subjects plus anthropometrics).</a:t>
             </a:r>
           </a:p>
         </p:txBody>
@@ -936,7 +936,7 @@
           <a:lstStyle/>
           <a:p>
             <a:r>
-              <a:t>Thank the panel and invite questions.</a:t>
+              <a:t>Calibration: the GP's nominal 95% interval covers 94% of unseen-day points for S1, close to perfect. For S2 it covers 77%, so it is over-confident on the harder subject, but the intervals are visibly wider there. Learning curves are still falling for S1 at 144 samples: more sessions should keep improving accuracy.</a:t>
             </a:r>
           </a:p>
         </p:txBody>
@@ -1146,7 +1146,7 @@
           <a:lstStyle/>
           <a:p>
             <a:r>
-              <a:t>Walk through left to right. Pre-processing was done by the lab: EMG filtering and day normalisation. Our contribution starts at the feature matrix: a leakage-free model zoo, two validation protocols and analyses aimed at what the optimiser actually needs.</a:t>
+              <a:t>Walk through left to right. Pre-processing was done by the lab: EMG filtering and day normalisation. Our contribution starts at the feature matrix. On evaluation: the original paper describes 10-fold cross-validation for tuning its LASSO model. We instead use repeated nested 5-fold CV, so every model-selection step stays inside the training folds, plus leave-one-day-out to test a new session. Because the protocols differ, the paper's scores are reference benchmarks, not a like-for-like match.</a:t>
             </a:r>
           </a:p>
         </p:txBody>
@@ -1286,7 +1286,7 @@
           <a:lstStyle/>
           <a:p>
             <a:r>
-              <a:t>Same protocol as the paper: random 5-fold CV, repeated 5 times and properly nested. S1: 0.0079 vs 0.0089 (11% lower). S2: 0.0109 vs 0.0168 (35% lower). In plain terms, about 9-10% error relative to normal-walking cost, versus 19-26% for predicting the mean. The noise floor is 0.0025, so headroom remains.</a:t>
+              <a:t>Under our evaluation setup (repeated nested 5-fold CV), our best models reach lower MSE on both subjects: S1 0.0079 (ensemble) and S2 0.0109 (SVR). The paper's 0.0089 (S1) is linear regression on all features and its 0.0168 (S2) is linear regression on step + EMG features, under its own CV. Different models and protocols, so treat the paper's numbers as reference benchmarks, not a like-for-like comparison. In plain terms our error is about 9-10% of normal-walking cost, versus 19-26% for predicting the mean.</a:t>
             </a:r>
           </a:p>
         </p:txBody>
@@ -1356,7 +1356,7 @@
           <a:lstStyle/>
           <a:p>
             <a:r>
-              <a:t>Dark bars use the paper's protocol; light bars use leave-one-day-out. Every model gets worse on an unseen day: neighbouring conditions from the same day leak information under random splits. For S1, heavily regularised linear models (OLS/PLS/Ridge) generalise best across days, while trees and kNN overfit. For S2, several models are worse than the mean on unseen days.</a:t>
+              <a:t>Dark bars use repeated nested 5-fold CV; light bars use leave-one-day-out. Every model gets worse on an unseen day: neighbouring conditions from the same day leak information under random splits. For S1, heavily regularised linear models (OLS/PLS/Ridge) generalise best across days, while trees and kNN overfit. For S2, several models are worse than the mean on unseen days.</a:t>
             </a:r>
           </a:p>
         </p:txBody>
@@ -1426,7 +1426,7 @@
           <a:lstStyle/>
           <a:p>
             <a:r>
-              <a:t>Each day is predicted by a GP trained only on the other four days; the shaded band is the GP 95% interval. S1 tracks closely (r = 0.88, R² ≈ 0.79 for the best linear model). S2 misses the drop in level on days 3-5: its sensors do not see that change, and the wider band shows the GP knows it is less sure. For CMA-ES, ranking within a day is what matters; Spearman rho is about 0.6 for S1.</a:t>
+              <a:t>Each day is predicted by a GP trained only on the other four days; the shaded band is the GP 95% interval. The stat cards on the right are each subject's BEST unseen-day model (S1: OLS, S2: Gradient Boosting); the GP drawn here is worse for S2 (MSE 0.046). S1 tracks closely (GP r = 0.88; OLS R² 0.79). S2 misses the drop in level on days 3-5: its sensors do not see that change, and the wider band shows the GP knows it is less sure. For CMA-ES, ranking within a day is what matters; Spearman rho is about 0.6 for S1.</a:t>
             </a:r>
           </a:p>
         </p:txBody>
@@ -4793,7 +4793,7 @@
                 </a:solidFill>
                 <a:latin typeface="Calibri"/>
               </a:rPr>
-              <a:t>RESULTS · DEEPER ANALYSIS</a:t>
+              <a:t>IMPROVEMENTS</a:t>
             </a:r>
           </a:p>
         </p:txBody>
@@ -4828,7 +4828,7 @@
                 </a:solidFill>
                 <a:latin typeface="Cambria"/>
               </a:rPr>
-              <a:t>Why PCA failed, and why one model cannot fit everyone</a:t>
+              <a:t>Fixing the weaknesses, without collecting new data</a:t>
             </a:r>
           </a:p>
         </p:txBody>
@@ -4905,7 +4905,7 @@
       </p:sp>
       <p:pic>
         <p:nvPicPr>
-          <p:cNvPr id="6" name="Picture 5" descr="F9_dimensionality_reduction.png"/>
+          <p:cNvPr id="6" name="Picture 5" descr="F14_day_calibration.png"/>
           <p:cNvPicPr>
             <a:picLocks noChangeAspect="1"/>
           </p:cNvPicPr>
@@ -4919,8 +4919,8 @@
         </p:blipFill>
         <p:spPr>
           <a:xfrm>
-            <a:off x="457200" y="1837943"/>
-            <a:ext cx="5669280" cy="2267712"/>
+            <a:off x="457200" y="1691640"/>
+            <a:ext cx="5715000" cy="2286000"/>
           </a:xfrm>
           <a:prstGeom prst="rect">
             <a:avLst/>
@@ -4929,7 +4929,7 @@
       </p:pic>
       <p:pic>
         <p:nvPicPr>
-          <p:cNvPr id="7" name="Picture 6" descr="F12_cross_subject.png"/>
+          <p:cNvPr id="7" name="Picture 6" descr="F15_sensor_reduction.png"/>
           <p:cNvPicPr>
             <a:picLocks noChangeAspect="1"/>
           </p:cNvPicPr>
@@ -4943,8 +4943,8 @@
         </p:blipFill>
         <p:spPr>
           <a:xfrm>
-            <a:off x="6309360" y="1623060"/>
-            <a:ext cx="5394960" cy="2697480"/>
+            <a:off x="6172200" y="1719072"/>
+            <a:ext cx="5577840" cy="2231136"/>
           </a:xfrm>
           <a:prstGeom prst="rect">
             <a:avLst/>
@@ -4959,8 +4959,8 @@
         </p:nvSpPr>
         <p:spPr>
           <a:xfrm>
-            <a:off x="548640" y="4754880"/>
-            <a:ext cx="5440680" cy="1463040"/>
+            <a:off x="548640" y="4526280"/>
+            <a:ext cx="3566160" cy="1417320"/>
           </a:xfrm>
           <a:prstGeom prst="roundRect">
             <a:avLst>
@@ -5005,8 +5005,8 @@
         </p:nvSpPr>
         <p:spPr>
           <a:xfrm>
-            <a:off x="777240" y="4873752"/>
-            <a:ext cx="5029200" cy="1280160"/>
+            <a:off x="777240" y="4690872"/>
+            <a:ext cx="3108960" cy="685800"/>
           </a:xfrm>
           <a:prstGeom prst="rect">
             <a:avLst/>
@@ -5019,49 +5019,64 @@
           </a:bodyPr>
           <a:lstStyle/>
           <a:p>
-            <a:pPr algn="l">
-              <a:spcAft>
-                <a:spcPts val="400"/>
-              </a:spcAft>
-            </a:pPr>
-            <a:r>
-              <a:rPr sz="1700" b="1" i="0">
-                <a:solidFill>
-                  <a:srgbClr val="0F1B2D"/>
-                </a:solidFill>
-                <a:latin typeface="Calibri"/>
-              </a:rPr>
-              <a:t>Supervised &gt; unsupervised</a:t>
-            </a:r>
-          </a:p>
-          <a:p>
-            <a:pPr algn="l">
-              <a:spcAft>
-                <a:spcPts val="400"/>
-              </a:spcAft>
-            </a:pPr>
-            <a:r>
-              <a:rPr sz="1400" b="0" i="0">
+            <a:pPr algn="l"/>
+            <a:r>
+              <a:rPr sz="3400" b="1" i="0">
+                <a:solidFill>
+                  <a:srgbClr val="EB6834"/>
+                </a:solidFill>
+                <a:latin typeface="Cambria"/>
+              </a:rPr>
+              <a:t>−51 %</a:t>
+            </a:r>
+          </a:p>
+        </p:txBody>
+      </p:sp>
+      <p:sp>
+        <p:nvSpPr>
+          <p:cNvPr id="10" name="TextBox 9"/>
+          <p:cNvSpPr txBox="1"/>
+          <p:nvPr/>
+        </p:nvSpPr>
+        <p:spPr>
+          <a:xfrm>
+            <a:off x="777240" y="5394960"/>
+            <a:ext cx="3108960" cy="502920"/>
+          </a:xfrm>
+          <a:prstGeom prst="rect">
+            <a:avLst/>
+          </a:prstGeom>
+          <a:noFill/>
+        </p:spPr>
+        <p:txBody>
+          <a:bodyPr wrap="square" anchor="t" lIns="0" rIns="0" tIns="0" bIns="0">
+            <a:spAutoFit/>
+          </a:bodyPr>
+          <a:lstStyle/>
+          <a:p>
+            <a:pPr algn="l"/>
+            <a:r>
+              <a:rPr sz="1300" b="0" i="0">
                 <a:solidFill>
                   <a:srgbClr val="555B66"/>
                 </a:solidFill>
                 <a:latin typeface="Calibri"/>
               </a:rPr>
-              <a:t>1 PLS component (0.0138) = 8 PCA components on S2. Forward selection is greedy and unstable.</a:t>
-            </a:r>
-          </a:p>
-        </p:txBody>
-      </p:sp>
-      <p:sp>
-        <p:nvSpPr>
-          <p:cNvPr id="10" name="Rounded Rectangle 9"/>
+              <a:t>S2 unseen-day error with just 3 of 36 mask spot-checks (GP 0.046 → 0.022)</a:t>
+            </a:r>
+          </a:p>
+        </p:txBody>
+      </p:sp>
+      <p:sp>
+        <p:nvSpPr>
+          <p:cNvPr id="11" name="Rounded Rectangle 10"/>
           <p:cNvSpPr/>
           <p:nvPr/>
         </p:nvSpPr>
         <p:spPr>
           <a:xfrm>
-            <a:off x="6309360" y="4754880"/>
-            <a:ext cx="5349240" cy="1463040"/>
+            <a:off x="4315968" y="4526280"/>
+            <a:ext cx="3566160" cy="1417320"/>
           </a:xfrm>
           <a:prstGeom prst="roundRect">
             <a:avLst>
@@ -5100,14 +5115,14 @@
       </p:sp>
       <p:sp>
         <p:nvSpPr>
-          <p:cNvPr id="11" name="TextBox 10"/>
-          <p:cNvSpPr txBox="1"/>
-          <p:nvPr/>
-        </p:nvSpPr>
-        <p:spPr>
-          <a:xfrm>
-            <a:off x="6537960" y="4873752"/>
-            <a:ext cx="4937760" cy="1280160"/>
+          <p:cNvPr id="12" name="TextBox 11"/>
+          <p:cNvSpPr txBox="1"/>
+          <p:nvPr/>
+        </p:nvSpPr>
+        <p:spPr>
+          <a:xfrm>
+            <a:off x="4544568" y="4690872"/>
+            <a:ext cx="3108960" cy="685800"/>
           </a:xfrm>
           <a:prstGeom prst="rect">
             <a:avLst/>
@@ -5120,35 +5135,166 @@
           </a:bodyPr>
           <a:lstStyle/>
           <a:p>
-            <a:pPr algn="l">
-              <a:spcAft>
-                <a:spcPts val="400"/>
-              </a:spcAft>
-            </a:pPr>
-            <a:r>
-              <a:rPr sz="1700" b="1" i="0">
+            <a:pPr algn="l"/>
+            <a:r>
+              <a:rPr sz="2400" b="1" i="0">
                 <a:solidFill>
                   <a:srgbClr val="0F1B2D"/>
                 </a:solidFill>
-                <a:latin typeface="Calibri"/>
-              </a:rPr>
-              <a:t>People are different</a:t>
-            </a:r>
-          </a:p>
-          <a:p>
-            <a:pPr algn="l">
-              <a:spcAft>
-                <a:spcPts val="400"/>
-              </a:spcAft>
-            </a:pPr>
-            <a:r>
-              <a:rPr sz="1400" b="0" i="0">
+                <a:latin typeface="Cambria"/>
+              </a:rPr>
+              <a:t>w = k/(k+σ²/τ²)</a:t>
+            </a:r>
+          </a:p>
+        </p:txBody>
+      </p:sp>
+      <p:sp>
+        <p:nvSpPr>
+          <p:cNvPr id="13" name="TextBox 12"/>
+          <p:cNvSpPr txBox="1"/>
+          <p:nvPr/>
+        </p:nvSpPr>
+        <p:spPr>
+          <a:xfrm>
+            <a:off x="4544568" y="5394960"/>
+            <a:ext cx="3108960" cy="502920"/>
+          </a:xfrm>
+          <a:prstGeom prst="rect">
+            <a:avLst/>
+          </a:prstGeom>
+          <a:noFill/>
+        </p:spPr>
+        <p:txBody>
+          <a:bodyPr wrap="square" anchor="t" lIns="0" rIns="0" tIns="0" bIns="0">
+            <a:spAutoFit/>
+          </a:bodyPr>
+          <a:lstStyle/>
+          <a:p>
+            <a:pPr algn="l"/>
+            <a:r>
+              <a:rPr sz="1300" b="0" i="0">
                 <a:solidFill>
                   <a:srgbClr val="555B66"/>
                 </a:solidFill>
                 <a:latin typeface="Calibri"/>
               </a:rPr>
-              <a:t>S1 → S2: MSE 0.152 vs 0.036 for the mean. Per-subject z-scoring → 0.046. Personal models are needed.</a:t>
+              <a:t>empirical-Bayes shrinkage: trusts calibration only as much as the training days justify</a:t>
+            </a:r>
+          </a:p>
+        </p:txBody>
+      </p:sp>
+      <p:sp>
+        <p:nvSpPr>
+          <p:cNvPr id="14" name="Rounded Rectangle 13"/>
+          <p:cNvSpPr/>
+          <p:nvPr/>
+        </p:nvSpPr>
+        <p:spPr>
+          <a:xfrm>
+            <a:off x="8092440" y="4526280"/>
+            <a:ext cx="3566160" cy="1417320"/>
+          </a:xfrm>
+          <a:prstGeom prst="roundRect">
+            <a:avLst>
+              <a:gd name="adj" fmla="val 8000"/>
+            </a:avLst>
+          </a:prstGeom>
+          <a:solidFill>
+            <a:srgbClr val="F1F5FB"/>
+          </a:solidFill>
+          <a:ln>
+            <a:noFill/>
+          </a:ln>
+          <a:effectLst/>
+        </p:spPr>
+        <p:style>
+          <a:lnRef idx="1">
+            <a:schemeClr val="accent1"/>
+          </a:lnRef>
+          <a:fillRef idx="3">
+            <a:schemeClr val="accent1"/>
+          </a:fillRef>
+          <a:effectRef idx="2">
+            <a:schemeClr val="accent1"/>
+          </a:effectRef>
+          <a:fontRef idx="minor">
+            <a:schemeClr val="lt1"/>
+          </a:fontRef>
+        </p:style>
+        <p:txBody>
+          <a:bodyPr rtlCol="0" anchor="ctr"/>
+          <a:lstStyle/>
+          <a:p>
+            <a:pPr algn="ctr"/>
+          </a:p>
+        </p:txBody>
+      </p:sp>
+      <p:sp>
+        <p:nvSpPr>
+          <p:cNvPr id="15" name="TextBox 14"/>
+          <p:cNvSpPr txBox="1"/>
+          <p:nvPr/>
+        </p:nvSpPr>
+        <p:spPr>
+          <a:xfrm>
+            <a:off x="8321040" y="4690872"/>
+            <a:ext cx="3108960" cy="685800"/>
+          </a:xfrm>
+          <a:prstGeom prst="rect">
+            <a:avLst/>
+          </a:prstGeom>
+          <a:noFill/>
+        </p:spPr>
+        <p:txBody>
+          <a:bodyPr wrap="square" anchor="t" lIns="0" rIns="0" tIns="0" bIns="0">
+            <a:spAutoFit/>
+          </a:bodyPr>
+          <a:lstStyle/>
+          <a:p>
+            <a:pPr algn="l"/>
+            <a:r>
+              <a:rPr sz="3400" b="1" i="0">
+                <a:solidFill>
+                  <a:srgbClr val="1BAF7A"/>
+                </a:solidFill>
+                <a:latin typeface="Cambria"/>
+              </a:rPr>
+              <a:t>4 of 16</a:t>
+            </a:r>
+          </a:p>
+        </p:txBody>
+      </p:sp>
+      <p:sp>
+        <p:nvSpPr>
+          <p:cNvPr id="16" name="TextBox 15"/>
+          <p:cNvSpPr txBox="1"/>
+          <p:nvPr/>
+        </p:nvSpPr>
+        <p:spPr>
+          <a:xfrm>
+            <a:off x="8321040" y="5394960"/>
+            <a:ext cx="3108960" cy="502920"/>
+          </a:xfrm>
+          <a:prstGeom prst="rect">
+            <a:avLst/>
+          </a:prstGeom>
+          <a:noFill/>
+        </p:spPr>
+        <p:txBody>
+          <a:bodyPr wrap="square" anchor="t" lIns="0" rIns="0" tIns="0" bIns="0">
+            <a:spAutoFit/>
+          </a:bodyPr>
+          <a:lstStyle/>
+          <a:p>
+            <a:pPr algn="l"/>
+            <a:r>
+              <a:rPr sz="1300" b="0" i="0">
+                <a:solidFill>
+                  <a:srgbClr val="555B66"/>
+                </a:solidFill>
+                <a:latin typeface="Calibri"/>
+              </a:rPr>
+              <a:t>EMG electrodes beat all 16 for S2 (unseen-day Ridge 0.036 → 0.024)</a:t>
             </a:r>
           </a:p>
         </p:txBody>
@@ -5209,7 +5355,7 @@
                 </a:solidFill>
                 <a:latin typeface="Calibri"/>
               </a:rPr>
-              <a:t>RESULTS · RELIABILITY</a:t>
+              <a:t>DEMO</a:t>
             </a:r>
           </a:p>
         </p:txBody>
@@ -5244,7 +5390,7 @@
                 </a:solidFill>
                 <a:latin typeface="Cambria"/>
               </a:rPr>
-              <a:t>The model knows when it is unsure, and more data would help</a:t>
+              <a:t>Live demo: the code, running</a:t>
             </a:r>
           </a:p>
         </p:txBody>
@@ -5319,54 +5465,93 @@
           </a:p>
         </p:txBody>
       </p:sp>
-      <p:pic>
-        <p:nvPicPr>
-          <p:cNvPr id="6" name="Picture 5" descr="F11_calibration.png"/>
-          <p:cNvPicPr>
-            <a:picLocks noChangeAspect="1"/>
-          </p:cNvPicPr>
-          <p:nvPr/>
-        </p:nvPicPr>
-        <p:blipFill>
-          <a:blip r:embed="rId3"/>
-          <a:stretch>
-            <a:fillRect/>
-          </a:stretch>
-        </p:blipFill>
-        <p:spPr>
-          <a:xfrm>
-            <a:off x="728197" y="1371600"/>
-            <a:ext cx="3664245" cy="3429000"/>
-          </a:xfrm>
-          <a:prstGeom prst="rect">
-            <a:avLst/>
-          </a:prstGeom>
-        </p:spPr>
-      </p:pic>
-      <p:pic>
-        <p:nvPicPr>
-          <p:cNvPr id="7" name="Picture 6" descr="F10_learning_curve.png"/>
-          <p:cNvPicPr>
-            <a:picLocks noChangeAspect="1"/>
-          </p:cNvPicPr>
-          <p:nvPr/>
-        </p:nvPicPr>
-        <p:blipFill>
-          <a:blip r:embed="rId4"/>
-          <a:stretch>
-            <a:fillRect/>
-          </a:stretch>
-        </p:blipFill>
-        <p:spPr>
-          <a:xfrm>
-            <a:off x="4754880" y="1696212"/>
-            <a:ext cx="6949440" cy="2779776"/>
-          </a:xfrm>
-          <a:prstGeom prst="rect">
-            <a:avLst/>
-          </a:prstGeom>
-        </p:spPr>
-      </p:pic>
+      <p:sp>
+        <p:nvSpPr>
+          <p:cNvPr id="6" name="Oval 5"/>
+          <p:cNvSpPr/>
+          <p:nvPr/>
+        </p:nvSpPr>
+        <p:spPr>
+          <a:xfrm>
+            <a:off x="548640" y="1508760"/>
+            <a:ext cx="457200" cy="457200"/>
+          </a:xfrm>
+          <a:prstGeom prst="ellipse">
+            <a:avLst/>
+          </a:prstGeom>
+          <a:solidFill>
+            <a:srgbClr val="2A78D6"/>
+          </a:solidFill>
+          <a:ln>
+            <a:noFill/>
+          </a:ln>
+        </p:spPr>
+        <p:style>
+          <a:lnRef idx="1">
+            <a:schemeClr val="accent1"/>
+          </a:lnRef>
+          <a:fillRef idx="3">
+            <a:schemeClr val="accent1"/>
+          </a:fillRef>
+          <a:effectRef idx="2">
+            <a:schemeClr val="accent1"/>
+          </a:effectRef>
+          <a:fontRef idx="minor">
+            <a:schemeClr val="lt1"/>
+          </a:fontRef>
+        </p:style>
+        <p:txBody>
+          <a:bodyPr rtlCol="0" anchor="ctr" lIns="0" rIns="0" tIns="0" bIns="0"/>
+          <a:lstStyle/>
+          <a:p>
+            <a:pPr algn="ctr"/>
+            <a:r>
+              <a:rPr sz="1600" b="1">
+                <a:solidFill>
+                  <a:srgbClr val="FFFFFF"/>
+                </a:solidFill>
+                <a:latin typeface="Calibri"/>
+              </a:rPr>
+              <a:t>1</a:t>
+            </a:r>
+          </a:p>
+        </p:txBody>
+      </p:sp>
+      <p:sp>
+        <p:nvSpPr>
+          <p:cNvPr id="7" name="TextBox 6"/>
+          <p:cNvSpPr txBox="1"/>
+          <p:nvPr/>
+        </p:nvSpPr>
+        <p:spPr>
+          <a:xfrm>
+            <a:off x="1143000" y="1554480"/>
+            <a:ext cx="2926080" cy="411480"/>
+          </a:xfrm>
+          <a:prstGeom prst="rect">
+            <a:avLst/>
+          </a:prstGeom>
+          <a:noFill/>
+        </p:spPr>
+        <p:txBody>
+          <a:bodyPr wrap="square" anchor="t" lIns="0" rIns="0" tIns="0" bIns="0">
+            <a:spAutoFit/>
+          </a:bodyPr>
+          <a:lstStyle/>
+          <a:p>
+            <a:pPr algn="l"/>
+            <a:r>
+              <a:rPr sz="1700" b="1" i="0">
+                <a:solidFill>
+                  <a:srgbClr val="0F1B2D"/>
+                </a:solidFill>
+                <a:latin typeface="Calibri"/>
+              </a:rPr>
+              <a:t>Baseline (paper port)</a:t>
+            </a:r>
+          </a:p>
+        </p:txBody>
+      </p:sp>
       <p:sp>
         <p:nvSpPr>
           <p:cNvPr id="8" name="Rounded Rectangle 7"/>
@@ -5375,16 +5560,16 @@
         </p:nvSpPr>
         <p:spPr>
           <a:xfrm>
-            <a:off x="548640" y="4983480"/>
-            <a:ext cx="4023360" cy="1417320"/>
+            <a:off x="548640" y="2148840"/>
+            <a:ext cx="3520440" cy="3566160"/>
           </a:xfrm>
           <a:prstGeom prst="roundRect">
             <a:avLst>
-              <a:gd name="adj" fmla="val 8000"/>
+              <a:gd name="adj" fmla="val 5000"/>
             </a:avLst>
           </a:prstGeom>
           <a:solidFill>
-            <a:srgbClr val="F1F5FB"/>
+            <a:srgbClr val="0F1B2D"/>
           </a:solidFill>
           <a:ln>
             <a:noFill/>
@@ -5421,8 +5606,8 @@
         </p:nvSpPr>
         <p:spPr>
           <a:xfrm>
-            <a:off x="777240" y="5148072"/>
-            <a:ext cx="3566160" cy="685800"/>
+            <a:off x="731520" y="2286000"/>
+            <a:ext cx="3200400" cy="822960"/>
           </a:xfrm>
           <a:prstGeom prst="rect">
             <a:avLst/>
@@ -5437,13 +5622,13 @@
           <a:p>
             <a:pPr algn="l"/>
             <a:r>
-              <a:rPr sz="3200" b="1" i="0">
-                <a:solidFill>
-                  <a:srgbClr val="1BAF7A"/>
-                </a:solidFill>
-                <a:latin typeface="Cambria"/>
-              </a:rPr>
-              <a:t>94 %</a:t>
+              <a:rPr sz="1200" b="0" i="0">
+                <a:solidFill>
+                  <a:srgbClr val="BFD4F2"/>
+                </a:solidFill>
+                <a:latin typeface="Courier New"/>
+              </a:rPr>
+              <a:t>$ python paper_reproduction/lin_reg_test.py</a:t>
             </a:r>
           </a:p>
         </p:txBody>
@@ -5456,8 +5641,8 @@
         </p:nvSpPr>
         <p:spPr>
           <a:xfrm>
-            <a:off x="777240" y="5852160"/>
-            <a:ext cx="3566160" cy="502920"/>
+            <a:off x="731520" y="3154680"/>
+            <a:ext cx="3200400" cy="2468880"/>
           </a:xfrm>
           <a:prstGeom prst="rect">
             <a:avLst/>
@@ -5472,35 +5657,146 @@
           <a:p>
             <a:pPr algn="l"/>
             <a:r>
-              <a:rPr sz="1300" b="0" i="0">
-                <a:solidFill>
-                  <a:srgbClr val="555B66"/>
-                </a:solidFill>
-                <a:latin typeface="Calibri"/>
-              </a:rPr>
-              <a:t>of unseen-day points inside the S1 95 % interval</a:t>
-            </a:r>
-          </a:p>
-        </p:txBody>
-      </p:sp>
-      <p:sp>
-        <p:nvSpPr>
-          <p:cNvPr id="11" name="Rounded Rectangle 10"/>
+              <a:rPr sz="1200" b="0" i="0">
+                <a:solidFill>
+                  <a:srgbClr val="FFFFFF"/>
+                </a:solidFill>
+                <a:latin typeface="Courier New"/>
+              </a:rPr>
+              <a:t>Linear Regression 5-Fold CV</a:t>
+            </a:r>
+          </a:p>
+          <a:p>
+            <a:pPr algn="l"/>
+            <a:r>
+              <a:rPr sz="1200" b="0" i="0">
+                <a:solidFill>
+                  <a:srgbClr val="FFFFFF"/>
+                </a:solidFill>
+                <a:latin typeface="Courier New"/>
+              </a:rPr>
+              <a:t>Mean MSE: 0.010700</a:t>
+            </a:r>
+          </a:p>
+          <a:p>
+            <a:pPr algn="l"/>
+            <a:r>
+              <a:rPr sz="1200" b="0" i="0">
+                <a:solidFill>
+                  <a:srgbClr val="FFFFFF"/>
+                </a:solidFill>
+                <a:latin typeface="Courier New"/>
+              </a:rPr>
+              <a:t>Mean R² : 0.8349</a:t>
+            </a:r>
+          </a:p>
+        </p:txBody>
+      </p:sp>
+      <p:sp>
+        <p:nvSpPr>
+          <p:cNvPr id="11" name="Oval 10"/>
           <p:cNvSpPr/>
           <p:nvPr/>
         </p:nvSpPr>
         <p:spPr>
           <a:xfrm>
-            <a:off x="4754880" y="4983480"/>
-            <a:ext cx="6903720" cy="1417320"/>
+            <a:off x="4297679" y="1508760"/>
+            <a:ext cx="457200" cy="457200"/>
+          </a:xfrm>
+          <a:prstGeom prst="ellipse">
+            <a:avLst/>
+          </a:prstGeom>
+          <a:solidFill>
+            <a:srgbClr val="2A78D6"/>
+          </a:solidFill>
+          <a:ln>
+            <a:noFill/>
+          </a:ln>
+        </p:spPr>
+        <p:style>
+          <a:lnRef idx="1">
+            <a:schemeClr val="accent1"/>
+          </a:lnRef>
+          <a:fillRef idx="3">
+            <a:schemeClr val="accent1"/>
+          </a:fillRef>
+          <a:effectRef idx="2">
+            <a:schemeClr val="accent1"/>
+          </a:effectRef>
+          <a:fontRef idx="minor">
+            <a:schemeClr val="lt1"/>
+          </a:fontRef>
+        </p:style>
+        <p:txBody>
+          <a:bodyPr rtlCol="0" anchor="ctr" lIns="0" rIns="0" tIns="0" bIns="0"/>
+          <a:lstStyle/>
+          <a:p>
+            <a:pPr algn="ctr"/>
+            <a:r>
+              <a:rPr sz="1600" b="1">
+                <a:solidFill>
+                  <a:srgbClr val="FFFFFF"/>
+                </a:solidFill>
+                <a:latin typeface="Calibri"/>
+              </a:rPr>
+              <a:t>2</a:t>
+            </a:r>
+          </a:p>
+        </p:txBody>
+      </p:sp>
+      <p:sp>
+        <p:nvSpPr>
+          <p:cNvPr id="12" name="TextBox 11"/>
+          <p:cNvSpPr txBox="1"/>
+          <p:nvPr/>
+        </p:nvSpPr>
+        <p:spPr>
+          <a:xfrm>
+            <a:off x="4892040" y="1554480"/>
+            <a:ext cx="2926080" cy="411480"/>
+          </a:xfrm>
+          <a:prstGeom prst="rect">
+            <a:avLst/>
+          </a:prstGeom>
+          <a:noFill/>
+        </p:spPr>
+        <p:txBody>
+          <a:bodyPr wrap="square" anchor="t" lIns="0" rIns="0" tIns="0" bIns="0">
+            <a:spAutoFit/>
+          </a:bodyPr>
+          <a:lstStyle/>
+          <a:p>
+            <a:pPr algn="l"/>
+            <a:r>
+              <a:rPr sz="1700" b="1" i="0">
+                <a:solidFill>
+                  <a:srgbClr val="0F1B2D"/>
+                </a:solidFill>
+                <a:latin typeface="Calibri"/>
+              </a:rPr>
+              <a:t>Predict unseen days</a:t>
+            </a:r>
+          </a:p>
+        </p:txBody>
+      </p:sp>
+      <p:sp>
+        <p:nvSpPr>
+          <p:cNvPr id="13" name="Rounded Rectangle 12"/>
+          <p:cNvSpPr/>
+          <p:nvPr/>
+        </p:nvSpPr>
+        <p:spPr>
+          <a:xfrm>
+            <a:off x="4297679" y="2148840"/>
+            <a:ext cx="3520440" cy="3566160"/>
           </a:xfrm>
           <a:prstGeom prst="roundRect">
             <a:avLst>
-              <a:gd name="adj" fmla="val 8000"/>
+              <a:gd name="adj" fmla="val 5000"/>
             </a:avLst>
           </a:prstGeom>
           <a:solidFill>
-            <a:srgbClr val="F1F5FB"/>
+            <a:srgbClr val="0F1B2D"/>
           </a:solidFill>
           <a:ln>
             <a:noFill/>
@@ -5531,14 +5827,14 @@
       </p:sp>
       <p:sp>
         <p:nvSpPr>
-          <p:cNvPr id="12" name="TextBox 11"/>
-          <p:cNvSpPr txBox="1"/>
-          <p:nvPr/>
-        </p:nvSpPr>
-        <p:spPr>
-          <a:xfrm>
-            <a:off x="4983480" y="5148072"/>
-            <a:ext cx="6446520" cy="685800"/>
+          <p:cNvPr id="14" name="TextBox 13"/>
+          <p:cNvSpPr txBox="1"/>
+          <p:nvPr/>
+        </p:nvSpPr>
+        <p:spPr>
+          <a:xfrm>
+            <a:off x="4480559" y="2286000"/>
+            <a:ext cx="3200400" cy="822960"/>
           </a:xfrm>
           <a:prstGeom prst="rect">
             <a:avLst/>
@@ -5553,27 +5849,27 @@
           <a:p>
             <a:pPr algn="l"/>
             <a:r>
-              <a:rPr sz="3200" b="1" i="0">
-                <a:solidFill>
-                  <a:srgbClr val="1BAF7A"/>
-                </a:solidFill>
-                <a:latin typeface="Cambria"/>
-              </a:rPr>
-              <a:t>0.0155 → 0.0088</a:t>
-            </a:r>
-          </a:p>
-        </p:txBody>
-      </p:sp>
-      <p:sp>
-        <p:nvSpPr>
-          <p:cNvPr id="13" name="TextBox 12"/>
-          <p:cNvSpPr txBox="1"/>
-          <p:nvPr/>
-        </p:nvSpPr>
-        <p:spPr>
-          <a:xfrm>
-            <a:off x="4983480" y="5852160"/>
-            <a:ext cx="6446520" cy="502920"/>
+              <a:rPr sz="1200" b="0" i="0">
+                <a:solidFill>
+                  <a:srgbClr val="BFD4F2"/>
+                </a:solidFill>
+                <a:latin typeface="Courier New"/>
+              </a:rPr>
+              <a:t>$ python scripts/predict.py --demo --subject S1</a:t>
+            </a:r>
+          </a:p>
+        </p:txBody>
+      </p:sp>
+      <p:sp>
+        <p:nvSpPr>
+          <p:cNvPr id="15" name="TextBox 14"/>
+          <p:cNvSpPr txBox="1"/>
+          <p:nvPr/>
+        </p:nvSpPr>
+        <p:spPr>
+          <a:xfrm>
+            <a:off x="4480559" y="3154680"/>
+            <a:ext cx="3200400" cy="2468880"/>
           </a:xfrm>
           <a:prstGeom prst="rect">
             <a:avLst/>
@@ -5588,13 +5884,323 @@
           <a:p>
             <a:pPr algn="l"/>
             <a:r>
-              <a:rPr sz="1300" b="0" i="0">
+              <a:rPr sz="1200" b="0" i="0">
+                <a:solidFill>
+                  <a:srgbClr val="FFFFFF"/>
+                </a:solidFill>
+                <a:latin typeface="Courier New"/>
+              </a:rPr>
+              <a:t>day      MSE   %err      r</a:t>
+            </a:r>
+          </a:p>
+          <a:p>
+            <a:pPr algn="l"/>
+            <a:r>
+              <a:rPr sz="1200" b="0" i="0">
+                <a:solidFill>
+                  <a:srgbClr val="FFFFFF"/>
+                </a:solidFill>
+                <a:latin typeface="Courier New"/>
+              </a:rPr>
+              <a:t>  1   0.0286  16.9%   0.82</a:t>
+            </a:r>
+          </a:p>
+          <a:p>
+            <a:pPr algn="l"/>
+            <a:r>
+              <a:rPr sz="1200" b="0" i="0">
+                <a:solidFill>
+                  <a:srgbClr val="FFFFFF"/>
+                </a:solidFill>
+                <a:latin typeface="Courier New"/>
+              </a:rPr>
+              <a:t>  2   0.0191  13.8%   0.49</a:t>
+            </a:r>
+          </a:p>
+          <a:p>
+            <a:pPr algn="l"/>
+            <a:r>
+              <a:rPr sz="1200" b="0" i="0">
+                <a:solidFill>
+                  <a:srgbClr val="FFFFFF"/>
+                </a:solidFill>
+                <a:latin typeface="Courier New"/>
+              </a:rPr>
+              <a:t>  3   0.0132  11.5%   0.64</a:t>
+            </a:r>
+          </a:p>
+          <a:p>
+            <a:pPr algn="l"/>
+            <a:r>
+              <a:rPr sz="1200" b="0" i="0">
+                <a:solidFill>
+                  <a:srgbClr val="FFFFFF"/>
+                </a:solidFill>
+                <a:latin typeface="Courier New"/>
+              </a:rPr>
+              <a:t>  4   0.0119  10.9%   0.61</a:t>
+            </a:r>
+          </a:p>
+          <a:p>
+            <a:pPr algn="l"/>
+            <a:r>
+              <a:rPr sz="1200" b="0" i="0">
+                <a:solidFill>
+                  <a:srgbClr val="FFFFFF"/>
+                </a:solidFill>
+                <a:latin typeface="Courier New"/>
+              </a:rPr>
+              <a:t>  5   0.0149  12.2%   0.67</a:t>
+            </a:r>
+          </a:p>
+        </p:txBody>
+      </p:sp>
+      <p:sp>
+        <p:nvSpPr>
+          <p:cNvPr id="16" name="Oval 15"/>
+          <p:cNvSpPr/>
+          <p:nvPr/>
+        </p:nvSpPr>
+        <p:spPr>
+          <a:xfrm>
+            <a:off x="8046719" y="1508760"/>
+            <a:ext cx="457200" cy="457200"/>
+          </a:xfrm>
+          <a:prstGeom prst="ellipse">
+            <a:avLst/>
+          </a:prstGeom>
+          <a:solidFill>
+            <a:srgbClr val="2A78D6"/>
+          </a:solidFill>
+          <a:ln>
+            <a:noFill/>
+          </a:ln>
+        </p:spPr>
+        <p:style>
+          <a:lnRef idx="1">
+            <a:schemeClr val="accent1"/>
+          </a:lnRef>
+          <a:fillRef idx="3">
+            <a:schemeClr val="accent1"/>
+          </a:fillRef>
+          <a:effectRef idx="2">
+            <a:schemeClr val="accent1"/>
+          </a:effectRef>
+          <a:fontRef idx="minor">
+            <a:schemeClr val="lt1"/>
+          </a:fontRef>
+        </p:style>
+        <p:txBody>
+          <a:bodyPr rtlCol="0" anchor="ctr" lIns="0" rIns="0" tIns="0" bIns="0"/>
+          <a:lstStyle/>
+          <a:p>
+            <a:pPr algn="ctr"/>
+            <a:r>
+              <a:rPr sz="1600" b="1">
+                <a:solidFill>
+                  <a:srgbClr val="FFFFFF"/>
+                </a:solidFill>
+                <a:latin typeface="Calibri"/>
+              </a:rPr>
+              <a:t>3</a:t>
+            </a:r>
+          </a:p>
+        </p:txBody>
+      </p:sp>
+      <p:sp>
+        <p:nvSpPr>
+          <p:cNvPr id="17" name="TextBox 16"/>
+          <p:cNvSpPr txBox="1"/>
+          <p:nvPr/>
+        </p:nvSpPr>
+        <p:spPr>
+          <a:xfrm>
+            <a:off x="8641080" y="1554480"/>
+            <a:ext cx="2926080" cy="411480"/>
+          </a:xfrm>
+          <a:prstGeom prst="rect">
+            <a:avLst/>
+          </a:prstGeom>
+          <a:noFill/>
+        </p:spPr>
+        <p:txBody>
+          <a:bodyPr wrap="square" anchor="t" lIns="0" rIns="0" tIns="0" bIns="0">
+            <a:spAutoFit/>
+          </a:bodyPr>
+          <a:lstStyle/>
+          <a:p>
+            <a:pPr algn="l"/>
+            <a:r>
+              <a:rPr sz="1700" b="1" i="0">
+                <a:solidFill>
+                  <a:srgbClr val="0F1B2D"/>
+                </a:solidFill>
+                <a:latin typeface="Calibri"/>
+              </a:rPr>
+              <a:t>Automated tests</a:t>
+            </a:r>
+          </a:p>
+        </p:txBody>
+      </p:sp>
+      <p:sp>
+        <p:nvSpPr>
+          <p:cNvPr id="18" name="Rounded Rectangle 17"/>
+          <p:cNvSpPr/>
+          <p:nvPr/>
+        </p:nvSpPr>
+        <p:spPr>
+          <a:xfrm>
+            <a:off x="8046719" y="2148840"/>
+            <a:ext cx="3520440" cy="3566160"/>
+          </a:xfrm>
+          <a:prstGeom prst="roundRect">
+            <a:avLst>
+              <a:gd name="adj" fmla="val 5000"/>
+            </a:avLst>
+          </a:prstGeom>
+          <a:solidFill>
+            <a:srgbClr val="0F1B2D"/>
+          </a:solidFill>
+          <a:ln>
+            <a:noFill/>
+          </a:ln>
+          <a:effectLst/>
+        </p:spPr>
+        <p:style>
+          <a:lnRef idx="1">
+            <a:schemeClr val="accent1"/>
+          </a:lnRef>
+          <a:fillRef idx="3">
+            <a:schemeClr val="accent1"/>
+          </a:fillRef>
+          <a:effectRef idx="2">
+            <a:schemeClr val="accent1"/>
+          </a:effectRef>
+          <a:fontRef idx="minor">
+            <a:schemeClr val="lt1"/>
+          </a:fontRef>
+        </p:style>
+        <p:txBody>
+          <a:bodyPr rtlCol="0" anchor="ctr"/>
+          <a:lstStyle/>
+          <a:p>
+            <a:pPr algn="ctr"/>
+          </a:p>
+        </p:txBody>
+      </p:sp>
+      <p:sp>
+        <p:nvSpPr>
+          <p:cNvPr id="19" name="TextBox 18"/>
+          <p:cNvSpPr txBox="1"/>
+          <p:nvPr/>
+        </p:nvSpPr>
+        <p:spPr>
+          <a:xfrm>
+            <a:off x="8229599" y="2286000"/>
+            <a:ext cx="3200400" cy="822960"/>
+          </a:xfrm>
+          <a:prstGeom prst="rect">
+            <a:avLst/>
+          </a:prstGeom>
+          <a:noFill/>
+        </p:spPr>
+        <p:txBody>
+          <a:bodyPr wrap="square" anchor="t" lIns="0" rIns="0" tIns="0" bIns="0">
+            <a:spAutoFit/>
+          </a:bodyPr>
+          <a:lstStyle/>
+          <a:p>
+            <a:pPr algn="l"/>
+            <a:r>
+              <a:rPr sz="1200" b="0" i="0">
+                <a:solidFill>
+                  <a:srgbClr val="BFD4F2"/>
+                </a:solidFill>
+                <a:latin typeface="Courier New"/>
+              </a:rPr>
+              <a:t>$ python -m pytest -q</a:t>
+            </a:r>
+          </a:p>
+        </p:txBody>
+      </p:sp>
+      <p:sp>
+        <p:nvSpPr>
+          <p:cNvPr id="20" name="TextBox 19"/>
+          <p:cNvSpPr txBox="1"/>
+          <p:nvPr/>
+        </p:nvSpPr>
+        <p:spPr>
+          <a:xfrm>
+            <a:off x="8229599" y="3154680"/>
+            <a:ext cx="3200400" cy="2468880"/>
+          </a:xfrm>
+          <a:prstGeom prst="rect">
+            <a:avLst/>
+          </a:prstGeom>
+          <a:noFill/>
+        </p:spPr>
+        <p:txBody>
+          <a:bodyPr wrap="square" anchor="t" lIns="0" rIns="0" tIns="0" bIns="0">
+            <a:spAutoFit/>
+          </a:bodyPr>
+          <a:lstStyle/>
+          <a:p>
+            <a:pPr algn="l"/>
+            <a:r>
+              <a:rPr sz="1200" b="0" i="0">
+                <a:solidFill>
+                  <a:srgbClr val="FFFFFF"/>
+                </a:solidFill>
+                <a:latin typeface="Courier New"/>
+              </a:rPr>
+              <a:t>..........</a:t>
+            </a:r>
+          </a:p>
+          <a:p>
+            <a:pPr algn="l"/>
+            <a:r>
+              <a:rPr sz="1200" b="0" i="0">
+                <a:solidFill>
+                  <a:srgbClr val="FFFFFF"/>
+                </a:solidFill>
+                <a:latin typeface="Courier New"/>
+              </a:rPr>
+              <a:t>10 passed</a:t>
+            </a:r>
+          </a:p>
+        </p:txBody>
+      </p:sp>
+      <p:sp>
+        <p:nvSpPr>
+          <p:cNvPr id="21" name="TextBox 20"/>
+          <p:cNvSpPr txBox="1"/>
+          <p:nvPr/>
+        </p:nvSpPr>
+        <p:spPr>
+          <a:xfrm>
+            <a:off x="548640" y="5852160"/>
+            <a:ext cx="11064240" cy="457200"/>
+          </a:xfrm>
+          <a:prstGeom prst="rect">
+            <a:avLst/>
+          </a:prstGeom>
+          <a:noFill/>
+        </p:spPr>
+        <p:txBody>
+          <a:bodyPr wrap="square" anchor="t" lIns="0" rIns="0" tIns="0" bIns="0">
+            <a:spAutoFit/>
+          </a:bodyPr>
+          <a:lstStyle/>
+          <a:p>
+            <a:pPr algn="l"/>
+            <a:r>
+              <a:rPr sz="1200" b="0" i="1">
                 <a:solidFill>
                   <a:srgbClr val="555B66"/>
                 </a:solidFill>
                 <a:latin typeface="Calibri"/>
               </a:rPr>
-              <a:t>S1 GP test MSE from 28 to 144 training samples, still decreasing</a:t>
+              <a:t>1 = the paper's linear-regression baseline (S1 MSE 0.0107; paper reports 0.0089 with its own folds). Our best model (slide 6) reaches 0.0079.  ·  Run from the ML proj folder, under a minute.</a:t>
             </a:r>
           </a:p>
         </p:txBody>
@@ -5608,6 +6214,1048 @@
 </file>
 
 <file path=ppt/slides/slide12.xml><?xml version="1.0" encoding="utf-8"?>
+<p:sld xmlns:a="http://schemas.openxmlformats.org/drawingml/2006/main" xmlns:p="http://schemas.openxmlformats.org/presentationml/2006/main" xmlns:r="http://schemas.openxmlformats.org/officeDocument/2006/relationships">
+  <p:cSld>
+    <p:bg>
+      <p:bgPr>
+        <a:solidFill>
+          <a:srgbClr val="0F1B2D"/>
+        </a:solidFill>
+        <a:effectLst/>
+      </p:bgPr>
+    </p:bg>
+    <p:spTree>
+      <p:nvGrpSpPr>
+        <p:cNvPr id="1" name=""/>
+        <p:cNvGrpSpPr/>
+        <p:nvPr/>
+      </p:nvGrpSpPr>
+      <p:grpSpPr/>
+      <p:sp>
+        <p:nvSpPr>
+          <p:cNvPr id="2" name="TextBox 1"/>
+          <p:cNvSpPr txBox="1"/>
+          <p:nvPr/>
+        </p:nvSpPr>
+        <p:spPr>
+          <a:xfrm>
+            <a:off x="548640" y="502920"/>
+            <a:ext cx="10972800" cy="365760"/>
+          </a:xfrm>
+          <a:prstGeom prst="rect">
+            <a:avLst/>
+          </a:prstGeom>
+          <a:noFill/>
+        </p:spPr>
+        <p:txBody>
+          <a:bodyPr wrap="square" anchor="t" lIns="0" rIns="0" tIns="0" bIns="0">
+            <a:spAutoFit/>
+          </a:bodyPr>
+          <a:lstStyle/>
+          <a:p>
+            <a:pPr algn="l"/>
+            <a:r>
+              <a:rPr sz="1300" b="1" i="0">
+                <a:solidFill>
+                  <a:srgbClr val="BFD4F2"/>
+                </a:solidFill>
+                <a:latin typeface="Calibri"/>
+              </a:rPr>
+              <a:t>CONCLUSIONS &amp; FUTURE WORK</a:t>
+            </a:r>
+          </a:p>
+        </p:txBody>
+      </p:sp>
+      <p:sp>
+        <p:nvSpPr>
+          <p:cNvPr id="3" name="TextBox 2"/>
+          <p:cNvSpPr txBox="1"/>
+          <p:nvPr/>
+        </p:nvSpPr>
+        <p:spPr>
+          <a:xfrm>
+            <a:off x="548640" y="822960"/>
+            <a:ext cx="10972800" cy="822960"/>
+          </a:xfrm>
+          <a:prstGeom prst="rect">
+            <a:avLst/>
+          </a:prstGeom>
+          <a:noFill/>
+        </p:spPr>
+        <p:txBody>
+          <a:bodyPr wrap="square" anchor="t" lIns="0" rIns="0" tIns="0" bIns="0">
+            <a:spAutoFit/>
+          </a:bodyPr>
+          <a:lstStyle/>
+          <a:p>
+            <a:pPr algn="l"/>
+            <a:r>
+              <a:rPr sz="3200" b="1" i="0">
+                <a:solidFill>
+                  <a:srgbClr val="FFFFFF"/>
+                </a:solidFill>
+                <a:latin typeface="Cambria"/>
+              </a:rPr>
+              <a:t>Wearable signals can reduce dependence on metabolic measurements</a:t>
+            </a:r>
+          </a:p>
+        </p:txBody>
+      </p:sp>
+      <p:sp>
+        <p:nvSpPr>
+          <p:cNvPr id="4" name="Rounded Rectangle 3"/>
+          <p:cNvSpPr/>
+          <p:nvPr/>
+        </p:nvSpPr>
+        <p:spPr>
+          <a:xfrm>
+            <a:off x="548640" y="1965960"/>
+            <a:ext cx="5440680" cy="1234440"/>
+          </a:xfrm>
+          <a:prstGeom prst="roundRect">
+            <a:avLst>
+              <a:gd name="adj" fmla="val 8000"/>
+            </a:avLst>
+          </a:prstGeom>
+          <a:solidFill>
+            <a:srgbClr val="1C2C45"/>
+          </a:solidFill>
+          <a:ln>
+            <a:noFill/>
+          </a:ln>
+          <a:effectLst/>
+        </p:spPr>
+        <p:style>
+          <a:lnRef idx="1">
+            <a:schemeClr val="accent1"/>
+          </a:lnRef>
+          <a:fillRef idx="3">
+            <a:schemeClr val="accent1"/>
+          </a:fillRef>
+          <a:effectRef idx="2">
+            <a:schemeClr val="accent1"/>
+          </a:effectRef>
+          <a:fontRef idx="minor">
+            <a:schemeClr val="lt1"/>
+          </a:fontRef>
+        </p:style>
+        <p:txBody>
+          <a:bodyPr rtlCol="0" anchor="ctr"/>
+          <a:lstStyle/>
+          <a:p>
+            <a:pPr algn="ctr"/>
+          </a:p>
+        </p:txBody>
+      </p:sp>
+      <p:sp>
+        <p:nvSpPr>
+          <p:cNvPr id="5" name="TextBox 4"/>
+          <p:cNvSpPr txBox="1"/>
+          <p:nvPr/>
+        </p:nvSpPr>
+        <p:spPr>
+          <a:xfrm>
+            <a:off x="777240" y="2148840"/>
+            <a:ext cx="1463040" cy="822960"/>
+          </a:xfrm>
+          <a:prstGeom prst="rect">
+            <a:avLst/>
+          </a:prstGeom>
+          <a:noFill/>
+        </p:spPr>
+        <p:txBody>
+          <a:bodyPr wrap="square" anchor="ctr" lIns="0" rIns="0" tIns="0" bIns="0">
+            <a:spAutoFit/>
+          </a:bodyPr>
+          <a:lstStyle/>
+          <a:p>
+            <a:pPr algn="l"/>
+            <a:r>
+              <a:rPr sz="3000" b="1" i="0">
+                <a:solidFill>
+                  <a:srgbClr val="EB6834"/>
+                </a:solidFill>
+                <a:latin typeface="Cambria"/>
+              </a:rPr>
+              <a:t>9-10 %</a:t>
+            </a:r>
+          </a:p>
+        </p:txBody>
+      </p:sp>
+      <p:sp>
+        <p:nvSpPr>
+          <p:cNvPr id="6" name="TextBox 5"/>
+          <p:cNvSpPr txBox="1"/>
+          <p:nvPr/>
+        </p:nvSpPr>
+        <p:spPr>
+          <a:xfrm>
+            <a:off x="2331720" y="2121408"/>
+            <a:ext cx="3474720" cy="960120"/>
+          </a:xfrm>
+          <a:prstGeom prst="rect">
+            <a:avLst/>
+          </a:prstGeom>
+          <a:noFill/>
+        </p:spPr>
+        <p:txBody>
+          <a:bodyPr wrap="square" anchor="ctr" lIns="0" rIns="0" tIns="0" bIns="0">
+            <a:spAutoFit/>
+          </a:bodyPr>
+          <a:lstStyle/>
+          <a:p>
+            <a:pPr algn="l"/>
+            <a:r>
+              <a:rPr sz="1400" b="0" i="0">
+                <a:solidFill>
+                  <a:srgbClr val="FFFFFF"/>
+                </a:solidFill>
+                <a:latin typeface="Calibri"/>
+              </a:rPr>
+              <a:t>error within a session from EMG + gait (mean baseline: 19-26 %)</a:t>
+            </a:r>
+          </a:p>
+        </p:txBody>
+      </p:sp>
+      <p:sp>
+        <p:nvSpPr>
+          <p:cNvPr id="7" name="Rounded Rectangle 6"/>
+          <p:cNvSpPr/>
+          <p:nvPr/>
+        </p:nvSpPr>
+        <p:spPr>
+          <a:xfrm>
+            <a:off x="6217920" y="1965960"/>
+            <a:ext cx="5440680" cy="1234440"/>
+          </a:xfrm>
+          <a:prstGeom prst="roundRect">
+            <a:avLst>
+              <a:gd name="adj" fmla="val 8000"/>
+            </a:avLst>
+          </a:prstGeom>
+          <a:solidFill>
+            <a:srgbClr val="1C2C45"/>
+          </a:solidFill>
+          <a:ln>
+            <a:noFill/>
+          </a:ln>
+          <a:effectLst/>
+        </p:spPr>
+        <p:style>
+          <a:lnRef idx="1">
+            <a:schemeClr val="accent1"/>
+          </a:lnRef>
+          <a:fillRef idx="3">
+            <a:schemeClr val="accent1"/>
+          </a:fillRef>
+          <a:effectRef idx="2">
+            <a:schemeClr val="accent1"/>
+          </a:effectRef>
+          <a:fontRef idx="minor">
+            <a:schemeClr val="lt1"/>
+          </a:fontRef>
+        </p:style>
+        <p:txBody>
+          <a:bodyPr rtlCol="0" anchor="ctr"/>
+          <a:lstStyle/>
+          <a:p>
+            <a:pPr algn="ctr"/>
+          </a:p>
+        </p:txBody>
+      </p:sp>
+      <p:sp>
+        <p:nvSpPr>
+          <p:cNvPr id="8" name="TextBox 7"/>
+          <p:cNvSpPr txBox="1"/>
+          <p:nvPr/>
+        </p:nvSpPr>
+        <p:spPr>
+          <a:xfrm>
+            <a:off x="6446520" y="2148840"/>
+            <a:ext cx="1463040" cy="822960"/>
+          </a:xfrm>
+          <a:prstGeom prst="rect">
+            <a:avLst/>
+          </a:prstGeom>
+          <a:noFill/>
+        </p:spPr>
+        <p:txBody>
+          <a:bodyPr wrap="square" anchor="ctr" lIns="0" rIns="0" tIns="0" bIns="0">
+            <a:spAutoFit/>
+          </a:bodyPr>
+          <a:lstStyle/>
+          <a:p>
+            <a:pPr algn="l"/>
+            <a:r>
+              <a:rPr sz="3000" b="1" i="0">
+                <a:solidFill>
+                  <a:srgbClr val="EB6834"/>
+                </a:solidFill>
+                <a:latin typeface="Cambria"/>
+              </a:rPr>
+              <a:t>2×</a:t>
+            </a:r>
+          </a:p>
+        </p:txBody>
+      </p:sp>
+      <p:sp>
+        <p:nvSpPr>
+          <p:cNvPr id="9" name="TextBox 8"/>
+          <p:cNvSpPr txBox="1"/>
+          <p:nvPr/>
+        </p:nvSpPr>
+        <p:spPr>
+          <a:xfrm>
+            <a:off x="8001000" y="2121408"/>
+            <a:ext cx="3474720" cy="960120"/>
+          </a:xfrm>
+          <a:prstGeom prst="rect">
+            <a:avLst/>
+          </a:prstGeom>
+          <a:noFill/>
+        </p:spPr>
+        <p:txBody>
+          <a:bodyPr wrap="square" anchor="ctr" lIns="0" rIns="0" tIns="0" bIns="0">
+            <a:spAutoFit/>
+          </a:bodyPr>
+          <a:lstStyle/>
+          <a:p>
+            <a:pPr algn="l"/>
+            <a:r>
+              <a:rPr sz="1400" b="0" i="0">
+                <a:solidFill>
+                  <a:srgbClr val="FFFFFF"/>
+                </a:solidFill>
+                <a:latin typeface="Calibri"/>
+              </a:rPr>
+              <a:t>error on a new day; 3 mask spot-checks cut S2's by 51 % on this small dataset</a:t>
+            </a:r>
+          </a:p>
+        </p:txBody>
+      </p:sp>
+      <p:sp>
+        <p:nvSpPr>
+          <p:cNvPr id="10" name="Rounded Rectangle 9"/>
+          <p:cNvSpPr/>
+          <p:nvPr/>
+        </p:nvSpPr>
+        <p:spPr>
+          <a:xfrm>
+            <a:off x="548640" y="3383280"/>
+            <a:ext cx="5440680" cy="1234440"/>
+          </a:xfrm>
+          <a:prstGeom prst="roundRect">
+            <a:avLst>
+              <a:gd name="adj" fmla="val 8000"/>
+            </a:avLst>
+          </a:prstGeom>
+          <a:solidFill>
+            <a:srgbClr val="1C2C45"/>
+          </a:solidFill>
+          <a:ln>
+            <a:noFill/>
+          </a:ln>
+          <a:effectLst/>
+        </p:spPr>
+        <p:style>
+          <a:lnRef idx="1">
+            <a:schemeClr val="accent1"/>
+          </a:lnRef>
+          <a:fillRef idx="3">
+            <a:schemeClr val="accent1"/>
+          </a:fillRef>
+          <a:effectRef idx="2">
+            <a:schemeClr val="accent1"/>
+          </a:effectRef>
+          <a:fontRef idx="minor">
+            <a:schemeClr val="lt1"/>
+          </a:fontRef>
+        </p:style>
+        <p:txBody>
+          <a:bodyPr rtlCol="0" anchor="ctr"/>
+          <a:lstStyle/>
+          <a:p>
+            <a:pPr algn="ctr"/>
+          </a:p>
+        </p:txBody>
+      </p:sp>
+      <p:sp>
+        <p:nvSpPr>
+          <p:cNvPr id="11" name="TextBox 10"/>
+          <p:cNvSpPr txBox="1"/>
+          <p:nvPr/>
+        </p:nvSpPr>
+        <p:spPr>
+          <a:xfrm>
+            <a:off x="777240" y="3566160"/>
+            <a:ext cx="1463040" cy="822960"/>
+          </a:xfrm>
+          <a:prstGeom prst="rect">
+            <a:avLst/>
+          </a:prstGeom>
+          <a:noFill/>
+        </p:spPr>
+        <p:txBody>
+          <a:bodyPr wrap="square" anchor="ctr" lIns="0" rIns="0" tIns="0" bIns="0">
+            <a:spAutoFit/>
+          </a:bodyPr>
+          <a:lstStyle/>
+          <a:p>
+            <a:pPr algn="l"/>
+            <a:r>
+              <a:rPr sz="3000" b="1" i="0">
+                <a:solidFill>
+                  <a:srgbClr val="EB6834"/>
+                </a:solidFill>
+                <a:latin typeface="Cambria"/>
+              </a:rPr>
+              <a:t>EMG</a:t>
+            </a:r>
+          </a:p>
+        </p:txBody>
+      </p:sp>
+      <p:sp>
+        <p:nvSpPr>
+          <p:cNvPr id="12" name="TextBox 11"/>
+          <p:cNvSpPr txBox="1"/>
+          <p:nvPr/>
+        </p:nvSpPr>
+        <p:spPr>
+          <a:xfrm>
+            <a:off x="2331720" y="3538728"/>
+            <a:ext cx="3474720" cy="960120"/>
+          </a:xfrm>
+          <a:prstGeom prst="rect">
+            <a:avLst/>
+          </a:prstGeom>
+          <a:noFill/>
+        </p:spPr>
+        <p:txBody>
+          <a:bodyPr wrap="square" anchor="ctr" lIns="0" rIns="0" tIns="0" bIns="0">
+            <a:spAutoFit/>
+          </a:bodyPr>
+          <a:lstStyle/>
+          <a:p>
+            <a:pPr algn="l"/>
+            <a:r>
+              <a:rPr sz="1400" b="0" i="0">
+                <a:solidFill>
+                  <a:srgbClr val="FFFFFF"/>
+                </a:solidFill>
+                <a:latin typeface="Calibri"/>
+              </a:rPr>
+              <a:t>is the key signal; 4 of 16 electrodes beat all 16 for S2, so cheaper hardware is possible</a:t>
+            </a:r>
+          </a:p>
+        </p:txBody>
+      </p:sp>
+      <p:sp>
+        <p:nvSpPr>
+          <p:cNvPr id="13" name="Rounded Rectangle 12"/>
+          <p:cNvSpPr/>
+          <p:nvPr/>
+        </p:nvSpPr>
+        <p:spPr>
+          <a:xfrm>
+            <a:off x="6217920" y="3383280"/>
+            <a:ext cx="5440680" cy="1234440"/>
+          </a:xfrm>
+          <a:prstGeom prst="roundRect">
+            <a:avLst>
+              <a:gd name="adj" fmla="val 8000"/>
+            </a:avLst>
+          </a:prstGeom>
+          <a:solidFill>
+            <a:srgbClr val="1C2C45"/>
+          </a:solidFill>
+          <a:ln>
+            <a:noFill/>
+          </a:ln>
+          <a:effectLst/>
+        </p:spPr>
+        <p:style>
+          <a:lnRef idx="1">
+            <a:schemeClr val="accent1"/>
+          </a:lnRef>
+          <a:fillRef idx="3">
+            <a:schemeClr val="accent1"/>
+          </a:fillRef>
+          <a:effectRef idx="2">
+            <a:schemeClr val="accent1"/>
+          </a:effectRef>
+          <a:fontRef idx="minor">
+            <a:schemeClr val="lt1"/>
+          </a:fontRef>
+        </p:style>
+        <p:txBody>
+          <a:bodyPr rtlCol="0" anchor="ctr"/>
+          <a:lstStyle/>
+          <a:p>
+            <a:pPr algn="ctr"/>
+          </a:p>
+        </p:txBody>
+      </p:sp>
+      <p:sp>
+        <p:nvSpPr>
+          <p:cNvPr id="14" name="TextBox 13"/>
+          <p:cNvSpPr txBox="1"/>
+          <p:nvPr/>
+        </p:nvSpPr>
+        <p:spPr>
+          <a:xfrm>
+            <a:off x="6446520" y="3566160"/>
+            <a:ext cx="1463040" cy="822960"/>
+          </a:xfrm>
+          <a:prstGeom prst="rect">
+            <a:avLst/>
+          </a:prstGeom>
+          <a:noFill/>
+        </p:spPr>
+        <p:txBody>
+          <a:bodyPr wrap="square" anchor="ctr" lIns="0" rIns="0" tIns="0" bIns="0">
+            <a:spAutoFit/>
+          </a:bodyPr>
+          <a:lstStyle/>
+          <a:p>
+            <a:pPr algn="l"/>
+            <a:r>
+              <a:rPr sz="3000" b="1" i="0">
+                <a:solidFill>
+                  <a:srgbClr val="EB6834"/>
+                </a:solidFill>
+                <a:latin typeface="Cambria"/>
+              </a:rPr>
+              <a:t>1 : 1</a:t>
+            </a:r>
+          </a:p>
+        </p:txBody>
+      </p:sp>
+      <p:sp>
+        <p:nvSpPr>
+          <p:cNvPr id="15" name="TextBox 14"/>
+          <p:cNvSpPr txBox="1"/>
+          <p:nvPr/>
+        </p:nvSpPr>
+        <p:spPr>
+          <a:xfrm>
+            <a:off x="8001000" y="3538728"/>
+            <a:ext cx="3474720" cy="960120"/>
+          </a:xfrm>
+          <a:prstGeom prst="rect">
+            <a:avLst/>
+          </a:prstGeom>
+          <a:noFill/>
+        </p:spPr>
+        <p:txBody>
+          <a:bodyPr wrap="square" anchor="ctr" lIns="0" rIns="0" tIns="0" bIns="0">
+            <a:spAutoFit/>
+          </a:bodyPr>
+          <a:lstStyle/>
+          <a:p>
+            <a:pPr algn="l"/>
+            <a:r>
+              <a:rPr sz="1400" b="0" i="0">
+                <a:solidFill>
+                  <a:srgbClr val="FFFFFF"/>
+                </a:solidFill>
+                <a:latin typeface="Calibri"/>
+              </a:rPr>
+              <a:t>models must be subject-specific; cross-person transfer is worse than the mean</a:t>
+            </a:r>
+          </a:p>
+        </p:txBody>
+      </p:sp>
+      <p:sp>
+        <p:nvSpPr>
+          <p:cNvPr id="16" name="TextBox 15"/>
+          <p:cNvSpPr txBox="1"/>
+          <p:nvPr/>
+        </p:nvSpPr>
+        <p:spPr>
+          <a:xfrm>
+            <a:off x="548640" y="4983480"/>
+            <a:ext cx="10972800" cy="365760"/>
+          </a:xfrm>
+          <a:prstGeom prst="rect">
+            <a:avLst/>
+          </a:prstGeom>
+          <a:noFill/>
+        </p:spPr>
+        <p:txBody>
+          <a:bodyPr wrap="square" anchor="t" lIns="0" rIns="0" tIns="0" bIns="0">
+            <a:spAutoFit/>
+          </a:bodyPr>
+          <a:lstStyle/>
+          <a:p>
+            <a:pPr algn="l"/>
+            <a:r>
+              <a:rPr sz="1700" b="1" i="0">
+                <a:solidFill>
+                  <a:srgbClr val="FFFFFF"/>
+                </a:solidFill>
+                <a:latin typeface="Calibri"/>
+              </a:rPr>
+              <a:t>Next steps</a:t>
+            </a:r>
+          </a:p>
+        </p:txBody>
+      </p:sp>
+      <p:sp>
+        <p:nvSpPr>
+          <p:cNvPr id="17" name="Rounded Rectangle 16"/>
+          <p:cNvSpPr/>
+          <p:nvPr/>
+        </p:nvSpPr>
+        <p:spPr>
+          <a:xfrm>
+            <a:off x="548640" y="5394960"/>
+            <a:ext cx="3520440" cy="822960"/>
+          </a:xfrm>
+          <a:prstGeom prst="roundRect">
+            <a:avLst>
+              <a:gd name="adj" fmla="val 8000"/>
+            </a:avLst>
+          </a:prstGeom>
+          <a:solidFill>
+            <a:srgbClr val="2A78D6"/>
+          </a:solidFill>
+          <a:ln>
+            <a:noFill/>
+          </a:ln>
+          <a:effectLst/>
+        </p:spPr>
+        <p:style>
+          <a:lnRef idx="1">
+            <a:schemeClr val="accent1"/>
+          </a:lnRef>
+          <a:fillRef idx="3">
+            <a:schemeClr val="accent1"/>
+          </a:fillRef>
+          <a:effectRef idx="2">
+            <a:schemeClr val="accent1"/>
+          </a:effectRef>
+          <a:fontRef idx="minor">
+            <a:schemeClr val="lt1"/>
+          </a:fontRef>
+        </p:style>
+        <p:txBody>
+          <a:bodyPr rtlCol="0" anchor="ctr"/>
+          <a:lstStyle/>
+          <a:p>
+            <a:pPr algn="ctr"/>
+          </a:p>
+        </p:txBody>
+      </p:sp>
+      <p:sp>
+        <p:nvSpPr>
+          <p:cNvPr id="18" name="TextBox 17"/>
+          <p:cNvSpPr txBox="1"/>
+          <p:nvPr/>
+        </p:nvSpPr>
+        <p:spPr>
+          <a:xfrm>
+            <a:off x="731520" y="5394960"/>
+            <a:ext cx="3154680" cy="822960"/>
+          </a:xfrm>
+          <a:prstGeom prst="rect">
+            <a:avLst/>
+          </a:prstGeom>
+          <a:noFill/>
+        </p:spPr>
+        <p:txBody>
+          <a:bodyPr wrap="square" anchor="ctr" lIns="0" rIns="0" tIns="0" bIns="0">
+            <a:spAutoFit/>
+          </a:bodyPr>
+          <a:lstStyle/>
+          <a:p>
+            <a:pPr algn="l"/>
+            <a:r>
+              <a:rPr sz="1400" b="0" i="0">
+                <a:solidFill>
+                  <a:srgbClr val="FFFFFF"/>
+                </a:solidFill>
+                <a:latin typeface="Calibri"/>
+              </a:rPr>
+              <a:t>Validate on more subjects, with anthropometrics + IMU</a:t>
+            </a:r>
+          </a:p>
+        </p:txBody>
+      </p:sp>
+      <p:sp>
+        <p:nvSpPr>
+          <p:cNvPr id="19" name="Rounded Rectangle 18"/>
+          <p:cNvSpPr/>
+          <p:nvPr/>
+        </p:nvSpPr>
+        <p:spPr>
+          <a:xfrm>
+            <a:off x="4297679" y="5394960"/>
+            <a:ext cx="3520440" cy="822960"/>
+          </a:xfrm>
+          <a:prstGeom prst="roundRect">
+            <a:avLst>
+              <a:gd name="adj" fmla="val 8000"/>
+            </a:avLst>
+          </a:prstGeom>
+          <a:solidFill>
+            <a:srgbClr val="2A78D6"/>
+          </a:solidFill>
+          <a:ln>
+            <a:noFill/>
+          </a:ln>
+          <a:effectLst/>
+        </p:spPr>
+        <p:style>
+          <a:lnRef idx="1">
+            <a:schemeClr val="accent1"/>
+          </a:lnRef>
+          <a:fillRef idx="3">
+            <a:schemeClr val="accent1"/>
+          </a:fillRef>
+          <a:effectRef idx="2">
+            <a:schemeClr val="accent1"/>
+          </a:effectRef>
+          <a:fontRef idx="minor">
+            <a:schemeClr val="lt1"/>
+          </a:fontRef>
+        </p:style>
+        <p:txBody>
+          <a:bodyPr rtlCol="0" anchor="ctr"/>
+          <a:lstStyle/>
+          <a:p>
+            <a:pPr algn="ctr"/>
+          </a:p>
+        </p:txBody>
+      </p:sp>
+      <p:sp>
+        <p:nvSpPr>
+          <p:cNvPr id="20" name="TextBox 19"/>
+          <p:cNvSpPr txBox="1"/>
+          <p:nvPr/>
+        </p:nvSpPr>
+        <p:spPr>
+          <a:xfrm>
+            <a:off x="4480559" y="5394960"/>
+            <a:ext cx="3154680" cy="822960"/>
+          </a:xfrm>
+          <a:prstGeom prst="rect">
+            <a:avLst/>
+          </a:prstGeom>
+          <a:noFill/>
+        </p:spPr>
+        <p:txBody>
+          <a:bodyPr wrap="square" anchor="ctr" lIns="0" rIns="0" tIns="0" bIns="0">
+            <a:spAutoFit/>
+          </a:bodyPr>
+          <a:lstStyle/>
+          <a:p>
+            <a:pPr algn="l"/>
+            <a:r>
+              <a:rPr sz="1400" b="0" i="0">
+                <a:solidFill>
+                  <a:srgbClr val="FFFFFF"/>
+                </a:solidFill>
+                <a:latin typeface="Calibri"/>
+              </a:rPr>
+              <a:t>Test spot-check calibration in real HILO sessions</a:t>
+            </a:r>
+          </a:p>
+        </p:txBody>
+      </p:sp>
+      <p:sp>
+        <p:nvSpPr>
+          <p:cNvPr id="21" name="Rounded Rectangle 20"/>
+          <p:cNvSpPr/>
+          <p:nvPr/>
+        </p:nvSpPr>
+        <p:spPr>
+          <a:xfrm>
+            <a:off x="8046719" y="5394960"/>
+            <a:ext cx="3520440" cy="822960"/>
+          </a:xfrm>
+          <a:prstGeom prst="roundRect">
+            <a:avLst>
+              <a:gd name="adj" fmla="val 8000"/>
+            </a:avLst>
+          </a:prstGeom>
+          <a:solidFill>
+            <a:srgbClr val="2A78D6"/>
+          </a:solidFill>
+          <a:ln>
+            <a:noFill/>
+          </a:ln>
+          <a:effectLst/>
+        </p:spPr>
+        <p:style>
+          <a:lnRef idx="1">
+            <a:schemeClr val="accent1"/>
+          </a:lnRef>
+          <a:fillRef idx="3">
+            <a:schemeClr val="accent1"/>
+          </a:fillRef>
+          <a:effectRef idx="2">
+            <a:schemeClr val="accent1"/>
+          </a:effectRef>
+          <a:fontRef idx="minor">
+            <a:schemeClr val="lt1"/>
+          </a:fontRef>
+        </p:style>
+        <p:txBody>
+          <a:bodyPr rtlCol="0" anchor="ctr"/>
+          <a:lstStyle/>
+          <a:p>
+            <a:pPr algn="ctr"/>
+          </a:p>
+        </p:txBody>
+      </p:sp>
+      <p:sp>
+        <p:nvSpPr>
+          <p:cNvPr id="22" name="TextBox 21"/>
+          <p:cNvSpPr txBox="1"/>
+          <p:nvPr/>
+        </p:nvSpPr>
+        <p:spPr>
+          <a:xfrm>
+            <a:off x="8229599" y="5394960"/>
+            <a:ext cx="3154680" cy="822960"/>
+          </a:xfrm>
+          <a:prstGeom prst="rect">
+            <a:avLst/>
+          </a:prstGeom>
+          <a:noFill/>
+        </p:spPr>
+        <p:txBody>
+          <a:bodyPr wrap="square" anchor="ctr" lIns="0" rIns="0" tIns="0" bIns="0">
+            <a:spAutoFit/>
+          </a:bodyPr>
+          <a:lstStyle/>
+          <a:p>
+            <a:pPr algn="l"/>
+            <a:r>
+              <a:rPr sz="1400" b="0" i="0">
+                <a:solidFill>
+                  <a:srgbClr val="FFFFFF"/>
+                </a:solidFill>
+                <a:latin typeface="Calibri"/>
+              </a:rPr>
+              <a:t>Use the surrogate as a prior inside CMA-ES / Bayesian optimisation</a:t>
+            </a:r>
+          </a:p>
+        </p:txBody>
+      </p:sp>
+    </p:spTree>
+  </p:cSld>
+  <p:clrMapOvr>
+    <a:masterClrMapping/>
+  </p:clrMapOvr>
+</p:sld>
+</file>
+
+<file path=ppt/slides/slide13.xml><?xml version="1.0" encoding="utf-8"?>
+<p:sld xmlns:a="http://schemas.openxmlformats.org/drawingml/2006/main" xmlns:p="http://schemas.openxmlformats.org/presentationml/2006/main" xmlns:r="http://schemas.openxmlformats.org/officeDocument/2006/relationships">
+  <p:cSld>
+    <p:bg>
+      <p:bgPr>
+        <a:solidFill>
+          <a:srgbClr val="0F1B2D"/>
+        </a:solidFill>
+        <a:effectLst/>
+      </p:bgPr>
+    </p:bg>
+    <p:spTree>
+      <p:nvGrpSpPr>
+        <p:cNvPr id="1" name=""/>
+        <p:cNvGrpSpPr/>
+        <p:nvPr/>
+      </p:nvGrpSpPr>
+      <p:grpSpPr/>
+      <p:sp>
+        <p:nvSpPr>
+          <p:cNvPr id="2" name="TextBox 1"/>
+          <p:cNvSpPr txBox="1"/>
+          <p:nvPr/>
+        </p:nvSpPr>
+        <p:spPr>
+          <a:xfrm>
+            <a:off x="548640" y="1097280"/>
+            <a:ext cx="10972800" cy="914400"/>
+          </a:xfrm>
+          <a:prstGeom prst="rect">
+            <a:avLst/>
+          </a:prstGeom>
+          <a:noFill/>
+        </p:spPr>
+        <p:txBody>
+          <a:bodyPr wrap="square" anchor="t" lIns="0" rIns="0" tIns="0" bIns="0">
+            <a:spAutoFit/>
+          </a:bodyPr>
+          <a:lstStyle/>
+          <a:p>
+            <a:pPr algn="l"/>
+            <a:r>
+              <a:rPr sz="4400" b="1" i="0">
+                <a:solidFill>
+                  <a:srgbClr val="FFFFFF"/>
+                </a:solidFill>
+                <a:latin typeface="Cambria"/>
+              </a:rPr>
+              <a:t>Thank you, questions?</a:t>
+            </a:r>
+          </a:p>
+        </p:txBody>
+      </p:sp>
+      <p:sp>
+        <p:nvSpPr>
+          <p:cNvPr id="3" name="TextBox 2"/>
+          <p:cNvSpPr txBox="1"/>
+          <p:nvPr/>
+        </p:nvSpPr>
+        <p:spPr>
+          <a:xfrm>
+            <a:off x="548640" y="2148840"/>
+            <a:ext cx="10972800" cy="457200"/>
+          </a:xfrm>
+          <a:prstGeom prst="rect">
+            <a:avLst/>
+          </a:prstGeom>
+          <a:noFill/>
+        </p:spPr>
+        <p:txBody>
+          <a:bodyPr wrap="square" anchor="t" lIns="0" rIns="0" tIns="0" bIns="0">
+            <a:spAutoFit/>
+          </a:bodyPr>
+          <a:lstStyle/>
+          <a:p>
+            <a:pPr algn="l"/>
+            <a:r>
+              <a:rPr sz="1700" b="0" i="0">
+                <a:solidFill>
+                  <a:srgbClr val="BFD4F2"/>
+                </a:solidFill>
+                <a:latin typeface="Calibri"/>
+              </a:rPr>
+              <a:t>Code, data, figures and the 2-page write-up are in the private GitHub repository.</a:t>
+            </a:r>
+          </a:p>
+        </p:txBody>
+      </p:sp>
+      <p:sp>
+        <p:nvSpPr>
+          <p:cNvPr id="4" name="TextBox 3"/>
+          <p:cNvSpPr txBox="1"/>
+          <p:nvPr/>
+        </p:nvSpPr>
+        <p:spPr>
+          <a:xfrm>
+            <a:off x="548640" y="3291840"/>
+            <a:ext cx="10972800" cy="914400"/>
+          </a:xfrm>
+          <a:prstGeom prst="rect">
+            <a:avLst/>
+          </a:prstGeom>
+          <a:noFill/>
+        </p:spPr>
+        <p:txBody>
+          <a:bodyPr wrap="square" anchor="t" lIns="0" rIns="0" tIns="0" bIns="0">
+            <a:spAutoFit/>
+          </a:bodyPr>
+          <a:lstStyle/>
+          <a:p>
+            <a:pPr algn="l">
+              <a:spcAft>
+                <a:spcPts val="800"/>
+              </a:spcAft>
+            </a:pPr>
+            <a:r>
+              <a:rPr sz="2000" b="1" i="0">
+                <a:solidFill>
+                  <a:srgbClr val="FFFFFF"/>
+                </a:solidFill>
+                <a:latin typeface="Calibri"/>
+              </a:rPr>
+              <a:t>Mukil Skanda A</a:t>
+            </a:r>
+            <a:r>
+              <a:rPr sz="2000" b="0" i="0">
+                <a:solidFill>
+                  <a:srgbClr val="BFD4F2"/>
+                </a:solidFill>
+                <a:latin typeface="Calibri"/>
+              </a:rPr>
+              <a:t>  ·  PES1UG24CS281</a:t>
+            </a:r>
+          </a:p>
+          <a:p>
+            <a:pPr algn="l">
+              <a:spcAft>
+                <a:spcPts val="800"/>
+              </a:spcAft>
+            </a:pPr>
+            <a:r>
+              <a:rPr sz="2000" b="1" i="0">
+                <a:solidFill>
+                  <a:srgbClr val="FFFFFF"/>
+                </a:solidFill>
+                <a:latin typeface="Calibri"/>
+              </a:rPr>
+              <a:t>Likhith M</a:t>
+            </a:r>
+            <a:r>
+              <a:rPr sz="2000" b="0" i="0">
+                <a:solidFill>
+                  <a:srgbClr val="BFD4F2"/>
+                </a:solidFill>
+                <a:latin typeface="Calibri"/>
+              </a:rPr>
+              <a:t>  ·  PES1UG24CS282</a:t>
+            </a:r>
+          </a:p>
+        </p:txBody>
+      </p:sp>
+      <p:sp>
+        <p:nvSpPr>
+          <p:cNvPr id="5" name="TextBox 4"/>
+          <p:cNvSpPr txBox="1"/>
+          <p:nvPr/>
+        </p:nvSpPr>
+        <p:spPr>
+          <a:xfrm>
+            <a:off x="548640" y="5760720"/>
+            <a:ext cx="10972800" cy="548640"/>
+          </a:xfrm>
+          <a:prstGeom prst="rect">
+            <a:avLst/>
+          </a:prstGeom>
+          <a:noFill/>
+        </p:spPr>
+        <p:txBody>
+          <a:bodyPr wrap="square" anchor="t" lIns="0" rIns="0" tIns="0" bIns="0">
+            <a:spAutoFit/>
+          </a:bodyPr>
+          <a:lstStyle/>
+          <a:p>
+            <a:pPr algn="l"/>
+            <a:r>
+              <a:rPr sz="1200" b="0" i="0">
+                <a:solidFill>
+                  <a:srgbClr val="BFD4F2"/>
+                </a:solidFill>
+                <a:latin typeface="Calibri"/>
+              </a:rPr>
+              <a:t>Ref: Krimsky &amp; Ng, CS229 2018 · Zhang et al., Science 2017 · MacKay 1992 · Rasmussen &amp; Williams 2006</a:t>
+            </a:r>
+          </a:p>
+        </p:txBody>
+      </p:sp>
+    </p:spTree>
+  </p:cSld>
+  <p:clrMapOvr>
+    <a:masterClrMapping/>
+  </p:clrMapOvr>
+</p:sld>
+</file>
+
+<file path=ppt/slides/slide14.xml><?xml version="1.0" encoding="utf-8"?>
 <p:sld xmlns:a="http://schemas.openxmlformats.org/drawingml/2006/main" xmlns:p="http://schemas.openxmlformats.org/presentationml/2006/main" xmlns:r="http://schemas.openxmlformats.org/officeDocument/2006/relationships">
   <p:cSld>
     <p:bg>
@@ -5655,7 +7303,7 @@
                 </a:solidFill>
                 <a:latin typeface="Calibri"/>
               </a:rPr>
-              <a:t>IMPROVEMENTS</a:t>
+              <a:t>BACKUP · DEEPER ANALYSIS</a:t>
             </a:r>
           </a:p>
         </p:txBody>
@@ -5690,7 +7338,7 @@
                 </a:solidFill>
                 <a:latin typeface="Cambria"/>
               </a:rPr>
-              <a:t>Fixing the weaknesses, without collecting new data</a:t>
+              <a:t>Why PCA failed, and why one model cannot fit everyone</a:t>
             </a:r>
           </a:p>
         </p:txBody>
@@ -5760,14 +7408,14 @@
                 </a:solidFill>
                 <a:latin typeface="Calibri"/>
               </a:rPr>
-              <a:t>12</a:t>
+              <a:t>14</a:t>
             </a:r>
           </a:p>
         </p:txBody>
       </p:sp>
       <p:pic>
         <p:nvPicPr>
-          <p:cNvPr id="6" name="Picture 5" descr="F14_day_calibration.png"/>
+          <p:cNvPr id="6" name="Picture 5" descr="F9_dimensionality_reduction.png"/>
           <p:cNvPicPr>
             <a:picLocks noChangeAspect="1"/>
           </p:cNvPicPr>
@@ -5781,8 +7429,8 @@
         </p:blipFill>
         <p:spPr>
           <a:xfrm>
-            <a:off x="457200" y="1691640"/>
-            <a:ext cx="5715000" cy="2286000"/>
+            <a:off x="457200" y="1837943"/>
+            <a:ext cx="5669280" cy="2267712"/>
           </a:xfrm>
           <a:prstGeom prst="rect">
             <a:avLst/>
@@ -5791,7 +7439,7 @@
       </p:pic>
       <p:pic>
         <p:nvPicPr>
-          <p:cNvPr id="7" name="Picture 6" descr="F15_sensor_reduction.png"/>
+          <p:cNvPr id="7" name="Picture 6" descr="F12_cross_subject.png"/>
           <p:cNvPicPr>
             <a:picLocks noChangeAspect="1"/>
           </p:cNvPicPr>
@@ -5805,8 +7453,8 @@
         </p:blipFill>
         <p:spPr>
           <a:xfrm>
-            <a:off x="6172200" y="1719072"/>
-            <a:ext cx="5577840" cy="2231136"/>
+            <a:off x="6309360" y="1623060"/>
+            <a:ext cx="5394960" cy="2697480"/>
           </a:xfrm>
           <a:prstGeom prst="rect">
             <a:avLst/>
@@ -5821,8 +7469,8 @@
         </p:nvSpPr>
         <p:spPr>
           <a:xfrm>
-            <a:off x="548640" y="4526280"/>
-            <a:ext cx="3566160" cy="1417320"/>
+            <a:off x="548640" y="4754880"/>
+            <a:ext cx="5440680" cy="1463040"/>
           </a:xfrm>
           <a:prstGeom prst="roundRect">
             <a:avLst>
@@ -5867,8 +7515,8 @@
         </p:nvSpPr>
         <p:spPr>
           <a:xfrm>
-            <a:off x="777240" y="4690872"/>
-            <a:ext cx="3108960" cy="685800"/>
+            <a:off x="777240" y="4873752"/>
+            <a:ext cx="5029200" cy="1280160"/>
           </a:xfrm>
           <a:prstGeom prst="rect">
             <a:avLst/>
@@ -5881,64 +7529,49 @@
           </a:bodyPr>
           <a:lstStyle/>
           <a:p>
-            <a:pPr algn="l"/>
-            <a:r>
-              <a:rPr sz="3400" b="1" i="0">
-                <a:solidFill>
-                  <a:srgbClr val="EB6834"/>
-                </a:solidFill>
-                <a:latin typeface="Cambria"/>
-              </a:rPr>
-              <a:t>−51 %</a:t>
-            </a:r>
-          </a:p>
-        </p:txBody>
-      </p:sp>
-      <p:sp>
-        <p:nvSpPr>
-          <p:cNvPr id="10" name="TextBox 9"/>
-          <p:cNvSpPr txBox="1"/>
-          <p:nvPr/>
-        </p:nvSpPr>
-        <p:spPr>
-          <a:xfrm>
-            <a:off x="777240" y="5394960"/>
-            <a:ext cx="3108960" cy="502920"/>
-          </a:xfrm>
-          <a:prstGeom prst="rect">
-            <a:avLst/>
-          </a:prstGeom>
-          <a:noFill/>
-        </p:spPr>
-        <p:txBody>
-          <a:bodyPr wrap="square" anchor="t" lIns="0" rIns="0" tIns="0" bIns="0">
-            <a:spAutoFit/>
-          </a:bodyPr>
-          <a:lstStyle/>
-          <a:p>
-            <a:pPr algn="l"/>
-            <a:r>
-              <a:rPr sz="1300" b="0" i="0">
+            <a:pPr algn="l">
+              <a:spcAft>
+                <a:spcPts val="400"/>
+              </a:spcAft>
+            </a:pPr>
+            <a:r>
+              <a:rPr sz="1700" b="1" i="0">
+                <a:solidFill>
+                  <a:srgbClr val="0F1B2D"/>
+                </a:solidFill>
+                <a:latin typeface="Calibri"/>
+              </a:rPr>
+              <a:t>Supervised &gt; unsupervised</a:t>
+            </a:r>
+          </a:p>
+          <a:p>
+            <a:pPr algn="l">
+              <a:spcAft>
+                <a:spcPts val="400"/>
+              </a:spcAft>
+            </a:pPr>
+            <a:r>
+              <a:rPr sz="1400" b="0" i="0">
                 <a:solidFill>
                   <a:srgbClr val="555B66"/>
                 </a:solidFill>
                 <a:latin typeface="Calibri"/>
               </a:rPr>
-              <a:t>S2 unseen-day error with just 3 of 36 mask spot-checks (GP 0.046 → 0.022)</a:t>
-            </a:r>
-          </a:p>
-        </p:txBody>
-      </p:sp>
-      <p:sp>
-        <p:nvSpPr>
-          <p:cNvPr id="11" name="Rounded Rectangle 10"/>
+              <a:t>1 PLS component (0.0138) = 8 PCA components on S2. Forward selection is greedy and unstable.</a:t>
+            </a:r>
+          </a:p>
+        </p:txBody>
+      </p:sp>
+      <p:sp>
+        <p:nvSpPr>
+          <p:cNvPr id="10" name="Rounded Rectangle 9"/>
           <p:cNvSpPr/>
           <p:nvPr/>
         </p:nvSpPr>
         <p:spPr>
           <a:xfrm>
-            <a:off x="4315968" y="4526280"/>
-            <a:ext cx="3566160" cy="1417320"/>
+            <a:off x="6309360" y="4754880"/>
+            <a:ext cx="5349240" cy="1463040"/>
           </a:xfrm>
           <a:prstGeom prst="roundRect">
             <a:avLst>
@@ -5977,14 +7610,14 @@
       </p:sp>
       <p:sp>
         <p:nvSpPr>
-          <p:cNvPr id="12" name="TextBox 11"/>
-          <p:cNvSpPr txBox="1"/>
-          <p:nvPr/>
-        </p:nvSpPr>
-        <p:spPr>
-          <a:xfrm>
-            <a:off x="4544568" y="4690872"/>
-            <a:ext cx="3108960" cy="685800"/>
+          <p:cNvPr id="11" name="TextBox 10"/>
+          <p:cNvSpPr txBox="1"/>
+          <p:nvPr/>
+        </p:nvSpPr>
+        <p:spPr>
+          <a:xfrm>
+            <a:off x="6537960" y="4873752"/>
+            <a:ext cx="4937760" cy="1280160"/>
           </a:xfrm>
           <a:prstGeom prst="rect">
             <a:avLst/>
@@ -5997,166 +7630,35 @@
           </a:bodyPr>
           <a:lstStyle/>
           <a:p>
-            <a:pPr algn="l"/>
-            <a:r>
-              <a:rPr sz="2400" b="1" i="0">
+            <a:pPr algn="l">
+              <a:spcAft>
+                <a:spcPts val="400"/>
+              </a:spcAft>
+            </a:pPr>
+            <a:r>
+              <a:rPr sz="1700" b="1" i="0">
                 <a:solidFill>
                   <a:srgbClr val="0F1B2D"/>
                 </a:solidFill>
-                <a:latin typeface="Cambria"/>
-              </a:rPr>
-              <a:t>w = k/(k+σ²/τ²)</a:t>
-            </a:r>
-          </a:p>
-        </p:txBody>
-      </p:sp>
-      <p:sp>
-        <p:nvSpPr>
-          <p:cNvPr id="13" name="TextBox 12"/>
-          <p:cNvSpPr txBox="1"/>
-          <p:nvPr/>
-        </p:nvSpPr>
-        <p:spPr>
-          <a:xfrm>
-            <a:off x="4544568" y="5394960"/>
-            <a:ext cx="3108960" cy="502920"/>
-          </a:xfrm>
-          <a:prstGeom prst="rect">
-            <a:avLst/>
-          </a:prstGeom>
-          <a:noFill/>
-        </p:spPr>
-        <p:txBody>
-          <a:bodyPr wrap="square" anchor="t" lIns="0" rIns="0" tIns="0" bIns="0">
-            <a:spAutoFit/>
-          </a:bodyPr>
-          <a:lstStyle/>
-          <a:p>
-            <a:pPr algn="l"/>
-            <a:r>
-              <a:rPr sz="1300" b="0" i="0">
+                <a:latin typeface="Calibri"/>
+              </a:rPr>
+              <a:t>People are different</a:t>
+            </a:r>
+          </a:p>
+          <a:p>
+            <a:pPr algn="l">
+              <a:spcAft>
+                <a:spcPts val="400"/>
+              </a:spcAft>
+            </a:pPr>
+            <a:r>
+              <a:rPr sz="1400" b="0" i="0">
                 <a:solidFill>
                   <a:srgbClr val="555B66"/>
                 </a:solidFill>
                 <a:latin typeface="Calibri"/>
               </a:rPr>
-              <a:t>empirical-Bayes shrinkage: trusts calibration only as much as the training days justify</a:t>
-            </a:r>
-          </a:p>
-        </p:txBody>
-      </p:sp>
-      <p:sp>
-        <p:nvSpPr>
-          <p:cNvPr id="14" name="Rounded Rectangle 13"/>
-          <p:cNvSpPr/>
-          <p:nvPr/>
-        </p:nvSpPr>
-        <p:spPr>
-          <a:xfrm>
-            <a:off x="8092440" y="4526280"/>
-            <a:ext cx="3566160" cy="1417320"/>
-          </a:xfrm>
-          <a:prstGeom prst="roundRect">
-            <a:avLst>
-              <a:gd name="adj" fmla="val 8000"/>
-            </a:avLst>
-          </a:prstGeom>
-          <a:solidFill>
-            <a:srgbClr val="F1F5FB"/>
-          </a:solidFill>
-          <a:ln>
-            <a:noFill/>
-          </a:ln>
-          <a:effectLst/>
-        </p:spPr>
-        <p:style>
-          <a:lnRef idx="1">
-            <a:schemeClr val="accent1"/>
-          </a:lnRef>
-          <a:fillRef idx="3">
-            <a:schemeClr val="accent1"/>
-          </a:fillRef>
-          <a:effectRef idx="2">
-            <a:schemeClr val="accent1"/>
-          </a:effectRef>
-          <a:fontRef idx="minor">
-            <a:schemeClr val="lt1"/>
-          </a:fontRef>
-        </p:style>
-        <p:txBody>
-          <a:bodyPr rtlCol="0" anchor="ctr"/>
-          <a:lstStyle/>
-          <a:p>
-            <a:pPr algn="ctr"/>
-          </a:p>
-        </p:txBody>
-      </p:sp>
-      <p:sp>
-        <p:nvSpPr>
-          <p:cNvPr id="15" name="TextBox 14"/>
-          <p:cNvSpPr txBox="1"/>
-          <p:nvPr/>
-        </p:nvSpPr>
-        <p:spPr>
-          <a:xfrm>
-            <a:off x="8321040" y="4690872"/>
-            <a:ext cx="3108960" cy="685800"/>
-          </a:xfrm>
-          <a:prstGeom prst="rect">
-            <a:avLst/>
-          </a:prstGeom>
-          <a:noFill/>
-        </p:spPr>
-        <p:txBody>
-          <a:bodyPr wrap="square" anchor="t" lIns="0" rIns="0" tIns="0" bIns="0">
-            <a:spAutoFit/>
-          </a:bodyPr>
-          <a:lstStyle/>
-          <a:p>
-            <a:pPr algn="l"/>
-            <a:r>
-              <a:rPr sz="3400" b="1" i="0">
-                <a:solidFill>
-                  <a:srgbClr val="1BAF7A"/>
-                </a:solidFill>
-                <a:latin typeface="Cambria"/>
-              </a:rPr>
-              <a:t>4 of 16</a:t>
-            </a:r>
-          </a:p>
-        </p:txBody>
-      </p:sp>
-      <p:sp>
-        <p:nvSpPr>
-          <p:cNvPr id="16" name="TextBox 15"/>
-          <p:cNvSpPr txBox="1"/>
-          <p:nvPr/>
-        </p:nvSpPr>
-        <p:spPr>
-          <a:xfrm>
-            <a:off x="8321040" y="5394960"/>
-            <a:ext cx="3108960" cy="502920"/>
-          </a:xfrm>
-          <a:prstGeom prst="rect">
-            <a:avLst/>
-          </a:prstGeom>
-          <a:noFill/>
-        </p:spPr>
-        <p:txBody>
-          <a:bodyPr wrap="square" anchor="t" lIns="0" rIns="0" tIns="0" bIns="0">
-            <a:spAutoFit/>
-          </a:bodyPr>
-          <a:lstStyle/>
-          <a:p>
-            <a:pPr algn="l"/>
-            <a:r>
-              <a:rPr sz="1300" b="0" i="0">
-                <a:solidFill>
-                  <a:srgbClr val="555B66"/>
-                </a:solidFill>
-                <a:latin typeface="Calibri"/>
-              </a:rPr>
-              <a:t>EMG electrodes beat all 16 for S2 (unseen-day Ridge 0.036 → 0.024)</a:t>
+              <a:t>S1 → S2: MSE 0.152 vs 0.036 for the mean. Per-subject z-scoring → 0.046. Personal models are needed.</a:t>
             </a:r>
           </a:p>
         </p:txBody>
@@ -6169,7 +7671,7 @@
 </p:sld>
 </file>
 
-<file path=ppt/slides/slide13.xml><?xml version="1.0" encoding="utf-8"?>
+<file path=ppt/slides/slide15.xml><?xml version="1.0" encoding="utf-8"?>
 <p:sld xmlns:a="http://schemas.openxmlformats.org/drawingml/2006/main" xmlns:p="http://schemas.openxmlformats.org/presentationml/2006/main" xmlns:r="http://schemas.openxmlformats.org/officeDocument/2006/relationships">
   <p:cSld>
     <p:bg>
@@ -6217,7 +7719,7 @@
                 </a:solidFill>
                 <a:latin typeface="Calibri"/>
               </a:rPr>
-              <a:t>DEMO</a:t>
+              <a:t>BACKUP · RELIABILITY</a:t>
             </a:r>
           </a:p>
         </p:txBody>
@@ -6252,7 +7754,7 @@
                 </a:solidFill>
                 <a:latin typeface="Cambria"/>
               </a:rPr>
-              <a:t>Live demo: the code, running</a:t>
+              <a:t>The model knows when it is unsure, and more data would help</a:t>
             </a:r>
           </a:p>
         </p:txBody>
@@ -6322,31 +7824,82 @@
                 </a:solidFill>
                 <a:latin typeface="Calibri"/>
               </a:rPr>
-              <a:t>13</a:t>
-            </a:r>
-          </a:p>
-        </p:txBody>
-      </p:sp>
-      <p:sp>
-        <p:nvSpPr>
-          <p:cNvPr id="6" name="Oval 5"/>
+              <a:t>15</a:t>
+            </a:r>
+          </a:p>
+        </p:txBody>
+      </p:sp>
+      <p:pic>
+        <p:nvPicPr>
+          <p:cNvPr id="6" name="Picture 5" descr="F11_calibration.png"/>
+          <p:cNvPicPr>
+            <a:picLocks noChangeAspect="1"/>
+          </p:cNvPicPr>
+          <p:nvPr/>
+        </p:nvPicPr>
+        <p:blipFill>
+          <a:blip r:embed="rId3"/>
+          <a:stretch>
+            <a:fillRect/>
+          </a:stretch>
+        </p:blipFill>
+        <p:spPr>
+          <a:xfrm>
+            <a:off x="728197" y="1371600"/>
+            <a:ext cx="3664245" cy="3429000"/>
+          </a:xfrm>
+          <a:prstGeom prst="rect">
+            <a:avLst/>
+          </a:prstGeom>
+        </p:spPr>
+      </p:pic>
+      <p:pic>
+        <p:nvPicPr>
+          <p:cNvPr id="7" name="Picture 6" descr="F10_learning_curve.png"/>
+          <p:cNvPicPr>
+            <a:picLocks noChangeAspect="1"/>
+          </p:cNvPicPr>
+          <p:nvPr/>
+        </p:nvPicPr>
+        <p:blipFill>
+          <a:blip r:embed="rId4"/>
+          <a:stretch>
+            <a:fillRect/>
+          </a:stretch>
+        </p:blipFill>
+        <p:spPr>
+          <a:xfrm>
+            <a:off x="4754880" y="1696212"/>
+            <a:ext cx="6949440" cy="2779776"/>
+          </a:xfrm>
+          <a:prstGeom prst="rect">
+            <a:avLst/>
+          </a:prstGeom>
+        </p:spPr>
+      </p:pic>
+      <p:sp>
+        <p:nvSpPr>
+          <p:cNvPr id="8" name="Rounded Rectangle 7"/>
           <p:cNvSpPr/>
           <p:nvPr/>
         </p:nvSpPr>
         <p:spPr>
           <a:xfrm>
-            <a:off x="548640" y="1508760"/>
-            <a:ext cx="457200" cy="457200"/>
-          </a:xfrm>
-          <a:prstGeom prst="ellipse">
-            <a:avLst/>
+            <a:off x="548640" y="4983480"/>
+            <a:ext cx="4023360" cy="1417320"/>
+          </a:xfrm>
+          <a:prstGeom prst="roundRect">
+            <a:avLst>
+              <a:gd name="adj" fmla="val 8000"/>
+            </a:avLst>
           </a:prstGeom>
           <a:solidFill>
-            <a:srgbClr val="2A78D6"/>
+            <a:srgbClr val="F1F5FB"/>
           </a:solidFill>
           <a:ln>
             <a:noFill/>
           </a:ln>
+          <a:effectLst/>
         </p:spPr>
         <p:style>
           <a:lnRef idx="1">
@@ -6363,32 +7916,23 @@
           </a:fontRef>
         </p:style>
         <p:txBody>
-          <a:bodyPr rtlCol="0" anchor="ctr" lIns="0" rIns="0" tIns="0" bIns="0"/>
+          <a:bodyPr rtlCol="0" anchor="ctr"/>
           <a:lstStyle/>
           <a:p>
             <a:pPr algn="ctr"/>
-            <a:r>
-              <a:rPr sz="1600" b="1">
-                <a:solidFill>
-                  <a:srgbClr val="FFFFFF"/>
-                </a:solidFill>
-                <a:latin typeface="Calibri"/>
-              </a:rPr>
-              <a:t>1</a:t>
-            </a:r>
-          </a:p>
-        </p:txBody>
-      </p:sp>
-      <p:sp>
-        <p:nvSpPr>
-          <p:cNvPr id="7" name="TextBox 6"/>
-          <p:cNvSpPr txBox="1"/>
-          <p:nvPr/>
-        </p:nvSpPr>
-        <p:spPr>
-          <a:xfrm>
-            <a:off x="1143000" y="1554480"/>
-            <a:ext cx="2926080" cy="411480"/>
+          </a:p>
+        </p:txBody>
+      </p:sp>
+      <p:sp>
+        <p:nvSpPr>
+          <p:cNvPr id="9" name="TextBox 8"/>
+          <p:cNvSpPr txBox="1"/>
+          <p:nvPr/>
+        </p:nvSpPr>
+        <p:spPr>
+          <a:xfrm>
+            <a:off x="777240" y="5148072"/>
+            <a:ext cx="3566160" cy="685800"/>
           </a:xfrm>
           <a:prstGeom prst="rect">
             <a:avLst/>
@@ -6403,35 +7947,70 @@
           <a:p>
             <a:pPr algn="l"/>
             <a:r>
-              <a:rPr sz="1700" b="1" i="0">
-                <a:solidFill>
-                  <a:srgbClr val="0F1B2D"/>
-                </a:solidFill>
-                <a:latin typeface="Calibri"/>
-              </a:rPr>
-              <a:t>Paper reproduction</a:t>
-            </a:r>
-          </a:p>
-        </p:txBody>
-      </p:sp>
-      <p:sp>
-        <p:nvSpPr>
-          <p:cNvPr id="8" name="Rounded Rectangle 7"/>
+              <a:rPr sz="3200" b="1" i="0">
+                <a:solidFill>
+                  <a:srgbClr val="1BAF7A"/>
+                </a:solidFill>
+                <a:latin typeface="Cambria"/>
+              </a:rPr>
+              <a:t>94 %</a:t>
+            </a:r>
+          </a:p>
+        </p:txBody>
+      </p:sp>
+      <p:sp>
+        <p:nvSpPr>
+          <p:cNvPr id="10" name="TextBox 9"/>
+          <p:cNvSpPr txBox="1"/>
+          <p:nvPr/>
+        </p:nvSpPr>
+        <p:spPr>
+          <a:xfrm>
+            <a:off x="777240" y="5852160"/>
+            <a:ext cx="3566160" cy="502920"/>
+          </a:xfrm>
+          <a:prstGeom prst="rect">
+            <a:avLst/>
+          </a:prstGeom>
+          <a:noFill/>
+        </p:spPr>
+        <p:txBody>
+          <a:bodyPr wrap="square" anchor="t" lIns="0" rIns="0" tIns="0" bIns="0">
+            <a:spAutoFit/>
+          </a:bodyPr>
+          <a:lstStyle/>
+          <a:p>
+            <a:pPr algn="l"/>
+            <a:r>
+              <a:rPr sz="1300" b="0" i="0">
+                <a:solidFill>
+                  <a:srgbClr val="555B66"/>
+                </a:solidFill>
+                <a:latin typeface="Calibri"/>
+              </a:rPr>
+              <a:t>of unseen-day points inside the S1 95 % interval</a:t>
+            </a:r>
+          </a:p>
+        </p:txBody>
+      </p:sp>
+      <p:sp>
+        <p:nvSpPr>
+          <p:cNvPr id="11" name="Rounded Rectangle 10"/>
           <p:cNvSpPr/>
           <p:nvPr/>
         </p:nvSpPr>
         <p:spPr>
           <a:xfrm>
-            <a:off x="548640" y="2148840"/>
-            <a:ext cx="3520440" cy="3566160"/>
+            <a:off x="4754880" y="4983480"/>
+            <a:ext cx="6903720" cy="1417320"/>
           </a:xfrm>
           <a:prstGeom prst="roundRect">
             <a:avLst>
-              <a:gd name="adj" fmla="val 5000"/>
+              <a:gd name="adj" fmla="val 8000"/>
             </a:avLst>
           </a:prstGeom>
           <a:solidFill>
-            <a:srgbClr val="0F1B2D"/>
+            <a:srgbClr val="F1F5FB"/>
           </a:solidFill>
           <a:ln>
             <a:noFill/>
@@ -6462,14 +8041,14 @@
       </p:sp>
       <p:sp>
         <p:nvSpPr>
-          <p:cNvPr id="9" name="TextBox 8"/>
-          <p:cNvSpPr txBox="1"/>
-          <p:nvPr/>
-        </p:nvSpPr>
-        <p:spPr>
-          <a:xfrm>
-            <a:off x="731520" y="2286000"/>
-            <a:ext cx="3200400" cy="822960"/>
+          <p:cNvPr id="12" name="TextBox 11"/>
+          <p:cNvSpPr txBox="1"/>
+          <p:nvPr/>
+        </p:nvSpPr>
+        <p:spPr>
+          <a:xfrm>
+            <a:off x="4983480" y="5148072"/>
+            <a:ext cx="6446520" cy="685800"/>
           </a:xfrm>
           <a:prstGeom prst="rect">
             <a:avLst/>
@@ -6484,27 +8063,27 @@
           <a:p>
             <a:pPr algn="l"/>
             <a:r>
-              <a:rPr sz="1200" b="0" i="0">
-                <a:solidFill>
-                  <a:srgbClr val="BFD4F2"/>
-                </a:solidFill>
-                <a:latin typeface="Courier New"/>
-              </a:rPr>
-              <a:t>$ python paper_reproduction/lin_reg_test.py</a:t>
-            </a:r>
-          </a:p>
-        </p:txBody>
-      </p:sp>
-      <p:sp>
-        <p:nvSpPr>
-          <p:cNvPr id="10" name="TextBox 9"/>
-          <p:cNvSpPr txBox="1"/>
-          <p:nvPr/>
-        </p:nvSpPr>
-        <p:spPr>
-          <a:xfrm>
-            <a:off x="731520" y="3154680"/>
-            <a:ext cx="3200400" cy="2468880"/>
+              <a:rPr sz="3200" b="1" i="0">
+                <a:solidFill>
+                  <a:srgbClr val="1BAF7A"/>
+                </a:solidFill>
+                <a:latin typeface="Cambria"/>
+              </a:rPr>
+              <a:t>0.0155 → 0.0088</a:t>
+            </a:r>
+          </a:p>
+        </p:txBody>
+      </p:sp>
+      <p:sp>
+        <p:nvSpPr>
+          <p:cNvPr id="13" name="TextBox 12"/>
+          <p:cNvSpPr txBox="1"/>
+          <p:nvPr/>
+        </p:nvSpPr>
+        <p:spPr>
+          <a:xfrm>
+            <a:off x="4983480" y="5852160"/>
+            <a:ext cx="6446520" cy="502920"/>
           </a:xfrm>
           <a:prstGeom prst="rect">
             <a:avLst/>
@@ -6519,1592 +8098,13 @@
           <a:p>
             <a:pPr algn="l"/>
             <a:r>
-              <a:rPr sz="1200" b="0" i="0">
-                <a:solidFill>
-                  <a:srgbClr val="FFFFFF"/>
-                </a:solidFill>
-                <a:latin typeface="Courier New"/>
-              </a:rPr>
-              <a:t>Linear Regression 5-Fold CV</a:t>
-            </a:r>
-          </a:p>
-          <a:p>
-            <a:pPr algn="l"/>
-            <a:r>
-              <a:rPr sz="1200" b="0" i="0">
-                <a:solidFill>
-                  <a:srgbClr val="FFFFFF"/>
-                </a:solidFill>
-                <a:latin typeface="Courier New"/>
-              </a:rPr>
-              <a:t>Mean MSE: 0.010700</a:t>
-            </a:r>
-          </a:p>
-          <a:p>
-            <a:pPr algn="l"/>
-            <a:r>
-              <a:rPr sz="1200" b="0" i="0">
-                <a:solidFill>
-                  <a:srgbClr val="FFFFFF"/>
-                </a:solidFill>
-                <a:latin typeface="Courier New"/>
-              </a:rPr>
-              <a:t>Mean R² : 0.8349</a:t>
-            </a:r>
-          </a:p>
-        </p:txBody>
-      </p:sp>
-      <p:sp>
-        <p:nvSpPr>
-          <p:cNvPr id="11" name="Oval 10"/>
-          <p:cNvSpPr/>
-          <p:nvPr/>
-        </p:nvSpPr>
-        <p:spPr>
-          <a:xfrm>
-            <a:off x="4297679" y="1508760"/>
-            <a:ext cx="457200" cy="457200"/>
-          </a:xfrm>
-          <a:prstGeom prst="ellipse">
-            <a:avLst/>
-          </a:prstGeom>
-          <a:solidFill>
-            <a:srgbClr val="2A78D6"/>
-          </a:solidFill>
-          <a:ln>
-            <a:noFill/>
-          </a:ln>
-        </p:spPr>
-        <p:style>
-          <a:lnRef idx="1">
-            <a:schemeClr val="accent1"/>
-          </a:lnRef>
-          <a:fillRef idx="3">
-            <a:schemeClr val="accent1"/>
-          </a:fillRef>
-          <a:effectRef idx="2">
-            <a:schemeClr val="accent1"/>
-          </a:effectRef>
-          <a:fontRef idx="minor">
-            <a:schemeClr val="lt1"/>
-          </a:fontRef>
-        </p:style>
-        <p:txBody>
-          <a:bodyPr rtlCol="0" anchor="ctr" lIns="0" rIns="0" tIns="0" bIns="0"/>
-          <a:lstStyle/>
-          <a:p>
-            <a:pPr algn="ctr"/>
-            <a:r>
-              <a:rPr sz="1600" b="1">
-                <a:solidFill>
-                  <a:srgbClr val="FFFFFF"/>
-                </a:solidFill>
-                <a:latin typeface="Calibri"/>
-              </a:rPr>
-              <a:t>2</a:t>
-            </a:r>
-          </a:p>
-        </p:txBody>
-      </p:sp>
-      <p:sp>
-        <p:nvSpPr>
-          <p:cNvPr id="12" name="TextBox 11"/>
-          <p:cNvSpPr txBox="1"/>
-          <p:nvPr/>
-        </p:nvSpPr>
-        <p:spPr>
-          <a:xfrm>
-            <a:off x="4892040" y="1554480"/>
-            <a:ext cx="2926080" cy="411480"/>
-          </a:xfrm>
-          <a:prstGeom prst="rect">
-            <a:avLst/>
-          </a:prstGeom>
-          <a:noFill/>
-        </p:spPr>
-        <p:txBody>
-          <a:bodyPr wrap="square" anchor="t" lIns="0" rIns="0" tIns="0" bIns="0">
-            <a:spAutoFit/>
-          </a:bodyPr>
-          <a:lstStyle/>
-          <a:p>
-            <a:pPr algn="l"/>
-            <a:r>
-              <a:rPr sz="1700" b="1" i="0">
-                <a:solidFill>
-                  <a:srgbClr val="0F1B2D"/>
-                </a:solidFill>
-                <a:latin typeface="Calibri"/>
-              </a:rPr>
-              <a:t>Predict unseen days</a:t>
-            </a:r>
-          </a:p>
-        </p:txBody>
-      </p:sp>
-      <p:sp>
-        <p:nvSpPr>
-          <p:cNvPr id="13" name="Rounded Rectangle 12"/>
-          <p:cNvSpPr/>
-          <p:nvPr/>
-        </p:nvSpPr>
-        <p:spPr>
-          <a:xfrm>
-            <a:off x="4297679" y="2148840"/>
-            <a:ext cx="3520440" cy="3566160"/>
-          </a:xfrm>
-          <a:prstGeom prst="roundRect">
-            <a:avLst>
-              <a:gd name="adj" fmla="val 5000"/>
-            </a:avLst>
-          </a:prstGeom>
-          <a:solidFill>
-            <a:srgbClr val="0F1B2D"/>
-          </a:solidFill>
-          <a:ln>
-            <a:noFill/>
-          </a:ln>
-          <a:effectLst/>
-        </p:spPr>
-        <p:style>
-          <a:lnRef idx="1">
-            <a:schemeClr val="accent1"/>
-          </a:lnRef>
-          <a:fillRef idx="3">
-            <a:schemeClr val="accent1"/>
-          </a:fillRef>
-          <a:effectRef idx="2">
-            <a:schemeClr val="accent1"/>
-          </a:effectRef>
-          <a:fontRef idx="minor">
-            <a:schemeClr val="lt1"/>
-          </a:fontRef>
-        </p:style>
-        <p:txBody>
-          <a:bodyPr rtlCol="0" anchor="ctr"/>
-          <a:lstStyle/>
-          <a:p>
-            <a:pPr algn="ctr"/>
-          </a:p>
-        </p:txBody>
-      </p:sp>
-      <p:sp>
-        <p:nvSpPr>
-          <p:cNvPr id="14" name="TextBox 13"/>
-          <p:cNvSpPr txBox="1"/>
-          <p:nvPr/>
-        </p:nvSpPr>
-        <p:spPr>
-          <a:xfrm>
-            <a:off x="4480559" y="2286000"/>
-            <a:ext cx="3200400" cy="822960"/>
-          </a:xfrm>
-          <a:prstGeom prst="rect">
-            <a:avLst/>
-          </a:prstGeom>
-          <a:noFill/>
-        </p:spPr>
-        <p:txBody>
-          <a:bodyPr wrap="square" anchor="t" lIns="0" rIns="0" tIns="0" bIns="0">
-            <a:spAutoFit/>
-          </a:bodyPr>
-          <a:lstStyle/>
-          <a:p>
-            <a:pPr algn="l"/>
-            <a:r>
-              <a:rPr sz="1200" b="0" i="0">
-                <a:solidFill>
-                  <a:srgbClr val="BFD4F2"/>
-                </a:solidFill>
-                <a:latin typeface="Courier New"/>
-              </a:rPr>
-              <a:t>$ python scripts/predict.py --demo --subject S1</a:t>
-            </a:r>
-          </a:p>
-        </p:txBody>
-      </p:sp>
-      <p:sp>
-        <p:nvSpPr>
-          <p:cNvPr id="15" name="TextBox 14"/>
-          <p:cNvSpPr txBox="1"/>
-          <p:nvPr/>
-        </p:nvSpPr>
-        <p:spPr>
-          <a:xfrm>
-            <a:off x="4480559" y="3154680"/>
-            <a:ext cx="3200400" cy="2468880"/>
-          </a:xfrm>
-          <a:prstGeom prst="rect">
-            <a:avLst/>
-          </a:prstGeom>
-          <a:noFill/>
-        </p:spPr>
-        <p:txBody>
-          <a:bodyPr wrap="square" anchor="t" lIns="0" rIns="0" tIns="0" bIns="0">
-            <a:spAutoFit/>
-          </a:bodyPr>
-          <a:lstStyle/>
-          <a:p>
-            <a:pPr algn="l"/>
-            <a:r>
-              <a:rPr sz="1200" b="0" i="0">
-                <a:solidFill>
-                  <a:srgbClr val="FFFFFF"/>
-                </a:solidFill>
-                <a:latin typeface="Courier New"/>
-              </a:rPr>
-              <a:t>day      MSE   %err      r</a:t>
-            </a:r>
-          </a:p>
-          <a:p>
-            <a:pPr algn="l"/>
-            <a:r>
-              <a:rPr sz="1200" b="0" i="0">
-                <a:solidFill>
-                  <a:srgbClr val="FFFFFF"/>
-                </a:solidFill>
-                <a:latin typeface="Courier New"/>
-              </a:rPr>
-              <a:t>  1   0.0286  16.9%   0.82</a:t>
-            </a:r>
-          </a:p>
-          <a:p>
-            <a:pPr algn="l"/>
-            <a:r>
-              <a:rPr sz="1200" b="0" i="0">
-                <a:solidFill>
-                  <a:srgbClr val="FFFFFF"/>
-                </a:solidFill>
-                <a:latin typeface="Courier New"/>
-              </a:rPr>
-              <a:t>  2   0.0191  13.8%   0.49</a:t>
-            </a:r>
-          </a:p>
-          <a:p>
-            <a:pPr algn="l"/>
-            <a:r>
-              <a:rPr sz="1200" b="0" i="0">
-                <a:solidFill>
-                  <a:srgbClr val="FFFFFF"/>
-                </a:solidFill>
-                <a:latin typeface="Courier New"/>
-              </a:rPr>
-              <a:t>  3   0.0132  11.5%   0.64</a:t>
-            </a:r>
-          </a:p>
-          <a:p>
-            <a:pPr algn="l"/>
-            <a:r>
-              <a:rPr sz="1200" b="0" i="0">
-                <a:solidFill>
-                  <a:srgbClr val="FFFFFF"/>
-                </a:solidFill>
-                <a:latin typeface="Courier New"/>
-              </a:rPr>
-              <a:t>  4   0.0119  10.9%   0.61</a:t>
-            </a:r>
-          </a:p>
-          <a:p>
-            <a:pPr algn="l"/>
-            <a:r>
-              <a:rPr sz="1200" b="0" i="0">
-                <a:solidFill>
-                  <a:srgbClr val="FFFFFF"/>
-                </a:solidFill>
-                <a:latin typeface="Courier New"/>
-              </a:rPr>
-              <a:t>  5   0.0149  12.2%   0.67</a:t>
-            </a:r>
-          </a:p>
-        </p:txBody>
-      </p:sp>
-      <p:sp>
-        <p:nvSpPr>
-          <p:cNvPr id="16" name="Oval 15"/>
-          <p:cNvSpPr/>
-          <p:nvPr/>
-        </p:nvSpPr>
-        <p:spPr>
-          <a:xfrm>
-            <a:off x="8046719" y="1508760"/>
-            <a:ext cx="457200" cy="457200"/>
-          </a:xfrm>
-          <a:prstGeom prst="ellipse">
-            <a:avLst/>
-          </a:prstGeom>
-          <a:solidFill>
-            <a:srgbClr val="2A78D6"/>
-          </a:solidFill>
-          <a:ln>
-            <a:noFill/>
-          </a:ln>
-        </p:spPr>
-        <p:style>
-          <a:lnRef idx="1">
-            <a:schemeClr val="accent1"/>
-          </a:lnRef>
-          <a:fillRef idx="3">
-            <a:schemeClr val="accent1"/>
-          </a:fillRef>
-          <a:effectRef idx="2">
-            <a:schemeClr val="accent1"/>
-          </a:effectRef>
-          <a:fontRef idx="minor">
-            <a:schemeClr val="lt1"/>
-          </a:fontRef>
-        </p:style>
-        <p:txBody>
-          <a:bodyPr rtlCol="0" anchor="ctr" lIns="0" rIns="0" tIns="0" bIns="0"/>
-          <a:lstStyle/>
-          <a:p>
-            <a:pPr algn="ctr"/>
-            <a:r>
-              <a:rPr sz="1600" b="1">
-                <a:solidFill>
-                  <a:srgbClr val="FFFFFF"/>
-                </a:solidFill>
-                <a:latin typeface="Calibri"/>
-              </a:rPr>
-              <a:t>3</a:t>
-            </a:r>
-          </a:p>
-        </p:txBody>
-      </p:sp>
-      <p:sp>
-        <p:nvSpPr>
-          <p:cNvPr id="17" name="TextBox 16"/>
-          <p:cNvSpPr txBox="1"/>
-          <p:nvPr/>
-        </p:nvSpPr>
-        <p:spPr>
-          <a:xfrm>
-            <a:off x="8641080" y="1554480"/>
-            <a:ext cx="2926080" cy="411480"/>
-          </a:xfrm>
-          <a:prstGeom prst="rect">
-            <a:avLst/>
-          </a:prstGeom>
-          <a:noFill/>
-        </p:spPr>
-        <p:txBody>
-          <a:bodyPr wrap="square" anchor="t" lIns="0" rIns="0" tIns="0" bIns="0">
-            <a:spAutoFit/>
-          </a:bodyPr>
-          <a:lstStyle/>
-          <a:p>
-            <a:pPr algn="l"/>
-            <a:r>
-              <a:rPr sz="1700" b="1" i="0">
-                <a:solidFill>
-                  <a:srgbClr val="0F1B2D"/>
-                </a:solidFill>
-                <a:latin typeface="Calibri"/>
-              </a:rPr>
-              <a:t>Automated tests</a:t>
-            </a:r>
-          </a:p>
-        </p:txBody>
-      </p:sp>
-      <p:sp>
-        <p:nvSpPr>
-          <p:cNvPr id="18" name="Rounded Rectangle 17"/>
-          <p:cNvSpPr/>
-          <p:nvPr/>
-        </p:nvSpPr>
-        <p:spPr>
-          <a:xfrm>
-            <a:off x="8046719" y="2148840"/>
-            <a:ext cx="3520440" cy="3566160"/>
-          </a:xfrm>
-          <a:prstGeom prst="roundRect">
-            <a:avLst>
-              <a:gd name="adj" fmla="val 5000"/>
-            </a:avLst>
-          </a:prstGeom>
-          <a:solidFill>
-            <a:srgbClr val="0F1B2D"/>
-          </a:solidFill>
-          <a:ln>
-            <a:noFill/>
-          </a:ln>
-          <a:effectLst/>
-        </p:spPr>
-        <p:style>
-          <a:lnRef idx="1">
-            <a:schemeClr val="accent1"/>
-          </a:lnRef>
-          <a:fillRef idx="3">
-            <a:schemeClr val="accent1"/>
-          </a:fillRef>
-          <a:effectRef idx="2">
-            <a:schemeClr val="accent1"/>
-          </a:effectRef>
-          <a:fontRef idx="minor">
-            <a:schemeClr val="lt1"/>
-          </a:fontRef>
-        </p:style>
-        <p:txBody>
-          <a:bodyPr rtlCol="0" anchor="ctr"/>
-          <a:lstStyle/>
-          <a:p>
-            <a:pPr algn="ctr"/>
-          </a:p>
-        </p:txBody>
-      </p:sp>
-      <p:sp>
-        <p:nvSpPr>
-          <p:cNvPr id="19" name="TextBox 18"/>
-          <p:cNvSpPr txBox="1"/>
-          <p:nvPr/>
-        </p:nvSpPr>
-        <p:spPr>
-          <a:xfrm>
-            <a:off x="8229599" y="2286000"/>
-            <a:ext cx="3200400" cy="822960"/>
-          </a:xfrm>
-          <a:prstGeom prst="rect">
-            <a:avLst/>
-          </a:prstGeom>
-          <a:noFill/>
-        </p:spPr>
-        <p:txBody>
-          <a:bodyPr wrap="square" anchor="t" lIns="0" rIns="0" tIns="0" bIns="0">
-            <a:spAutoFit/>
-          </a:bodyPr>
-          <a:lstStyle/>
-          <a:p>
-            <a:pPr algn="l"/>
-            <a:r>
-              <a:rPr sz="1200" b="0" i="0">
-                <a:solidFill>
-                  <a:srgbClr val="BFD4F2"/>
-                </a:solidFill>
-                <a:latin typeface="Courier New"/>
-              </a:rPr>
-              <a:t>$ python -m pytest -q</a:t>
-            </a:r>
-          </a:p>
-        </p:txBody>
-      </p:sp>
-      <p:sp>
-        <p:nvSpPr>
-          <p:cNvPr id="20" name="TextBox 19"/>
-          <p:cNvSpPr txBox="1"/>
-          <p:nvPr/>
-        </p:nvSpPr>
-        <p:spPr>
-          <a:xfrm>
-            <a:off x="8229599" y="3154680"/>
-            <a:ext cx="3200400" cy="2468880"/>
-          </a:xfrm>
-          <a:prstGeom prst="rect">
-            <a:avLst/>
-          </a:prstGeom>
-          <a:noFill/>
-        </p:spPr>
-        <p:txBody>
-          <a:bodyPr wrap="square" anchor="t" lIns="0" rIns="0" tIns="0" bIns="0">
-            <a:spAutoFit/>
-          </a:bodyPr>
-          <a:lstStyle/>
-          <a:p>
-            <a:pPr algn="l"/>
-            <a:r>
-              <a:rPr sz="1200" b="0" i="0">
-                <a:solidFill>
-                  <a:srgbClr val="FFFFFF"/>
-                </a:solidFill>
-                <a:latin typeface="Courier New"/>
-              </a:rPr>
-              <a:t>..........</a:t>
-            </a:r>
-          </a:p>
-          <a:p>
-            <a:pPr algn="l"/>
-            <a:r>
-              <a:rPr sz="1200" b="0" i="0">
-                <a:solidFill>
-                  <a:srgbClr val="FFFFFF"/>
-                </a:solidFill>
-                <a:latin typeface="Courier New"/>
-              </a:rPr>
-              <a:t>10 passed</a:t>
-            </a:r>
-          </a:p>
-        </p:txBody>
-      </p:sp>
-      <p:sp>
-        <p:nvSpPr>
-          <p:cNvPr id="21" name="TextBox 20"/>
-          <p:cNvSpPr txBox="1"/>
-          <p:nvPr/>
-        </p:nvSpPr>
-        <p:spPr>
-          <a:xfrm>
-            <a:off x="548640" y="5897880"/>
-            <a:ext cx="11064240" cy="365760"/>
-          </a:xfrm>
-          <a:prstGeom prst="rect">
-            <a:avLst/>
-          </a:prstGeom>
-          <a:noFill/>
-        </p:spPr>
-        <p:txBody>
-          <a:bodyPr wrap="square" anchor="t" lIns="0" rIns="0" tIns="0" bIns="0">
-            <a:spAutoFit/>
-          </a:bodyPr>
-          <a:lstStyle/>
-          <a:p>
-            <a:pPr algn="l"/>
-            <a:r>
-              <a:rPr sz="1300" b="0" i="1">
+              <a:rPr sz="1300" b="0" i="0">
                 <a:solidFill>
                   <a:srgbClr val="555B66"/>
                 </a:solidFill>
                 <a:latin typeface="Calibri"/>
               </a:rPr>
-              <a:t>Run from the project folder:  cd "ML proj"   ·   total time under a minute</a:t>
-            </a:r>
-          </a:p>
-        </p:txBody>
-      </p:sp>
-    </p:spTree>
-  </p:cSld>
-  <p:clrMapOvr>
-    <a:masterClrMapping/>
-  </p:clrMapOvr>
-</p:sld>
-</file>
-
-<file path=ppt/slides/slide14.xml><?xml version="1.0" encoding="utf-8"?>
-<p:sld xmlns:a="http://schemas.openxmlformats.org/drawingml/2006/main" xmlns:p="http://schemas.openxmlformats.org/presentationml/2006/main" xmlns:r="http://schemas.openxmlformats.org/officeDocument/2006/relationships">
-  <p:cSld>
-    <p:bg>
-      <p:bgPr>
-        <a:solidFill>
-          <a:srgbClr val="0F1B2D"/>
-        </a:solidFill>
-        <a:effectLst/>
-      </p:bgPr>
-    </p:bg>
-    <p:spTree>
-      <p:nvGrpSpPr>
-        <p:cNvPr id="1" name=""/>
-        <p:cNvGrpSpPr/>
-        <p:nvPr/>
-      </p:nvGrpSpPr>
-      <p:grpSpPr/>
-      <p:sp>
-        <p:nvSpPr>
-          <p:cNvPr id="2" name="TextBox 1"/>
-          <p:cNvSpPr txBox="1"/>
-          <p:nvPr/>
-        </p:nvSpPr>
-        <p:spPr>
-          <a:xfrm>
-            <a:off x="548640" y="502920"/>
-            <a:ext cx="10972800" cy="365760"/>
-          </a:xfrm>
-          <a:prstGeom prst="rect">
-            <a:avLst/>
-          </a:prstGeom>
-          <a:noFill/>
-        </p:spPr>
-        <p:txBody>
-          <a:bodyPr wrap="square" anchor="t" lIns="0" rIns="0" tIns="0" bIns="0">
-            <a:spAutoFit/>
-          </a:bodyPr>
-          <a:lstStyle/>
-          <a:p>
-            <a:pPr algn="l"/>
-            <a:r>
-              <a:rPr sz="1300" b="1" i="0">
-                <a:solidFill>
-                  <a:srgbClr val="BFD4F2"/>
-                </a:solidFill>
-                <a:latin typeface="Calibri"/>
-              </a:rPr>
-              <a:t>CONCLUSIONS &amp; FUTURE WORK</a:t>
-            </a:r>
-          </a:p>
-        </p:txBody>
-      </p:sp>
-      <p:sp>
-        <p:nvSpPr>
-          <p:cNvPr id="3" name="TextBox 2"/>
-          <p:cNvSpPr txBox="1"/>
-          <p:nvPr/>
-        </p:nvSpPr>
-        <p:spPr>
-          <a:xfrm>
-            <a:off x="548640" y="822960"/>
-            <a:ext cx="10972800" cy="822960"/>
-          </a:xfrm>
-          <a:prstGeom prst="rect">
-            <a:avLst/>
-          </a:prstGeom>
-          <a:noFill/>
-        </p:spPr>
-        <p:txBody>
-          <a:bodyPr wrap="square" anchor="t" lIns="0" rIns="0" tIns="0" bIns="0">
-            <a:spAutoFit/>
-          </a:bodyPr>
-          <a:lstStyle/>
-          <a:p>
-            <a:pPr algn="l"/>
-            <a:r>
-              <a:rPr sz="3200" b="1" i="0">
-                <a:solidFill>
-                  <a:srgbClr val="FFFFFF"/>
-                </a:solidFill>
-                <a:latin typeface="Cambria"/>
-              </a:rPr>
-              <a:t>Wearables can replace the mask, one person at a time</a:t>
-            </a:r>
-          </a:p>
-        </p:txBody>
-      </p:sp>
-      <p:sp>
-        <p:nvSpPr>
-          <p:cNvPr id="4" name="Rounded Rectangle 3"/>
-          <p:cNvSpPr/>
-          <p:nvPr/>
-        </p:nvSpPr>
-        <p:spPr>
-          <a:xfrm>
-            <a:off x="548640" y="1965960"/>
-            <a:ext cx="5440680" cy="1234440"/>
-          </a:xfrm>
-          <a:prstGeom prst="roundRect">
-            <a:avLst>
-              <a:gd name="adj" fmla="val 8000"/>
-            </a:avLst>
-          </a:prstGeom>
-          <a:solidFill>
-            <a:srgbClr val="1C2C45"/>
-          </a:solidFill>
-          <a:ln>
-            <a:noFill/>
-          </a:ln>
-          <a:effectLst/>
-        </p:spPr>
-        <p:style>
-          <a:lnRef idx="1">
-            <a:schemeClr val="accent1"/>
-          </a:lnRef>
-          <a:fillRef idx="3">
-            <a:schemeClr val="accent1"/>
-          </a:fillRef>
-          <a:effectRef idx="2">
-            <a:schemeClr val="accent1"/>
-          </a:effectRef>
-          <a:fontRef idx="minor">
-            <a:schemeClr val="lt1"/>
-          </a:fontRef>
-        </p:style>
-        <p:txBody>
-          <a:bodyPr rtlCol="0" anchor="ctr"/>
-          <a:lstStyle/>
-          <a:p>
-            <a:pPr algn="ctr"/>
-          </a:p>
-        </p:txBody>
-      </p:sp>
-      <p:sp>
-        <p:nvSpPr>
-          <p:cNvPr id="5" name="TextBox 4"/>
-          <p:cNvSpPr txBox="1"/>
-          <p:nvPr/>
-        </p:nvSpPr>
-        <p:spPr>
-          <a:xfrm>
-            <a:off x="777240" y="2148840"/>
-            <a:ext cx="1463040" cy="822960"/>
-          </a:xfrm>
-          <a:prstGeom prst="rect">
-            <a:avLst/>
-          </a:prstGeom>
-          <a:noFill/>
-        </p:spPr>
-        <p:txBody>
-          <a:bodyPr wrap="square" anchor="ctr" lIns="0" rIns="0" tIns="0" bIns="0">
-            <a:spAutoFit/>
-          </a:bodyPr>
-          <a:lstStyle/>
-          <a:p>
-            <a:pPr algn="l"/>
-            <a:r>
-              <a:rPr sz="3000" b="1" i="0">
-                <a:solidFill>
-                  <a:srgbClr val="EB6834"/>
-                </a:solidFill>
-                <a:latin typeface="Cambria"/>
-              </a:rPr>
-              <a:t>9-10 %</a:t>
-            </a:r>
-          </a:p>
-        </p:txBody>
-      </p:sp>
-      <p:sp>
-        <p:nvSpPr>
-          <p:cNvPr id="6" name="TextBox 5"/>
-          <p:cNvSpPr txBox="1"/>
-          <p:nvPr/>
-        </p:nvSpPr>
-        <p:spPr>
-          <a:xfrm>
-            <a:off x="2331720" y="2121408"/>
-            <a:ext cx="3474720" cy="960120"/>
-          </a:xfrm>
-          <a:prstGeom prst="rect">
-            <a:avLst/>
-          </a:prstGeom>
-          <a:noFill/>
-        </p:spPr>
-        <p:txBody>
-          <a:bodyPr wrap="square" anchor="ctr" lIns="0" rIns="0" tIns="0" bIns="0">
-            <a:spAutoFit/>
-          </a:bodyPr>
-          <a:lstStyle/>
-          <a:p>
-            <a:pPr algn="l"/>
-            <a:r>
-              <a:rPr sz="1400" b="0" i="0">
-                <a:solidFill>
-                  <a:srgbClr val="FFFFFF"/>
-                </a:solidFill>
-                <a:latin typeface="Calibri"/>
-              </a:rPr>
-              <a:t>error within a session from EMG + gait (mean-baseline: 19-26 %); beats the original study</a:t>
-            </a:r>
-          </a:p>
-        </p:txBody>
-      </p:sp>
-      <p:sp>
-        <p:nvSpPr>
-          <p:cNvPr id="7" name="Rounded Rectangle 6"/>
-          <p:cNvSpPr/>
-          <p:nvPr/>
-        </p:nvSpPr>
-        <p:spPr>
-          <a:xfrm>
-            <a:off x="6217920" y="1965960"/>
-            <a:ext cx="5440680" cy="1234440"/>
-          </a:xfrm>
-          <a:prstGeom prst="roundRect">
-            <a:avLst>
-              <a:gd name="adj" fmla="val 8000"/>
-            </a:avLst>
-          </a:prstGeom>
-          <a:solidFill>
-            <a:srgbClr val="1C2C45"/>
-          </a:solidFill>
-          <a:ln>
-            <a:noFill/>
-          </a:ln>
-          <a:effectLst/>
-        </p:spPr>
-        <p:style>
-          <a:lnRef idx="1">
-            <a:schemeClr val="accent1"/>
-          </a:lnRef>
-          <a:fillRef idx="3">
-            <a:schemeClr val="accent1"/>
-          </a:fillRef>
-          <a:effectRef idx="2">
-            <a:schemeClr val="accent1"/>
-          </a:effectRef>
-          <a:fontRef idx="minor">
-            <a:schemeClr val="lt1"/>
-          </a:fontRef>
-        </p:style>
-        <p:txBody>
-          <a:bodyPr rtlCol="0" anchor="ctr"/>
-          <a:lstStyle/>
-          <a:p>
-            <a:pPr algn="ctr"/>
-          </a:p>
-        </p:txBody>
-      </p:sp>
-      <p:sp>
-        <p:nvSpPr>
-          <p:cNvPr id="8" name="TextBox 7"/>
-          <p:cNvSpPr txBox="1"/>
-          <p:nvPr/>
-        </p:nvSpPr>
-        <p:spPr>
-          <a:xfrm>
-            <a:off x="6446520" y="2148840"/>
-            <a:ext cx="1463040" cy="822960"/>
-          </a:xfrm>
-          <a:prstGeom prst="rect">
-            <a:avLst/>
-          </a:prstGeom>
-          <a:noFill/>
-        </p:spPr>
-        <p:txBody>
-          <a:bodyPr wrap="square" anchor="ctr" lIns="0" rIns="0" tIns="0" bIns="0">
-            <a:spAutoFit/>
-          </a:bodyPr>
-          <a:lstStyle/>
-          <a:p>
-            <a:pPr algn="l"/>
-            <a:r>
-              <a:rPr sz="3000" b="1" i="0">
-                <a:solidFill>
-                  <a:srgbClr val="EB6834"/>
-                </a:solidFill>
-                <a:latin typeface="Cambria"/>
-              </a:rPr>
-              <a:t>2×</a:t>
-            </a:r>
-          </a:p>
-        </p:txBody>
-      </p:sp>
-      <p:sp>
-        <p:nvSpPr>
-          <p:cNvPr id="9" name="TextBox 8"/>
-          <p:cNvSpPr txBox="1"/>
-          <p:nvPr/>
-        </p:nvSpPr>
-        <p:spPr>
-          <a:xfrm>
-            <a:off x="8001000" y="2121408"/>
-            <a:ext cx="3474720" cy="960120"/>
-          </a:xfrm>
-          <a:prstGeom prst="rect">
-            <a:avLst/>
-          </a:prstGeom>
-          <a:noFill/>
-        </p:spPr>
-        <p:txBody>
-          <a:bodyPr wrap="square" anchor="ctr" lIns="0" rIns="0" tIns="0" bIns="0">
-            <a:spAutoFit/>
-          </a:bodyPr>
-          <a:lstStyle/>
-          <a:p>
-            <a:pPr algn="l"/>
-            <a:r>
-              <a:rPr sz="1400" b="0" i="0">
-                <a:solidFill>
-                  <a:srgbClr val="FFFFFF"/>
-                </a:solidFill>
-                <a:latin typeface="Calibri"/>
-              </a:rPr>
-              <a:t>error on a new day: random-split CV is optimistic, so deploy-style validation matters</a:t>
-            </a:r>
-          </a:p>
-        </p:txBody>
-      </p:sp>
-      <p:sp>
-        <p:nvSpPr>
-          <p:cNvPr id="10" name="Rounded Rectangle 9"/>
-          <p:cNvSpPr/>
-          <p:nvPr/>
-        </p:nvSpPr>
-        <p:spPr>
-          <a:xfrm>
-            <a:off x="548640" y="3383280"/>
-            <a:ext cx="5440680" cy="1234440"/>
-          </a:xfrm>
-          <a:prstGeom prst="roundRect">
-            <a:avLst>
-              <a:gd name="adj" fmla="val 8000"/>
-            </a:avLst>
-          </a:prstGeom>
-          <a:solidFill>
-            <a:srgbClr val="1C2C45"/>
-          </a:solidFill>
-          <a:ln>
-            <a:noFill/>
-          </a:ln>
-          <a:effectLst/>
-        </p:spPr>
-        <p:style>
-          <a:lnRef idx="1">
-            <a:schemeClr val="accent1"/>
-          </a:lnRef>
-          <a:fillRef idx="3">
-            <a:schemeClr val="accent1"/>
-          </a:fillRef>
-          <a:effectRef idx="2">
-            <a:schemeClr val="accent1"/>
-          </a:effectRef>
-          <a:fontRef idx="minor">
-            <a:schemeClr val="lt1"/>
-          </a:fontRef>
-        </p:style>
-        <p:txBody>
-          <a:bodyPr rtlCol="0" anchor="ctr"/>
-          <a:lstStyle/>
-          <a:p>
-            <a:pPr algn="ctr"/>
-          </a:p>
-        </p:txBody>
-      </p:sp>
-      <p:sp>
-        <p:nvSpPr>
-          <p:cNvPr id="11" name="TextBox 10"/>
-          <p:cNvSpPr txBox="1"/>
-          <p:nvPr/>
-        </p:nvSpPr>
-        <p:spPr>
-          <a:xfrm>
-            <a:off x="777240" y="3566160"/>
-            <a:ext cx="1463040" cy="822960"/>
-          </a:xfrm>
-          <a:prstGeom prst="rect">
-            <a:avLst/>
-          </a:prstGeom>
-          <a:noFill/>
-        </p:spPr>
-        <p:txBody>
-          <a:bodyPr wrap="square" anchor="ctr" lIns="0" rIns="0" tIns="0" bIns="0">
-            <a:spAutoFit/>
-          </a:bodyPr>
-          <a:lstStyle/>
-          <a:p>
-            <a:pPr algn="l"/>
-            <a:r>
-              <a:rPr sz="3000" b="1" i="0">
-                <a:solidFill>
-                  <a:srgbClr val="EB6834"/>
-                </a:solidFill>
-                <a:latin typeface="Cambria"/>
-              </a:rPr>
-              <a:t>EMG</a:t>
-            </a:r>
-          </a:p>
-        </p:txBody>
-      </p:sp>
-      <p:sp>
-        <p:nvSpPr>
-          <p:cNvPr id="12" name="TextBox 11"/>
-          <p:cNvSpPr txBox="1"/>
-          <p:nvPr/>
-        </p:nvSpPr>
-        <p:spPr>
-          <a:xfrm>
-            <a:off x="2331720" y="3538728"/>
-            <a:ext cx="3474720" cy="960120"/>
-          </a:xfrm>
-          <a:prstGeom prst="rect">
-            <a:avLst/>
-          </a:prstGeom>
-          <a:noFill/>
-        </p:spPr>
-        <p:txBody>
-          <a:bodyPr wrap="square" anchor="ctr" lIns="0" rIns="0" tIns="0" bIns="0">
-            <a:spAutoFit/>
-          </a:bodyPr>
-          <a:lstStyle/>
-          <a:p>
-            <a:pPr algn="l"/>
-            <a:r>
-              <a:rPr sz="1400" b="0" i="0">
-                <a:solidFill>
-                  <a:srgbClr val="FFFFFF"/>
-                </a:solidFill>
-                <a:latin typeface="Calibri"/>
-              </a:rPr>
-              <a:t>is the key signal; 4 of 16 electrodes beat all 16 for S2, so cheaper hardware is possible</a:t>
-            </a:r>
-          </a:p>
-        </p:txBody>
-      </p:sp>
-      <p:sp>
-        <p:nvSpPr>
-          <p:cNvPr id="13" name="Rounded Rectangle 12"/>
-          <p:cNvSpPr/>
-          <p:nvPr/>
-        </p:nvSpPr>
-        <p:spPr>
-          <a:xfrm>
-            <a:off x="6217920" y="3383280"/>
-            <a:ext cx="5440680" cy="1234440"/>
-          </a:xfrm>
-          <a:prstGeom prst="roundRect">
-            <a:avLst>
-              <a:gd name="adj" fmla="val 8000"/>
-            </a:avLst>
-          </a:prstGeom>
-          <a:solidFill>
-            <a:srgbClr val="1C2C45"/>
-          </a:solidFill>
-          <a:ln>
-            <a:noFill/>
-          </a:ln>
-          <a:effectLst/>
-        </p:spPr>
-        <p:style>
-          <a:lnRef idx="1">
-            <a:schemeClr val="accent1"/>
-          </a:lnRef>
-          <a:fillRef idx="3">
-            <a:schemeClr val="accent1"/>
-          </a:fillRef>
-          <a:effectRef idx="2">
-            <a:schemeClr val="accent1"/>
-          </a:effectRef>
-          <a:fontRef idx="minor">
-            <a:schemeClr val="lt1"/>
-          </a:fontRef>
-        </p:style>
-        <p:txBody>
-          <a:bodyPr rtlCol="0" anchor="ctr"/>
-          <a:lstStyle/>
-          <a:p>
-            <a:pPr algn="ctr"/>
-          </a:p>
-        </p:txBody>
-      </p:sp>
-      <p:sp>
-        <p:nvSpPr>
-          <p:cNvPr id="14" name="TextBox 13"/>
-          <p:cNvSpPr txBox="1"/>
-          <p:nvPr/>
-        </p:nvSpPr>
-        <p:spPr>
-          <a:xfrm>
-            <a:off x="6446520" y="3566160"/>
-            <a:ext cx="1463040" cy="822960"/>
-          </a:xfrm>
-          <a:prstGeom prst="rect">
-            <a:avLst/>
-          </a:prstGeom>
-          <a:noFill/>
-        </p:spPr>
-        <p:txBody>
-          <a:bodyPr wrap="square" anchor="ctr" lIns="0" rIns="0" tIns="0" bIns="0">
-            <a:spAutoFit/>
-          </a:bodyPr>
-          <a:lstStyle/>
-          <a:p>
-            <a:pPr algn="l"/>
-            <a:r>
-              <a:rPr sz="3000" b="1" i="0">
-                <a:solidFill>
-                  <a:srgbClr val="EB6834"/>
-                </a:solidFill>
-                <a:latin typeface="Cambria"/>
-              </a:rPr>
-              <a:t>1 : 1</a:t>
-            </a:r>
-          </a:p>
-        </p:txBody>
-      </p:sp>
-      <p:sp>
-        <p:nvSpPr>
-          <p:cNvPr id="15" name="TextBox 14"/>
-          <p:cNvSpPr txBox="1"/>
-          <p:nvPr/>
-        </p:nvSpPr>
-        <p:spPr>
-          <a:xfrm>
-            <a:off x="8001000" y="3538728"/>
-            <a:ext cx="3474720" cy="960120"/>
-          </a:xfrm>
-          <a:prstGeom prst="rect">
-            <a:avLst/>
-          </a:prstGeom>
-          <a:noFill/>
-        </p:spPr>
-        <p:txBody>
-          <a:bodyPr wrap="square" anchor="ctr" lIns="0" rIns="0" tIns="0" bIns="0">
-            <a:spAutoFit/>
-          </a:bodyPr>
-          <a:lstStyle/>
-          <a:p>
-            <a:pPr algn="l"/>
-            <a:r>
-              <a:rPr sz="1400" b="0" i="0">
-                <a:solidFill>
-                  <a:srgbClr val="FFFFFF"/>
-                </a:solidFill>
-                <a:latin typeface="Calibri"/>
-              </a:rPr>
-              <a:t>models must be subject-specific; cross-person transfer is worse than the mean</a:t>
-            </a:r>
-          </a:p>
-        </p:txBody>
-      </p:sp>
-      <p:sp>
-        <p:nvSpPr>
-          <p:cNvPr id="16" name="TextBox 15"/>
-          <p:cNvSpPr txBox="1"/>
-          <p:nvPr/>
-        </p:nvSpPr>
-        <p:spPr>
-          <a:xfrm>
-            <a:off x="548640" y="4983480"/>
-            <a:ext cx="10972800" cy="365760"/>
-          </a:xfrm>
-          <a:prstGeom prst="rect">
-            <a:avLst/>
-          </a:prstGeom>
-          <a:noFill/>
-        </p:spPr>
-        <p:txBody>
-          <a:bodyPr wrap="square" anchor="t" lIns="0" rIns="0" tIns="0" bIns="0">
-            <a:spAutoFit/>
-          </a:bodyPr>
-          <a:lstStyle/>
-          <a:p>
-            <a:pPr algn="l"/>
-            <a:r>
-              <a:rPr sz="1700" b="1" i="0">
-                <a:solidFill>
-                  <a:srgbClr val="FFFFFF"/>
-                </a:solidFill>
-                <a:latin typeface="Calibri"/>
-              </a:rPr>
-              <a:t>Next steps</a:t>
-            </a:r>
-          </a:p>
-        </p:txBody>
-      </p:sp>
-      <p:sp>
-        <p:nvSpPr>
-          <p:cNvPr id="17" name="Rounded Rectangle 16"/>
-          <p:cNvSpPr/>
-          <p:nvPr/>
-        </p:nvSpPr>
-        <p:spPr>
-          <a:xfrm>
-            <a:off x="548640" y="5394960"/>
-            <a:ext cx="3520440" cy="822960"/>
-          </a:xfrm>
-          <a:prstGeom prst="roundRect">
-            <a:avLst>
-              <a:gd name="adj" fmla="val 8000"/>
-            </a:avLst>
-          </a:prstGeom>
-          <a:solidFill>
-            <a:srgbClr val="2A78D6"/>
-          </a:solidFill>
-          <a:ln>
-            <a:noFill/>
-          </a:ln>
-          <a:effectLst/>
-        </p:spPr>
-        <p:style>
-          <a:lnRef idx="1">
-            <a:schemeClr val="accent1"/>
-          </a:lnRef>
-          <a:fillRef idx="3">
-            <a:schemeClr val="accent1"/>
-          </a:fillRef>
-          <a:effectRef idx="2">
-            <a:schemeClr val="accent1"/>
-          </a:effectRef>
-          <a:fontRef idx="minor">
-            <a:schemeClr val="lt1"/>
-          </a:fontRef>
-        </p:style>
-        <p:txBody>
-          <a:bodyPr rtlCol="0" anchor="ctr"/>
-          <a:lstStyle/>
-          <a:p>
-            <a:pPr algn="ctr"/>
-          </a:p>
-        </p:txBody>
-      </p:sp>
-      <p:sp>
-        <p:nvSpPr>
-          <p:cNvPr id="18" name="TextBox 17"/>
-          <p:cNvSpPr txBox="1"/>
-          <p:nvPr/>
-        </p:nvSpPr>
-        <p:spPr>
-          <a:xfrm>
-            <a:off x="731520" y="5394960"/>
-            <a:ext cx="3154680" cy="822960"/>
-          </a:xfrm>
-          <a:prstGeom prst="rect">
-            <a:avLst/>
-          </a:prstGeom>
-          <a:noFill/>
-        </p:spPr>
-        <p:txBody>
-          <a:bodyPr wrap="square" anchor="ctr" lIns="0" rIns="0" tIns="0" bIns="0">
-            <a:spAutoFit/>
-          </a:bodyPr>
-          <a:lstStyle/>
-          <a:p>
-            <a:pPr algn="l"/>
-            <a:r>
-              <a:rPr sz="1400" b="0" i="0">
-                <a:solidFill>
-                  <a:srgbClr val="FFFFFF"/>
-                </a:solidFill>
-                <a:latin typeface="Calibri"/>
-              </a:rPr>
-              <a:t>More subjects + anthropometrics + IMU kinematics</a:t>
-            </a:r>
-          </a:p>
-        </p:txBody>
-      </p:sp>
-      <p:sp>
-        <p:nvSpPr>
-          <p:cNvPr id="19" name="Rounded Rectangle 18"/>
-          <p:cNvSpPr/>
-          <p:nvPr/>
-        </p:nvSpPr>
-        <p:spPr>
-          <a:xfrm>
-            <a:off x="4297679" y="5394960"/>
-            <a:ext cx="3520440" cy="822960"/>
-          </a:xfrm>
-          <a:prstGeom prst="roundRect">
-            <a:avLst>
-              <a:gd name="adj" fmla="val 8000"/>
-            </a:avLst>
-          </a:prstGeom>
-          <a:solidFill>
-            <a:srgbClr val="2A78D6"/>
-          </a:solidFill>
-          <a:ln>
-            <a:noFill/>
-          </a:ln>
-          <a:effectLst/>
-        </p:spPr>
-        <p:style>
-          <a:lnRef idx="1">
-            <a:schemeClr val="accent1"/>
-          </a:lnRef>
-          <a:fillRef idx="3">
-            <a:schemeClr val="accent1"/>
-          </a:fillRef>
-          <a:effectRef idx="2">
-            <a:schemeClr val="accent1"/>
-          </a:effectRef>
-          <a:fontRef idx="minor">
-            <a:schemeClr val="lt1"/>
-          </a:fontRef>
-        </p:style>
-        <p:txBody>
-          <a:bodyPr rtlCol="0" anchor="ctr"/>
-          <a:lstStyle/>
-          <a:p>
-            <a:pPr algn="ctr"/>
-          </a:p>
-        </p:txBody>
-      </p:sp>
-      <p:sp>
-        <p:nvSpPr>
-          <p:cNvPr id="20" name="TextBox 19"/>
-          <p:cNvSpPr txBox="1"/>
-          <p:nvPr/>
-        </p:nvSpPr>
-        <p:spPr>
-          <a:xfrm>
-            <a:off x="4480559" y="5394960"/>
-            <a:ext cx="3154680" cy="822960"/>
-          </a:xfrm>
-          <a:prstGeom prst="rect">
-            <a:avLst/>
-          </a:prstGeom>
-          <a:noFill/>
-        </p:spPr>
-        <p:txBody>
-          <a:bodyPr wrap="square" anchor="ctr" lIns="0" rIns="0" tIns="0" bIns="0">
-            <a:spAutoFit/>
-          </a:bodyPr>
-          <a:lstStyle/>
-          <a:p>
-            <a:pPr algn="l"/>
-            <a:r>
-              <a:rPr sz="1400" b="0" i="0">
-                <a:solidFill>
-                  <a:srgbClr val="FFFFFF"/>
-                </a:solidFill>
-                <a:latin typeface="Calibri"/>
-              </a:rPr>
-              <a:t>Test spot-check calibration live in a real HILO session</a:t>
-            </a:r>
-          </a:p>
-        </p:txBody>
-      </p:sp>
-      <p:sp>
-        <p:nvSpPr>
-          <p:cNvPr id="21" name="Rounded Rectangle 20"/>
-          <p:cNvSpPr/>
-          <p:nvPr/>
-        </p:nvSpPr>
-        <p:spPr>
-          <a:xfrm>
-            <a:off x="8046719" y="5394960"/>
-            <a:ext cx="3520440" cy="822960"/>
-          </a:xfrm>
-          <a:prstGeom prst="roundRect">
-            <a:avLst>
-              <a:gd name="adj" fmla="val 8000"/>
-            </a:avLst>
-          </a:prstGeom>
-          <a:solidFill>
-            <a:srgbClr val="2A78D6"/>
-          </a:solidFill>
-          <a:ln>
-            <a:noFill/>
-          </a:ln>
-          <a:effectLst/>
-        </p:spPr>
-        <p:style>
-          <a:lnRef idx="1">
-            <a:schemeClr val="accent1"/>
-          </a:lnRef>
-          <a:fillRef idx="3">
-            <a:schemeClr val="accent1"/>
-          </a:fillRef>
-          <a:effectRef idx="2">
-            <a:schemeClr val="accent1"/>
-          </a:effectRef>
-          <a:fontRef idx="minor">
-            <a:schemeClr val="lt1"/>
-          </a:fontRef>
-        </p:style>
-        <p:txBody>
-          <a:bodyPr rtlCol="0" anchor="ctr"/>
-          <a:lstStyle/>
-          <a:p>
-            <a:pPr algn="ctr"/>
-          </a:p>
-        </p:txBody>
-      </p:sp>
-      <p:sp>
-        <p:nvSpPr>
-          <p:cNvPr id="22" name="TextBox 21"/>
-          <p:cNvSpPr txBox="1"/>
-          <p:nvPr/>
-        </p:nvSpPr>
-        <p:spPr>
-          <a:xfrm>
-            <a:off x="8229599" y="5394960"/>
-            <a:ext cx="3154680" cy="822960"/>
-          </a:xfrm>
-          <a:prstGeom prst="rect">
-            <a:avLst/>
-          </a:prstGeom>
-          <a:noFill/>
-        </p:spPr>
-        <p:txBody>
-          <a:bodyPr wrap="square" anchor="ctr" lIns="0" rIns="0" tIns="0" bIns="0">
-            <a:spAutoFit/>
-          </a:bodyPr>
-          <a:lstStyle/>
-          <a:p>
-            <a:pPr algn="l"/>
-            <a:r>
-              <a:rPr sz="1400" b="0" i="0">
-                <a:solidFill>
-                  <a:srgbClr val="FFFFFF"/>
-                </a:solidFill>
-                <a:latin typeface="Calibri"/>
-              </a:rPr>
-              <a:t>Use the surrogate as a prior inside CMA-ES / Bayesian optimisation</a:t>
-            </a:r>
-          </a:p>
-        </p:txBody>
-      </p:sp>
-    </p:spTree>
-  </p:cSld>
-  <p:clrMapOvr>
-    <a:masterClrMapping/>
-  </p:clrMapOvr>
-</p:sld>
-</file>
-
-<file path=ppt/slides/slide15.xml><?xml version="1.0" encoding="utf-8"?>
-<p:sld xmlns:a="http://schemas.openxmlformats.org/drawingml/2006/main" xmlns:p="http://schemas.openxmlformats.org/presentationml/2006/main" xmlns:r="http://schemas.openxmlformats.org/officeDocument/2006/relationships">
-  <p:cSld>
-    <p:bg>
-      <p:bgPr>
-        <a:solidFill>
-          <a:srgbClr val="0F1B2D"/>
-        </a:solidFill>
-        <a:effectLst/>
-      </p:bgPr>
-    </p:bg>
-    <p:spTree>
-      <p:nvGrpSpPr>
-        <p:cNvPr id="1" name=""/>
-        <p:cNvGrpSpPr/>
-        <p:nvPr/>
-      </p:nvGrpSpPr>
-      <p:grpSpPr/>
-      <p:sp>
-        <p:nvSpPr>
-          <p:cNvPr id="2" name="TextBox 1"/>
-          <p:cNvSpPr txBox="1"/>
-          <p:nvPr/>
-        </p:nvSpPr>
-        <p:spPr>
-          <a:xfrm>
-            <a:off x="548640" y="1097280"/>
-            <a:ext cx="10972800" cy="914400"/>
-          </a:xfrm>
-          <a:prstGeom prst="rect">
-            <a:avLst/>
-          </a:prstGeom>
-          <a:noFill/>
-        </p:spPr>
-        <p:txBody>
-          <a:bodyPr wrap="square" anchor="t" lIns="0" rIns="0" tIns="0" bIns="0">
-            <a:spAutoFit/>
-          </a:bodyPr>
-          <a:lstStyle/>
-          <a:p>
-            <a:pPr algn="l"/>
-            <a:r>
-              <a:rPr sz="4400" b="1" i="0">
-                <a:solidFill>
-                  <a:srgbClr val="FFFFFF"/>
-                </a:solidFill>
-                <a:latin typeface="Cambria"/>
-              </a:rPr>
-              <a:t>Thank you, questions?</a:t>
-            </a:r>
-          </a:p>
-        </p:txBody>
-      </p:sp>
-      <p:sp>
-        <p:nvSpPr>
-          <p:cNvPr id="3" name="TextBox 2"/>
-          <p:cNvSpPr txBox="1"/>
-          <p:nvPr/>
-        </p:nvSpPr>
-        <p:spPr>
-          <a:xfrm>
-            <a:off x="548640" y="2148840"/>
-            <a:ext cx="10972800" cy="457200"/>
-          </a:xfrm>
-          <a:prstGeom prst="rect">
-            <a:avLst/>
-          </a:prstGeom>
-          <a:noFill/>
-        </p:spPr>
-        <p:txBody>
-          <a:bodyPr wrap="square" anchor="t" lIns="0" rIns="0" tIns="0" bIns="0">
-            <a:spAutoFit/>
-          </a:bodyPr>
-          <a:lstStyle/>
-          <a:p>
-            <a:pPr algn="l"/>
-            <a:r>
-              <a:rPr sz="1700" b="0" i="0">
-                <a:solidFill>
-                  <a:srgbClr val="BFD4F2"/>
-                </a:solidFill>
-                <a:latin typeface="Calibri"/>
-              </a:rPr>
-              <a:t>Code, data, figures and the 2-page write-up are in the private GitHub repository.</a:t>
-            </a:r>
-          </a:p>
-        </p:txBody>
-      </p:sp>
-      <p:sp>
-        <p:nvSpPr>
-          <p:cNvPr id="4" name="TextBox 3"/>
-          <p:cNvSpPr txBox="1"/>
-          <p:nvPr/>
-        </p:nvSpPr>
-        <p:spPr>
-          <a:xfrm>
-            <a:off x="548640" y="3291840"/>
-            <a:ext cx="10972800" cy="914400"/>
-          </a:xfrm>
-          <a:prstGeom prst="rect">
-            <a:avLst/>
-          </a:prstGeom>
-          <a:noFill/>
-        </p:spPr>
-        <p:txBody>
-          <a:bodyPr wrap="square" anchor="t" lIns="0" rIns="0" tIns="0" bIns="0">
-            <a:spAutoFit/>
-          </a:bodyPr>
-          <a:lstStyle/>
-          <a:p>
-            <a:pPr algn="l">
-              <a:spcAft>
-                <a:spcPts val="800"/>
-              </a:spcAft>
-            </a:pPr>
-            <a:r>
-              <a:rPr sz="2000" b="1" i="0">
-                <a:solidFill>
-                  <a:srgbClr val="FFFFFF"/>
-                </a:solidFill>
-                <a:latin typeface="Calibri"/>
-              </a:rPr>
-              <a:t>Mukil Skanda A</a:t>
-            </a:r>
-            <a:r>
-              <a:rPr sz="2000" b="0" i="0">
-                <a:solidFill>
-                  <a:srgbClr val="BFD4F2"/>
-                </a:solidFill>
-                <a:latin typeface="Calibri"/>
-              </a:rPr>
-              <a:t>  ·  PES1UG24CS281</a:t>
-            </a:r>
-          </a:p>
-          <a:p>
-            <a:pPr algn="l">
-              <a:spcAft>
-                <a:spcPts val="800"/>
-              </a:spcAft>
-            </a:pPr>
-            <a:r>
-              <a:rPr sz="2000" b="1" i="0">
-                <a:solidFill>
-                  <a:srgbClr val="FFFFFF"/>
-                </a:solidFill>
-                <a:latin typeface="Calibri"/>
-              </a:rPr>
-              <a:t>Likhith M</a:t>
-            </a:r>
-            <a:r>
-              <a:rPr sz="2000" b="0" i="0">
-                <a:solidFill>
-                  <a:srgbClr val="BFD4F2"/>
-                </a:solidFill>
-                <a:latin typeface="Calibri"/>
-              </a:rPr>
-              <a:t>  ·  PES1UG24CS282</a:t>
-            </a:r>
-          </a:p>
-        </p:txBody>
-      </p:sp>
-      <p:sp>
-        <p:nvSpPr>
-          <p:cNvPr id="5" name="TextBox 4"/>
-          <p:cNvSpPr txBox="1"/>
-          <p:nvPr/>
-        </p:nvSpPr>
-        <p:spPr>
-          <a:xfrm>
-            <a:off x="548640" y="5760720"/>
-            <a:ext cx="10972800" cy="548640"/>
-          </a:xfrm>
-          <a:prstGeom prst="rect">
-            <a:avLst/>
-          </a:prstGeom>
-          <a:noFill/>
-        </p:spPr>
-        <p:txBody>
-          <a:bodyPr wrap="square" anchor="t" lIns="0" rIns="0" tIns="0" bIns="0">
-            <a:spAutoFit/>
-          </a:bodyPr>
-          <a:lstStyle/>
-          <a:p>
-            <a:pPr algn="l"/>
-            <a:r>
-              <a:rPr sz="1200" b="0" i="0">
-                <a:solidFill>
-                  <a:srgbClr val="BFD4F2"/>
-                </a:solidFill>
-                <a:latin typeface="Calibri"/>
-              </a:rPr>
-              <a:t>Ref: Krimsky &amp; Ng, CS229 2018 · Zhang et al., Science 2017 · MacKay 1992 · Rasmussen &amp; Williams 2006</a:t>
+              <a:t>S1 GP test MSE from 28 to 144 training samples, still decreasing</a:t>
             </a:r>
           </a:p>
         </p:txBody>
@@ -10394,8 +10394,8 @@
         </p:nvSpPr>
         <p:spPr>
           <a:xfrm>
-            <a:off x="548640" y="4434840"/>
-            <a:ext cx="3520440" cy="1691640"/>
+            <a:off x="548640" y="4343400"/>
+            <a:ext cx="3520440" cy="1554480"/>
           </a:xfrm>
           <a:prstGeom prst="roundRect">
             <a:avLst>
@@ -10440,7 +10440,7 @@
         </p:nvSpPr>
         <p:spPr>
           <a:xfrm>
-            <a:off x="777240" y="4617720"/>
+            <a:off x="777240" y="4498848"/>
             <a:ext cx="457200" cy="457200"/>
           </a:xfrm>
           <a:prstGeom prst="ellipse">
@@ -10492,7 +10492,7 @@
         </p:nvSpPr>
         <p:spPr>
           <a:xfrm>
-            <a:off x="1371600" y="4645152"/>
+            <a:off x="1371600" y="4526280"/>
             <a:ext cx="2560320" cy="411480"/>
           </a:xfrm>
           <a:prstGeom prst="rect">
@@ -10527,8 +10527,8 @@
         </p:nvSpPr>
         <p:spPr>
           <a:xfrm>
-            <a:off x="777240" y="5166360"/>
-            <a:ext cx="3108960" cy="914400"/>
+            <a:off x="777240" y="5029200"/>
+            <a:ext cx="3108960" cy="822960"/>
           </a:xfrm>
           <a:prstGeom prst="rect">
             <a:avLst/>
@@ -10549,7 +10549,7 @@
                 </a:solidFill>
                 <a:latin typeface="Calibri"/>
               </a:rPr>
-              <a:t>Scaling and every hyper-parameter search happen inside training folds (nested CV). The paper tuned λ on its test folds.</a:t>
+              <a:t>Scaling and every hyper-parameter search happen inside the training folds (nested CV), so no test data influences model selection.</a:t>
             </a:r>
           </a:p>
         </p:txBody>
@@ -10562,8 +10562,8 @@
         </p:nvSpPr>
         <p:spPr>
           <a:xfrm>
-            <a:off x="4297679" y="4434840"/>
-            <a:ext cx="3520440" cy="1691640"/>
+            <a:off x="4297679" y="4343400"/>
+            <a:ext cx="3520440" cy="1554480"/>
           </a:xfrm>
           <a:prstGeom prst="roundRect">
             <a:avLst>
@@ -10608,7 +10608,7 @@
         </p:nvSpPr>
         <p:spPr>
           <a:xfrm>
-            <a:off x="4526279" y="4617720"/>
+            <a:off x="4526279" y="4498848"/>
             <a:ext cx="457200" cy="457200"/>
           </a:xfrm>
           <a:prstGeom prst="ellipse">
@@ -10660,7 +10660,7 @@
         </p:nvSpPr>
         <p:spPr>
           <a:xfrm>
-            <a:off x="5120640" y="4645152"/>
+            <a:off x="5120640" y="4526280"/>
             <a:ext cx="2560320" cy="411480"/>
           </a:xfrm>
           <a:prstGeom prst="rect">
@@ -10695,8 +10695,8 @@
         </p:nvSpPr>
         <p:spPr>
           <a:xfrm>
-            <a:off x="4526279" y="5166360"/>
-            <a:ext cx="3108960" cy="914400"/>
+            <a:off x="4526279" y="5029200"/>
+            <a:ext cx="3108960" cy="822960"/>
           </a:xfrm>
           <a:prstGeom prst="rect">
             <a:avLst/>
@@ -10717,7 +10717,7 @@
                 </a:solidFill>
                 <a:latin typeface="Calibri"/>
               </a:rPr>
-              <a:t>Random 5-fold ×5 (the paper's, for comparison) and leave-one-day-out (predict a whole new session, the realistic case).</a:t>
+              <a:t>Repeated nested 5-fold CV for comparison, and leave-one-day-out to test generalisation to an unseen session.</a:t>
             </a:r>
           </a:p>
         </p:txBody>
@@ -10730,8 +10730,8 @@
         </p:nvSpPr>
         <p:spPr>
           <a:xfrm>
-            <a:off x="8046719" y="4434840"/>
-            <a:ext cx="3520440" cy="1691640"/>
+            <a:off x="8046719" y="4343400"/>
+            <a:ext cx="3520440" cy="1554480"/>
           </a:xfrm>
           <a:prstGeom prst="roundRect">
             <a:avLst>
@@ -10776,7 +10776,7 @@
         </p:nvSpPr>
         <p:spPr>
           <a:xfrm>
-            <a:off x="8275319" y="4617720"/>
+            <a:off x="8275319" y="4498848"/>
             <a:ext cx="457200" cy="457200"/>
           </a:xfrm>
           <a:prstGeom prst="ellipse">
@@ -10828,7 +10828,7 @@
         </p:nvSpPr>
         <p:spPr>
           <a:xfrm>
-            <a:off x="8869680" y="4645152"/>
+            <a:off x="8869680" y="4526280"/>
             <a:ext cx="2560320" cy="411480"/>
           </a:xfrm>
           <a:prstGeom prst="rect">
@@ -10863,8 +10863,8 @@
         </p:nvSpPr>
         <p:spPr>
           <a:xfrm>
-            <a:off x="8275319" y="5166360"/>
-            <a:ext cx="3108960" cy="914400"/>
+            <a:off x="8275319" y="5029200"/>
+            <a:ext cx="3108960" cy="822960"/>
           </a:xfrm>
           <a:prstGeom prst="rect">
             <a:avLst/>
@@ -10886,6 +10886,41 @@
                 <a:latin typeface="Calibri"/>
               </a:rPr>
               <a:t>A faithful 1:1 Python port of the paper's MATLAB scripts (baseline), plus the extended study: 12 experiments, 16 figures, 10 unit tests.</a:t>
+            </a:r>
+          </a:p>
+        </p:txBody>
+      </p:sp>
+      <p:sp>
+        <p:nvSpPr>
+          <p:cNvPr id="19" name="TextBox 18"/>
+          <p:cNvSpPr txBox="1"/>
+          <p:nvPr/>
+        </p:nvSpPr>
+        <p:spPr>
+          <a:xfrm>
+            <a:off x="548640" y="5989320"/>
+            <a:ext cx="11064240" cy="320040"/>
+          </a:xfrm>
+          <a:prstGeom prst="rect">
+            <a:avLst/>
+          </a:prstGeom>
+          <a:noFill/>
+        </p:spPr>
+        <p:txBody>
+          <a:bodyPr wrap="square" anchor="t" lIns="0" rIns="0" tIns="0" bIns="0">
+            <a:spAutoFit/>
+          </a:bodyPr>
+          <a:lstStyle/>
+          <a:p>
+            <a:pPr algn="l"/>
+            <a:r>
+              <a:rPr sz="1500" b="1" i="1">
+                <a:solidFill>
+                  <a:srgbClr val="0F1B2D"/>
+                </a:solidFill>
+                <a:latin typeface="Calibri"/>
+              </a:rPr>
+              <a:t>We evaluate both predictive accuracy and whether it holds on a new day.</a:t>
             </a:r>
           </a:p>
         </p:txBody>
@@ -11619,7 +11654,7 @@
                 </a:solidFill>
                 <a:latin typeface="Calibri"/>
               </a:rPr>
-              <a:t>RESULTS</a:t>
+              <a:t>RESULTS · RANDOM CV</a:t>
             </a:r>
           </a:p>
         </p:txBody>
@@ -11654,7 +11689,7 @@
                 </a:solidFill>
                 <a:latin typeface="Cambria"/>
               </a:rPr>
-              <a:t>We beat the original study on both subjects</a:t>
+              <a:t>Our best models: lower MSE than the paper's references</a:t>
             </a:r>
           </a:p>
         </p:txBody>
@@ -11840,8 +11875,8 @@
                 </a:solidFill>
                 <a:latin typeface="Calibri"/>
               </a:rPr>
-              <a:t>Subject 1 MSE (ours)
-paper: 0.0089</a:t>
+              <a:t>S1, ours (ensemble)
+paper ref.: 0.0089 (lin. reg.)</a:t>
             </a:r>
           </a:p>
         </p:txBody>
@@ -11922,7 +11957,7 @@
                 </a:solidFill>
                 <a:latin typeface="Cambria"/>
               </a:rPr>
-              <a:t>−11 %</a:t>
+              <a:t>R² 0.88</a:t>
             </a:r>
           </a:p>
         </p:txBody>
@@ -11957,8 +11992,8 @@
                 </a:solidFill>
                 <a:latin typeface="Calibri"/>
               </a:rPr>
-              <a:t>error vs paper
-on Subject 1</a:t>
+              <a:t>S1 variance explained
+(out-of-fold)</a:t>
             </a:r>
           </a:p>
         </p:txBody>
@@ -12074,8 +12109,8 @@
                 </a:solidFill>
                 <a:latin typeface="Calibri"/>
               </a:rPr>
-              <a:t>Subject 2 MSE (ours)
-paper: 0.0168</a:t>
+              <a:t>S2, ours (SVR)
+paper ref.: 0.0168 (lin. reg.)</a:t>
             </a:r>
           </a:p>
         </p:txBody>
@@ -12156,7 +12191,7 @@
                 </a:solidFill>
                 <a:latin typeface="Cambria"/>
               </a:rPr>
-              <a:t>−35 %</a:t>
+              <a:t>R² 0.71</a:t>
             </a:r>
           </a:p>
         </p:txBody>
@@ -12191,8 +12226,8 @@
                 </a:solidFill>
                 <a:latin typeface="Calibri"/>
               </a:rPr>
-              <a:t>error vs paper
-on Subject 2</a:t>
+              <a:t>S2 variance explained
+(out-of-fold)</a:t>
             </a:r>
           </a:p>
         </p:txBody>
@@ -12251,8 +12286,8 @@
         </p:nvSpPr>
         <p:spPr>
           <a:xfrm>
-            <a:off x="777240" y="4919472"/>
-            <a:ext cx="5120640" cy="685800"/>
+            <a:off x="777240" y="4864608"/>
+            <a:ext cx="5120640" cy="1234440"/>
           </a:xfrm>
           <a:prstGeom prst="rect">
             <a:avLst/>
@@ -12267,40 +12302,14 @@
           <a:p>
             <a:pPr algn="l"/>
             <a:r>
-              <a:rPr sz="3000" b="1" i="0">
+              <a:rPr sz="1300" b="1" i="0">
                 <a:solidFill>
                   <a:srgbClr val="0F1B2D"/>
                 </a:solidFill>
-                <a:latin typeface="Cambria"/>
-              </a:rPr>
-              <a:t>R² = 0.88  /  0.71</a:t>
-            </a:r>
-          </a:p>
-        </p:txBody>
-      </p:sp>
-      <p:sp>
-        <p:nvSpPr>
-          <p:cNvPr id="20" name="TextBox 19"/>
-          <p:cNvSpPr txBox="1"/>
-          <p:nvPr/>
-        </p:nvSpPr>
-        <p:spPr>
-          <a:xfrm>
-            <a:off x="777240" y="5623560"/>
-            <a:ext cx="5120640" cy="502920"/>
-          </a:xfrm>
-          <a:prstGeom prst="rect">
-            <a:avLst/>
-          </a:prstGeom>
-          <a:noFill/>
-        </p:spPr>
-        <p:txBody>
-          <a:bodyPr wrap="square" anchor="t" lIns="0" rIns="0" tIns="0" bIns="0">
-            <a:spAutoFit/>
-          </a:bodyPr>
-          <a:lstStyle/>
-          <a:p>
-            <a:pPr algn="l"/>
+                <a:latin typeface="Calibri"/>
+              </a:rPr>
+              <a:t>Not a like-for-like comparison. </a:t>
+            </a:r>
             <a:r>
               <a:rPr sz="1300" b="0" i="0">
                 <a:solidFill>
@@ -12308,14 +12317,14 @@
                 </a:solidFill>
                 <a:latin typeface="Calibri"/>
               </a:rPr>
-              <a:t>variance explained (S1 / S2), out-of-fold</a:t>
+              <a:t>Ours: best of 13 models, repeated nested 5-fold CV. Paper: linear regression under its own 10-fold CV. Unseen-day validation (next slides) shows the remaining challenge.</a:t>
             </a:r>
           </a:p>
         </p:txBody>
       </p:sp>
       <p:pic>
         <p:nvPicPr>
-          <p:cNvPr id="21" name="Picture 20" descr="F6_pred_vs_actual.png"/>
+          <p:cNvPr id="20" name="Picture 19" descr="F6_pred_vs_actual.png"/>
           <p:cNvPicPr>
             <a:picLocks noChangeAspect="1"/>
           </p:cNvPicPr>
@@ -13021,7 +13030,7 @@
                 </a:solidFill>
                 <a:latin typeface="Calibri"/>
               </a:rPr>
-              <a:t>error on unseen days, Subject 1 (R² 0.78)</a:t>
+              <a:t>S1 unseen-day error, best model (OLS, MSE 0.014, R² 0.79)</a:t>
             </a:r>
           </a:p>
         </p:txBody>
@@ -13253,7 +13262,7 @@
                 </a:solidFill>
                 <a:latin typeface="Calibri"/>
               </a:rPr>
-              <a:t>Subject 2: day-level shifts are invisible to the sensors</a:t>
+              <a:t>S2 unseen-day error, best model (Grad. Boosting, MSE 0.026); GP shown: 0.046</a:t>
             </a:r>
           </a:p>
         </p:txBody>
@@ -13893,7 +13902,7 @@
                 </a:solidFill>
                 <a:latin typeface="Calibri"/>
               </a:rPr>
-              <a:t>EMG is the strongest group </a:t>
+              <a:t>EMG is the strongest group in grouped importance </a:t>
             </a:r>
             <a:r>
               <a:rPr sz="1500" b="0">
@@ -13902,7 +13911,7 @@
                 </a:solidFill>
                 <a:latin typeface="Calibri"/>
               </a:rPr>
-              <a:t>in grouped importance for both subjects; dropping the controls costs little, which helps transfer to other exo hardware</a:t>
+              <a:t>for both subjects. The ablation is a different test: for S2 (GP) step-only ≈ EMG-only (0.0141 vs 0.0146).</a:t>
             </a:r>
           </a:p>
         </p:txBody>

--- a/docs/MetaCost_Presentation.pptx
+++ b/docs/MetaCost_Presentation.pptx
@@ -4828,7 +4828,7 @@
                 </a:solidFill>
                 <a:latin typeface="Cambria"/>
               </a:rPr>
-              <a:t>Fixing the weaknesses, without collecting new data</a:t>
+              <a:t>Reducing unseen-day error with just 3 mask spot-checks</a:t>
             </a:r>
           </a:p>
         </p:txBody>

--- a/docs/MetaCost_Presentation.pptx
+++ b/docs/MetaCost_Presentation.pptx
@@ -18,8 +18,6 @@
     <p:sldId id="266" r:id="rId18"/>
     <p:sldId id="267" r:id="rId19"/>
     <p:sldId id="268" r:id="rId20"/>
-    <p:sldId id="269" r:id="rId21"/>
-    <p:sldId id="270" r:id="rId22"/>
   </p:sldIdLst>
   <p:sldSz cx="12191695" cy="6858000" type="screen4x3"/>
   <p:notesSz cx="6858000" cy="9144000"/>
@@ -796,147 +794,7 @@
           <a:lstStyle/>
           <a:p>
             <a:r>
-              <a:t>Thank the panel and invite questions.</a:t>
-            </a:r>
-          </a:p>
-        </p:txBody>
-      </p:sp>
-      <p:sp>
-        <p:nvSpPr>
-          <p:cNvPr id="4" name="Slide Number Placeholder 3"/>
-          <p:cNvSpPr>
-            <a:spLocks noGrp="1"/>
-          </p:cNvSpPr>
-          <p:nvPr>
-            <p:ph type="sldNum" idx="5" sz="quarter"/>
-          </p:nvPr>
-        </p:nvSpPr>
-        <p:spPr/>
-      </p:sp>
-    </p:spTree>
-  </p:cSld>
-  <p:clrMapOvr>
-    <a:masterClrMapping/>
-  </p:clrMapOvr>
-</p:notes>
-</file>
-
-<file path=ppt/notesSlides/notesSlide14.xml><?xml version="1.0" encoding="utf-8"?>
-<p:notes xmlns:a="http://schemas.openxmlformats.org/drawingml/2006/main" xmlns:p="http://schemas.openxmlformats.org/presentationml/2006/main" xmlns:r="http://schemas.openxmlformats.org/officeDocument/2006/relationships">
-  <p:cSld>
-    <p:spTree>
-      <p:nvGrpSpPr>
-        <p:cNvPr id="1" name=""/>
-        <p:cNvGrpSpPr/>
-        <p:nvPr/>
-      </p:nvGrpSpPr>
-      <p:grpSpPr>
-        <a:xfrm>
-          <a:off x="0" y="0"/>
-          <a:ext cx="0" cy="0"/>
-          <a:chOff x="0" y="0"/>
-          <a:chExt cx="0" cy="0"/>
-        </a:xfrm>
-      </p:grpSpPr>
-      <p:sp>
-        <p:nvSpPr>
-          <p:cNvPr id="2" name="Slide Image Placeholder 1"/>
-          <p:cNvSpPr>
-            <a:spLocks noGrp="1"/>
-          </p:cNvSpPr>
-          <p:nvPr>
-            <p:ph type="sldImg" idx="2"/>
-          </p:nvPr>
-        </p:nvSpPr>
-        <p:spPr/>
-      </p:sp>
-      <p:sp>
-        <p:nvSpPr>
-          <p:cNvPr id="3" name="Notes Placeholder 2"/>
-          <p:cNvSpPr>
-            <a:spLocks noGrp="1"/>
-          </p:cNvSpPr>
-          <p:nvPr>
-            <p:ph type="body" idx="3" sz="quarter"/>
-          </p:nvPr>
-        </p:nvSpPr>
-        <p:spPr/>
-        <p:txBody>
-          <a:bodyPr/>
-          <a:lstStyle/>
-          <a:p>
-            <a:r>
-              <a:t>Left: PCA ignores the target. Supervised PLS with one component matches PCA with 8 on S2, which explains the paper's poor PCA result. Right: train on one person, test on the other: worse than predicting the mean. Per-subject z-scoring cuts the error 3x but is still not useful, so models must be subject-specific (or need many more subjects plus anthropometrics).</a:t>
-            </a:r>
-          </a:p>
-        </p:txBody>
-      </p:sp>
-      <p:sp>
-        <p:nvSpPr>
-          <p:cNvPr id="4" name="Slide Number Placeholder 3"/>
-          <p:cNvSpPr>
-            <a:spLocks noGrp="1"/>
-          </p:cNvSpPr>
-          <p:nvPr>
-            <p:ph type="sldNum" idx="5" sz="quarter"/>
-          </p:nvPr>
-        </p:nvSpPr>
-        <p:spPr/>
-      </p:sp>
-    </p:spTree>
-  </p:cSld>
-  <p:clrMapOvr>
-    <a:masterClrMapping/>
-  </p:clrMapOvr>
-</p:notes>
-</file>
-
-<file path=ppt/notesSlides/notesSlide15.xml><?xml version="1.0" encoding="utf-8"?>
-<p:notes xmlns:a="http://schemas.openxmlformats.org/drawingml/2006/main" xmlns:p="http://schemas.openxmlformats.org/presentationml/2006/main" xmlns:r="http://schemas.openxmlformats.org/officeDocument/2006/relationships">
-  <p:cSld>
-    <p:spTree>
-      <p:nvGrpSpPr>
-        <p:cNvPr id="1" name=""/>
-        <p:cNvGrpSpPr/>
-        <p:nvPr/>
-      </p:nvGrpSpPr>
-      <p:grpSpPr>
-        <a:xfrm>
-          <a:off x="0" y="0"/>
-          <a:ext cx="0" cy="0"/>
-          <a:chOff x="0" y="0"/>
-          <a:chExt cx="0" cy="0"/>
-        </a:xfrm>
-      </p:grpSpPr>
-      <p:sp>
-        <p:nvSpPr>
-          <p:cNvPr id="2" name="Slide Image Placeholder 1"/>
-          <p:cNvSpPr>
-            <a:spLocks noGrp="1"/>
-          </p:cNvSpPr>
-          <p:nvPr>
-            <p:ph type="sldImg" idx="2"/>
-          </p:nvPr>
-        </p:nvSpPr>
-        <p:spPr/>
-      </p:sp>
-      <p:sp>
-        <p:nvSpPr>
-          <p:cNvPr id="3" name="Notes Placeholder 2"/>
-          <p:cNvSpPr>
-            <a:spLocks noGrp="1"/>
-          </p:cNvSpPr>
-          <p:nvPr>
-            <p:ph type="body" idx="3" sz="quarter"/>
-          </p:nvPr>
-        </p:nvSpPr>
-        <p:spPr/>
-        <p:txBody>
-          <a:bodyPr/>
-          <a:lstStyle/>
-          <a:p>
-            <a:r>
-              <a:t>Calibration: the GP's nominal 95% interval covers 94% of unseen-day points for S1, close to perfect. For S2 it covers 77%, so it is over-confident on the harder subject, but the intervals are visibly wider there. Learning curves are still falling for S1 at 144 samples: more sessions should keep improving accuracy.</a:t>
+              <a:t>Thank the panel.</a:t>
             </a:r>
           </a:p>
         </p:txBody>
@@ -7099,7 +6957,7 @@
                 </a:solidFill>
                 <a:latin typeface="Cambria"/>
               </a:rPr>
-              <a:t>Thank you, questions?</a:t>
+              <a:t>Thank you</a:t>
             </a:r>
           </a:p>
         </p:txBody>
@@ -7243,868 +7101,6 @@
                 <a:latin typeface="Calibri"/>
               </a:rPr>
               <a:t>Ref: Krimsky &amp; Ng, CS229 2018 · Zhang et al., Science 2017 · MacKay 1992 · Rasmussen &amp; Williams 2006</a:t>
-            </a:r>
-          </a:p>
-        </p:txBody>
-      </p:sp>
-    </p:spTree>
-  </p:cSld>
-  <p:clrMapOvr>
-    <a:masterClrMapping/>
-  </p:clrMapOvr>
-</p:sld>
-</file>
-
-<file path=ppt/slides/slide14.xml><?xml version="1.0" encoding="utf-8"?>
-<p:sld xmlns:a="http://schemas.openxmlformats.org/drawingml/2006/main" xmlns:p="http://schemas.openxmlformats.org/presentationml/2006/main" xmlns:r="http://schemas.openxmlformats.org/officeDocument/2006/relationships">
-  <p:cSld>
-    <p:bg>
-      <p:bgPr>
-        <a:solidFill>
-          <a:srgbClr val="FFFFFF"/>
-        </a:solidFill>
-        <a:effectLst/>
-      </p:bgPr>
-    </p:bg>
-    <p:spTree>
-      <p:nvGrpSpPr>
-        <p:cNvPr id="1" name=""/>
-        <p:cNvGrpSpPr/>
-        <p:nvPr/>
-      </p:nvGrpSpPr>
-      <p:grpSpPr/>
-      <p:sp>
-        <p:nvSpPr>
-          <p:cNvPr id="2" name="TextBox 1"/>
-          <p:cNvSpPr txBox="1"/>
-          <p:nvPr/>
-        </p:nvSpPr>
-        <p:spPr>
-          <a:xfrm>
-            <a:off x="548640" y="347472"/>
-            <a:ext cx="9144000" cy="274320"/>
-          </a:xfrm>
-          <a:prstGeom prst="rect">
-            <a:avLst/>
-          </a:prstGeom>
-          <a:noFill/>
-        </p:spPr>
-        <p:txBody>
-          <a:bodyPr wrap="square" anchor="t" lIns="0" rIns="0" tIns="0" bIns="0">
-            <a:spAutoFit/>
-          </a:bodyPr>
-          <a:lstStyle/>
-          <a:p>
-            <a:pPr algn="l"/>
-            <a:r>
-              <a:rPr sz="1200" b="1" i="0">
-                <a:solidFill>
-                  <a:srgbClr val="2A78D6"/>
-                </a:solidFill>
-                <a:latin typeface="Calibri"/>
-              </a:rPr>
-              <a:t>BACKUP · DEEPER ANALYSIS</a:t>
-            </a:r>
-          </a:p>
-        </p:txBody>
-      </p:sp>
-      <p:sp>
-        <p:nvSpPr>
-          <p:cNvPr id="3" name="TextBox 2"/>
-          <p:cNvSpPr txBox="1"/>
-          <p:nvPr/>
-        </p:nvSpPr>
-        <p:spPr>
-          <a:xfrm>
-            <a:off x="548640" y="621792"/>
-            <a:ext cx="11064240" cy="731520"/>
-          </a:xfrm>
-          <a:prstGeom prst="rect">
-            <a:avLst/>
-          </a:prstGeom>
-          <a:noFill/>
-        </p:spPr>
-        <p:txBody>
-          <a:bodyPr wrap="square" anchor="t" lIns="0" rIns="0" tIns="0" bIns="0">
-            <a:spAutoFit/>
-          </a:bodyPr>
-          <a:lstStyle/>
-          <a:p>
-            <a:pPr algn="l"/>
-            <a:r>
-              <a:rPr sz="3000" b="1" i="0">
-                <a:solidFill>
-                  <a:srgbClr val="0F1B2D"/>
-                </a:solidFill>
-                <a:latin typeface="Cambria"/>
-              </a:rPr>
-              <a:t>Why PCA failed, and why one model cannot fit everyone</a:t>
-            </a:r>
-          </a:p>
-        </p:txBody>
-      </p:sp>
-      <p:sp>
-        <p:nvSpPr>
-          <p:cNvPr id="4" name="TextBox 3"/>
-          <p:cNvSpPr txBox="1"/>
-          <p:nvPr/>
-        </p:nvSpPr>
-        <p:spPr>
-          <a:xfrm>
-            <a:off x="548640" y="6419088"/>
-            <a:ext cx="7315200" cy="274320"/>
-          </a:xfrm>
-          <a:prstGeom prst="rect">
-            <a:avLst/>
-          </a:prstGeom>
-          <a:noFill/>
-        </p:spPr>
-        <p:txBody>
-          <a:bodyPr wrap="square" anchor="t" lIns="0" rIns="0" tIns="0" bIns="0">
-            <a:spAutoFit/>
-          </a:bodyPr>
-          <a:lstStyle/>
-          <a:p>
-            <a:pPr algn="l"/>
-            <a:r>
-              <a:rPr sz="1000" b="0" i="0">
-                <a:solidFill>
-                  <a:srgbClr val="555B66"/>
-                </a:solidFill>
-                <a:latin typeface="Calibri"/>
-              </a:rPr>
-              <a:t>MetaCost · Predicting metabolic cost during HILO</a:t>
-            </a:r>
-          </a:p>
-        </p:txBody>
-      </p:sp>
-      <p:sp>
-        <p:nvSpPr>
-          <p:cNvPr id="5" name="TextBox 4"/>
-          <p:cNvSpPr txBox="1"/>
-          <p:nvPr/>
-        </p:nvSpPr>
-        <p:spPr>
-          <a:xfrm>
-            <a:off x="10972800" y="6419088"/>
-            <a:ext cx="667512" cy="274320"/>
-          </a:xfrm>
-          <a:prstGeom prst="rect">
-            <a:avLst/>
-          </a:prstGeom>
-          <a:noFill/>
-        </p:spPr>
-        <p:txBody>
-          <a:bodyPr wrap="square" anchor="t" lIns="0" rIns="0" tIns="0" bIns="0">
-            <a:spAutoFit/>
-          </a:bodyPr>
-          <a:lstStyle/>
-          <a:p>
-            <a:pPr algn="r"/>
-            <a:r>
-              <a:rPr sz="1000" b="0" i="0">
-                <a:solidFill>
-                  <a:srgbClr val="555B66"/>
-                </a:solidFill>
-                <a:latin typeface="Calibri"/>
-              </a:rPr>
-              <a:t>14</a:t>
-            </a:r>
-          </a:p>
-        </p:txBody>
-      </p:sp>
-      <p:pic>
-        <p:nvPicPr>
-          <p:cNvPr id="6" name="Picture 5" descr="F9_dimensionality_reduction.png"/>
-          <p:cNvPicPr>
-            <a:picLocks noChangeAspect="1"/>
-          </p:cNvPicPr>
-          <p:nvPr/>
-        </p:nvPicPr>
-        <p:blipFill>
-          <a:blip r:embed="rId3"/>
-          <a:stretch>
-            <a:fillRect/>
-          </a:stretch>
-        </p:blipFill>
-        <p:spPr>
-          <a:xfrm>
-            <a:off x="457200" y="1837943"/>
-            <a:ext cx="5669280" cy="2267712"/>
-          </a:xfrm>
-          <a:prstGeom prst="rect">
-            <a:avLst/>
-          </a:prstGeom>
-        </p:spPr>
-      </p:pic>
-      <p:pic>
-        <p:nvPicPr>
-          <p:cNvPr id="7" name="Picture 6" descr="F12_cross_subject.png"/>
-          <p:cNvPicPr>
-            <a:picLocks noChangeAspect="1"/>
-          </p:cNvPicPr>
-          <p:nvPr/>
-        </p:nvPicPr>
-        <p:blipFill>
-          <a:blip r:embed="rId4"/>
-          <a:stretch>
-            <a:fillRect/>
-          </a:stretch>
-        </p:blipFill>
-        <p:spPr>
-          <a:xfrm>
-            <a:off x="6309360" y="1623060"/>
-            <a:ext cx="5394960" cy="2697480"/>
-          </a:xfrm>
-          <a:prstGeom prst="rect">
-            <a:avLst/>
-          </a:prstGeom>
-        </p:spPr>
-      </p:pic>
-      <p:sp>
-        <p:nvSpPr>
-          <p:cNvPr id="8" name="Rounded Rectangle 7"/>
-          <p:cNvSpPr/>
-          <p:nvPr/>
-        </p:nvSpPr>
-        <p:spPr>
-          <a:xfrm>
-            <a:off x="548640" y="4754880"/>
-            <a:ext cx="5440680" cy="1463040"/>
-          </a:xfrm>
-          <a:prstGeom prst="roundRect">
-            <a:avLst>
-              <a:gd name="adj" fmla="val 8000"/>
-            </a:avLst>
-          </a:prstGeom>
-          <a:solidFill>
-            <a:srgbClr val="F1F5FB"/>
-          </a:solidFill>
-          <a:ln>
-            <a:noFill/>
-          </a:ln>
-          <a:effectLst/>
-        </p:spPr>
-        <p:style>
-          <a:lnRef idx="1">
-            <a:schemeClr val="accent1"/>
-          </a:lnRef>
-          <a:fillRef idx="3">
-            <a:schemeClr val="accent1"/>
-          </a:fillRef>
-          <a:effectRef idx="2">
-            <a:schemeClr val="accent1"/>
-          </a:effectRef>
-          <a:fontRef idx="minor">
-            <a:schemeClr val="lt1"/>
-          </a:fontRef>
-        </p:style>
-        <p:txBody>
-          <a:bodyPr rtlCol="0" anchor="ctr"/>
-          <a:lstStyle/>
-          <a:p>
-            <a:pPr algn="ctr"/>
-          </a:p>
-        </p:txBody>
-      </p:sp>
-      <p:sp>
-        <p:nvSpPr>
-          <p:cNvPr id="9" name="TextBox 8"/>
-          <p:cNvSpPr txBox="1"/>
-          <p:nvPr/>
-        </p:nvSpPr>
-        <p:spPr>
-          <a:xfrm>
-            <a:off x="777240" y="4873752"/>
-            <a:ext cx="5029200" cy="1280160"/>
-          </a:xfrm>
-          <a:prstGeom prst="rect">
-            <a:avLst/>
-          </a:prstGeom>
-          <a:noFill/>
-        </p:spPr>
-        <p:txBody>
-          <a:bodyPr wrap="square" anchor="t" lIns="0" rIns="0" tIns="0" bIns="0">
-            <a:spAutoFit/>
-          </a:bodyPr>
-          <a:lstStyle/>
-          <a:p>
-            <a:pPr algn="l">
-              <a:spcAft>
-                <a:spcPts val="400"/>
-              </a:spcAft>
-            </a:pPr>
-            <a:r>
-              <a:rPr sz="1700" b="1" i="0">
-                <a:solidFill>
-                  <a:srgbClr val="0F1B2D"/>
-                </a:solidFill>
-                <a:latin typeface="Calibri"/>
-              </a:rPr>
-              <a:t>Supervised &gt; unsupervised</a:t>
-            </a:r>
-          </a:p>
-          <a:p>
-            <a:pPr algn="l">
-              <a:spcAft>
-                <a:spcPts val="400"/>
-              </a:spcAft>
-            </a:pPr>
-            <a:r>
-              <a:rPr sz="1400" b="0" i="0">
-                <a:solidFill>
-                  <a:srgbClr val="555B66"/>
-                </a:solidFill>
-                <a:latin typeface="Calibri"/>
-              </a:rPr>
-              <a:t>1 PLS component (0.0138) = 8 PCA components on S2. Forward selection is greedy and unstable.</a:t>
-            </a:r>
-          </a:p>
-        </p:txBody>
-      </p:sp>
-      <p:sp>
-        <p:nvSpPr>
-          <p:cNvPr id="10" name="Rounded Rectangle 9"/>
-          <p:cNvSpPr/>
-          <p:nvPr/>
-        </p:nvSpPr>
-        <p:spPr>
-          <a:xfrm>
-            <a:off x="6309360" y="4754880"/>
-            <a:ext cx="5349240" cy="1463040"/>
-          </a:xfrm>
-          <a:prstGeom prst="roundRect">
-            <a:avLst>
-              <a:gd name="adj" fmla="val 8000"/>
-            </a:avLst>
-          </a:prstGeom>
-          <a:solidFill>
-            <a:srgbClr val="F1F5FB"/>
-          </a:solidFill>
-          <a:ln>
-            <a:noFill/>
-          </a:ln>
-          <a:effectLst/>
-        </p:spPr>
-        <p:style>
-          <a:lnRef idx="1">
-            <a:schemeClr val="accent1"/>
-          </a:lnRef>
-          <a:fillRef idx="3">
-            <a:schemeClr val="accent1"/>
-          </a:fillRef>
-          <a:effectRef idx="2">
-            <a:schemeClr val="accent1"/>
-          </a:effectRef>
-          <a:fontRef idx="minor">
-            <a:schemeClr val="lt1"/>
-          </a:fontRef>
-        </p:style>
-        <p:txBody>
-          <a:bodyPr rtlCol="0" anchor="ctr"/>
-          <a:lstStyle/>
-          <a:p>
-            <a:pPr algn="ctr"/>
-          </a:p>
-        </p:txBody>
-      </p:sp>
-      <p:sp>
-        <p:nvSpPr>
-          <p:cNvPr id="11" name="TextBox 10"/>
-          <p:cNvSpPr txBox="1"/>
-          <p:nvPr/>
-        </p:nvSpPr>
-        <p:spPr>
-          <a:xfrm>
-            <a:off x="6537960" y="4873752"/>
-            <a:ext cx="4937760" cy="1280160"/>
-          </a:xfrm>
-          <a:prstGeom prst="rect">
-            <a:avLst/>
-          </a:prstGeom>
-          <a:noFill/>
-        </p:spPr>
-        <p:txBody>
-          <a:bodyPr wrap="square" anchor="t" lIns="0" rIns="0" tIns="0" bIns="0">
-            <a:spAutoFit/>
-          </a:bodyPr>
-          <a:lstStyle/>
-          <a:p>
-            <a:pPr algn="l">
-              <a:spcAft>
-                <a:spcPts val="400"/>
-              </a:spcAft>
-            </a:pPr>
-            <a:r>
-              <a:rPr sz="1700" b="1" i="0">
-                <a:solidFill>
-                  <a:srgbClr val="0F1B2D"/>
-                </a:solidFill>
-                <a:latin typeface="Calibri"/>
-              </a:rPr>
-              <a:t>People are different</a:t>
-            </a:r>
-          </a:p>
-          <a:p>
-            <a:pPr algn="l">
-              <a:spcAft>
-                <a:spcPts val="400"/>
-              </a:spcAft>
-            </a:pPr>
-            <a:r>
-              <a:rPr sz="1400" b="0" i="0">
-                <a:solidFill>
-                  <a:srgbClr val="555B66"/>
-                </a:solidFill>
-                <a:latin typeface="Calibri"/>
-              </a:rPr>
-              <a:t>S1 → S2: MSE 0.152 vs 0.036 for the mean. Per-subject z-scoring → 0.046. Personal models are needed.</a:t>
-            </a:r>
-          </a:p>
-        </p:txBody>
-      </p:sp>
-    </p:spTree>
-  </p:cSld>
-  <p:clrMapOvr>
-    <a:masterClrMapping/>
-  </p:clrMapOvr>
-</p:sld>
-</file>
-
-<file path=ppt/slides/slide15.xml><?xml version="1.0" encoding="utf-8"?>
-<p:sld xmlns:a="http://schemas.openxmlformats.org/drawingml/2006/main" xmlns:p="http://schemas.openxmlformats.org/presentationml/2006/main" xmlns:r="http://schemas.openxmlformats.org/officeDocument/2006/relationships">
-  <p:cSld>
-    <p:bg>
-      <p:bgPr>
-        <a:solidFill>
-          <a:srgbClr val="FFFFFF"/>
-        </a:solidFill>
-        <a:effectLst/>
-      </p:bgPr>
-    </p:bg>
-    <p:spTree>
-      <p:nvGrpSpPr>
-        <p:cNvPr id="1" name=""/>
-        <p:cNvGrpSpPr/>
-        <p:nvPr/>
-      </p:nvGrpSpPr>
-      <p:grpSpPr/>
-      <p:sp>
-        <p:nvSpPr>
-          <p:cNvPr id="2" name="TextBox 1"/>
-          <p:cNvSpPr txBox="1"/>
-          <p:nvPr/>
-        </p:nvSpPr>
-        <p:spPr>
-          <a:xfrm>
-            <a:off x="548640" y="347472"/>
-            <a:ext cx="9144000" cy="274320"/>
-          </a:xfrm>
-          <a:prstGeom prst="rect">
-            <a:avLst/>
-          </a:prstGeom>
-          <a:noFill/>
-        </p:spPr>
-        <p:txBody>
-          <a:bodyPr wrap="square" anchor="t" lIns="0" rIns="0" tIns="0" bIns="0">
-            <a:spAutoFit/>
-          </a:bodyPr>
-          <a:lstStyle/>
-          <a:p>
-            <a:pPr algn="l"/>
-            <a:r>
-              <a:rPr sz="1200" b="1" i="0">
-                <a:solidFill>
-                  <a:srgbClr val="2A78D6"/>
-                </a:solidFill>
-                <a:latin typeface="Calibri"/>
-              </a:rPr>
-              <a:t>BACKUP · RELIABILITY</a:t>
-            </a:r>
-          </a:p>
-        </p:txBody>
-      </p:sp>
-      <p:sp>
-        <p:nvSpPr>
-          <p:cNvPr id="3" name="TextBox 2"/>
-          <p:cNvSpPr txBox="1"/>
-          <p:nvPr/>
-        </p:nvSpPr>
-        <p:spPr>
-          <a:xfrm>
-            <a:off x="548640" y="621792"/>
-            <a:ext cx="11064240" cy="731520"/>
-          </a:xfrm>
-          <a:prstGeom prst="rect">
-            <a:avLst/>
-          </a:prstGeom>
-          <a:noFill/>
-        </p:spPr>
-        <p:txBody>
-          <a:bodyPr wrap="square" anchor="t" lIns="0" rIns="0" tIns="0" bIns="0">
-            <a:spAutoFit/>
-          </a:bodyPr>
-          <a:lstStyle/>
-          <a:p>
-            <a:pPr algn="l"/>
-            <a:r>
-              <a:rPr sz="3000" b="1" i="0">
-                <a:solidFill>
-                  <a:srgbClr val="0F1B2D"/>
-                </a:solidFill>
-                <a:latin typeface="Cambria"/>
-              </a:rPr>
-              <a:t>The model knows when it is unsure, and more data would help</a:t>
-            </a:r>
-          </a:p>
-        </p:txBody>
-      </p:sp>
-      <p:sp>
-        <p:nvSpPr>
-          <p:cNvPr id="4" name="TextBox 3"/>
-          <p:cNvSpPr txBox="1"/>
-          <p:nvPr/>
-        </p:nvSpPr>
-        <p:spPr>
-          <a:xfrm>
-            <a:off x="548640" y="6419088"/>
-            <a:ext cx="7315200" cy="274320"/>
-          </a:xfrm>
-          <a:prstGeom prst="rect">
-            <a:avLst/>
-          </a:prstGeom>
-          <a:noFill/>
-        </p:spPr>
-        <p:txBody>
-          <a:bodyPr wrap="square" anchor="t" lIns="0" rIns="0" tIns="0" bIns="0">
-            <a:spAutoFit/>
-          </a:bodyPr>
-          <a:lstStyle/>
-          <a:p>
-            <a:pPr algn="l"/>
-            <a:r>
-              <a:rPr sz="1000" b="0" i="0">
-                <a:solidFill>
-                  <a:srgbClr val="555B66"/>
-                </a:solidFill>
-                <a:latin typeface="Calibri"/>
-              </a:rPr>
-              <a:t>MetaCost · Predicting metabolic cost during HILO</a:t>
-            </a:r>
-          </a:p>
-        </p:txBody>
-      </p:sp>
-      <p:sp>
-        <p:nvSpPr>
-          <p:cNvPr id="5" name="TextBox 4"/>
-          <p:cNvSpPr txBox="1"/>
-          <p:nvPr/>
-        </p:nvSpPr>
-        <p:spPr>
-          <a:xfrm>
-            <a:off x="10972800" y="6419088"/>
-            <a:ext cx="667512" cy="274320"/>
-          </a:xfrm>
-          <a:prstGeom prst="rect">
-            <a:avLst/>
-          </a:prstGeom>
-          <a:noFill/>
-        </p:spPr>
-        <p:txBody>
-          <a:bodyPr wrap="square" anchor="t" lIns="0" rIns="0" tIns="0" bIns="0">
-            <a:spAutoFit/>
-          </a:bodyPr>
-          <a:lstStyle/>
-          <a:p>
-            <a:pPr algn="r"/>
-            <a:r>
-              <a:rPr sz="1000" b="0" i="0">
-                <a:solidFill>
-                  <a:srgbClr val="555B66"/>
-                </a:solidFill>
-                <a:latin typeface="Calibri"/>
-              </a:rPr>
-              <a:t>15</a:t>
-            </a:r>
-          </a:p>
-        </p:txBody>
-      </p:sp>
-      <p:pic>
-        <p:nvPicPr>
-          <p:cNvPr id="6" name="Picture 5" descr="F11_calibration.png"/>
-          <p:cNvPicPr>
-            <a:picLocks noChangeAspect="1"/>
-          </p:cNvPicPr>
-          <p:nvPr/>
-        </p:nvPicPr>
-        <p:blipFill>
-          <a:blip r:embed="rId3"/>
-          <a:stretch>
-            <a:fillRect/>
-          </a:stretch>
-        </p:blipFill>
-        <p:spPr>
-          <a:xfrm>
-            <a:off x="728197" y="1371600"/>
-            <a:ext cx="3664245" cy="3429000"/>
-          </a:xfrm>
-          <a:prstGeom prst="rect">
-            <a:avLst/>
-          </a:prstGeom>
-        </p:spPr>
-      </p:pic>
-      <p:pic>
-        <p:nvPicPr>
-          <p:cNvPr id="7" name="Picture 6" descr="F10_learning_curve.png"/>
-          <p:cNvPicPr>
-            <a:picLocks noChangeAspect="1"/>
-          </p:cNvPicPr>
-          <p:nvPr/>
-        </p:nvPicPr>
-        <p:blipFill>
-          <a:blip r:embed="rId4"/>
-          <a:stretch>
-            <a:fillRect/>
-          </a:stretch>
-        </p:blipFill>
-        <p:spPr>
-          <a:xfrm>
-            <a:off x="4754880" y="1696212"/>
-            <a:ext cx="6949440" cy="2779776"/>
-          </a:xfrm>
-          <a:prstGeom prst="rect">
-            <a:avLst/>
-          </a:prstGeom>
-        </p:spPr>
-      </p:pic>
-      <p:sp>
-        <p:nvSpPr>
-          <p:cNvPr id="8" name="Rounded Rectangle 7"/>
-          <p:cNvSpPr/>
-          <p:nvPr/>
-        </p:nvSpPr>
-        <p:spPr>
-          <a:xfrm>
-            <a:off x="548640" y="4983480"/>
-            <a:ext cx="4023360" cy="1417320"/>
-          </a:xfrm>
-          <a:prstGeom prst="roundRect">
-            <a:avLst>
-              <a:gd name="adj" fmla="val 8000"/>
-            </a:avLst>
-          </a:prstGeom>
-          <a:solidFill>
-            <a:srgbClr val="F1F5FB"/>
-          </a:solidFill>
-          <a:ln>
-            <a:noFill/>
-          </a:ln>
-          <a:effectLst/>
-        </p:spPr>
-        <p:style>
-          <a:lnRef idx="1">
-            <a:schemeClr val="accent1"/>
-          </a:lnRef>
-          <a:fillRef idx="3">
-            <a:schemeClr val="accent1"/>
-          </a:fillRef>
-          <a:effectRef idx="2">
-            <a:schemeClr val="accent1"/>
-          </a:effectRef>
-          <a:fontRef idx="minor">
-            <a:schemeClr val="lt1"/>
-          </a:fontRef>
-        </p:style>
-        <p:txBody>
-          <a:bodyPr rtlCol="0" anchor="ctr"/>
-          <a:lstStyle/>
-          <a:p>
-            <a:pPr algn="ctr"/>
-          </a:p>
-        </p:txBody>
-      </p:sp>
-      <p:sp>
-        <p:nvSpPr>
-          <p:cNvPr id="9" name="TextBox 8"/>
-          <p:cNvSpPr txBox="1"/>
-          <p:nvPr/>
-        </p:nvSpPr>
-        <p:spPr>
-          <a:xfrm>
-            <a:off x="777240" y="5148072"/>
-            <a:ext cx="3566160" cy="685800"/>
-          </a:xfrm>
-          <a:prstGeom prst="rect">
-            <a:avLst/>
-          </a:prstGeom>
-          <a:noFill/>
-        </p:spPr>
-        <p:txBody>
-          <a:bodyPr wrap="square" anchor="t" lIns="0" rIns="0" tIns="0" bIns="0">
-            <a:spAutoFit/>
-          </a:bodyPr>
-          <a:lstStyle/>
-          <a:p>
-            <a:pPr algn="l"/>
-            <a:r>
-              <a:rPr sz="3200" b="1" i="0">
-                <a:solidFill>
-                  <a:srgbClr val="1BAF7A"/>
-                </a:solidFill>
-                <a:latin typeface="Cambria"/>
-              </a:rPr>
-              <a:t>94 %</a:t>
-            </a:r>
-          </a:p>
-        </p:txBody>
-      </p:sp>
-      <p:sp>
-        <p:nvSpPr>
-          <p:cNvPr id="10" name="TextBox 9"/>
-          <p:cNvSpPr txBox="1"/>
-          <p:nvPr/>
-        </p:nvSpPr>
-        <p:spPr>
-          <a:xfrm>
-            <a:off x="777240" y="5852160"/>
-            <a:ext cx="3566160" cy="502920"/>
-          </a:xfrm>
-          <a:prstGeom prst="rect">
-            <a:avLst/>
-          </a:prstGeom>
-          <a:noFill/>
-        </p:spPr>
-        <p:txBody>
-          <a:bodyPr wrap="square" anchor="t" lIns="0" rIns="0" tIns="0" bIns="0">
-            <a:spAutoFit/>
-          </a:bodyPr>
-          <a:lstStyle/>
-          <a:p>
-            <a:pPr algn="l"/>
-            <a:r>
-              <a:rPr sz="1300" b="0" i="0">
-                <a:solidFill>
-                  <a:srgbClr val="555B66"/>
-                </a:solidFill>
-                <a:latin typeface="Calibri"/>
-              </a:rPr>
-              <a:t>of unseen-day points inside the S1 95 % interval</a:t>
-            </a:r>
-          </a:p>
-        </p:txBody>
-      </p:sp>
-      <p:sp>
-        <p:nvSpPr>
-          <p:cNvPr id="11" name="Rounded Rectangle 10"/>
-          <p:cNvSpPr/>
-          <p:nvPr/>
-        </p:nvSpPr>
-        <p:spPr>
-          <a:xfrm>
-            <a:off x="4754880" y="4983480"/>
-            <a:ext cx="6903720" cy="1417320"/>
-          </a:xfrm>
-          <a:prstGeom prst="roundRect">
-            <a:avLst>
-              <a:gd name="adj" fmla="val 8000"/>
-            </a:avLst>
-          </a:prstGeom>
-          <a:solidFill>
-            <a:srgbClr val="F1F5FB"/>
-          </a:solidFill>
-          <a:ln>
-            <a:noFill/>
-          </a:ln>
-          <a:effectLst/>
-        </p:spPr>
-        <p:style>
-          <a:lnRef idx="1">
-            <a:schemeClr val="accent1"/>
-          </a:lnRef>
-          <a:fillRef idx="3">
-            <a:schemeClr val="accent1"/>
-          </a:fillRef>
-          <a:effectRef idx="2">
-            <a:schemeClr val="accent1"/>
-          </a:effectRef>
-          <a:fontRef idx="minor">
-            <a:schemeClr val="lt1"/>
-          </a:fontRef>
-        </p:style>
-        <p:txBody>
-          <a:bodyPr rtlCol="0" anchor="ctr"/>
-          <a:lstStyle/>
-          <a:p>
-            <a:pPr algn="ctr"/>
-          </a:p>
-        </p:txBody>
-      </p:sp>
-      <p:sp>
-        <p:nvSpPr>
-          <p:cNvPr id="12" name="TextBox 11"/>
-          <p:cNvSpPr txBox="1"/>
-          <p:nvPr/>
-        </p:nvSpPr>
-        <p:spPr>
-          <a:xfrm>
-            <a:off x="4983480" y="5148072"/>
-            <a:ext cx="6446520" cy="685800"/>
-          </a:xfrm>
-          <a:prstGeom prst="rect">
-            <a:avLst/>
-          </a:prstGeom>
-          <a:noFill/>
-        </p:spPr>
-        <p:txBody>
-          <a:bodyPr wrap="square" anchor="t" lIns="0" rIns="0" tIns="0" bIns="0">
-            <a:spAutoFit/>
-          </a:bodyPr>
-          <a:lstStyle/>
-          <a:p>
-            <a:pPr algn="l"/>
-            <a:r>
-              <a:rPr sz="3200" b="1" i="0">
-                <a:solidFill>
-                  <a:srgbClr val="1BAF7A"/>
-                </a:solidFill>
-                <a:latin typeface="Cambria"/>
-              </a:rPr>
-              <a:t>0.0155 → 0.0088</a:t>
-            </a:r>
-          </a:p>
-        </p:txBody>
-      </p:sp>
-      <p:sp>
-        <p:nvSpPr>
-          <p:cNvPr id="13" name="TextBox 12"/>
-          <p:cNvSpPr txBox="1"/>
-          <p:nvPr/>
-        </p:nvSpPr>
-        <p:spPr>
-          <a:xfrm>
-            <a:off x="4983480" y="5852160"/>
-            <a:ext cx="6446520" cy="502920"/>
-          </a:xfrm>
-          <a:prstGeom prst="rect">
-            <a:avLst/>
-          </a:prstGeom>
-          <a:noFill/>
-        </p:spPr>
-        <p:txBody>
-          <a:bodyPr wrap="square" anchor="t" lIns="0" rIns="0" tIns="0" bIns="0">
-            <a:spAutoFit/>
-          </a:bodyPr>
-          <a:lstStyle/>
-          <a:p>
-            <a:pPr algn="l"/>
-            <a:r>
-              <a:rPr sz="1300" b="0" i="0">
-                <a:solidFill>
-                  <a:srgbClr val="555B66"/>
-                </a:solidFill>
-                <a:latin typeface="Calibri"/>
-              </a:rPr>
-              <a:t>S1 GP test MSE from 28 to 144 training samples, still decreasing</a:t>
             </a:r>
           </a:p>
         </p:txBody>

--- a/docs/MetaCost_Presentation.pptx
+++ b/docs/MetaCost_Presentation.pptx
@@ -1,30 +1,30 @@
 
 <file path=ppt/presentation.xml><?xml version="1.0" encoding="utf-8"?>
-<p:presentation xmlns:a="http://schemas.openxmlformats.org/drawingml/2006/main" xmlns:r="http://schemas.openxmlformats.org/officeDocument/2006/relationships" xmlns:p="http://schemas.openxmlformats.org/presentationml/2006/main" saveSubsetFonts="1" autoCompressPictures="0">
+<p:presentation xmlns:a="http://schemas.openxmlformats.org/drawingml/2006/main" xmlns:r="http://schemas.openxmlformats.org/officeDocument/2006/relationships" xmlns:p="http://schemas.openxmlformats.org/presentationml/2006/main" saveSubsetFonts="1">
   <p:sldMasterIdLst>
     <p:sldMasterId id="2147483648" r:id="rId1"/>
   </p:sldMasterIdLst>
+  <p:notesMasterIdLst>
+    <p:notesMasterId r:id="rId2"/>
+  </p:notesMasterIdLst>
   <p:sldIdLst>
-    <p:sldId id="256" r:id="rId7"/>
-    <p:sldId id="257" r:id="rId9"/>
-    <p:sldId id="258" r:id="rId10"/>
-    <p:sldId id="259" r:id="rId11"/>
-    <p:sldId id="260" r:id="rId12"/>
-    <p:sldId id="261" r:id="rId13"/>
-    <p:sldId id="262" r:id="rId14"/>
-    <p:sldId id="263" r:id="rId15"/>
-    <p:sldId id="264" r:id="rId16"/>
-    <p:sldId id="265" r:id="rId17"/>
-    <p:sldId id="266" r:id="rId18"/>
-    <p:sldId id="267" r:id="rId19"/>
-    <p:sldId id="268" r:id="rId20"/>
+    <p:sldId id="256" r:id="rId3"/>
+    <p:sldId id="257" r:id="rId4"/>
+    <p:sldId id="258" r:id="rId5"/>
+    <p:sldId id="259" r:id="rId6"/>
+    <p:sldId id="260" r:id="rId7"/>
+    <p:sldId id="261" r:id="rId8"/>
+    <p:sldId id="262" r:id="rId9"/>
+    <p:sldId id="263" r:id="rId10"/>
+    <p:sldId id="264" r:id="rId11"/>
+    <p:sldId id="265" r:id="rId12"/>
+    <p:sldId id="266" r:id="rId13"/>
+    <p:sldId id="267" r:id="rId14"/>
+    <p:sldId id="268" r:id="rId15"/>
   </p:sldIdLst>
-  <p:sldSz cx="12191695" cy="6858000" type="screen4x3"/>
+  <p:sldSz cx="12191695" cy="6858000"/>
   <p:notesSz cx="6858000" cy="9144000"/>
   <p:defaultTextStyle>
-    <a:defPPr>
-      <a:defRPr lang="en-US"/>
-    </a:defPPr>
     <a:lvl1pPr marL="0" algn="l" defTabSz="457200" rtl="0" eaLnBrk="1" latinLnBrk="0" hangingPunct="1">
       <a:defRPr sz="1800" kern="1200">
         <a:solidFill>
@@ -120,7 +120,7 @@
 </file>
 
 <file path=ppt/notesMasters/notesMaster1.xml><?xml version="1.0" encoding="utf-8"?>
-<p:notesMaster xmlns:a="http://schemas.openxmlformats.org/drawingml/2006/main" xmlns:p="http://schemas.openxmlformats.org/presentationml/2006/main" xmlns:r="http://schemas.openxmlformats.org/officeDocument/2006/relationships">
+<p:notesMaster xmlns:a="http://schemas.openxmlformats.org/drawingml/2006/main" xmlns:r="http://schemas.openxmlformats.org/officeDocument/2006/relationships" xmlns:p="http://schemas.openxmlformats.org/presentationml/2006/main">
   <p:cSld>
     <p:bg>
       <p:bgRef idx="1001">
@@ -154,22 +154,16 @@
         <p:spPr>
           <a:xfrm>
             <a:off x="0" y="0"/>
-            <a:ext cx="2971800" cy="457200"/>
-          </a:xfrm>
-          <a:prstGeom prst="rect">
-            <a:avLst/>
-          </a:prstGeom>
-        </p:spPr>
-        <p:txBody>
-          <a:bodyPr vert="horz" lIns="91440" tIns="45720" rIns="91440" bIns="45720" rtlCol="0"/>
-          <a:lstStyle>
-            <a:lvl1pPr algn="l">
-              <a:defRPr sz="1200"/>
-            </a:lvl1pPr>
-          </a:lstStyle>
-          <a:p>
-            <a:endParaRPr lang="en-US"/>
-          </a:p>
+            <a:ext cx="2948940" cy="457200"/>
+          </a:xfrm>
+          <a:prstGeom prst="rect">
+            <a:avLst/>
+          </a:prstGeom>
+        </p:spPr>
+        <p:txBody>
+          <a:bodyPr/>
+          <a:lstStyle/>
+          <a:p/>
         </p:txBody>
       </p:sp>
       <p:sp>
@@ -179,39 +173,29 @@
             <a:spLocks noGrp="1"/>
           </p:cNvSpPr>
           <p:nvPr>
-            <p:ph type="dt" idx="1"/>
+            <p:ph type="dt" sz="quarter" idx="1"/>
           </p:nvPr>
         </p:nvSpPr>
         <p:spPr>
           <a:xfrm>
-            <a:off x="3884613" y="0"/>
-            <a:ext cx="2971800" cy="457200"/>
-          </a:xfrm>
-          <a:prstGeom prst="rect">
-            <a:avLst/>
-          </a:prstGeom>
-        </p:spPr>
-        <p:txBody>
-          <a:bodyPr vert="horz" lIns="91440" tIns="45720" rIns="91440" bIns="45720" rtlCol="0"/>
-          <a:lstStyle>
-            <a:lvl1pPr algn="r">
-              <a:defRPr sz="1200"/>
-            </a:lvl1pPr>
-          </a:lstStyle>
-          <a:p>
-            <a:fld id="{0F89C1C7-3DCD-1040-A9CF-14679D8B5DDD}" type="datetimeFigureOut">
-              <a:rPr lang="en-US" smtClean="0"/>
-              <a:t>10/17/16</a:t>
-            </a:fld>
-            <a:endParaRPr lang="en-US"/>
-          </a:p>
+            <a:off x="3909060" y="0"/>
+            <a:ext cx="2948940" cy="457200"/>
+          </a:xfrm>
+          <a:prstGeom prst="rect">
+            <a:avLst/>
+          </a:prstGeom>
+        </p:spPr>
+        <p:txBody>
+          <a:bodyPr/>
+          <a:lstStyle/>
+          <a:p/>
         </p:txBody>
       </p:sp>
       <p:sp>
         <p:nvSpPr>
           <p:cNvPr id="4" name="Slide Image Placeholder 3"/>
           <p:cNvSpPr>
-            <a:spLocks noGrp="1" noRot="1" noChangeAspect="1"/>
+            <a:spLocks noGrp="1"/>
           </p:cNvSpPr>
           <p:nvPr>
             <p:ph type="sldImg" idx="2"/>
@@ -219,8 +203,8 @@
         </p:nvSpPr>
         <p:spPr>
           <a:xfrm>
-            <a:off x="1143000" y="685800"/>
-            <a:ext cx="4572000" cy="3429000"/>
+            <a:off x="857250" y="1143000"/>
+            <a:ext cx="5143500" cy="3429000"/>
           </a:xfrm>
           <a:prstGeom prst="rect">
             <a:avLst/>
@@ -228,17 +212,10 @@
           <a:noFill/>
           <a:ln w="12700">
             <a:solidFill>
-              <a:prstClr val="black"/>
+              <a:srgbClr val="000000"/>
             </a:solidFill>
           </a:ln>
         </p:spPr>
-        <p:txBody>
-          <a:bodyPr vert="horz" lIns="91440" tIns="45720" rIns="91440" bIns="45720" rtlCol="0" anchor="ctr"/>
-          <a:lstStyle/>
-          <a:p>
-            <a:endParaRPr lang="en-US"/>
-          </a:p>
-        </p:txBody>
       </p:sp>
       <p:sp>
         <p:nvSpPr>
@@ -252,51 +229,21 @@
         </p:nvSpPr>
         <p:spPr>
           <a:xfrm>
-            <a:off x="685800" y="4343400"/>
-            <a:ext cx="5486400" cy="4114800"/>
-          </a:xfrm>
-          <a:prstGeom prst="rect">
-            <a:avLst/>
-          </a:prstGeom>
-        </p:spPr>
-        <p:txBody>
-          <a:bodyPr vert="horz" lIns="91440" tIns="45720" rIns="91440" bIns="45720" rtlCol="0"/>
-          <a:lstStyle/>
-          <a:p>
-            <a:pPr lvl="0"/>
-            <a:r>
-              <a:rPr lang="en-US" smtClean="0"/>
+            <a:off x="685800" y="4846320"/>
+            <a:ext cx="5486400" cy="3291840"/>
+          </a:xfrm>
+          <a:prstGeom prst="rect">
+            <a:avLst/>
+          </a:prstGeom>
+        </p:spPr>
+        <p:txBody>
+          <a:bodyPr/>
+          <a:lstStyle/>
+          <a:p>
+            <a:r>
+              <a:rPr/>
               <a:t>Click to edit Master text styles</a:t>
             </a:r>
-          </a:p>
-          <a:p>
-            <a:pPr lvl="1"/>
-            <a:r>
-              <a:rPr lang="en-US" smtClean="0"/>
-              <a:t>Second level</a:t>
-            </a:r>
-          </a:p>
-          <a:p>
-            <a:pPr lvl="2"/>
-            <a:r>
-              <a:rPr lang="en-US" smtClean="0"/>
-              <a:t>Third level</a:t>
-            </a:r>
-          </a:p>
-          <a:p>
-            <a:pPr lvl="3"/>
-            <a:r>
-              <a:rPr lang="en-US" smtClean="0"/>
-              <a:t>Fourth level</a:t>
-            </a:r>
-          </a:p>
-          <a:p>
-            <a:pPr lvl="4"/>
-            <a:r>
-              <a:rPr lang="en-US" smtClean="0"/>
-              <a:t>Fifth level</a:t>
-            </a:r>
-            <a:endParaRPr lang="en-US"/>
           </a:p>
         </p:txBody>
       </p:sp>
@@ -312,23 +259,17 @@
         </p:nvSpPr>
         <p:spPr>
           <a:xfrm>
-            <a:off x="0" y="8685213"/>
-            <a:ext cx="2971800" cy="457200"/>
-          </a:xfrm>
-          <a:prstGeom prst="rect">
-            <a:avLst/>
-          </a:prstGeom>
-        </p:spPr>
-        <p:txBody>
-          <a:bodyPr vert="horz" lIns="91440" tIns="45720" rIns="91440" bIns="45720" rtlCol="0" anchor="b"/>
-          <a:lstStyle>
-            <a:lvl1pPr algn="l">
-              <a:defRPr sz="1200"/>
-            </a:lvl1pPr>
-          </a:lstStyle>
-          <a:p>
-            <a:endParaRPr lang="en-US"/>
-          </a:p>
+            <a:off x="0" y="8686800"/>
+            <a:ext cx="2948940" cy="457200"/>
+          </a:xfrm>
+          <a:prstGeom prst="rect">
+            <a:avLst/>
+          </a:prstGeom>
+        </p:spPr>
+        <p:txBody>
+          <a:bodyPr/>
+          <a:lstStyle/>
+          <a:p/>
         </p:txBody>
       </p:sp>
       <p:sp>
@@ -343,126 +284,93 @@
         </p:nvSpPr>
         <p:spPr>
           <a:xfrm>
-            <a:off x="3884613" y="8685213"/>
-            <a:ext cx="2971800" cy="457200"/>
-          </a:xfrm>
-          <a:prstGeom prst="rect">
-            <a:avLst/>
-          </a:prstGeom>
-        </p:spPr>
-        <p:txBody>
-          <a:bodyPr vert="horz" lIns="91440" tIns="45720" rIns="91440" bIns="45720" rtlCol="0" anchor="b"/>
-          <a:lstStyle>
-            <a:lvl1pPr algn="r">
-              <a:defRPr sz="1200"/>
-            </a:lvl1pPr>
-          </a:lstStyle>
-          <a:p>
-            <a:fld id="{BB5E49A5-4136-284D-997B-48E1D791AD67}" type="slidenum">
-              <a:rPr lang="en-US" smtClean="0"/>
-              <a:t>‹#›</a:t>
-            </a:fld>
-            <a:endParaRPr lang="en-US"/>
-          </a:p>
+            <a:off x="3909060" y="8686800"/>
+            <a:ext cx="2948940" cy="457200"/>
+          </a:xfrm>
+          <a:prstGeom prst="rect">
+            <a:avLst/>
+          </a:prstGeom>
+        </p:spPr>
+        <p:txBody>
+          <a:bodyPr/>
+          <a:lstStyle/>
+          <a:p/>
         </p:txBody>
       </p:sp>
     </p:spTree>
-    <p:extLst>
-      <p:ext uri="{BB962C8B-B14F-4D97-AF65-F5344CB8AC3E}">
-        <p14:creationId xmlns:p14="http://schemas.microsoft.com/office/powerpoint/2010/main" val="2623252185"/>
-      </p:ext>
-    </p:extLst>
   </p:cSld>
   <p:clrMap bg1="lt1" tx1="dk1" bg2="lt2" tx2="dk2" accent1="accent1" accent2="accent2" accent3="accent3" accent4="accent4" accent5="accent5" accent6="accent6" hlink="hlink" folHlink="folHlink"/>
   <p:notesStyle>
-    <a:lvl1pPr marL="0" algn="l" defTabSz="457200" rtl="0" eaLnBrk="1" latinLnBrk="0" hangingPunct="1">
-      <a:defRPr sz="1200" kern="1200">
+    <a:lvl1pPr marL="0" algn="l">
+      <a:defRPr sz="1200">
         <a:solidFill>
           <a:schemeClr val="tx1"/>
         </a:solidFill>
         <a:latin typeface="+mn-lt"/>
-        <a:ea typeface="+mn-ea"/>
-        <a:cs typeface="+mn-cs"/>
       </a:defRPr>
     </a:lvl1pPr>
-    <a:lvl2pPr marL="457200" algn="l" defTabSz="457200" rtl="0" eaLnBrk="1" latinLnBrk="0" hangingPunct="1">
-      <a:defRPr sz="1200" kern="1200">
+    <a:lvl2pPr marL="457200" algn="l">
+      <a:defRPr sz="1200">
         <a:solidFill>
           <a:schemeClr val="tx1"/>
         </a:solidFill>
         <a:latin typeface="+mn-lt"/>
-        <a:ea typeface="+mn-ea"/>
-        <a:cs typeface="+mn-cs"/>
       </a:defRPr>
     </a:lvl2pPr>
-    <a:lvl3pPr marL="914400" algn="l" defTabSz="457200" rtl="0" eaLnBrk="1" latinLnBrk="0" hangingPunct="1">
-      <a:defRPr sz="1200" kern="1200">
+    <a:lvl3pPr marL="914400" algn="l">
+      <a:defRPr sz="1200">
         <a:solidFill>
           <a:schemeClr val="tx1"/>
         </a:solidFill>
         <a:latin typeface="+mn-lt"/>
-        <a:ea typeface="+mn-ea"/>
-        <a:cs typeface="+mn-cs"/>
       </a:defRPr>
     </a:lvl3pPr>
-    <a:lvl4pPr marL="1371600" algn="l" defTabSz="457200" rtl="0" eaLnBrk="1" latinLnBrk="0" hangingPunct="1">
-      <a:defRPr sz="1200" kern="1200">
+    <a:lvl4pPr marL="1371600" algn="l">
+      <a:defRPr sz="1200">
         <a:solidFill>
           <a:schemeClr val="tx1"/>
         </a:solidFill>
         <a:latin typeface="+mn-lt"/>
-        <a:ea typeface="+mn-ea"/>
-        <a:cs typeface="+mn-cs"/>
       </a:defRPr>
     </a:lvl4pPr>
-    <a:lvl5pPr marL="1828800" algn="l" defTabSz="457200" rtl="0" eaLnBrk="1" latinLnBrk="0" hangingPunct="1">
-      <a:defRPr sz="1200" kern="1200">
+    <a:lvl5pPr marL="1828800" algn="l">
+      <a:defRPr sz="1200">
         <a:solidFill>
           <a:schemeClr val="tx1"/>
         </a:solidFill>
         <a:latin typeface="+mn-lt"/>
-        <a:ea typeface="+mn-ea"/>
-        <a:cs typeface="+mn-cs"/>
       </a:defRPr>
     </a:lvl5pPr>
-    <a:lvl6pPr marL="2286000" algn="l" defTabSz="457200" rtl="0" eaLnBrk="1" latinLnBrk="0" hangingPunct="1">
-      <a:defRPr sz="1200" kern="1200">
+    <a:lvl6pPr marL="2286000" algn="l">
+      <a:defRPr sz="1200">
         <a:solidFill>
           <a:schemeClr val="tx1"/>
         </a:solidFill>
         <a:latin typeface="+mn-lt"/>
-        <a:ea typeface="+mn-ea"/>
-        <a:cs typeface="+mn-cs"/>
       </a:defRPr>
     </a:lvl6pPr>
-    <a:lvl7pPr marL="2743200" algn="l" defTabSz="457200" rtl="0" eaLnBrk="1" latinLnBrk="0" hangingPunct="1">
-      <a:defRPr sz="1200" kern="1200">
+    <a:lvl7pPr marL="2743200" algn="l">
+      <a:defRPr sz="1200">
         <a:solidFill>
           <a:schemeClr val="tx1"/>
         </a:solidFill>
         <a:latin typeface="+mn-lt"/>
-        <a:ea typeface="+mn-ea"/>
-        <a:cs typeface="+mn-cs"/>
       </a:defRPr>
     </a:lvl7pPr>
-    <a:lvl8pPr marL="3200400" algn="l" defTabSz="457200" rtl="0" eaLnBrk="1" latinLnBrk="0" hangingPunct="1">
-      <a:defRPr sz="1200" kern="1200">
+    <a:lvl8pPr marL="3200400" algn="l">
+      <a:defRPr sz="1200">
         <a:solidFill>
           <a:schemeClr val="tx1"/>
         </a:solidFill>
         <a:latin typeface="+mn-lt"/>
-        <a:ea typeface="+mn-ea"/>
-        <a:cs typeface="+mn-cs"/>
       </a:defRPr>
     </a:lvl8pPr>
-    <a:lvl9pPr marL="3657600" algn="l" defTabSz="457200" rtl="0" eaLnBrk="1" latinLnBrk="0" hangingPunct="1">
-      <a:defRPr sz="1200" kern="1200">
+    <a:lvl9pPr marL="3657600" algn="l">
+      <a:defRPr sz="1200">
         <a:solidFill>
           <a:schemeClr val="tx1"/>
         </a:solidFill>
         <a:latin typeface="+mn-lt"/>
-        <a:ea typeface="+mn-ea"/>
-        <a:cs typeface="+mn-cs"/>
       </a:defRPr>
     </a:lvl9pPr>
   </p:notesStyle>
@@ -470,7 +378,7 @@
 </file>
 
 <file path=ppt/notesSlides/notesSlide1.xml><?xml version="1.0" encoding="utf-8"?>
-<p:notes xmlns:a="http://schemas.openxmlformats.org/drawingml/2006/main" xmlns:p="http://schemas.openxmlformats.org/presentationml/2006/main" xmlns:r="http://schemas.openxmlformats.org/officeDocument/2006/relationships">
+<p:notes xmlns:a="http://schemas.openxmlformats.org/drawingml/2006/main" xmlns:r="http://schemas.openxmlformats.org/officeDocument/2006/relationships" xmlns:p="http://schemas.openxmlformats.org/presentationml/2006/main">
   <p:cSld>
     <p:spTree>
       <p:nvGrpSpPr>
@@ -493,7 +401,7 @@
             <a:spLocks noGrp="1"/>
           </p:cNvSpPr>
           <p:nvPr>
-            <p:ph type="sldImg" idx="2"/>
+            <p:ph type="sldImg"/>
           </p:nvPr>
         </p:nvSpPr>
         <p:spPr/>
@@ -505,7 +413,7 @@
             <a:spLocks noGrp="1"/>
           </p:cNvSpPr>
           <p:nvPr>
-            <p:ph type="body" idx="3" sz="quarter"/>
+            <p:ph type="body" idx="1"/>
           </p:nvPr>
         </p:nvSpPr>
         <p:spPr/>
@@ -514,22 +422,11 @@
           <a:lstStyle/>
           <a:p>
             <a:r>
+              <a:rPr/>
               <a:t>Introduce the team. One line: we predict how much energy a person burns while walking in an exoskeleton, from sensors they could wear anywhere, instead of from a lab-only breathing mask.</a:t>
             </a:r>
           </a:p>
         </p:txBody>
-      </p:sp>
-      <p:sp>
-        <p:nvSpPr>
-          <p:cNvPr id="4" name="Slide Number Placeholder 3"/>
-          <p:cNvSpPr>
-            <a:spLocks noGrp="1"/>
-          </p:cNvSpPr>
-          <p:nvPr>
-            <p:ph type="sldNum" idx="5" sz="quarter"/>
-          </p:nvPr>
-        </p:nvSpPr>
-        <p:spPr/>
       </p:sp>
     </p:spTree>
   </p:cSld>
@@ -540,7 +437,7 @@
 </file>
 
 <file path=ppt/notesSlides/notesSlide10.xml><?xml version="1.0" encoding="utf-8"?>
-<p:notes xmlns:a="http://schemas.openxmlformats.org/drawingml/2006/main" xmlns:p="http://schemas.openxmlformats.org/presentationml/2006/main" xmlns:r="http://schemas.openxmlformats.org/officeDocument/2006/relationships">
+<p:notes xmlns:a="http://schemas.openxmlformats.org/drawingml/2006/main" xmlns:r="http://schemas.openxmlformats.org/officeDocument/2006/relationships" xmlns:p="http://schemas.openxmlformats.org/presentationml/2006/main">
   <p:cSld>
     <p:spTree>
       <p:nvGrpSpPr>
@@ -563,7 +460,7 @@
             <a:spLocks noGrp="1"/>
           </p:cNvSpPr>
           <p:nvPr>
-            <p:ph type="sldImg" idx="2"/>
+            <p:ph type="sldImg"/>
           </p:nvPr>
         </p:nvSpPr>
         <p:spPr/>
@@ -575,7 +472,7 @@
             <a:spLocks noGrp="1"/>
           </p:cNvSpPr>
           <p:nvPr>
-            <p:ph type="body" idx="3" sz="quarter"/>
+            <p:ph type="body" idx="1"/>
           </p:nvPr>
         </p:nvSpPr>
         <p:spPr/>
@@ -584,22 +481,11 @@
           <a:lstStyle/>
           <a:p>
             <a:r>
+              <a:rPr/>
               <a:t>Calibration: on a new day, measure k random conditions with the mask and shift that day's predictions by a shrunken offset w * mean residual, with w = k / (k + sigma^2 / tau^2). Both variances are estimated from the training days only (empirical Bayes). S2 trusts calibration (w about 0.87); S1, whose days are already well predicted, trusts it less. 3 of 36 readings: S2 GP 0.046 -&gt; 0.022. Calibrating on the first conditions of a session is biased (cost runs high early on) and hurt S1 at k &gt;= 5; shrinkage limits the damage. Sensors: electrode choice is made inside each training fold, so there is no leakage. Cross-subject recalibration did NOT help: a new person needs their own data.</a:t>
             </a:r>
           </a:p>
         </p:txBody>
-      </p:sp>
-      <p:sp>
-        <p:nvSpPr>
-          <p:cNvPr id="4" name="Slide Number Placeholder 3"/>
-          <p:cNvSpPr>
-            <a:spLocks noGrp="1"/>
-          </p:cNvSpPr>
-          <p:nvPr>
-            <p:ph type="sldNum" idx="5" sz="quarter"/>
-          </p:nvPr>
-        </p:nvSpPr>
-        <p:spPr/>
       </p:sp>
     </p:spTree>
   </p:cSld>
@@ -610,7 +496,7 @@
 </file>
 
 <file path=ppt/notesSlides/notesSlide11.xml><?xml version="1.0" encoding="utf-8"?>
-<p:notes xmlns:a="http://schemas.openxmlformats.org/drawingml/2006/main" xmlns:p="http://schemas.openxmlformats.org/presentationml/2006/main" xmlns:r="http://schemas.openxmlformats.org/officeDocument/2006/relationships">
+<p:notes xmlns:a="http://schemas.openxmlformats.org/drawingml/2006/main" xmlns:r="http://schemas.openxmlformats.org/officeDocument/2006/relationships" xmlns:p="http://schemas.openxmlformats.org/presentationml/2006/main">
   <p:cSld>
     <p:spTree>
       <p:nvGrpSpPr>
@@ -633,7 +519,7 @@
             <a:spLocks noGrp="1"/>
           </p:cNvSpPr>
           <p:nvPr>
-            <p:ph type="sldImg" idx="2"/>
+            <p:ph type="sldImg"/>
           </p:nvPr>
         </p:nvSpPr>
         <p:spPr/>
@@ -645,7 +531,7 @@
             <a:spLocks noGrp="1"/>
           </p:cNvSpPr>
           <p:nvPr>
-            <p:ph type="body" idx="3" sz="quarter"/>
+            <p:ph type="body" idx="1"/>
           </p:nvPr>
         </p:nvSpPr>
         <p:spPr/>
@@ -654,22 +540,11 @@
           <a:lstStyle/>
           <a:p>
             <a:r>
-              <a:t>Open a terminal in the project folder (cd into ML proj). Run the three commands in order. (1) The baseline from our port of the paper prints linear-regression MSE 0.0107 and R2 0.83 for Subject 1. This is the baseline, not our headline result: our best model reaches 0.0079 (slide 6). The paper reports 0.0089; the gap comes from different fold splits on only 180 samples. (2) predict.py trains a Gaussian Process on 4 days and predicts each unseen day; errors of about 11-17 %. (3) pytest shows all 10 tests pass. Total under a minute.</a:t>
-            </a:r>
-          </a:p>
-        </p:txBody>
-      </p:sp>
-      <p:sp>
-        <p:nvSpPr>
-          <p:cNvPr id="4" name="Slide Number Placeholder 3"/>
-          <p:cNvSpPr>
-            <a:spLocks noGrp="1"/>
-          </p:cNvSpPr>
-          <p:nvPr>
-            <p:ph type="sldNum" idx="5" sz="quarter"/>
-          </p:nvPr>
-        </p:nvSpPr>
-        <p:spPr/>
+              <a:rPr/>
+              <a:t>Thank the panel.</a:t>
+            </a:r>
+          </a:p>
+        </p:txBody>
       </p:sp>
     </p:spTree>
   </p:cSld>
@@ -680,7 +555,7 @@
 </file>
 
 <file path=ppt/notesSlides/notesSlide12.xml><?xml version="1.0" encoding="utf-8"?>
-<p:notes xmlns:a="http://schemas.openxmlformats.org/drawingml/2006/main" xmlns:p="http://schemas.openxmlformats.org/presentationml/2006/main" xmlns:r="http://schemas.openxmlformats.org/officeDocument/2006/relationships">
+<p:notes xmlns:a="http://schemas.openxmlformats.org/drawingml/2006/main" xmlns:r="http://schemas.openxmlformats.org/officeDocument/2006/relationships" xmlns:p="http://schemas.openxmlformats.org/presentationml/2006/main">
   <p:cSld>
     <p:spTree>
       <p:nvGrpSpPr>
@@ -703,7 +578,7 @@
             <a:spLocks noGrp="1"/>
           </p:cNvSpPr>
           <p:nvPr>
-            <p:ph type="sldImg" idx="2"/>
+            <p:ph type="sldImg"/>
           </p:nvPr>
         </p:nvSpPr>
         <p:spPr/>
@@ -715,7 +590,7 @@
             <a:spLocks noGrp="1"/>
           </p:cNvSpPr>
           <p:nvPr>
-            <p:ph type="body" idx="3" sz="quarter"/>
+            <p:ph type="body" idx="1"/>
           </p:nvPr>
         </p:nvSpPr>
         <p:spPr/>
@@ -724,22 +599,11 @@
           <a:lstStyle/>
           <a:p>
             <a:r>
-              <a:t>Central conclusion: EMG and gait signals predict metabolic cost reasonably well within a session. However, unseen-day shifts and individual differences remain important limitations. Limited metabolic spot-checks may improve predictions, but validation on more subjects and real sessions is still needed. Future work: the biggest lever is more people. A daily calibration walk could fix the day-level offset seen in Subject 2. Use the prediction as a prior to speed up the optimiser rather than as a complete replacement for the mask.</a:t>
-            </a:r>
-          </a:p>
-        </p:txBody>
-      </p:sp>
-      <p:sp>
-        <p:nvSpPr>
-          <p:cNvPr id="4" name="Slide Number Placeholder 3"/>
-          <p:cNvSpPr>
-            <a:spLocks noGrp="1"/>
-          </p:cNvSpPr>
-          <p:nvPr>
-            <p:ph type="sldNum" idx="5" sz="quarter"/>
-          </p:nvPr>
-        </p:nvSpPr>
-        <p:spPr/>
+              <a:rPr/>
+              <a:t>Open a terminal in the project folder (cd into ML proj). Run the three commands in order. (1) The baseline from our port of the paper prints linear-regression MSE 0.0107 and R2 0.83 for Subject 1. This is the baseline, not our headline result: our best model reaches 0.0079 (slide 6). The paper reports 0.0089; the gap comes from different fold splits on only 180 samples. (2) predict.py trains a Gaussian Process on 4 days and predicts each unseen day; errors of about 11-17 %. (3) pytest shows all 10 tests pass. Total under a minute.</a:t>
+            </a:r>
+          </a:p>
+        </p:txBody>
       </p:sp>
     </p:spTree>
   </p:cSld>
@@ -750,7 +614,7 @@
 </file>
 
 <file path=ppt/notesSlides/notesSlide13.xml><?xml version="1.0" encoding="utf-8"?>
-<p:notes xmlns:a="http://schemas.openxmlformats.org/drawingml/2006/main" xmlns:p="http://schemas.openxmlformats.org/presentationml/2006/main" xmlns:r="http://schemas.openxmlformats.org/officeDocument/2006/relationships">
+<p:notes xmlns:a="http://schemas.openxmlformats.org/drawingml/2006/main" xmlns:r="http://schemas.openxmlformats.org/officeDocument/2006/relationships" xmlns:p="http://schemas.openxmlformats.org/presentationml/2006/main">
   <p:cSld>
     <p:spTree>
       <p:nvGrpSpPr>
@@ -773,7 +637,7 @@
             <a:spLocks noGrp="1"/>
           </p:cNvSpPr>
           <p:nvPr>
-            <p:ph type="sldImg" idx="2"/>
+            <p:ph type="sldImg"/>
           </p:nvPr>
         </p:nvSpPr>
         <p:spPr/>
@@ -785,7 +649,7 @@
             <a:spLocks noGrp="1"/>
           </p:cNvSpPr>
           <p:nvPr>
-            <p:ph type="body" idx="3" sz="quarter"/>
+            <p:ph type="body" idx="1"/>
           </p:nvPr>
         </p:nvSpPr>
         <p:spPr/>
@@ -794,22 +658,11 @@
           <a:lstStyle/>
           <a:p>
             <a:r>
-              <a:t>Thank the panel.</a:t>
-            </a:r>
-          </a:p>
-        </p:txBody>
-      </p:sp>
-      <p:sp>
-        <p:nvSpPr>
-          <p:cNvPr id="4" name="Slide Number Placeholder 3"/>
-          <p:cNvSpPr>
-            <a:spLocks noGrp="1"/>
-          </p:cNvSpPr>
-          <p:nvPr>
-            <p:ph type="sldNum" idx="5" sz="quarter"/>
-          </p:nvPr>
-        </p:nvSpPr>
-        <p:spPr/>
+              <a:rPr/>
+              <a:t>Central conclusion: EMG and gait signals predict metabolic cost reasonably well within a session. However, unseen-day shifts and individual differences remain important limitations. Limited metabolic spot-checks may improve predictions, but validation on more subjects and real sessions is still needed. Future work: the biggest lever is more people. A daily calibration walk could fix the day-level offset seen in Subject 2. Use the prediction as a prior to speed up the optimiser rather than as a complete replacement for the mask.</a:t>
+            </a:r>
+          </a:p>
+        </p:txBody>
       </p:sp>
     </p:spTree>
   </p:cSld>
@@ -820,7 +673,7 @@
 </file>
 
 <file path=ppt/notesSlides/notesSlide2.xml><?xml version="1.0" encoding="utf-8"?>
-<p:notes xmlns:a="http://schemas.openxmlformats.org/drawingml/2006/main" xmlns:p="http://schemas.openxmlformats.org/presentationml/2006/main" xmlns:r="http://schemas.openxmlformats.org/officeDocument/2006/relationships">
+<p:notes xmlns:a="http://schemas.openxmlformats.org/drawingml/2006/main" xmlns:r="http://schemas.openxmlformats.org/officeDocument/2006/relationships" xmlns:p="http://schemas.openxmlformats.org/presentationml/2006/main">
   <p:cSld>
     <p:spTree>
       <p:nvGrpSpPr>
@@ -843,7 +696,7 @@
             <a:spLocks noGrp="1"/>
           </p:cNvSpPr>
           <p:nvPr>
-            <p:ph type="sldImg" idx="2"/>
+            <p:ph type="sldImg"/>
           </p:nvPr>
         </p:nvSpPr>
         <p:spPr/>
@@ -855,7 +708,7 @@
             <a:spLocks noGrp="1"/>
           </p:cNvSpPr>
           <p:nvPr>
-            <p:ph type="body" idx="3" sz="quarter"/>
+            <p:ph type="body" idx="1"/>
           </p:nvPr>
         </p:nvSpPr>
         <p:spPr/>
@@ -864,22 +717,11 @@
           <a:lstStyle/>
           <a:p>
             <a:r>
-              <a:t>Explain HILO: CMA-ES proposes a torque profile every 2 min and keeps those with the lowest metabolic cost (Zhang et al., Science 2017). Metabolic cost comes from a mask (indirect calorimetry): slow, noisy, lab-only. If we can predict it from wearable signals, HILO becomes faster and portable.</a:t>
-            </a:r>
-          </a:p>
-        </p:txBody>
-      </p:sp>
-      <p:sp>
-        <p:nvSpPr>
-          <p:cNvPr id="4" name="Slide Number Placeholder 3"/>
-          <p:cNvSpPr>
-            <a:spLocks noGrp="1"/>
-          </p:cNvSpPr>
-          <p:nvPr>
-            <p:ph type="sldNum" idx="5" sz="quarter"/>
-          </p:nvPr>
-        </p:nvSpPr>
-        <p:spPr/>
+              <a:rPr/>
+              <a:t>Walk through left to right. Pre-processing was done by the lab: EMG filtering and day normalisation. Our contribution starts at the feature matrix. On evaluation: the original paper describes 10-fold cross-validation for tuning its LASSO model. We instead use repeated nested 5-fold CV, so every model-selection step stays inside the training folds, plus leave-one-day-out to test a new session. Because the protocols differ, the paper's scores are reference benchmarks, not a like-for-like match.</a:t>
+            </a:r>
+          </a:p>
+        </p:txBody>
       </p:sp>
     </p:spTree>
   </p:cSld>
@@ -890,7 +732,7 @@
 </file>
 
 <file path=ppt/notesSlides/notesSlide3.xml><?xml version="1.0" encoding="utf-8"?>
-<p:notes xmlns:a="http://schemas.openxmlformats.org/drawingml/2006/main" xmlns:p="http://schemas.openxmlformats.org/presentationml/2006/main" xmlns:r="http://schemas.openxmlformats.org/officeDocument/2006/relationships">
+<p:notes xmlns:a="http://schemas.openxmlformats.org/drawingml/2006/main" xmlns:r="http://schemas.openxmlformats.org/officeDocument/2006/relationships" xmlns:p="http://schemas.openxmlformats.org/presentationml/2006/main">
   <p:cSld>
     <p:spTree>
       <p:nvGrpSpPr>
@@ -913,7 +755,7 @@
             <a:spLocks noGrp="1"/>
           </p:cNvSpPr>
           <p:nvPr>
-            <p:ph type="sldImg" idx="2"/>
+            <p:ph type="sldImg"/>
           </p:nvPr>
         </p:nvSpPr>
         <p:spPr/>
@@ -925,7 +767,7 @@
             <a:spLocks noGrp="1"/>
           </p:cNvSpPr>
           <p:nvPr>
-            <p:ph type="body" idx="3" sz="quarter"/>
+            <p:ph type="body" idx="1"/>
           </p:nvPr>
         </p:nvSpPr>
         <p:spPr/>
@@ -934,22 +776,11 @@
           <a:lstStyle/>
           <a:p>
             <a:r>
-              <a:t>Data from the Stanford Biomechatronics Lab HILO study, as released with the CS229 paper we were given. Each row is the last 30 s of a 2-min condition. One Subject-2 row had a negative (impossible) metabolic rate and is removed, as in the original. Point at the plot: cost drops ~40% across days because the user learns to walk with the exo. The data are non-stationary, which matters later.</a:t>
-            </a:r>
-          </a:p>
-        </p:txBody>
-      </p:sp>
-      <p:sp>
-        <p:nvSpPr>
-          <p:cNvPr id="4" name="Slide Number Placeholder 3"/>
-          <p:cNvSpPr>
-            <a:spLocks noGrp="1"/>
-          </p:cNvSpPr>
-          <p:nvPr>
-            <p:ph type="sldNum" idx="5" sz="quarter"/>
-          </p:nvPr>
-        </p:nvSpPr>
-        <p:spPr/>
+              <a:rPr/>
+              <a:t>Explain HILO: CMA-ES proposes a torque profile every 2 min and keeps those with the lowest metabolic cost (Zhang et al., Science 2017). Metabolic cost comes from a mask (indirect calorimetry): slow, noisy, lab-only. If we can predict it from wearable signals, HILO becomes faster and portable.</a:t>
+            </a:r>
+          </a:p>
+        </p:txBody>
       </p:sp>
     </p:spTree>
   </p:cSld>
@@ -960,7 +791,7 @@
 </file>
 
 <file path=ppt/notesSlides/notesSlide4.xml><?xml version="1.0" encoding="utf-8"?>
-<p:notes xmlns:a="http://schemas.openxmlformats.org/drawingml/2006/main" xmlns:p="http://schemas.openxmlformats.org/presentationml/2006/main" xmlns:r="http://schemas.openxmlformats.org/officeDocument/2006/relationships">
+<p:notes xmlns:a="http://schemas.openxmlformats.org/drawingml/2006/main" xmlns:r="http://schemas.openxmlformats.org/officeDocument/2006/relationships" xmlns:p="http://schemas.openxmlformats.org/presentationml/2006/main">
   <p:cSld>
     <p:spTree>
       <p:nvGrpSpPr>
@@ -983,7 +814,7 @@
             <a:spLocks noGrp="1"/>
           </p:cNvSpPr>
           <p:nvPr>
-            <p:ph type="sldImg" idx="2"/>
+            <p:ph type="sldImg"/>
           </p:nvPr>
         </p:nvSpPr>
         <p:spPr/>
@@ -995,7 +826,7 @@
             <a:spLocks noGrp="1"/>
           </p:cNvSpPr>
           <p:nvPr>
-            <p:ph type="body" idx="3" sz="quarter"/>
+            <p:ph type="body" idx="1"/>
           </p:nvPr>
         </p:nvSpPr>
         <p:spPr/>
@@ -1004,22 +835,11 @@
           <a:lstStyle/>
           <a:p>
             <a:r>
-              <a:t>Walk through left to right. Pre-processing was done by the lab: EMG filtering and day normalisation. Our contribution starts at the feature matrix. On evaluation: the original paper describes 10-fold cross-validation for tuning its LASSO model. We instead use repeated nested 5-fold CV, so every model-selection step stays inside the training folds, plus leave-one-day-out to test a new session. Because the protocols differ, the paper's scores are reference benchmarks, not a like-for-like match.</a:t>
-            </a:r>
-          </a:p>
-        </p:txBody>
-      </p:sp>
-      <p:sp>
-        <p:nvSpPr>
-          <p:cNvPr id="4" name="Slide Number Placeholder 3"/>
-          <p:cNvSpPr>
-            <a:spLocks noGrp="1"/>
-          </p:cNvSpPr>
-          <p:nvPr>
-            <p:ph type="sldNum" idx="5" sz="quarter"/>
-          </p:nvPr>
-        </p:nvSpPr>
-        <p:spPr/>
+              <a:rPr/>
+              <a:t>Data from the Stanford Biomechatronics Lab HILO study, as released with the CS229 paper we were given. Each row is the last 30 s of a 2-min condition. One Subject-2 row had a negative (impossible) metabolic rate and is removed, as in the original. Point at the plot: cost drops ~40% across days because the user learns to walk with the exo. The data are non-stationary, which matters later.</a:t>
+            </a:r>
+          </a:p>
+        </p:txBody>
       </p:sp>
     </p:spTree>
   </p:cSld>
@@ -1030,7 +850,7 @@
 </file>
 
 <file path=ppt/notesSlides/notesSlide5.xml><?xml version="1.0" encoding="utf-8"?>
-<p:notes xmlns:a="http://schemas.openxmlformats.org/drawingml/2006/main" xmlns:p="http://schemas.openxmlformats.org/presentationml/2006/main" xmlns:r="http://schemas.openxmlformats.org/officeDocument/2006/relationships">
+<p:notes xmlns:a="http://schemas.openxmlformats.org/drawingml/2006/main" xmlns:r="http://schemas.openxmlformats.org/officeDocument/2006/relationships" xmlns:p="http://schemas.openxmlformats.org/presentationml/2006/main">
   <p:cSld>
     <p:spTree>
       <p:nvGrpSpPr>
@@ -1053,7 +873,7 @@
             <a:spLocks noGrp="1"/>
           </p:cNvSpPr>
           <p:nvPr>
-            <p:ph type="sldImg" idx="2"/>
+            <p:ph type="sldImg"/>
           </p:nvPr>
         </p:nvSpPr>
         <p:spPr/>
@@ -1065,7 +885,7 @@
             <a:spLocks noGrp="1"/>
           </p:cNvSpPr>
           <p:nvPr>
-            <p:ph type="body" idx="3" sz="quarter"/>
+            <p:ph type="body" idx="1"/>
           </p:nvPr>
         </p:nvSpPr>
         <p:spPr/>
@@ -1074,22 +894,11 @@
           <a:lstStyle/>
           <a:p>
             <a:r>
+              <a:rPr/>
               <a:t>The paper used MATLAB trainbr. We re-implemented it in NumPy: Levenberg-Marquardt steps plus MacKay's evidence updates for alpha, beta and gamma, so regularisation is learned from the training data with no validation split. The Jacobian is closed form and unit-tested against finite differences. The neuron sweep (right) reproduces the paper's Fig. 1: 1-2 neurons are best. The Gaussian Process adds calibrated uncertainty.</a:t>
             </a:r>
           </a:p>
         </p:txBody>
-      </p:sp>
-      <p:sp>
-        <p:nvSpPr>
-          <p:cNvPr id="4" name="Slide Number Placeholder 3"/>
-          <p:cNvSpPr>
-            <a:spLocks noGrp="1"/>
-          </p:cNvSpPr>
-          <p:nvPr>
-            <p:ph type="sldNum" idx="5" sz="quarter"/>
-          </p:nvPr>
-        </p:nvSpPr>
-        <p:spPr/>
       </p:sp>
     </p:spTree>
   </p:cSld>
@@ -1100,7 +909,7 @@
 </file>
 
 <file path=ppt/notesSlides/notesSlide6.xml><?xml version="1.0" encoding="utf-8"?>
-<p:notes xmlns:a="http://schemas.openxmlformats.org/drawingml/2006/main" xmlns:p="http://schemas.openxmlformats.org/presentationml/2006/main" xmlns:r="http://schemas.openxmlformats.org/officeDocument/2006/relationships">
+<p:notes xmlns:a="http://schemas.openxmlformats.org/drawingml/2006/main" xmlns:r="http://schemas.openxmlformats.org/officeDocument/2006/relationships" xmlns:p="http://schemas.openxmlformats.org/presentationml/2006/main">
   <p:cSld>
     <p:spTree>
       <p:nvGrpSpPr>
@@ -1123,7 +932,7 @@
             <a:spLocks noGrp="1"/>
           </p:cNvSpPr>
           <p:nvPr>
-            <p:ph type="sldImg" idx="2"/>
+            <p:ph type="sldImg"/>
           </p:nvPr>
         </p:nvSpPr>
         <p:spPr/>
@@ -1135,7 +944,7 @@
             <a:spLocks noGrp="1"/>
           </p:cNvSpPr>
           <p:nvPr>
-            <p:ph type="body" idx="3" sz="quarter"/>
+            <p:ph type="body" idx="1"/>
           </p:nvPr>
         </p:nvSpPr>
         <p:spPr/>
@@ -1144,22 +953,11 @@
           <a:lstStyle/>
           <a:p>
             <a:r>
+              <a:rPr/>
               <a:t>Under our evaluation setup (repeated nested 5-fold CV), our best models reach lower MSE on both subjects: S1 0.0079 (ensemble) and S2 0.0109 (SVR). The paper's 0.0089 (S1) is linear regression on all features and its 0.0168 (S2) is linear regression on step + EMG features, under its own CV. Different models and protocols, so treat the paper's numbers as reference benchmarks, not a like-for-like comparison. In plain terms our error is about 9-10% of normal-walking cost, versus 19-26% for predicting the mean.</a:t>
             </a:r>
           </a:p>
         </p:txBody>
-      </p:sp>
-      <p:sp>
-        <p:nvSpPr>
-          <p:cNvPr id="4" name="Slide Number Placeholder 3"/>
-          <p:cNvSpPr>
-            <a:spLocks noGrp="1"/>
-          </p:cNvSpPr>
-          <p:nvPr>
-            <p:ph type="sldNum" idx="5" sz="quarter"/>
-          </p:nvPr>
-        </p:nvSpPr>
-        <p:spPr/>
       </p:sp>
     </p:spTree>
   </p:cSld>
@@ -1170,7 +968,7 @@
 </file>
 
 <file path=ppt/notesSlides/notesSlide7.xml><?xml version="1.0" encoding="utf-8"?>
-<p:notes xmlns:a="http://schemas.openxmlformats.org/drawingml/2006/main" xmlns:p="http://schemas.openxmlformats.org/presentationml/2006/main" xmlns:r="http://schemas.openxmlformats.org/officeDocument/2006/relationships">
+<p:notes xmlns:a="http://schemas.openxmlformats.org/drawingml/2006/main" xmlns:r="http://schemas.openxmlformats.org/officeDocument/2006/relationships" xmlns:p="http://schemas.openxmlformats.org/presentationml/2006/main">
   <p:cSld>
     <p:spTree>
       <p:nvGrpSpPr>
@@ -1193,7 +991,7 @@
             <a:spLocks noGrp="1"/>
           </p:cNvSpPr>
           <p:nvPr>
-            <p:ph type="sldImg" idx="2"/>
+            <p:ph type="sldImg"/>
           </p:nvPr>
         </p:nvSpPr>
         <p:spPr/>
@@ -1205,7 +1003,7 @@
             <a:spLocks noGrp="1"/>
           </p:cNvSpPr>
           <p:nvPr>
-            <p:ph type="body" idx="3" sz="quarter"/>
+            <p:ph type="body" idx="1"/>
           </p:nvPr>
         </p:nvSpPr>
         <p:spPr/>
@@ -1214,22 +1012,11 @@
           <a:lstStyle/>
           <a:p>
             <a:r>
+              <a:rPr/>
               <a:t>Dark bars use repeated nested 5-fold CV; light bars use leave-one-day-out. Every model gets worse on an unseen day: neighbouring conditions from the same day leak information under random splits. For S1, heavily regularised linear models (OLS/PLS/Ridge) generalise best across days, while trees and kNN overfit. For S2, several models are worse than the mean on unseen days.</a:t>
             </a:r>
           </a:p>
         </p:txBody>
-      </p:sp>
-      <p:sp>
-        <p:nvSpPr>
-          <p:cNvPr id="4" name="Slide Number Placeholder 3"/>
-          <p:cNvSpPr>
-            <a:spLocks noGrp="1"/>
-          </p:cNvSpPr>
-          <p:nvPr>
-            <p:ph type="sldNum" idx="5" sz="quarter"/>
-          </p:nvPr>
-        </p:nvSpPr>
-        <p:spPr/>
       </p:sp>
     </p:spTree>
   </p:cSld>
@@ -1240,7 +1027,7 @@
 </file>
 
 <file path=ppt/notesSlides/notesSlide8.xml><?xml version="1.0" encoding="utf-8"?>
-<p:notes xmlns:a="http://schemas.openxmlformats.org/drawingml/2006/main" xmlns:p="http://schemas.openxmlformats.org/presentationml/2006/main" xmlns:r="http://schemas.openxmlformats.org/officeDocument/2006/relationships">
+<p:notes xmlns:a="http://schemas.openxmlformats.org/drawingml/2006/main" xmlns:r="http://schemas.openxmlformats.org/officeDocument/2006/relationships" xmlns:p="http://schemas.openxmlformats.org/presentationml/2006/main">
   <p:cSld>
     <p:spTree>
       <p:nvGrpSpPr>
@@ -1263,7 +1050,7 @@
             <a:spLocks noGrp="1"/>
           </p:cNvSpPr>
           <p:nvPr>
-            <p:ph type="sldImg" idx="2"/>
+            <p:ph type="sldImg"/>
           </p:nvPr>
         </p:nvSpPr>
         <p:spPr/>
@@ -1275,7 +1062,7 @@
             <a:spLocks noGrp="1"/>
           </p:cNvSpPr>
           <p:nvPr>
-            <p:ph type="body" idx="3" sz="quarter"/>
+            <p:ph type="body" idx="1"/>
           </p:nvPr>
         </p:nvSpPr>
         <p:spPr/>
@@ -1284,22 +1071,11 @@
           <a:lstStyle/>
           <a:p>
             <a:r>
+              <a:rPr/>
               <a:t>Each day is predicted by a GP trained only on the other four days; the shaded band is the GP 95% interval. The stat cards on the right are each subject's BEST unseen-day model (S1: OLS, S2: Gradient Boosting); the GP drawn here is worse for S2 (MSE 0.046). S1 tracks closely (GP r = 0.88; OLS R² 0.79). S2 misses the drop in level on days 3-5: its sensors do not see that change, and the wider band shows the GP knows it is less sure. For CMA-ES, ranking within a day is what matters; Spearman rho is about 0.6 for S1.</a:t>
             </a:r>
           </a:p>
         </p:txBody>
-      </p:sp>
-      <p:sp>
-        <p:nvSpPr>
-          <p:cNvPr id="4" name="Slide Number Placeholder 3"/>
-          <p:cNvSpPr>
-            <a:spLocks noGrp="1"/>
-          </p:cNvSpPr>
-          <p:nvPr>
-            <p:ph type="sldNum" idx="5" sz="quarter"/>
-          </p:nvPr>
-        </p:nvSpPr>
-        <p:spPr/>
       </p:sp>
     </p:spTree>
   </p:cSld>
@@ -1310,7 +1086,7 @@
 </file>
 
 <file path=ppt/notesSlides/notesSlide9.xml><?xml version="1.0" encoding="utf-8"?>
-<p:notes xmlns:a="http://schemas.openxmlformats.org/drawingml/2006/main" xmlns:p="http://schemas.openxmlformats.org/presentationml/2006/main" xmlns:r="http://schemas.openxmlformats.org/officeDocument/2006/relationships">
+<p:notes xmlns:a="http://schemas.openxmlformats.org/drawingml/2006/main" xmlns:r="http://schemas.openxmlformats.org/officeDocument/2006/relationships" xmlns:p="http://schemas.openxmlformats.org/presentationml/2006/main">
   <p:cSld>
     <p:spTree>
       <p:nvGrpSpPr>
@@ -1333,7 +1109,7 @@
             <a:spLocks noGrp="1"/>
           </p:cNvSpPr>
           <p:nvPr>
-            <p:ph type="sldImg" idx="2"/>
+            <p:ph type="sldImg"/>
           </p:nvPr>
         </p:nvSpPr>
         <p:spPr/>
@@ -1345,7 +1121,7 @@
             <a:spLocks noGrp="1"/>
           </p:cNvSpPr>
           <p:nvPr>
-            <p:ph type="body" idx="3" sz="quarter"/>
+            <p:ph type="body" idx="1"/>
           </p:nvPr>
         </p:nvSpPr>
         <p:spPr/>
@@ -1354,22 +1130,11 @@
           <a:lstStyle/>
           <a:p>
             <a:r>
+              <a:rPr/>
               <a:t>Permutation importance on held-out folds, plus a group-wise permutation. EMG &gt; Step &gt; Control for S1, and EMG &gt; Control &gt; Step for S2, matching the paper's ablation. LASSO stability selection over 200 bootstraps keeps R4 and R7 (S1) and R2 (S2) 93-100% of the time, so a reduced sensor set is realistic. Dropping the control parameters barely hurts, which is good for portability to other devices.</a:t>
             </a:r>
           </a:p>
         </p:txBody>
-      </p:sp>
-      <p:sp>
-        <p:nvSpPr>
-          <p:cNvPr id="4" name="Slide Number Placeholder 3"/>
-          <p:cNvSpPr>
-            <a:spLocks noGrp="1"/>
-          </p:cNvSpPr>
-          <p:nvPr>
-            <p:ph type="sldNum" idx="5" sz="quarter"/>
-          </p:nvPr>
-        </p:nvSpPr>
-        <p:spPr/>
       </p:sp>
     </p:spTree>
   </p:cSld>
@@ -1411,13 +1176,16 @@
             <a:off x="685800" y="2130425"/>
             <a:ext cx="7772400" cy="1470025"/>
           </a:xfrm>
+          <a:prstGeom prst="rect">
+            <a:avLst/>
+          </a:prstGeom>
         </p:spPr>
         <p:txBody>
           <a:bodyPr/>
           <a:lstStyle/>
           <a:p>
             <a:r>
-              <a:rPr lang="en-US" smtClean="0"/>
+              <a:rPr lang="en-US"/>
               <a:t>Click to edit Master title style</a:t>
             </a:r>
             <a:endParaRPr lang="en-US"/>
@@ -1439,6 +1207,9 @@
             <a:off x="1371600" y="3886200"/>
             <a:ext cx="6400800" cy="1752600"/>
           </a:xfrm>
+          <a:prstGeom prst="rect">
+            <a:avLst/>
+          </a:prstGeom>
         </p:spPr>
         <p:txBody>
           <a:bodyPr/>
@@ -1536,7 +1307,7 @@
           </a:lstStyle>
           <a:p>
             <a:r>
-              <a:rPr lang="en-US" smtClean="0"/>
+              <a:rPr lang="en-US"/>
               <a:t>Click to edit Master subtitle style</a:t>
             </a:r>
             <a:endParaRPr lang="en-US"/>
@@ -1558,8 +1329,8 @@
           <a:bodyPr/>
           <a:lstStyle/>
           <a:p>
-            <a:fld id="{5BCAD085-E8A6-8845-BD4E-CB4CCA059FC4}" type="datetimeFigureOut">
-              <a:rPr lang="en-US" smtClean="0"/>
+            <a:fld id="{CF395B21-E8EE-4505-87E0-7B7F2C3DBBD0}" type="datetimeFigureOut">
+              <a:rPr lang="en-US"/>
               <a:t>1/27/13</a:t>
             </a:fld>
             <a:endParaRPr lang="en-US"/>
@@ -1600,8 +1371,8 @@
           <a:bodyPr/>
           <a:lstStyle/>
           <a:p>
-            <a:fld id="{C1FF6DA9-008F-8B48-92A6-B652298478BF}" type="slidenum">
-              <a:rPr lang="en-US" smtClean="0"/>
+            <a:fld id="{7DDC6D5D-A00E-4AA9-84F2-364CBECE0EEA}" type="slidenum">
+              <a:rPr lang="en-US"/>
               <a:t>‹#›</a:t>
             </a:fld>
             <a:endParaRPr lang="en-US"/>
@@ -1609,11 +1380,6 @@
         </p:txBody>
       </p:sp>
     </p:spTree>
-    <p:extLst>
-      <p:ext uri="{BB962C8B-B14F-4D97-AF65-F5344CB8AC3E}">
-        <p14:creationId xmlns:p14="http://schemas.microsoft.com/office/powerpoint/2010/main" val="3168075583"/>
-      </p:ext>
-    </p:extLst>
   </p:cSld>
   <p:clrMapOvr>
     <a:masterClrMapping/>
@@ -1654,7 +1420,7 @@
           <a:lstStyle/>
           <a:p>
             <a:r>
-              <a:rPr lang="en-US" smtClean="0"/>
+              <a:rPr lang="en-US"/>
               <a:t>Click to edit Master title style</a:t>
             </a:r>
             <a:endParaRPr lang="en-US"/>
@@ -1676,37 +1442,36 @@
           <a:bodyPr vert="eaVert"/>
           <a:lstStyle/>
           <a:p>
-            <a:pPr lvl="0"/>
-            <a:r>
-              <a:rPr lang="en-US" smtClean="0"/>
+            <a:r>
+              <a:rPr lang="en-US"/>
               <a:t>Click to edit Master text styles</a:t>
             </a:r>
           </a:p>
           <a:p>
             <a:pPr lvl="1"/>
             <a:r>
-              <a:rPr lang="en-US" smtClean="0"/>
+              <a:rPr lang="en-US"/>
               <a:t>Second level</a:t>
             </a:r>
           </a:p>
           <a:p>
             <a:pPr lvl="2"/>
             <a:r>
-              <a:rPr lang="en-US" smtClean="0"/>
+              <a:rPr lang="en-US"/>
               <a:t>Third level</a:t>
             </a:r>
           </a:p>
           <a:p>
             <a:pPr lvl="3"/>
             <a:r>
-              <a:rPr lang="en-US" smtClean="0"/>
+              <a:rPr lang="en-US"/>
               <a:t>Fourth level</a:t>
             </a:r>
           </a:p>
           <a:p>
             <a:pPr lvl="4"/>
             <a:r>
-              <a:rPr lang="en-US" smtClean="0"/>
+              <a:rPr lang="en-US"/>
               <a:t>Fifth level</a:t>
             </a:r>
             <a:endParaRPr lang="en-US"/>
@@ -1728,8 +1493,8 @@
           <a:bodyPr/>
           <a:lstStyle/>
           <a:p>
-            <a:fld id="{5BCAD085-E8A6-8845-BD4E-CB4CCA059FC4}" type="datetimeFigureOut">
-              <a:rPr lang="en-US" smtClean="0"/>
+            <a:fld id="{27602B83-4DFE-444B-8222-D5FF1EA6B44C}" type="datetimeFigureOut">
+              <a:rPr lang="en-US"/>
               <a:t>1/27/13</a:t>
             </a:fld>
             <a:endParaRPr lang="en-US"/>
@@ -1770,8 +1535,8 @@
           <a:bodyPr/>
           <a:lstStyle/>
           <a:p>
-            <a:fld id="{C1FF6DA9-008F-8B48-92A6-B652298478BF}" type="slidenum">
-              <a:rPr lang="en-US" smtClean="0"/>
+            <a:fld id="{DE19C649-D3E0-46CB-87C1-67136E4226A6}" type="slidenum">
+              <a:rPr lang="en-US"/>
               <a:t>‹#›</a:t>
             </a:fld>
             <a:endParaRPr lang="en-US"/>
@@ -1779,11 +1544,6 @@
         </p:txBody>
       </p:sp>
     </p:spTree>
-    <p:extLst>
-      <p:ext uri="{BB962C8B-B14F-4D97-AF65-F5344CB8AC3E}">
-        <p14:creationId xmlns:p14="http://schemas.microsoft.com/office/powerpoint/2010/main" val="2910927964"/>
-      </p:ext>
-    </p:extLst>
   </p:cSld>
   <p:clrMapOvr>
     <a:masterClrMapping/>
@@ -1823,13 +1583,16 @@
             <a:off x="6629400" y="274638"/>
             <a:ext cx="2057400" cy="5851525"/>
           </a:xfrm>
+          <a:prstGeom prst="rect">
+            <a:avLst/>
+          </a:prstGeom>
         </p:spPr>
         <p:txBody>
           <a:bodyPr vert="eaVert"/>
           <a:lstStyle/>
           <a:p>
             <a:r>
-              <a:rPr lang="en-US" smtClean="0"/>
+              <a:rPr lang="en-US"/>
               <a:t>Click to edit Master title style</a:t>
             </a:r>
             <a:endParaRPr lang="en-US"/>
@@ -1851,42 +1614,44 @@
             <a:off x="457200" y="274638"/>
             <a:ext cx="6019800" cy="5851525"/>
           </a:xfrm>
+          <a:prstGeom prst="rect">
+            <a:avLst/>
+          </a:prstGeom>
         </p:spPr>
         <p:txBody>
           <a:bodyPr vert="eaVert"/>
           <a:lstStyle/>
           <a:p>
-            <a:pPr lvl="0"/>
-            <a:r>
-              <a:rPr lang="en-US" smtClean="0"/>
+            <a:r>
+              <a:rPr lang="en-US"/>
               <a:t>Click to edit Master text styles</a:t>
             </a:r>
           </a:p>
           <a:p>
             <a:pPr lvl="1"/>
             <a:r>
-              <a:rPr lang="en-US" smtClean="0"/>
+              <a:rPr lang="en-US"/>
               <a:t>Second level</a:t>
             </a:r>
           </a:p>
           <a:p>
             <a:pPr lvl="2"/>
             <a:r>
-              <a:rPr lang="en-US" smtClean="0"/>
+              <a:rPr lang="en-US"/>
               <a:t>Third level</a:t>
             </a:r>
           </a:p>
           <a:p>
             <a:pPr lvl="3"/>
             <a:r>
-              <a:rPr lang="en-US" smtClean="0"/>
+              <a:rPr lang="en-US"/>
               <a:t>Fourth level</a:t>
             </a:r>
           </a:p>
           <a:p>
             <a:pPr lvl="4"/>
             <a:r>
-              <a:rPr lang="en-US" smtClean="0"/>
+              <a:rPr lang="en-US"/>
               <a:t>Fifth level</a:t>
             </a:r>
             <a:endParaRPr lang="en-US"/>
@@ -1908,8 +1673,8 @@
           <a:bodyPr/>
           <a:lstStyle/>
           <a:p>
-            <a:fld id="{5BCAD085-E8A6-8845-BD4E-CB4CCA059FC4}" type="datetimeFigureOut">
-              <a:rPr lang="en-US" smtClean="0"/>
+            <a:fld id="{A6FA40F9-1701-4EB4-806D-4ED861E7A003}" type="datetimeFigureOut">
+              <a:rPr lang="en-US"/>
               <a:t>1/27/13</a:t>
             </a:fld>
             <a:endParaRPr lang="en-US"/>
@@ -1950,8 +1715,8 @@
           <a:bodyPr/>
           <a:lstStyle/>
           <a:p>
-            <a:fld id="{C1FF6DA9-008F-8B48-92A6-B652298478BF}" type="slidenum">
-              <a:rPr lang="en-US" smtClean="0"/>
+            <a:fld id="{20EBE78A-EB3E-401E-81B5-D7F53201DAF3}" type="slidenum">
+              <a:rPr lang="en-US"/>
               <a:t>‹#›</a:t>
             </a:fld>
             <a:endParaRPr lang="en-US"/>
@@ -1959,11 +1724,6 @@
         </p:txBody>
       </p:sp>
     </p:spTree>
-    <p:extLst>
-      <p:ext uri="{BB962C8B-B14F-4D97-AF65-F5344CB8AC3E}">
-        <p14:creationId xmlns:p14="http://schemas.microsoft.com/office/powerpoint/2010/main" val="3612223792"/>
-      </p:ext>
-    </p:extLst>
   </p:cSld>
   <p:clrMapOvr>
     <a:masterClrMapping/>
@@ -2004,7 +1764,7 @@
           <a:lstStyle/>
           <a:p>
             <a:r>
-              <a:rPr lang="en-US" smtClean="0"/>
+              <a:rPr lang="en-US"/>
               <a:t>Click to edit Master title style</a:t>
             </a:r>
             <a:endParaRPr lang="en-US"/>
@@ -2026,37 +1786,36 @@
           <a:bodyPr/>
           <a:lstStyle/>
           <a:p>
-            <a:pPr lvl="0"/>
-            <a:r>
-              <a:rPr lang="en-US" smtClean="0"/>
+            <a:r>
+              <a:rPr lang="en-US"/>
               <a:t>Click to edit Master text styles</a:t>
             </a:r>
           </a:p>
           <a:p>
             <a:pPr lvl="1"/>
             <a:r>
-              <a:rPr lang="en-US" smtClean="0"/>
+              <a:rPr lang="en-US"/>
               <a:t>Second level</a:t>
             </a:r>
           </a:p>
           <a:p>
             <a:pPr lvl="2"/>
             <a:r>
-              <a:rPr lang="en-US" smtClean="0"/>
+              <a:rPr lang="en-US"/>
               <a:t>Third level</a:t>
             </a:r>
           </a:p>
           <a:p>
             <a:pPr lvl="3"/>
             <a:r>
-              <a:rPr lang="en-US" smtClean="0"/>
+              <a:rPr lang="en-US"/>
               <a:t>Fourth level</a:t>
             </a:r>
           </a:p>
           <a:p>
             <a:pPr lvl="4"/>
             <a:r>
-              <a:rPr lang="en-US" smtClean="0"/>
+              <a:rPr lang="en-US"/>
               <a:t>Fifth level</a:t>
             </a:r>
             <a:endParaRPr lang="en-US"/>
@@ -2078,8 +1837,8 @@
           <a:bodyPr/>
           <a:lstStyle/>
           <a:p>
-            <a:fld id="{5BCAD085-E8A6-8845-BD4E-CB4CCA059FC4}" type="datetimeFigureOut">
-              <a:rPr lang="en-US" smtClean="0"/>
+            <a:fld id="{05E609E6-1126-4CCC-8F95-892B304C12E9}" type="datetimeFigureOut">
+              <a:rPr lang="en-US"/>
               <a:t>1/27/13</a:t>
             </a:fld>
             <a:endParaRPr lang="en-US"/>
@@ -2120,8 +1879,8 @@
           <a:bodyPr/>
           <a:lstStyle/>
           <a:p>
-            <a:fld id="{C1FF6DA9-008F-8B48-92A6-B652298478BF}" type="slidenum">
-              <a:rPr lang="en-US" smtClean="0"/>
+            <a:fld id="{EDCD0F9E-EF7E-4C26-8662-25A73F2263DD}" type="slidenum">
+              <a:rPr lang="en-US"/>
               <a:t>‹#›</a:t>
             </a:fld>
             <a:endParaRPr lang="en-US"/>
@@ -2129,11 +1888,6 @@
         </p:txBody>
       </p:sp>
     </p:spTree>
-    <p:extLst>
-      <p:ext uri="{BB962C8B-B14F-4D97-AF65-F5344CB8AC3E}">
-        <p14:creationId xmlns:p14="http://schemas.microsoft.com/office/powerpoint/2010/main" val="2614314258"/>
-      </p:ext>
-    </p:extLst>
   </p:cSld>
   <p:clrMapOvr>
     <a:masterClrMapping/>
@@ -2173,6 +1927,9 @@
             <a:off x="722313" y="4406900"/>
             <a:ext cx="7772400" cy="1362075"/>
           </a:xfrm>
+          <a:prstGeom prst="rect">
+            <a:avLst/>
+          </a:prstGeom>
         </p:spPr>
         <p:txBody>
           <a:bodyPr anchor="t"/>
@@ -2183,7 +1940,7 @@
           </a:lstStyle>
           <a:p>
             <a:r>
-              <a:rPr lang="en-US" smtClean="0"/>
+              <a:rPr lang="en-US"/>
               <a:t>Click to edit Master title style</a:t>
             </a:r>
             <a:endParaRPr lang="en-US"/>
@@ -2205,6 +1962,9 @@
             <a:off x="722313" y="2906713"/>
             <a:ext cx="7772400" cy="1500187"/>
           </a:xfrm>
+          <a:prstGeom prst="rect">
+            <a:avLst/>
+          </a:prstGeom>
         </p:spPr>
         <p:txBody>
           <a:bodyPr anchor="b"/>
@@ -2301,9 +2061,8 @@
             </a:lvl9pPr>
           </a:lstStyle>
           <a:p>
-            <a:pPr lvl="0"/>
-            <a:r>
-              <a:rPr lang="en-US" smtClean="0"/>
+            <a:r>
+              <a:rPr lang="en-US"/>
               <a:t>Click to edit Master text styles</a:t>
             </a:r>
           </a:p>
@@ -2324,8 +2083,8 @@
           <a:bodyPr/>
           <a:lstStyle/>
           <a:p>
-            <a:fld id="{5BCAD085-E8A6-8845-BD4E-CB4CCA059FC4}" type="datetimeFigureOut">
-              <a:rPr lang="en-US" smtClean="0"/>
+            <a:fld id="{B43082BF-5467-4883-8896-824F7369BC9A}" type="datetimeFigureOut">
+              <a:rPr lang="en-US"/>
               <a:t>1/27/13</a:t>
             </a:fld>
             <a:endParaRPr lang="en-US"/>
@@ -2366,8 +2125,8 @@
           <a:bodyPr/>
           <a:lstStyle/>
           <a:p>
-            <a:fld id="{C1FF6DA9-008F-8B48-92A6-B652298478BF}" type="slidenum">
-              <a:rPr lang="en-US" smtClean="0"/>
+            <a:fld id="{87C18080-B33E-4073-8615-72D8F5AE8F78}" type="slidenum">
+              <a:rPr lang="en-US"/>
               <a:t>‹#›</a:t>
             </a:fld>
             <a:endParaRPr lang="en-US"/>
@@ -2375,11 +2134,6 @@
         </p:txBody>
       </p:sp>
     </p:spTree>
-    <p:extLst>
-      <p:ext uri="{BB962C8B-B14F-4D97-AF65-F5344CB8AC3E}">
-        <p14:creationId xmlns:p14="http://schemas.microsoft.com/office/powerpoint/2010/main" val="960648375"/>
-      </p:ext>
-    </p:extLst>
   </p:cSld>
   <p:clrMapOvr>
     <a:masterClrMapping/>
@@ -2420,7 +2174,7 @@
           <a:lstStyle/>
           <a:p>
             <a:r>
-              <a:rPr lang="en-US" smtClean="0"/>
+              <a:rPr lang="en-US"/>
               <a:t>Click to edit Master title style</a:t>
             </a:r>
             <a:endParaRPr lang="en-US"/>
@@ -2442,6 +2196,9 @@
             <a:off x="457200" y="1600200"/>
             <a:ext cx="4038600" cy="4525963"/>
           </a:xfrm>
+          <a:prstGeom prst="rect">
+            <a:avLst/>
+          </a:prstGeom>
         </p:spPr>
         <p:txBody>
           <a:bodyPr/>
@@ -2475,37 +2232,36 @@
             </a:lvl9pPr>
           </a:lstStyle>
           <a:p>
-            <a:pPr lvl="0"/>
-            <a:r>
-              <a:rPr lang="en-US" smtClean="0"/>
+            <a:r>
+              <a:rPr lang="en-US"/>
               <a:t>Click to edit Master text styles</a:t>
             </a:r>
           </a:p>
           <a:p>
             <a:pPr lvl="1"/>
             <a:r>
-              <a:rPr lang="en-US" smtClean="0"/>
+              <a:rPr lang="en-US"/>
               <a:t>Second level</a:t>
             </a:r>
           </a:p>
           <a:p>
             <a:pPr lvl="2"/>
             <a:r>
-              <a:rPr lang="en-US" smtClean="0"/>
+              <a:rPr lang="en-US"/>
               <a:t>Third level</a:t>
             </a:r>
           </a:p>
           <a:p>
             <a:pPr lvl="3"/>
             <a:r>
-              <a:rPr lang="en-US" smtClean="0"/>
+              <a:rPr lang="en-US"/>
               <a:t>Fourth level</a:t>
             </a:r>
           </a:p>
           <a:p>
             <a:pPr lvl="4"/>
             <a:r>
-              <a:rPr lang="en-US" smtClean="0"/>
+              <a:rPr lang="en-US"/>
               <a:t>Fifth level</a:t>
             </a:r>
             <a:endParaRPr lang="en-US"/>
@@ -2527,6 +2283,9 @@
             <a:off x="4648200" y="1600200"/>
             <a:ext cx="4038600" cy="4525963"/>
           </a:xfrm>
+          <a:prstGeom prst="rect">
+            <a:avLst/>
+          </a:prstGeom>
         </p:spPr>
         <p:txBody>
           <a:bodyPr/>
@@ -2560,37 +2319,36 @@
             </a:lvl9pPr>
           </a:lstStyle>
           <a:p>
-            <a:pPr lvl="0"/>
-            <a:r>
-              <a:rPr lang="en-US" smtClean="0"/>
+            <a:r>
+              <a:rPr lang="en-US"/>
               <a:t>Click to edit Master text styles</a:t>
             </a:r>
           </a:p>
           <a:p>
             <a:pPr lvl="1"/>
             <a:r>
-              <a:rPr lang="en-US" smtClean="0"/>
+              <a:rPr lang="en-US"/>
               <a:t>Second level</a:t>
             </a:r>
           </a:p>
           <a:p>
             <a:pPr lvl="2"/>
             <a:r>
-              <a:rPr lang="en-US" smtClean="0"/>
+              <a:rPr lang="en-US"/>
               <a:t>Third level</a:t>
             </a:r>
           </a:p>
           <a:p>
             <a:pPr lvl="3"/>
             <a:r>
-              <a:rPr lang="en-US" smtClean="0"/>
+              <a:rPr lang="en-US"/>
               <a:t>Fourth level</a:t>
             </a:r>
           </a:p>
           <a:p>
             <a:pPr lvl="4"/>
             <a:r>
-              <a:rPr lang="en-US" smtClean="0"/>
+              <a:rPr lang="en-US"/>
               <a:t>Fifth level</a:t>
             </a:r>
             <a:endParaRPr lang="en-US"/>
@@ -2612,8 +2370,8 @@
           <a:bodyPr/>
           <a:lstStyle/>
           <a:p>
-            <a:fld id="{5BCAD085-E8A6-8845-BD4E-CB4CCA059FC4}" type="datetimeFigureOut">
-              <a:rPr lang="en-US" smtClean="0"/>
+            <a:fld id="{A3A66248-C912-41CA-84D9-08E1C7982093}" type="datetimeFigureOut">
+              <a:rPr lang="en-US"/>
               <a:t>1/27/13</a:t>
             </a:fld>
             <a:endParaRPr lang="en-US"/>
@@ -2654,8 +2412,8 @@
           <a:bodyPr/>
           <a:lstStyle/>
           <a:p>
-            <a:fld id="{C1FF6DA9-008F-8B48-92A6-B652298478BF}" type="slidenum">
-              <a:rPr lang="en-US" smtClean="0"/>
+            <a:fld id="{85CB9569-04AF-4288-8880-64CE52ABE7A3}" type="slidenum">
+              <a:rPr lang="en-US"/>
               <a:t>‹#›</a:t>
             </a:fld>
             <a:endParaRPr lang="en-US"/>
@@ -2663,11 +2421,6 @@
         </p:txBody>
       </p:sp>
     </p:spTree>
-    <p:extLst>
-      <p:ext uri="{BB962C8B-B14F-4D97-AF65-F5344CB8AC3E}">
-        <p14:creationId xmlns:p14="http://schemas.microsoft.com/office/powerpoint/2010/main" val="2782244947"/>
-      </p:ext>
-    </p:extLst>
   </p:cSld>
   <p:clrMapOvr>
     <a:masterClrMapping/>
@@ -2706,13 +2459,11 @@
         <p:txBody>
           <a:bodyPr/>
           <a:lstStyle>
-            <a:lvl1pPr>
-              <a:defRPr/>
-            </a:lvl1pPr>
+            <a:lvl1pPr/>
           </a:lstStyle>
           <a:p>
             <a:r>
-              <a:rPr lang="en-US" smtClean="0"/>
+              <a:rPr lang="en-US"/>
               <a:t>Click to edit Master title style</a:t>
             </a:r>
             <a:endParaRPr lang="en-US"/>
@@ -2734,6 +2485,9 @@
             <a:off x="457200" y="1535113"/>
             <a:ext cx="4040188" cy="639762"/>
           </a:xfrm>
+          <a:prstGeom prst="rect">
+            <a:avLst/>
+          </a:prstGeom>
         </p:spPr>
         <p:txBody>
           <a:bodyPr anchor="b"/>
@@ -2776,9 +2530,8 @@
             </a:lvl9pPr>
           </a:lstStyle>
           <a:p>
-            <a:pPr lvl="0"/>
-            <a:r>
-              <a:rPr lang="en-US" smtClean="0"/>
+            <a:r>
+              <a:rPr lang="en-US"/>
               <a:t>Click to edit Master text styles</a:t>
             </a:r>
           </a:p>
@@ -2799,6 +2552,9 @@
             <a:off x="457200" y="2174875"/>
             <a:ext cx="4040188" cy="3951288"/>
           </a:xfrm>
+          <a:prstGeom prst="rect">
+            <a:avLst/>
+          </a:prstGeom>
         </p:spPr>
         <p:txBody>
           <a:bodyPr/>
@@ -2832,37 +2588,36 @@
             </a:lvl9pPr>
           </a:lstStyle>
           <a:p>
-            <a:pPr lvl="0"/>
-            <a:r>
-              <a:rPr lang="en-US" smtClean="0"/>
+            <a:r>
+              <a:rPr lang="en-US"/>
               <a:t>Click to edit Master text styles</a:t>
             </a:r>
           </a:p>
           <a:p>
             <a:pPr lvl="1"/>
             <a:r>
-              <a:rPr lang="en-US" smtClean="0"/>
+              <a:rPr lang="en-US"/>
               <a:t>Second level</a:t>
             </a:r>
           </a:p>
           <a:p>
             <a:pPr lvl="2"/>
             <a:r>
-              <a:rPr lang="en-US" smtClean="0"/>
+              <a:rPr lang="en-US"/>
               <a:t>Third level</a:t>
             </a:r>
           </a:p>
           <a:p>
             <a:pPr lvl="3"/>
             <a:r>
-              <a:rPr lang="en-US" smtClean="0"/>
+              <a:rPr lang="en-US"/>
               <a:t>Fourth level</a:t>
             </a:r>
           </a:p>
           <a:p>
             <a:pPr lvl="4"/>
             <a:r>
-              <a:rPr lang="en-US" smtClean="0"/>
+              <a:rPr lang="en-US"/>
               <a:t>Fifth level</a:t>
             </a:r>
             <a:endParaRPr lang="en-US"/>
@@ -2884,6 +2639,9 @@
             <a:off x="4645025" y="1535113"/>
             <a:ext cx="4041775" cy="639762"/>
           </a:xfrm>
+          <a:prstGeom prst="rect">
+            <a:avLst/>
+          </a:prstGeom>
         </p:spPr>
         <p:txBody>
           <a:bodyPr anchor="b"/>
@@ -2926,9 +2684,8 @@
             </a:lvl9pPr>
           </a:lstStyle>
           <a:p>
-            <a:pPr lvl="0"/>
-            <a:r>
-              <a:rPr lang="en-US" smtClean="0"/>
+            <a:r>
+              <a:rPr lang="en-US"/>
               <a:t>Click to edit Master text styles</a:t>
             </a:r>
           </a:p>
@@ -2949,6 +2706,9 @@
             <a:off x="4645025" y="2174875"/>
             <a:ext cx="4041775" cy="3951288"/>
           </a:xfrm>
+          <a:prstGeom prst="rect">
+            <a:avLst/>
+          </a:prstGeom>
         </p:spPr>
         <p:txBody>
           <a:bodyPr/>
@@ -2982,37 +2742,36 @@
             </a:lvl9pPr>
           </a:lstStyle>
           <a:p>
-            <a:pPr lvl="0"/>
-            <a:r>
-              <a:rPr lang="en-US" smtClean="0"/>
+            <a:r>
+              <a:rPr lang="en-US"/>
               <a:t>Click to edit Master text styles</a:t>
             </a:r>
           </a:p>
           <a:p>
             <a:pPr lvl="1"/>
             <a:r>
-              <a:rPr lang="en-US" smtClean="0"/>
+              <a:rPr lang="en-US"/>
               <a:t>Second level</a:t>
             </a:r>
           </a:p>
           <a:p>
             <a:pPr lvl="2"/>
             <a:r>
-              <a:rPr lang="en-US" smtClean="0"/>
+              <a:rPr lang="en-US"/>
               <a:t>Third level</a:t>
             </a:r>
           </a:p>
           <a:p>
             <a:pPr lvl="3"/>
             <a:r>
-              <a:rPr lang="en-US" smtClean="0"/>
+              <a:rPr lang="en-US"/>
               <a:t>Fourth level</a:t>
             </a:r>
           </a:p>
           <a:p>
             <a:pPr lvl="4"/>
             <a:r>
-              <a:rPr lang="en-US" smtClean="0"/>
+              <a:rPr lang="en-US"/>
               <a:t>Fifth level</a:t>
             </a:r>
             <a:endParaRPr lang="en-US"/>
@@ -3034,8 +2793,8 @@
           <a:bodyPr/>
           <a:lstStyle/>
           <a:p>
-            <a:fld id="{5BCAD085-E8A6-8845-BD4E-CB4CCA059FC4}" type="datetimeFigureOut">
-              <a:rPr lang="en-US" smtClean="0"/>
+            <a:fld id="{54EFB636-F4D9-4299-85F9-44D23E27C49C}" type="datetimeFigureOut">
+              <a:rPr lang="en-US"/>
               <a:t>1/27/13</a:t>
             </a:fld>
             <a:endParaRPr lang="en-US"/>
@@ -3076,8 +2835,8 @@
           <a:bodyPr/>
           <a:lstStyle/>
           <a:p>
-            <a:fld id="{C1FF6DA9-008F-8B48-92A6-B652298478BF}" type="slidenum">
-              <a:rPr lang="en-US" smtClean="0"/>
+            <a:fld id="{BF533E07-937E-4FED-8300-891295843456}" type="slidenum">
+              <a:rPr lang="en-US"/>
               <a:t>‹#›</a:t>
             </a:fld>
             <a:endParaRPr lang="en-US"/>
@@ -3085,11 +2844,6 @@
         </p:txBody>
       </p:sp>
     </p:spTree>
-    <p:extLst>
-      <p:ext uri="{BB962C8B-B14F-4D97-AF65-F5344CB8AC3E}">
-        <p14:creationId xmlns:p14="http://schemas.microsoft.com/office/powerpoint/2010/main" val="990158736"/>
-      </p:ext>
-    </p:extLst>
   </p:cSld>
   <p:clrMapOvr>
     <a:masterClrMapping/>
@@ -3130,7 +2884,7 @@
           <a:lstStyle/>
           <a:p>
             <a:r>
-              <a:rPr lang="en-US" smtClean="0"/>
+              <a:rPr lang="en-US"/>
               <a:t>Click to edit Master title style</a:t>
             </a:r>
             <a:endParaRPr lang="en-US"/>
@@ -3152,8 +2906,8 @@
           <a:bodyPr/>
           <a:lstStyle/>
           <a:p>
-            <a:fld id="{5BCAD085-E8A6-8845-BD4E-CB4CCA059FC4}" type="datetimeFigureOut">
-              <a:rPr lang="en-US" smtClean="0"/>
+            <a:fld id="{D5CAC346-E4DF-45C0-848B-E2AC5513E0D5}" type="datetimeFigureOut">
+              <a:rPr lang="en-US"/>
               <a:t>1/27/13</a:t>
             </a:fld>
             <a:endParaRPr lang="en-US"/>
@@ -3194,8 +2948,8 @@
           <a:bodyPr/>
           <a:lstStyle/>
           <a:p>
-            <a:fld id="{C1FF6DA9-008F-8B48-92A6-B652298478BF}" type="slidenum">
-              <a:rPr lang="en-US" smtClean="0"/>
+            <a:fld id="{7A28B55B-FA15-48BA-860D-0231187503D9}" type="slidenum">
+              <a:rPr lang="en-US"/>
               <a:t>‹#›</a:t>
             </a:fld>
             <a:endParaRPr lang="en-US"/>
@@ -3203,11 +2957,6 @@
         </p:txBody>
       </p:sp>
     </p:spTree>
-    <p:extLst>
-      <p:ext uri="{BB962C8B-B14F-4D97-AF65-F5344CB8AC3E}">
-        <p14:creationId xmlns:p14="http://schemas.microsoft.com/office/powerpoint/2010/main" val="727027711"/>
-      </p:ext>
-    </p:extLst>
   </p:cSld>
   <p:clrMapOvr>
     <a:masterClrMapping/>
@@ -3247,8 +2996,8 @@
           <a:bodyPr/>
           <a:lstStyle/>
           <a:p>
-            <a:fld id="{5BCAD085-E8A6-8845-BD4E-CB4CCA059FC4}" type="datetimeFigureOut">
-              <a:rPr lang="en-US" smtClean="0"/>
+            <a:fld id="{FE20B29E-DC2A-4D67-887F-3BE2DC8489D6}" type="datetimeFigureOut">
+              <a:rPr lang="en-US"/>
               <a:t>1/27/13</a:t>
             </a:fld>
             <a:endParaRPr lang="en-US"/>
@@ -3289,8 +3038,8 @@
           <a:bodyPr/>
           <a:lstStyle/>
           <a:p>
-            <a:fld id="{C1FF6DA9-008F-8B48-92A6-B652298478BF}" type="slidenum">
-              <a:rPr lang="en-US" smtClean="0"/>
+            <a:fld id="{00E0EBC0-ADA9-4FA7-889C-9287646BC794}" type="slidenum">
+              <a:rPr lang="en-US"/>
               <a:t>‹#›</a:t>
             </a:fld>
             <a:endParaRPr lang="en-US"/>
@@ -3298,11 +3047,6 @@
         </p:txBody>
       </p:sp>
     </p:spTree>
-    <p:extLst>
-      <p:ext uri="{BB962C8B-B14F-4D97-AF65-F5344CB8AC3E}">
-        <p14:creationId xmlns:p14="http://schemas.microsoft.com/office/powerpoint/2010/main" val="1212999818"/>
-      </p:ext>
-    </p:extLst>
   </p:cSld>
   <p:clrMapOvr>
     <a:masterClrMapping/>
@@ -3342,6 +3086,9 @@
             <a:off x="457200" y="273050"/>
             <a:ext cx="3008313" cy="1162050"/>
           </a:xfrm>
+          <a:prstGeom prst="rect">
+            <a:avLst/>
+          </a:prstGeom>
         </p:spPr>
         <p:txBody>
           <a:bodyPr anchor="b"/>
@@ -3352,7 +3099,7 @@
           </a:lstStyle>
           <a:p>
             <a:r>
-              <a:rPr lang="en-US" smtClean="0"/>
+              <a:rPr lang="en-US"/>
               <a:t>Click to edit Master title style</a:t>
             </a:r>
             <a:endParaRPr lang="en-US"/>
@@ -3374,6 +3121,9 @@
             <a:off x="3575050" y="273050"/>
             <a:ext cx="5111750" cy="5853113"/>
           </a:xfrm>
+          <a:prstGeom prst="rect">
+            <a:avLst/>
+          </a:prstGeom>
         </p:spPr>
         <p:txBody>
           <a:bodyPr/>
@@ -3407,37 +3157,36 @@
             </a:lvl9pPr>
           </a:lstStyle>
           <a:p>
-            <a:pPr lvl="0"/>
-            <a:r>
-              <a:rPr lang="en-US" smtClean="0"/>
+            <a:r>
+              <a:rPr lang="en-US"/>
               <a:t>Click to edit Master text styles</a:t>
             </a:r>
           </a:p>
           <a:p>
             <a:pPr lvl="1"/>
             <a:r>
-              <a:rPr lang="en-US" smtClean="0"/>
+              <a:rPr lang="en-US"/>
               <a:t>Second level</a:t>
             </a:r>
           </a:p>
           <a:p>
             <a:pPr lvl="2"/>
             <a:r>
-              <a:rPr lang="en-US" smtClean="0"/>
+              <a:rPr lang="en-US"/>
               <a:t>Third level</a:t>
             </a:r>
           </a:p>
           <a:p>
             <a:pPr lvl="3"/>
             <a:r>
-              <a:rPr lang="en-US" smtClean="0"/>
+              <a:rPr lang="en-US"/>
               <a:t>Fourth level</a:t>
             </a:r>
           </a:p>
           <a:p>
             <a:pPr lvl="4"/>
             <a:r>
-              <a:rPr lang="en-US" smtClean="0"/>
+              <a:rPr lang="en-US"/>
               <a:t>Fifth level</a:t>
             </a:r>
             <a:endParaRPr lang="en-US"/>
@@ -3459,6 +3208,9 @@
             <a:off x="457200" y="1435100"/>
             <a:ext cx="3008313" cy="4691063"/>
           </a:xfrm>
+          <a:prstGeom prst="rect">
+            <a:avLst/>
+          </a:prstGeom>
         </p:spPr>
         <p:txBody>
           <a:bodyPr/>
@@ -3501,9 +3253,8 @@
             </a:lvl9pPr>
           </a:lstStyle>
           <a:p>
-            <a:pPr lvl="0"/>
-            <a:r>
-              <a:rPr lang="en-US" smtClean="0"/>
+            <a:r>
+              <a:rPr lang="en-US"/>
               <a:t>Click to edit Master text styles</a:t>
             </a:r>
           </a:p>
@@ -3524,8 +3275,8 @@
           <a:bodyPr/>
           <a:lstStyle/>
           <a:p>
-            <a:fld id="{5BCAD085-E8A6-8845-BD4E-CB4CCA059FC4}" type="datetimeFigureOut">
-              <a:rPr lang="en-US" smtClean="0"/>
+            <a:fld id="{AFC563BD-7186-488E-816C-8F41FA24179F}" type="datetimeFigureOut">
+              <a:rPr lang="en-US"/>
               <a:t>1/27/13</a:t>
             </a:fld>
             <a:endParaRPr lang="en-US"/>
@@ -3566,8 +3317,8 @@
           <a:bodyPr/>
           <a:lstStyle/>
           <a:p>
-            <a:fld id="{C1FF6DA9-008F-8B48-92A6-B652298478BF}" type="slidenum">
-              <a:rPr lang="en-US" smtClean="0"/>
+            <a:fld id="{7DA25AB8-FB3A-479C-8780-0B7E5F586C0F}" type="slidenum">
+              <a:rPr lang="en-US"/>
               <a:t>‹#›</a:t>
             </a:fld>
             <a:endParaRPr lang="en-US"/>
@@ -3575,11 +3326,6 @@
         </p:txBody>
       </p:sp>
     </p:spTree>
-    <p:extLst>
-      <p:ext uri="{BB962C8B-B14F-4D97-AF65-F5344CB8AC3E}">
-        <p14:creationId xmlns:p14="http://schemas.microsoft.com/office/powerpoint/2010/main" val="1840726560"/>
-      </p:ext>
-    </p:extLst>
   </p:cSld>
   <p:clrMapOvr>
     <a:masterClrMapping/>
@@ -3619,6 +3365,9 @@
             <a:off x="1792288" y="4800600"/>
             <a:ext cx="5486400" cy="566738"/>
           </a:xfrm>
+          <a:prstGeom prst="rect">
+            <a:avLst/>
+          </a:prstGeom>
         </p:spPr>
         <p:txBody>
           <a:bodyPr anchor="b"/>
@@ -3629,7 +3378,7 @@
           </a:lstStyle>
           <a:p>
             <a:r>
-              <a:rPr lang="en-US" smtClean="0"/>
+              <a:rPr lang="en-US"/>
               <a:t>Click to edit Master title style</a:t>
             </a:r>
             <a:endParaRPr lang="en-US"/>
@@ -3651,6 +3400,9 @@
             <a:off x="1792288" y="612775"/>
             <a:ext cx="5486400" cy="4114800"/>
           </a:xfrm>
+          <a:prstGeom prst="rect">
+            <a:avLst/>
+          </a:prstGeom>
         </p:spPr>
         <p:txBody>
           <a:bodyPr/>
@@ -3712,6 +3464,9 @@
             <a:off x="1792288" y="5367338"/>
             <a:ext cx="5486400" cy="804862"/>
           </a:xfrm>
+          <a:prstGeom prst="rect">
+            <a:avLst/>
+          </a:prstGeom>
         </p:spPr>
         <p:txBody>
           <a:bodyPr/>
@@ -3754,9 +3509,8 @@
             </a:lvl9pPr>
           </a:lstStyle>
           <a:p>
-            <a:pPr lvl="0"/>
-            <a:r>
-              <a:rPr lang="en-US" smtClean="0"/>
+            <a:r>
+              <a:rPr lang="en-US"/>
               <a:t>Click to edit Master text styles</a:t>
             </a:r>
           </a:p>
@@ -3777,8 +3531,8 @@
           <a:bodyPr/>
           <a:lstStyle/>
           <a:p>
-            <a:fld id="{5BCAD085-E8A6-8845-BD4E-CB4CCA059FC4}" type="datetimeFigureOut">
-              <a:rPr lang="en-US" smtClean="0"/>
+            <a:fld id="{1EE02C48-70E8-4C8D-81F4-17FB598144B8}" type="datetimeFigureOut">
+              <a:rPr lang="en-US"/>
               <a:t>1/27/13</a:t>
             </a:fld>
             <a:endParaRPr lang="en-US"/>
@@ -3819,8 +3573,8 @@
           <a:bodyPr/>
           <a:lstStyle/>
           <a:p>
-            <a:fld id="{C1FF6DA9-008F-8B48-92A6-B652298478BF}" type="slidenum">
-              <a:rPr lang="en-US" smtClean="0"/>
+            <a:fld id="{5AEFC29A-6C4F-4141-86E3-1A3E2D58E3A2}" type="slidenum">
+              <a:rPr lang="en-US"/>
               <a:t>‹#›</a:t>
             </a:fld>
             <a:endParaRPr lang="en-US"/>
@@ -3828,11 +3582,6 @@
         </p:txBody>
       </p:sp>
     </p:spTree>
-    <p:extLst>
-      <p:ext uri="{BB962C8B-B14F-4D97-AF65-F5344CB8AC3E}">
-        <p14:creationId xmlns:p14="http://schemas.microsoft.com/office/powerpoint/2010/main" val="3889236939"/>
-      </p:ext>
-    </p:extLst>
   </p:cSld>
   <p:clrMapOvr>
     <a:masterClrMapping/>
@@ -3842,7 +3591,7 @@
 
 <file path=ppt/slideMasters/slideMaster1.xml><?xml version="1.0" encoding="utf-8"?>
 <p:sldMaster xmlns:a="http://schemas.openxmlformats.org/drawingml/2006/main" xmlns:r="http://schemas.openxmlformats.org/officeDocument/2006/relationships" xmlns:p="http://schemas.openxmlformats.org/presentationml/2006/main">
-  <p:cSld>
+  <p:cSld name="Office Theme">
     <p:bg>
       <p:bgRef idx="1001">
         <a:schemeClr val="bg1"/>
@@ -3888,7 +3637,7 @@
           <a:lstStyle/>
           <a:p>
             <a:r>
-              <a:rPr lang="en-US" smtClean="0"/>
+              <a:rPr lang="en-US"/>
               <a:t>Click to edit Master title style</a:t>
             </a:r>
             <a:endParaRPr lang="en-US"/>
@@ -3920,37 +3669,36 @@
           </a:bodyPr>
           <a:lstStyle/>
           <a:p>
-            <a:pPr lvl="0"/>
-            <a:r>
-              <a:rPr lang="en-US" smtClean="0"/>
+            <a:r>
+              <a:rPr lang="en-US"/>
               <a:t>Click to edit Master text styles</a:t>
             </a:r>
           </a:p>
           <a:p>
             <a:pPr lvl="1"/>
             <a:r>
-              <a:rPr lang="en-US" smtClean="0"/>
+              <a:rPr lang="en-US"/>
               <a:t>Second level</a:t>
             </a:r>
           </a:p>
           <a:p>
             <a:pPr lvl="2"/>
             <a:r>
-              <a:rPr lang="en-US" smtClean="0"/>
+              <a:rPr lang="en-US"/>
               <a:t>Third level</a:t>
             </a:r>
           </a:p>
           <a:p>
             <a:pPr lvl="3"/>
             <a:r>
-              <a:rPr lang="en-US" smtClean="0"/>
+              <a:rPr lang="en-US"/>
               <a:t>Fourth level</a:t>
             </a:r>
           </a:p>
           <a:p>
             <a:pPr lvl="4"/>
             <a:r>
-              <a:rPr lang="en-US" smtClean="0"/>
+              <a:rPr lang="en-US"/>
               <a:t>Fifth level</a:t>
             </a:r>
             <a:endParaRPr lang="en-US"/>
@@ -3990,8 +3738,8 @@
             </a:lvl1pPr>
           </a:lstStyle>
           <a:p>
-            <a:fld id="{5BCAD085-E8A6-8845-BD4E-CB4CCA059FC4}" type="datetimeFigureOut">
-              <a:rPr lang="en-US" smtClean="0"/>
+            <a:fld id="{90ADADCF-DC63-475D-8D69-AEBF4EDF3BBC}" type="datetimeFigureOut">
+              <a:rPr lang="en-US"/>
               <a:t>1/27/13</a:t>
             </a:fld>
             <a:endParaRPr lang="en-US"/>
@@ -4068,8 +3816,8 @@
             </a:lvl1pPr>
           </a:lstStyle>
           <a:p>
-            <a:fld id="{C1FF6DA9-008F-8B48-92A6-B652298478BF}" type="slidenum">
-              <a:rPr lang="en-US" smtClean="0"/>
+            <a:fld id="{473D6AB1-0FDA-49F1-8390-8828CE9E6676}" type="slidenum">
+              <a:rPr lang="en-US"/>
               <a:t>‹#›</a:t>
             </a:fld>
             <a:endParaRPr lang="en-US"/>
@@ -4077,11 +3825,6 @@
         </p:txBody>
       </p:sp>
     </p:spTree>
-    <p:extLst>
-      <p:ext uri="{BB962C8B-B14F-4D97-AF65-F5344CB8AC3E}">
-        <p14:creationId xmlns:p14="http://schemas.microsoft.com/office/powerpoint/2010/main" val="2209977519"/>
-      </p:ext>
-    </p:extLst>
   </p:cSld>
   <p:clrMap bg1="lt1" tx1="dk1" bg2="lt2" tx2="dk2" accent1="accent1" accent2="accent2" accent3="accent3" accent4="accent4" accent5="accent5" accent6="accent6" hlink="hlink" folHlink="folHlink"/>
   <p:sldLayoutIdLst>
@@ -4252,9 +3995,6 @@
       </a:lvl9pPr>
     </p:bodyStyle>
     <p:otherStyle>
-      <a:defPPr>
-        <a:defRPr lang="en-US"/>
-      </a:defPPr>
       <a:lvl1pPr marL="0" algn="l" defTabSz="457200" rtl="0" eaLnBrk="1" latinLnBrk="0" hangingPunct="1">
         <a:defRPr sz="1800" kern="1200">
           <a:solidFill>
@@ -4351,7 +4091,7 @@
 </file>
 
 <file path=ppt/slides/slide1.xml><?xml version="1.0" encoding="utf-8"?>
-<p:sld xmlns:a="http://schemas.openxmlformats.org/drawingml/2006/main" xmlns:p="http://schemas.openxmlformats.org/presentationml/2006/main" xmlns:r="http://schemas.openxmlformats.org/officeDocument/2006/relationships">
+<p:sld xmlns:a="http://schemas.openxmlformats.org/drawingml/2006/main" xmlns:r="http://schemas.openxmlformats.org/officeDocument/2006/relationships" xmlns:p="http://schemas.openxmlformats.org/presentationml/2006/main">
   <p:cSld>
     <p:bg>
       <p:bgPr>
@@ -4367,7 +4107,14 @@
         <p:cNvGrpSpPr/>
         <p:nvPr/>
       </p:nvGrpSpPr>
-      <p:grpSpPr/>
+      <p:grpSpPr>
+        <a:xfrm>
+          <a:off x="0" y="0"/>
+          <a:ext cx="0" cy="0"/>
+          <a:chOff x="0" y="0"/>
+          <a:chExt cx="0" cy="0"/>
+        </a:xfrm>
+      </p:grpSpPr>
       <p:sp>
         <p:nvSpPr>
           <p:cNvPr id="2" name="Rounded Rectangle 1"/>
@@ -4431,7 +4178,7 @@
           <a:noFill/>
         </p:spPr>
         <p:txBody>
-          <a:bodyPr wrap="square" anchor="ctr" lIns="0" rIns="0" tIns="0" bIns="0">
+          <a:bodyPr wrap="square" lIns="0" tIns="0" rIns="0" bIns="0" anchor="ctr">
             <a:spAutoFit/>
           </a:bodyPr>
           <a:lstStyle/>
@@ -4466,7 +4213,7 @@
           <a:noFill/>
         </p:spPr>
         <p:txBody>
-          <a:bodyPr wrap="square" anchor="t" lIns="0" rIns="0" tIns="0" bIns="0">
+          <a:bodyPr wrap="square" lIns="0" tIns="0" rIns="0" bIns="0" anchor="t">
             <a:spAutoFit/>
           </a:bodyPr>
           <a:lstStyle/>
@@ -4513,7 +4260,7 @@
           <a:noFill/>
         </p:spPr>
         <p:txBody>
-          <a:bodyPr wrap="square" anchor="t" lIns="0" rIns="0" tIns="0" bIns="0">
+          <a:bodyPr wrap="square" lIns="0" tIns="0" rIns="0" bIns="0" anchor="t">
             <a:spAutoFit/>
           </a:bodyPr>
           <a:lstStyle/>
@@ -4548,7 +4295,7 @@
           <a:noFill/>
         </p:spPr>
         <p:txBody>
-          <a:bodyPr wrap="square" anchor="t" lIns="0" rIns="0" tIns="0" bIns="0">
+          <a:bodyPr wrap="square" lIns="0" tIns="0" rIns="0" bIns="0" anchor="t">
             <a:spAutoFit/>
           </a:bodyPr>
           <a:lstStyle/>
@@ -4604,7 +4351,7 @@
 </file>
 
 <file path=ppt/slides/slide10.xml><?xml version="1.0" encoding="utf-8"?>
-<p:sld xmlns:a="http://schemas.openxmlformats.org/drawingml/2006/main" xmlns:p="http://schemas.openxmlformats.org/presentationml/2006/main" xmlns:r="http://schemas.openxmlformats.org/officeDocument/2006/relationships">
+<p:sld xmlns:a="http://schemas.openxmlformats.org/drawingml/2006/main" xmlns:r="http://schemas.openxmlformats.org/officeDocument/2006/relationships" xmlns:p="http://schemas.openxmlformats.org/presentationml/2006/main">
   <p:cSld>
     <p:bg>
       <p:bgPr>
@@ -4620,7 +4367,14 @@
         <p:cNvGrpSpPr/>
         <p:nvPr/>
       </p:nvGrpSpPr>
-      <p:grpSpPr/>
+      <p:grpSpPr>
+        <a:xfrm>
+          <a:off x="0" y="0"/>
+          <a:ext cx="0" cy="0"/>
+          <a:chOff x="0" y="0"/>
+          <a:chExt cx="0" cy="0"/>
+        </a:xfrm>
+      </p:grpSpPr>
       <p:sp>
         <p:nvSpPr>
           <p:cNvPr id="2" name="TextBox 1"/>
@@ -4638,7 +4392,7 @@
           <a:noFill/>
         </p:spPr>
         <p:txBody>
-          <a:bodyPr wrap="square" anchor="t" lIns="0" rIns="0" tIns="0" bIns="0">
+          <a:bodyPr wrap="square" lIns="0" tIns="0" rIns="0" bIns="0" anchor="t">
             <a:spAutoFit/>
           </a:bodyPr>
           <a:lstStyle/>
@@ -4673,7 +4427,7 @@
           <a:noFill/>
         </p:spPr>
         <p:txBody>
-          <a:bodyPr wrap="square" anchor="t" lIns="0" rIns="0" tIns="0" bIns="0">
+          <a:bodyPr wrap="square" lIns="0" tIns="0" rIns="0" bIns="0" anchor="t">
             <a:spAutoFit/>
           </a:bodyPr>
           <a:lstStyle/>
@@ -4708,7 +4462,7 @@
           <a:noFill/>
         </p:spPr>
         <p:txBody>
-          <a:bodyPr wrap="square" anchor="t" lIns="0" rIns="0" tIns="0" bIns="0">
+          <a:bodyPr wrap="square" lIns="0" tIns="0" rIns="0" bIns="0" anchor="t">
             <a:spAutoFit/>
           </a:bodyPr>
           <a:lstStyle/>
@@ -4743,7 +4497,7 @@
           <a:noFill/>
         </p:spPr>
         <p:txBody>
-          <a:bodyPr wrap="square" anchor="t" lIns="0" rIns="0" tIns="0" bIns="0">
+          <a:bodyPr wrap="square" lIns="0" tIns="0" rIns="0" bIns="0" anchor="t">
             <a:spAutoFit/>
           </a:bodyPr>
           <a:lstStyle/>
@@ -4769,7 +4523,7 @@
           </p:cNvPicPr>
           <p:nvPr/>
         </p:nvPicPr>
-        <p:blipFill>
+        <p:blipFill rotWithShape="1">
           <a:blip r:embed="rId3"/>
           <a:stretch>
             <a:fillRect/>
@@ -4793,7 +4547,7 @@
           </p:cNvPicPr>
           <p:nvPr/>
         </p:nvPicPr>
-        <p:blipFill>
+        <p:blipFill rotWithShape="1">
           <a:blip r:embed="rId4"/>
           <a:stretch>
             <a:fillRect/>
@@ -4872,7 +4626,7 @@
           <a:noFill/>
         </p:spPr>
         <p:txBody>
-          <a:bodyPr wrap="square" anchor="t" lIns="0" rIns="0" tIns="0" bIns="0">
+          <a:bodyPr wrap="square" lIns="0" tIns="0" rIns="0" bIns="0" anchor="t">
             <a:spAutoFit/>
           </a:bodyPr>
           <a:lstStyle/>
@@ -4907,7 +4661,7 @@
           <a:noFill/>
         </p:spPr>
         <p:txBody>
-          <a:bodyPr wrap="square" anchor="t" lIns="0" rIns="0" tIns="0" bIns="0">
+          <a:bodyPr wrap="square" lIns="0" tIns="0" rIns="0" bIns="0" anchor="t">
             <a:spAutoFit/>
           </a:bodyPr>
           <a:lstStyle/>
@@ -4988,7 +4742,7 @@
           <a:noFill/>
         </p:spPr>
         <p:txBody>
-          <a:bodyPr wrap="square" anchor="t" lIns="0" rIns="0" tIns="0" bIns="0">
+          <a:bodyPr wrap="square" lIns="0" tIns="0" rIns="0" bIns="0" anchor="t">
             <a:spAutoFit/>
           </a:bodyPr>
           <a:lstStyle/>
@@ -5023,7 +4777,7 @@
           <a:noFill/>
         </p:spPr>
         <p:txBody>
-          <a:bodyPr wrap="square" anchor="t" lIns="0" rIns="0" tIns="0" bIns="0">
+          <a:bodyPr wrap="square" lIns="0" tIns="0" rIns="0" bIns="0" anchor="t">
             <a:spAutoFit/>
           </a:bodyPr>
           <a:lstStyle/>
@@ -5104,7 +4858,7 @@
           <a:noFill/>
         </p:spPr>
         <p:txBody>
-          <a:bodyPr wrap="square" anchor="t" lIns="0" rIns="0" tIns="0" bIns="0">
+          <a:bodyPr wrap="square" lIns="0" tIns="0" rIns="0" bIns="0" anchor="t">
             <a:spAutoFit/>
           </a:bodyPr>
           <a:lstStyle/>
@@ -5139,7 +4893,7 @@
           <a:noFill/>
         </p:spPr>
         <p:txBody>
-          <a:bodyPr wrap="square" anchor="t" lIns="0" rIns="0" tIns="0" bIns="0">
+          <a:bodyPr wrap="square" lIns="0" tIns="0" rIns="0" bIns="0" anchor="t">
             <a:spAutoFit/>
           </a:bodyPr>
           <a:lstStyle/>
@@ -5166,7 +4920,218 @@
 </file>
 
 <file path=ppt/slides/slide11.xml><?xml version="1.0" encoding="utf-8"?>
-<p:sld xmlns:a="http://schemas.openxmlformats.org/drawingml/2006/main" xmlns:p="http://schemas.openxmlformats.org/presentationml/2006/main" xmlns:r="http://schemas.openxmlformats.org/officeDocument/2006/relationships">
+<p:sld xmlns:a="http://schemas.openxmlformats.org/drawingml/2006/main" xmlns:r="http://schemas.openxmlformats.org/officeDocument/2006/relationships" xmlns:p="http://schemas.openxmlformats.org/presentationml/2006/main">
+  <p:cSld>
+    <p:bg>
+      <p:bgPr>
+        <a:solidFill>
+          <a:srgbClr val="0F1B2D"/>
+        </a:solidFill>
+        <a:effectLst/>
+      </p:bgPr>
+    </p:bg>
+    <p:spTree>
+      <p:nvGrpSpPr>
+        <p:cNvPr id="1" name=""/>
+        <p:cNvGrpSpPr/>
+        <p:nvPr/>
+      </p:nvGrpSpPr>
+      <p:grpSpPr>
+        <a:xfrm>
+          <a:off x="0" y="0"/>
+          <a:ext cx="0" cy="0"/>
+          <a:chOff x="0" y="0"/>
+          <a:chExt cx="0" cy="0"/>
+        </a:xfrm>
+      </p:grpSpPr>
+      <p:sp>
+        <p:nvSpPr>
+          <p:cNvPr id="2" name="TextBox 1"/>
+          <p:cNvSpPr txBox="1"/>
+          <p:nvPr/>
+        </p:nvSpPr>
+        <p:spPr>
+          <a:xfrm>
+            <a:off x="548640" y="1097280"/>
+            <a:ext cx="10972800" cy="914400"/>
+          </a:xfrm>
+          <a:prstGeom prst="rect">
+            <a:avLst/>
+          </a:prstGeom>
+          <a:noFill/>
+        </p:spPr>
+        <p:txBody>
+          <a:bodyPr wrap="square" lIns="0" tIns="0" rIns="0" bIns="0" anchor="t">
+            <a:spAutoFit/>
+          </a:bodyPr>
+          <a:lstStyle/>
+          <a:p>
+            <a:pPr algn="l"/>
+            <a:r>
+              <a:rPr sz="4400" b="1" i="0">
+                <a:solidFill>
+                  <a:srgbClr val="FFFFFF"/>
+                </a:solidFill>
+                <a:latin typeface="Cambria"/>
+              </a:rPr>
+              <a:t>Thank you</a:t>
+            </a:r>
+          </a:p>
+        </p:txBody>
+      </p:sp>
+      <p:sp>
+        <p:nvSpPr>
+          <p:cNvPr id="3" name="TextBox 2"/>
+          <p:cNvSpPr txBox="1"/>
+          <p:nvPr/>
+        </p:nvSpPr>
+        <p:spPr>
+          <a:xfrm>
+            <a:off x="548640" y="2148840"/>
+            <a:ext cx="10972800" cy="457200"/>
+          </a:xfrm>
+          <a:prstGeom prst="rect">
+            <a:avLst/>
+          </a:prstGeom>
+          <a:noFill/>
+        </p:spPr>
+        <p:txBody>
+          <a:bodyPr wrap="square" lIns="0" tIns="0" rIns="0" bIns="0" anchor="t">
+            <a:spAutoFit/>
+          </a:bodyPr>
+          <a:lstStyle/>
+          <a:p>
+            <a:pPr algn="l"/>
+            <a:r>
+              <a:rPr sz="1700" b="0" i="0">
+                <a:solidFill>
+                  <a:srgbClr val="BFD4F2"/>
+                </a:solidFill>
+                <a:latin typeface="Calibri"/>
+              </a:rPr>
+              <a:t>Code, data, figures and the 2-page write-up are in the private GitHub repository.</a:t>
+            </a:r>
+          </a:p>
+        </p:txBody>
+      </p:sp>
+      <p:sp>
+        <p:nvSpPr>
+          <p:cNvPr id="4" name="TextBox 3"/>
+          <p:cNvSpPr txBox="1"/>
+          <p:nvPr/>
+        </p:nvSpPr>
+        <p:spPr>
+          <a:xfrm>
+            <a:off x="548640" y="3291840"/>
+            <a:ext cx="10972800" cy="914400"/>
+          </a:xfrm>
+          <a:prstGeom prst="rect">
+            <a:avLst/>
+          </a:prstGeom>
+          <a:noFill/>
+        </p:spPr>
+        <p:txBody>
+          <a:bodyPr wrap="square" lIns="0" tIns="0" rIns="0" bIns="0" anchor="t">
+            <a:spAutoFit/>
+          </a:bodyPr>
+          <a:lstStyle/>
+          <a:p>
+            <a:pPr algn="l">
+              <a:spcAft>
+                <a:spcPts val="800"/>
+              </a:spcAft>
+            </a:pPr>
+            <a:r>
+              <a:rPr sz="2000" b="1" i="0">
+                <a:solidFill>
+                  <a:srgbClr val="FFFFFF"/>
+                </a:solidFill>
+                <a:latin typeface="Calibri"/>
+              </a:rPr>
+              <a:t>Mukil Skanda A</a:t>
+            </a:r>
+            <a:r>
+              <a:rPr sz="2000" b="0" i="0">
+                <a:solidFill>
+                  <a:srgbClr val="BFD4F2"/>
+                </a:solidFill>
+                <a:latin typeface="Calibri"/>
+              </a:rPr>
+              <a:t>  ·  PES1UG24CS281</a:t>
+            </a:r>
+          </a:p>
+          <a:p>
+            <a:pPr algn="l">
+              <a:spcAft>
+                <a:spcPts val="800"/>
+              </a:spcAft>
+            </a:pPr>
+            <a:r>
+              <a:rPr sz="2000" b="1" i="0">
+                <a:solidFill>
+                  <a:srgbClr val="FFFFFF"/>
+                </a:solidFill>
+                <a:latin typeface="Calibri"/>
+              </a:rPr>
+              <a:t>Likhith M</a:t>
+            </a:r>
+            <a:r>
+              <a:rPr sz="2000" b="0" i="0">
+                <a:solidFill>
+                  <a:srgbClr val="BFD4F2"/>
+                </a:solidFill>
+                <a:latin typeface="Calibri"/>
+              </a:rPr>
+              <a:t>  ·  PES1UG24CS282</a:t>
+            </a:r>
+          </a:p>
+        </p:txBody>
+      </p:sp>
+      <p:sp>
+        <p:nvSpPr>
+          <p:cNvPr id="5" name="TextBox 4"/>
+          <p:cNvSpPr txBox="1"/>
+          <p:nvPr/>
+        </p:nvSpPr>
+        <p:spPr>
+          <a:xfrm>
+            <a:off x="548640" y="5760720"/>
+            <a:ext cx="10972800" cy="548640"/>
+          </a:xfrm>
+          <a:prstGeom prst="rect">
+            <a:avLst/>
+          </a:prstGeom>
+          <a:noFill/>
+        </p:spPr>
+        <p:txBody>
+          <a:bodyPr wrap="square" lIns="0" tIns="0" rIns="0" bIns="0" anchor="t">
+            <a:spAutoFit/>
+          </a:bodyPr>
+          <a:lstStyle/>
+          <a:p>
+            <a:pPr algn="l"/>
+            <a:r>
+              <a:rPr sz="1200" b="0" i="0">
+                <a:solidFill>
+                  <a:srgbClr val="BFD4F2"/>
+                </a:solidFill>
+                <a:latin typeface="Calibri"/>
+              </a:rPr>
+              <a:t>Ref: Krimsky &amp; Ng, CS229 2018 · Zhang et al., Science 2017 · MacKay 1992 · Rasmussen &amp; Williams 2006</a:t>
+            </a:r>
+          </a:p>
+        </p:txBody>
+      </p:sp>
+    </p:spTree>
+  </p:cSld>
+  <p:clrMapOvr>
+    <a:masterClrMapping/>
+  </p:clrMapOvr>
+</p:sld>
+</file>
+
+<file path=ppt/slides/slide12.xml><?xml version="1.0" encoding="utf-8"?>
+<p:sld xmlns:a="http://schemas.openxmlformats.org/drawingml/2006/main" xmlns:r="http://schemas.openxmlformats.org/officeDocument/2006/relationships" xmlns:p="http://schemas.openxmlformats.org/presentationml/2006/main">
   <p:cSld>
     <p:bg>
       <p:bgPr>
@@ -5182,7 +5147,14 @@
         <p:cNvGrpSpPr/>
         <p:nvPr/>
       </p:nvGrpSpPr>
-      <p:grpSpPr/>
+      <p:grpSpPr>
+        <a:xfrm>
+          <a:off x="0" y="0"/>
+          <a:ext cx="0" cy="0"/>
+          <a:chOff x="0" y="0"/>
+          <a:chExt cx="0" cy="0"/>
+        </a:xfrm>
+      </p:grpSpPr>
       <p:sp>
         <p:nvSpPr>
           <p:cNvPr id="2" name="TextBox 1"/>
@@ -5200,7 +5172,7 @@
           <a:noFill/>
         </p:spPr>
         <p:txBody>
-          <a:bodyPr wrap="square" anchor="t" lIns="0" rIns="0" tIns="0" bIns="0">
+          <a:bodyPr wrap="square" lIns="0" tIns="0" rIns="0" bIns="0" anchor="t">
             <a:spAutoFit/>
           </a:bodyPr>
           <a:lstStyle/>
@@ -5235,7 +5207,7 @@
           <a:noFill/>
         </p:spPr>
         <p:txBody>
-          <a:bodyPr wrap="square" anchor="t" lIns="0" rIns="0" tIns="0" bIns="0">
+          <a:bodyPr wrap="square" lIns="0" tIns="0" rIns="0" bIns="0" anchor="t">
             <a:spAutoFit/>
           </a:bodyPr>
           <a:lstStyle/>
@@ -5270,7 +5242,7 @@
           <a:noFill/>
         </p:spPr>
         <p:txBody>
-          <a:bodyPr wrap="square" anchor="t" lIns="0" rIns="0" tIns="0" bIns="0">
+          <a:bodyPr wrap="square" lIns="0" tIns="0" rIns="0" bIns="0" anchor="t">
             <a:spAutoFit/>
           </a:bodyPr>
           <a:lstStyle/>
@@ -5305,7 +5277,7 @@
           <a:noFill/>
         </p:spPr>
         <p:txBody>
-          <a:bodyPr wrap="square" anchor="t" lIns="0" rIns="0" tIns="0" bIns="0">
+          <a:bodyPr wrap="square" lIns="0" tIns="0" rIns="0" bIns="0" anchor="t">
             <a:spAutoFit/>
           </a:bodyPr>
           <a:lstStyle/>
@@ -5359,7 +5331,7 @@
           </a:fontRef>
         </p:style>
         <p:txBody>
-          <a:bodyPr rtlCol="0" anchor="ctr" lIns="0" rIns="0" tIns="0" bIns="0"/>
+          <a:bodyPr lIns="0" tIns="0" rIns="0" bIns="0" rtlCol="0" anchor="ctr"/>
           <a:lstStyle/>
           <a:p>
             <a:pPr algn="ctr"/>
@@ -5392,7 +5364,7 @@
           <a:noFill/>
         </p:spPr>
         <p:txBody>
-          <a:bodyPr wrap="square" anchor="t" lIns="0" rIns="0" tIns="0" bIns="0">
+          <a:bodyPr wrap="square" lIns="0" tIns="0" rIns="0" bIns="0" anchor="t">
             <a:spAutoFit/>
           </a:bodyPr>
           <a:lstStyle/>
@@ -5473,7 +5445,7 @@
           <a:noFill/>
         </p:spPr>
         <p:txBody>
-          <a:bodyPr wrap="square" anchor="t" lIns="0" rIns="0" tIns="0" bIns="0">
+          <a:bodyPr wrap="square" lIns="0" tIns="0" rIns="0" bIns="0" anchor="t">
             <a:spAutoFit/>
           </a:bodyPr>
           <a:lstStyle/>
@@ -5508,7 +5480,7 @@
           <a:noFill/>
         </p:spPr>
         <p:txBody>
-          <a:bodyPr wrap="square" anchor="t" lIns="0" rIns="0" tIns="0" bIns="0">
+          <a:bodyPr wrap="square" lIns="0" tIns="0" rIns="0" bIns="0" anchor="t">
             <a:spAutoFit/>
           </a:bodyPr>
           <a:lstStyle/>
@@ -5586,7 +5558,7 @@
           </a:fontRef>
         </p:style>
         <p:txBody>
-          <a:bodyPr rtlCol="0" anchor="ctr" lIns="0" rIns="0" tIns="0" bIns="0"/>
+          <a:bodyPr lIns="0" tIns="0" rIns="0" bIns="0" rtlCol="0" anchor="ctr"/>
           <a:lstStyle/>
           <a:p>
             <a:pPr algn="ctr"/>
@@ -5619,7 +5591,7 @@
           <a:noFill/>
         </p:spPr>
         <p:txBody>
-          <a:bodyPr wrap="square" anchor="t" lIns="0" rIns="0" tIns="0" bIns="0">
+          <a:bodyPr wrap="square" lIns="0" tIns="0" rIns="0" bIns="0" anchor="t">
             <a:spAutoFit/>
           </a:bodyPr>
           <a:lstStyle/>
@@ -5700,7 +5672,7 @@
           <a:noFill/>
         </p:spPr>
         <p:txBody>
-          <a:bodyPr wrap="square" anchor="t" lIns="0" rIns="0" tIns="0" bIns="0">
+          <a:bodyPr wrap="square" lIns="0" tIns="0" rIns="0" bIns="0" anchor="t">
             <a:spAutoFit/>
           </a:bodyPr>
           <a:lstStyle/>
@@ -5735,7 +5707,7 @@
           <a:noFill/>
         </p:spPr>
         <p:txBody>
-          <a:bodyPr wrap="square" anchor="t" lIns="0" rIns="0" tIns="0" bIns="0">
+          <a:bodyPr wrap="square" lIns="0" tIns="0" rIns="0" bIns="0" anchor="t">
             <a:spAutoFit/>
           </a:bodyPr>
           <a:lstStyle/>
@@ -5849,7 +5821,7 @@
           </a:fontRef>
         </p:style>
         <p:txBody>
-          <a:bodyPr rtlCol="0" anchor="ctr" lIns="0" rIns="0" tIns="0" bIns="0"/>
+          <a:bodyPr lIns="0" tIns="0" rIns="0" bIns="0" rtlCol="0" anchor="ctr"/>
           <a:lstStyle/>
           <a:p>
             <a:pPr algn="ctr"/>
@@ -5882,7 +5854,7 @@
           <a:noFill/>
         </p:spPr>
         <p:txBody>
-          <a:bodyPr wrap="square" anchor="t" lIns="0" rIns="0" tIns="0" bIns="0">
+          <a:bodyPr wrap="square" lIns="0" tIns="0" rIns="0" bIns="0" anchor="t">
             <a:spAutoFit/>
           </a:bodyPr>
           <a:lstStyle/>
@@ -5963,7 +5935,7 @@
           <a:noFill/>
         </p:spPr>
         <p:txBody>
-          <a:bodyPr wrap="square" anchor="t" lIns="0" rIns="0" tIns="0" bIns="0">
+          <a:bodyPr wrap="square" lIns="0" tIns="0" rIns="0" bIns="0" anchor="t">
             <a:spAutoFit/>
           </a:bodyPr>
           <a:lstStyle/>
@@ -5998,7 +5970,7 @@
           <a:noFill/>
         </p:spPr>
         <p:txBody>
-          <a:bodyPr wrap="square" anchor="t" lIns="0" rIns="0" tIns="0" bIns="0">
+          <a:bodyPr wrap="square" lIns="0" tIns="0" rIns="0" bIns="0" anchor="t">
             <a:spAutoFit/>
           </a:bodyPr>
           <a:lstStyle/>
@@ -6045,7 +6017,7 @@
           <a:noFill/>
         </p:spPr>
         <p:txBody>
-          <a:bodyPr wrap="square" anchor="t" lIns="0" rIns="0" tIns="0" bIns="0">
+          <a:bodyPr wrap="square" lIns="0" tIns="0" rIns="0" bIns="0" anchor="t">
             <a:spAutoFit/>
           </a:bodyPr>
           <a:lstStyle/>
@@ -6071,8 +6043,8 @@
 </p:sld>
 </file>
 
-<file path=ppt/slides/slide12.xml><?xml version="1.0" encoding="utf-8"?>
-<p:sld xmlns:a="http://schemas.openxmlformats.org/drawingml/2006/main" xmlns:p="http://schemas.openxmlformats.org/presentationml/2006/main" xmlns:r="http://schemas.openxmlformats.org/officeDocument/2006/relationships">
+<file path=ppt/slides/slide13.xml><?xml version="1.0" encoding="utf-8"?>
+<p:sld xmlns:a="http://schemas.openxmlformats.org/drawingml/2006/main" xmlns:r="http://schemas.openxmlformats.org/officeDocument/2006/relationships" xmlns:p="http://schemas.openxmlformats.org/presentationml/2006/main">
   <p:cSld>
     <p:bg>
       <p:bgPr>
@@ -6088,7 +6060,14 @@
         <p:cNvGrpSpPr/>
         <p:nvPr/>
       </p:nvGrpSpPr>
-      <p:grpSpPr/>
+      <p:grpSpPr>
+        <a:xfrm>
+          <a:off x="0" y="0"/>
+          <a:ext cx="0" cy="0"/>
+          <a:chOff x="0" y="0"/>
+          <a:chExt cx="0" cy="0"/>
+        </a:xfrm>
+      </p:grpSpPr>
       <p:sp>
         <p:nvSpPr>
           <p:cNvPr id="2" name="TextBox 1"/>
@@ -6106,7 +6085,7 @@
           <a:noFill/>
         </p:spPr>
         <p:txBody>
-          <a:bodyPr wrap="square" anchor="t" lIns="0" rIns="0" tIns="0" bIns="0">
+          <a:bodyPr wrap="square" lIns="0" tIns="0" rIns="0" bIns="0" anchor="t">
             <a:spAutoFit/>
           </a:bodyPr>
           <a:lstStyle/>
@@ -6141,7 +6120,7 @@
           <a:noFill/>
         </p:spPr>
         <p:txBody>
-          <a:bodyPr wrap="square" anchor="t" lIns="0" rIns="0" tIns="0" bIns="0">
+          <a:bodyPr wrap="square" lIns="0" tIns="0" rIns="0" bIns="0" anchor="t">
             <a:spAutoFit/>
           </a:bodyPr>
           <a:lstStyle/>
@@ -6222,7 +6201,7 @@
           <a:noFill/>
         </p:spPr>
         <p:txBody>
-          <a:bodyPr wrap="square" anchor="ctr" lIns="0" rIns="0" tIns="0" bIns="0">
+          <a:bodyPr wrap="square" lIns="0" tIns="0" rIns="0" bIns="0" anchor="ctr">
             <a:spAutoFit/>
           </a:bodyPr>
           <a:lstStyle/>
@@ -6257,7 +6236,7 @@
           <a:noFill/>
         </p:spPr>
         <p:txBody>
-          <a:bodyPr wrap="square" anchor="ctr" lIns="0" rIns="0" tIns="0" bIns="0">
+          <a:bodyPr wrap="square" lIns="0" tIns="0" rIns="0" bIns="0" anchor="ctr">
             <a:spAutoFit/>
           </a:bodyPr>
           <a:lstStyle/>
@@ -6338,7 +6317,7 @@
           <a:noFill/>
         </p:spPr>
         <p:txBody>
-          <a:bodyPr wrap="square" anchor="ctr" lIns="0" rIns="0" tIns="0" bIns="0">
+          <a:bodyPr wrap="square" lIns="0" tIns="0" rIns="0" bIns="0" anchor="ctr">
             <a:spAutoFit/>
           </a:bodyPr>
           <a:lstStyle/>
@@ -6373,7 +6352,7 @@
           <a:noFill/>
         </p:spPr>
         <p:txBody>
-          <a:bodyPr wrap="square" anchor="ctr" lIns="0" rIns="0" tIns="0" bIns="0">
+          <a:bodyPr wrap="square" lIns="0" tIns="0" rIns="0" bIns="0" anchor="ctr">
             <a:spAutoFit/>
           </a:bodyPr>
           <a:lstStyle/>
@@ -6454,7 +6433,7 @@
           <a:noFill/>
         </p:spPr>
         <p:txBody>
-          <a:bodyPr wrap="square" anchor="ctr" lIns="0" rIns="0" tIns="0" bIns="0">
+          <a:bodyPr wrap="square" lIns="0" tIns="0" rIns="0" bIns="0" anchor="ctr">
             <a:spAutoFit/>
           </a:bodyPr>
           <a:lstStyle/>
@@ -6489,7 +6468,7 @@
           <a:noFill/>
         </p:spPr>
         <p:txBody>
-          <a:bodyPr wrap="square" anchor="ctr" lIns="0" rIns="0" tIns="0" bIns="0">
+          <a:bodyPr wrap="square" lIns="0" tIns="0" rIns="0" bIns="0" anchor="ctr">
             <a:spAutoFit/>
           </a:bodyPr>
           <a:lstStyle/>
@@ -6570,7 +6549,7 @@
           <a:noFill/>
         </p:spPr>
         <p:txBody>
-          <a:bodyPr wrap="square" anchor="ctr" lIns="0" rIns="0" tIns="0" bIns="0">
+          <a:bodyPr wrap="square" lIns="0" tIns="0" rIns="0" bIns="0" anchor="ctr">
             <a:spAutoFit/>
           </a:bodyPr>
           <a:lstStyle/>
@@ -6605,7 +6584,7 @@
           <a:noFill/>
         </p:spPr>
         <p:txBody>
-          <a:bodyPr wrap="square" anchor="ctr" lIns="0" rIns="0" tIns="0" bIns="0">
+          <a:bodyPr wrap="square" lIns="0" tIns="0" rIns="0" bIns="0" anchor="ctr">
             <a:spAutoFit/>
           </a:bodyPr>
           <a:lstStyle/>
@@ -6640,7 +6619,7 @@
           <a:noFill/>
         </p:spPr>
         <p:txBody>
-          <a:bodyPr wrap="square" anchor="t" lIns="0" rIns="0" tIns="0" bIns="0">
+          <a:bodyPr wrap="square" lIns="0" tIns="0" rIns="0" bIns="0" anchor="t">
             <a:spAutoFit/>
           </a:bodyPr>
           <a:lstStyle/>
@@ -6721,7 +6700,7 @@
           <a:noFill/>
         </p:spPr>
         <p:txBody>
-          <a:bodyPr wrap="square" anchor="ctr" lIns="0" rIns="0" tIns="0" bIns="0">
+          <a:bodyPr wrap="square" lIns="0" tIns="0" rIns="0" bIns="0" anchor="ctr">
             <a:spAutoFit/>
           </a:bodyPr>
           <a:lstStyle/>
@@ -6802,7 +6781,7 @@
           <a:noFill/>
         </p:spPr>
         <p:txBody>
-          <a:bodyPr wrap="square" anchor="ctr" lIns="0" rIns="0" tIns="0" bIns="0">
+          <a:bodyPr wrap="square" lIns="0" tIns="0" rIns="0" bIns="0" anchor="ctr">
             <a:spAutoFit/>
           </a:bodyPr>
           <a:lstStyle/>
@@ -6883,7 +6862,7 @@
           <a:noFill/>
         </p:spPr>
         <p:txBody>
-          <a:bodyPr wrap="square" anchor="ctr" lIns="0" rIns="0" tIns="0" bIns="0">
+          <a:bodyPr wrap="square" lIns="0" tIns="0" rIns="0" bIns="0" anchor="ctr">
             <a:spAutoFit/>
           </a:bodyPr>
           <a:lstStyle/>
@@ -6897,210 +6876,6 @@
                 <a:latin typeface="Calibri"/>
               </a:rPr>
               <a:t>Use the surrogate as a prior inside CMA-ES / Bayesian optimisation</a:t>
-            </a:r>
-          </a:p>
-        </p:txBody>
-      </p:sp>
-    </p:spTree>
-  </p:cSld>
-  <p:clrMapOvr>
-    <a:masterClrMapping/>
-  </p:clrMapOvr>
-</p:sld>
-</file>
-
-<file path=ppt/slides/slide13.xml><?xml version="1.0" encoding="utf-8"?>
-<p:sld xmlns:a="http://schemas.openxmlformats.org/drawingml/2006/main" xmlns:p="http://schemas.openxmlformats.org/presentationml/2006/main" xmlns:r="http://schemas.openxmlformats.org/officeDocument/2006/relationships">
-  <p:cSld>
-    <p:bg>
-      <p:bgPr>
-        <a:solidFill>
-          <a:srgbClr val="0F1B2D"/>
-        </a:solidFill>
-        <a:effectLst/>
-      </p:bgPr>
-    </p:bg>
-    <p:spTree>
-      <p:nvGrpSpPr>
-        <p:cNvPr id="1" name=""/>
-        <p:cNvGrpSpPr/>
-        <p:nvPr/>
-      </p:nvGrpSpPr>
-      <p:grpSpPr/>
-      <p:sp>
-        <p:nvSpPr>
-          <p:cNvPr id="2" name="TextBox 1"/>
-          <p:cNvSpPr txBox="1"/>
-          <p:nvPr/>
-        </p:nvSpPr>
-        <p:spPr>
-          <a:xfrm>
-            <a:off x="548640" y="1097280"/>
-            <a:ext cx="10972800" cy="914400"/>
-          </a:xfrm>
-          <a:prstGeom prst="rect">
-            <a:avLst/>
-          </a:prstGeom>
-          <a:noFill/>
-        </p:spPr>
-        <p:txBody>
-          <a:bodyPr wrap="square" anchor="t" lIns="0" rIns="0" tIns="0" bIns="0">
-            <a:spAutoFit/>
-          </a:bodyPr>
-          <a:lstStyle/>
-          <a:p>
-            <a:pPr algn="l"/>
-            <a:r>
-              <a:rPr sz="4400" b="1" i="0">
-                <a:solidFill>
-                  <a:srgbClr val="FFFFFF"/>
-                </a:solidFill>
-                <a:latin typeface="Cambria"/>
-              </a:rPr>
-              <a:t>Thank you</a:t>
-            </a:r>
-          </a:p>
-        </p:txBody>
-      </p:sp>
-      <p:sp>
-        <p:nvSpPr>
-          <p:cNvPr id="3" name="TextBox 2"/>
-          <p:cNvSpPr txBox="1"/>
-          <p:nvPr/>
-        </p:nvSpPr>
-        <p:spPr>
-          <a:xfrm>
-            <a:off x="548640" y="2148840"/>
-            <a:ext cx="10972800" cy="457200"/>
-          </a:xfrm>
-          <a:prstGeom prst="rect">
-            <a:avLst/>
-          </a:prstGeom>
-          <a:noFill/>
-        </p:spPr>
-        <p:txBody>
-          <a:bodyPr wrap="square" anchor="t" lIns="0" rIns="0" tIns="0" bIns="0">
-            <a:spAutoFit/>
-          </a:bodyPr>
-          <a:lstStyle/>
-          <a:p>
-            <a:pPr algn="l"/>
-            <a:r>
-              <a:rPr sz="1700" b="0" i="0">
-                <a:solidFill>
-                  <a:srgbClr val="BFD4F2"/>
-                </a:solidFill>
-                <a:latin typeface="Calibri"/>
-              </a:rPr>
-              <a:t>Code, data, figures and the 2-page write-up are in the private GitHub repository.</a:t>
-            </a:r>
-          </a:p>
-        </p:txBody>
-      </p:sp>
-      <p:sp>
-        <p:nvSpPr>
-          <p:cNvPr id="4" name="TextBox 3"/>
-          <p:cNvSpPr txBox="1"/>
-          <p:nvPr/>
-        </p:nvSpPr>
-        <p:spPr>
-          <a:xfrm>
-            <a:off x="548640" y="3291840"/>
-            <a:ext cx="10972800" cy="914400"/>
-          </a:xfrm>
-          <a:prstGeom prst="rect">
-            <a:avLst/>
-          </a:prstGeom>
-          <a:noFill/>
-        </p:spPr>
-        <p:txBody>
-          <a:bodyPr wrap="square" anchor="t" lIns="0" rIns="0" tIns="0" bIns="0">
-            <a:spAutoFit/>
-          </a:bodyPr>
-          <a:lstStyle/>
-          <a:p>
-            <a:pPr algn="l">
-              <a:spcAft>
-                <a:spcPts val="800"/>
-              </a:spcAft>
-            </a:pPr>
-            <a:r>
-              <a:rPr sz="2000" b="1" i="0">
-                <a:solidFill>
-                  <a:srgbClr val="FFFFFF"/>
-                </a:solidFill>
-                <a:latin typeface="Calibri"/>
-              </a:rPr>
-              <a:t>Mukil Skanda A</a:t>
-            </a:r>
-            <a:r>
-              <a:rPr sz="2000" b="0" i="0">
-                <a:solidFill>
-                  <a:srgbClr val="BFD4F2"/>
-                </a:solidFill>
-                <a:latin typeface="Calibri"/>
-              </a:rPr>
-              <a:t>  ·  PES1UG24CS281</a:t>
-            </a:r>
-          </a:p>
-          <a:p>
-            <a:pPr algn="l">
-              <a:spcAft>
-                <a:spcPts val="800"/>
-              </a:spcAft>
-            </a:pPr>
-            <a:r>
-              <a:rPr sz="2000" b="1" i="0">
-                <a:solidFill>
-                  <a:srgbClr val="FFFFFF"/>
-                </a:solidFill>
-                <a:latin typeface="Calibri"/>
-              </a:rPr>
-              <a:t>Likhith M</a:t>
-            </a:r>
-            <a:r>
-              <a:rPr sz="2000" b="0" i="0">
-                <a:solidFill>
-                  <a:srgbClr val="BFD4F2"/>
-                </a:solidFill>
-                <a:latin typeface="Calibri"/>
-              </a:rPr>
-              <a:t>  ·  PES1UG24CS282</a:t>
-            </a:r>
-          </a:p>
-        </p:txBody>
-      </p:sp>
-      <p:sp>
-        <p:nvSpPr>
-          <p:cNvPr id="5" name="TextBox 4"/>
-          <p:cNvSpPr txBox="1"/>
-          <p:nvPr/>
-        </p:nvSpPr>
-        <p:spPr>
-          <a:xfrm>
-            <a:off x="548640" y="5760720"/>
-            <a:ext cx="10972800" cy="548640"/>
-          </a:xfrm>
-          <a:prstGeom prst="rect">
-            <a:avLst/>
-          </a:prstGeom>
-          <a:noFill/>
-        </p:spPr>
-        <p:txBody>
-          <a:bodyPr wrap="square" anchor="t" lIns="0" rIns="0" tIns="0" bIns="0">
-            <a:spAutoFit/>
-          </a:bodyPr>
-          <a:lstStyle/>
-          <a:p>
-            <a:pPr algn="l"/>
-            <a:r>
-              <a:rPr sz="1200" b="0" i="0">
-                <a:solidFill>
-                  <a:srgbClr val="BFD4F2"/>
-                </a:solidFill>
-                <a:latin typeface="Calibri"/>
-              </a:rPr>
-              <a:t>Ref: Krimsky &amp; Ng, CS229 2018 · Zhang et al., Science 2017 · MacKay 1992 · Rasmussen &amp; Williams 2006</a:t>
             </a:r>
           </a:p>
         </p:txBody>
@@ -7114,7 +6889,7 @@
 </file>
 
 <file path=ppt/slides/slide2.xml><?xml version="1.0" encoding="utf-8"?>
-<p:sld xmlns:a="http://schemas.openxmlformats.org/drawingml/2006/main" xmlns:p="http://schemas.openxmlformats.org/presentationml/2006/main" xmlns:r="http://schemas.openxmlformats.org/officeDocument/2006/relationships">
+<p:sld xmlns:a="http://schemas.openxmlformats.org/drawingml/2006/main" xmlns:r="http://schemas.openxmlformats.org/officeDocument/2006/relationships" xmlns:p="http://schemas.openxmlformats.org/presentationml/2006/main">
   <p:cSld>
     <p:bg>
       <p:bgPr>
@@ -7130,7 +6905,14 @@
         <p:cNvGrpSpPr/>
         <p:nvPr/>
       </p:nvGrpSpPr>
-      <p:grpSpPr/>
+      <p:grpSpPr>
+        <a:xfrm>
+          <a:off x="0" y="0"/>
+          <a:ext cx="0" cy="0"/>
+          <a:chOff x="0" y="0"/>
+          <a:chExt cx="0" cy="0"/>
+        </a:xfrm>
+      </p:grpSpPr>
       <p:sp>
         <p:nvSpPr>
           <p:cNvPr id="2" name="TextBox 1"/>
@@ -7148,7 +6930,7 @@
           <a:noFill/>
         </p:spPr>
         <p:txBody>
-          <a:bodyPr wrap="square" anchor="t" lIns="0" rIns="0" tIns="0" bIns="0">
+          <a:bodyPr wrap="square" lIns="0" tIns="0" rIns="0" bIns="0" anchor="t">
             <a:spAutoFit/>
           </a:bodyPr>
           <a:lstStyle/>
@@ -7161,7 +6943,7 @@
                 </a:solidFill>
                 <a:latin typeface="Calibri"/>
               </a:rPr>
-              <a:t>THE PROBLEM</a:t>
+              <a:t>METHODOLOGY</a:t>
             </a:r>
           </a:p>
         </p:txBody>
@@ -7183,7 +6965,7 @@
           <a:noFill/>
         </p:spPr>
         <p:txBody>
-          <a:bodyPr wrap="square" anchor="t" lIns="0" rIns="0" tIns="0" bIns="0">
+          <a:bodyPr wrap="square" lIns="0" tIns="0" rIns="0" bIns="0" anchor="t">
             <a:spAutoFit/>
           </a:bodyPr>
           <a:lstStyle/>
@@ -7196,7 +6978,7 @@
                 </a:solidFill>
                 <a:latin typeface="Cambria"/>
               </a:rPr>
-              <a:t>Exoskeleton tuning is bottlenecked by a breathing mask</a:t>
+              <a:t>End-to-end pipeline</a:t>
             </a:r>
           </a:p>
         </p:txBody>
@@ -7218,7 +7000,7 @@
           <a:noFill/>
         </p:spPr>
         <p:txBody>
-          <a:bodyPr wrap="square" anchor="t" lIns="0" rIns="0" tIns="0" bIns="0">
+          <a:bodyPr wrap="square" lIns="0" tIns="0" rIns="0" bIns="0" anchor="t">
             <a:spAutoFit/>
           </a:bodyPr>
           <a:lstStyle/>
@@ -7253,7 +7035,7 @@
           <a:noFill/>
         </p:spPr>
         <p:txBody>
-          <a:bodyPr wrap="square" anchor="t" lIns="0" rIns="0" tIns="0" bIns="0">
+          <a:bodyPr wrap="square" lIns="0" tIns="0" rIns="0" bIns="0" anchor="t">
             <a:spAutoFit/>
           </a:bodyPr>
           <a:lstStyle/>
@@ -7266,21 +7048,45 @@
                 </a:solidFill>
                 <a:latin typeface="Calibri"/>
               </a:rPr>
-              <a:t>2</a:t>
-            </a:r>
-          </a:p>
-        </p:txBody>
-      </p:sp>
-      <p:sp>
-        <p:nvSpPr>
-          <p:cNvPr id="6" name="Rounded Rectangle 5"/>
+              <a:t>4</a:t>
+            </a:r>
+          </a:p>
+        </p:txBody>
+      </p:sp>
+      <p:pic>
+        <p:nvPicPr>
+          <p:cNvPr id="6" name="Picture 5" descr="F13_pipeline.png"/>
+          <p:cNvPicPr>
+            <a:picLocks noChangeAspect="1"/>
+          </p:cNvPicPr>
+          <p:nvPr/>
+        </p:nvPicPr>
+        <p:blipFill rotWithShape="1">
+          <a:blip r:embed="rId3"/>
+          <a:stretch>
+            <a:fillRect/>
+          </a:stretch>
+        </p:blipFill>
+        <p:spPr>
+          <a:xfrm>
+            <a:off x="548640" y="1463040"/>
+            <a:ext cx="11064240" cy="2766060"/>
+          </a:xfrm>
+          <a:prstGeom prst="rect">
+            <a:avLst/>
+          </a:prstGeom>
+        </p:spPr>
+      </p:pic>
+      <p:sp>
+        <p:nvSpPr>
+          <p:cNvPr id="7" name="Rounded Rectangle 6"/>
           <p:cNvSpPr/>
           <p:nvPr/>
         </p:nvSpPr>
         <p:spPr>
           <a:xfrm>
-            <a:off x="548640" y="1737360"/>
-            <a:ext cx="2514600" cy="1234440"/>
+            <a:off x="548640" y="4343400"/>
+            <a:ext cx="3520440" cy="1554480"/>
           </a:xfrm>
           <a:prstGeom prst="roundRect">
             <a:avLst>
@@ -7319,90 +7125,20 @@
       </p:sp>
       <p:sp>
         <p:nvSpPr>
-          <p:cNvPr id="7" name="TextBox 6"/>
-          <p:cNvSpPr txBox="1"/>
-          <p:nvPr/>
-        </p:nvSpPr>
-        <p:spPr>
-          <a:xfrm>
-            <a:off x="731520" y="1874519"/>
-            <a:ext cx="2148840" cy="411480"/>
-          </a:xfrm>
-          <a:prstGeom prst="rect">
-            <a:avLst/>
-          </a:prstGeom>
-          <a:noFill/>
-        </p:spPr>
-        <p:txBody>
-          <a:bodyPr wrap="square" anchor="t" lIns="0" rIns="0" tIns="0" bIns="0">
-            <a:spAutoFit/>
-          </a:bodyPr>
-          <a:lstStyle/>
-          <a:p>
-            <a:pPr algn="l"/>
-            <a:r>
-              <a:rPr sz="1700" b="1" i="0">
-                <a:solidFill>
-                  <a:srgbClr val="0F1B2D"/>
-                </a:solidFill>
-                <a:latin typeface="Calibri"/>
-              </a:rPr>
-              <a:t>CMA-ES optimiser</a:t>
-            </a:r>
-          </a:p>
-        </p:txBody>
-      </p:sp>
-      <p:sp>
-        <p:nvSpPr>
-          <p:cNvPr id="8" name="TextBox 7"/>
-          <p:cNvSpPr txBox="1"/>
-          <p:nvPr/>
-        </p:nvSpPr>
-        <p:spPr>
-          <a:xfrm>
-            <a:off x="731520" y="2331720"/>
-            <a:ext cx="2148840" cy="548640"/>
-          </a:xfrm>
-          <a:prstGeom prst="rect">
-            <a:avLst/>
-          </a:prstGeom>
-          <a:noFill/>
-        </p:spPr>
-        <p:txBody>
-          <a:bodyPr wrap="square" anchor="t" lIns="0" rIns="0" tIns="0" bIns="0">
-            <a:spAutoFit/>
-          </a:bodyPr>
-          <a:lstStyle/>
-          <a:p>
-            <a:pPr algn="l"/>
-            <a:r>
-              <a:rPr sz="1400" b="0" i="0">
-                <a:solidFill>
-                  <a:srgbClr val="555B66"/>
-                </a:solidFill>
-                <a:latin typeface="Calibri"/>
-              </a:rPr>
-              <a:t>proposes new torque profile</a:t>
-            </a:r>
-          </a:p>
-        </p:txBody>
-      </p:sp>
-      <p:sp>
-        <p:nvSpPr>
-          <p:cNvPr id="9" name="Right Arrow 8"/>
+          <p:cNvPr id="8" name="Oval 7"/>
           <p:cNvSpPr/>
           <p:nvPr/>
         </p:nvSpPr>
         <p:spPr>
           <a:xfrm>
-            <a:off x="3108960" y="2212848"/>
-            <a:ext cx="182880" cy="274320"/>
-          </a:xfrm>
-          <a:prstGeom prst="rightArrow">
+            <a:off x="777240" y="4498848"/>
+            <a:ext cx="457200" cy="457200"/>
+          </a:xfrm>
+          <a:prstGeom prst="ellipse">
             <a:avLst/>
           </a:prstGeom>
           <a:solidFill>
-            <a:srgbClr val="555B66"/>
+            <a:srgbClr val="2A78D6"/>
           </a:solidFill>
           <a:ln>
             <a:noFill/>
@@ -7423,23 +7159,102 @@
           </a:fontRef>
         </p:style>
         <p:txBody>
-          <a:bodyPr rtlCol="0" anchor="ctr"/>
+          <a:bodyPr lIns="0" tIns="0" rIns="0" bIns="0" rtlCol="0" anchor="ctr"/>
           <a:lstStyle/>
           <a:p>
             <a:pPr algn="ctr"/>
-          </a:p>
-        </p:txBody>
-      </p:sp>
-      <p:sp>
-        <p:nvSpPr>
-          <p:cNvPr id="10" name="Rounded Rectangle 9"/>
+            <a:r>
+              <a:rPr sz="1600" b="1">
+                <a:solidFill>
+                  <a:srgbClr val="FFFFFF"/>
+                </a:solidFill>
+                <a:latin typeface="Calibri"/>
+              </a:rPr>
+              <a:t>1</a:t>
+            </a:r>
+          </a:p>
+        </p:txBody>
+      </p:sp>
+      <p:sp>
+        <p:nvSpPr>
+          <p:cNvPr id="9" name="TextBox 8"/>
+          <p:cNvSpPr txBox="1"/>
+          <p:nvPr/>
+        </p:nvSpPr>
+        <p:spPr>
+          <a:xfrm>
+            <a:off x="1371600" y="4526280"/>
+            <a:ext cx="2560320" cy="411480"/>
+          </a:xfrm>
+          <a:prstGeom prst="rect">
+            <a:avLst/>
+          </a:prstGeom>
+          <a:noFill/>
+        </p:spPr>
+        <p:txBody>
+          <a:bodyPr wrap="square" lIns="0" tIns="0" rIns="0" bIns="0" anchor="t">
+            <a:spAutoFit/>
+          </a:bodyPr>
+          <a:lstStyle/>
+          <a:p>
+            <a:pPr algn="l"/>
+            <a:r>
+              <a:rPr sz="1700" b="1" i="0">
+                <a:solidFill>
+                  <a:srgbClr val="0F1B2D"/>
+                </a:solidFill>
+                <a:latin typeface="Calibri"/>
+              </a:rPr>
+              <a:t>Leakage-free</a:t>
+            </a:r>
+          </a:p>
+        </p:txBody>
+      </p:sp>
+      <p:sp>
+        <p:nvSpPr>
+          <p:cNvPr id="10" name="TextBox 9"/>
+          <p:cNvSpPr txBox="1"/>
+          <p:nvPr/>
+        </p:nvSpPr>
+        <p:spPr>
+          <a:xfrm>
+            <a:off x="777240" y="5029200"/>
+            <a:ext cx="3108960" cy="822960"/>
+          </a:xfrm>
+          <a:prstGeom prst="rect">
+            <a:avLst/>
+          </a:prstGeom>
+          <a:noFill/>
+        </p:spPr>
+        <p:txBody>
+          <a:bodyPr wrap="square" lIns="0" tIns="0" rIns="0" bIns="0" anchor="t">
+            <a:spAutoFit/>
+          </a:bodyPr>
+          <a:lstStyle/>
+          <a:p>
+            <a:pPr algn="l"/>
+            <a:r>
+              <a:rPr sz="1300" b="0" i="0">
+                <a:solidFill>
+                  <a:srgbClr val="555B66"/>
+                </a:solidFill>
+                <a:latin typeface="Calibri"/>
+              </a:rPr>
+              <a:t>Scaling and every hyper-parameter search happen inside the training folds (nested CV), so no test data influences model selection.</a:t>
+            </a:r>
+          </a:p>
+        </p:txBody>
+      </p:sp>
+      <p:sp>
+        <p:nvSpPr>
+          <p:cNvPr id="11" name="Rounded Rectangle 10"/>
           <p:cNvSpPr/>
           <p:nvPr/>
         </p:nvSpPr>
         <p:spPr>
           <a:xfrm>
-            <a:off x="3246120" y="1737360"/>
-            <a:ext cx="2514600" cy="1234440"/>
+            <a:off x="4297679" y="4343400"/>
+            <a:ext cx="3520440" cy="1554480"/>
           </a:xfrm>
           <a:prstGeom prst="roundRect">
             <a:avLst>
@@ -7478,90 +7293,20 @@
       </p:sp>
       <p:sp>
         <p:nvSpPr>
-          <p:cNvPr id="11" name="TextBox 10"/>
-          <p:cNvSpPr txBox="1"/>
-          <p:nvPr/>
-        </p:nvSpPr>
-        <p:spPr>
-          <a:xfrm>
-            <a:off x="3429000" y="1874519"/>
-            <a:ext cx="2148840" cy="411480"/>
-          </a:xfrm>
-          <a:prstGeom prst="rect">
-            <a:avLst/>
-          </a:prstGeom>
-          <a:noFill/>
-        </p:spPr>
-        <p:txBody>
-          <a:bodyPr wrap="square" anchor="t" lIns="0" rIns="0" tIns="0" bIns="0">
-            <a:spAutoFit/>
-          </a:bodyPr>
-          <a:lstStyle/>
-          <a:p>
-            <a:pPr algn="l"/>
-            <a:r>
-              <a:rPr sz="1700" b="1" i="0">
-                <a:solidFill>
-                  <a:srgbClr val="0F1B2D"/>
-                </a:solidFill>
-                <a:latin typeface="Calibri"/>
-              </a:rPr>
-              <a:t>Exoskeleton</a:t>
-            </a:r>
-          </a:p>
-        </p:txBody>
-      </p:sp>
-      <p:sp>
-        <p:nvSpPr>
-          <p:cNvPr id="12" name="TextBox 11"/>
-          <p:cNvSpPr txBox="1"/>
-          <p:nvPr/>
-        </p:nvSpPr>
-        <p:spPr>
-          <a:xfrm>
-            <a:off x="3429000" y="2331720"/>
-            <a:ext cx="2148840" cy="548640"/>
-          </a:xfrm>
-          <a:prstGeom prst="rect">
-            <a:avLst/>
-          </a:prstGeom>
-          <a:noFill/>
-        </p:spPr>
-        <p:txBody>
-          <a:bodyPr wrap="square" anchor="t" lIns="0" rIns="0" tIns="0" bIns="0">
-            <a:spAutoFit/>
-          </a:bodyPr>
-          <a:lstStyle/>
-          <a:p>
-            <a:pPr algn="l"/>
-            <a:r>
-              <a:rPr sz="1400" b="0" i="0">
-                <a:solidFill>
-                  <a:srgbClr val="555B66"/>
-                </a:solidFill>
-                <a:latin typeface="Calibri"/>
-              </a:rPr>
-              <a:t>applies it for 2 min</a:t>
-            </a:r>
-          </a:p>
-        </p:txBody>
-      </p:sp>
-      <p:sp>
-        <p:nvSpPr>
-          <p:cNvPr id="13" name="Right Arrow 12"/>
+          <p:cNvPr id="12" name="Oval 11"/>
           <p:cNvSpPr/>
           <p:nvPr/>
         </p:nvSpPr>
         <p:spPr>
           <a:xfrm>
-            <a:off x="5806440" y="2212848"/>
-            <a:ext cx="182880" cy="274320"/>
-          </a:xfrm>
-          <a:prstGeom prst="rightArrow">
+            <a:off x="4526279" y="4498848"/>
+            <a:ext cx="457200" cy="457200"/>
+          </a:xfrm>
+          <a:prstGeom prst="ellipse">
             <a:avLst/>
           </a:prstGeom>
           <a:solidFill>
-            <a:srgbClr val="555B66"/>
+            <a:srgbClr val="2A78D6"/>
           </a:solidFill>
           <a:ln>
             <a:noFill/>
@@ -7582,23 +7327,102 @@
           </a:fontRef>
         </p:style>
         <p:txBody>
-          <a:bodyPr rtlCol="0" anchor="ctr"/>
+          <a:bodyPr lIns="0" tIns="0" rIns="0" bIns="0" rtlCol="0" anchor="ctr"/>
           <a:lstStyle/>
           <a:p>
             <a:pPr algn="ctr"/>
-          </a:p>
-        </p:txBody>
-      </p:sp>
-      <p:sp>
-        <p:nvSpPr>
-          <p:cNvPr id="14" name="Rounded Rectangle 13"/>
+            <a:r>
+              <a:rPr sz="1600" b="1">
+                <a:solidFill>
+                  <a:srgbClr val="FFFFFF"/>
+                </a:solidFill>
+                <a:latin typeface="Calibri"/>
+              </a:rPr>
+              <a:t>2</a:t>
+            </a:r>
+          </a:p>
+        </p:txBody>
+      </p:sp>
+      <p:sp>
+        <p:nvSpPr>
+          <p:cNvPr id="13" name="TextBox 12"/>
+          <p:cNvSpPr txBox="1"/>
+          <p:nvPr/>
+        </p:nvSpPr>
+        <p:spPr>
+          <a:xfrm>
+            <a:off x="5120640" y="4526280"/>
+            <a:ext cx="2560320" cy="411480"/>
+          </a:xfrm>
+          <a:prstGeom prst="rect">
+            <a:avLst/>
+          </a:prstGeom>
+          <a:noFill/>
+        </p:spPr>
+        <p:txBody>
+          <a:bodyPr wrap="square" lIns="0" tIns="0" rIns="0" bIns="0" anchor="t">
+            <a:spAutoFit/>
+          </a:bodyPr>
+          <a:lstStyle/>
+          <a:p>
+            <a:pPr algn="l"/>
+            <a:r>
+              <a:rPr sz="1700" b="1" i="0">
+                <a:solidFill>
+                  <a:srgbClr val="0F1B2D"/>
+                </a:solidFill>
+                <a:latin typeface="Calibri"/>
+              </a:rPr>
+              <a:t>Two protocols</a:t>
+            </a:r>
+          </a:p>
+        </p:txBody>
+      </p:sp>
+      <p:sp>
+        <p:nvSpPr>
+          <p:cNvPr id="14" name="TextBox 13"/>
+          <p:cNvSpPr txBox="1"/>
+          <p:nvPr/>
+        </p:nvSpPr>
+        <p:spPr>
+          <a:xfrm>
+            <a:off x="4526279" y="5029200"/>
+            <a:ext cx="3108960" cy="822960"/>
+          </a:xfrm>
+          <a:prstGeom prst="rect">
+            <a:avLst/>
+          </a:prstGeom>
+          <a:noFill/>
+        </p:spPr>
+        <p:txBody>
+          <a:bodyPr wrap="square" lIns="0" tIns="0" rIns="0" bIns="0" anchor="t">
+            <a:spAutoFit/>
+          </a:bodyPr>
+          <a:lstStyle/>
+          <a:p>
+            <a:pPr algn="l"/>
+            <a:r>
+              <a:rPr sz="1300" b="0" i="0">
+                <a:solidFill>
+                  <a:srgbClr val="555B66"/>
+                </a:solidFill>
+                <a:latin typeface="Calibri"/>
+              </a:rPr>
+              <a:t>Repeated nested 5-fold CV for comparison, and leave-one-day-out to test generalisation to an unseen session.</a:t>
+            </a:r>
+          </a:p>
+        </p:txBody>
+      </p:sp>
+      <p:sp>
+        <p:nvSpPr>
+          <p:cNvPr id="15" name="Rounded Rectangle 14"/>
           <p:cNvSpPr/>
           <p:nvPr/>
         </p:nvSpPr>
         <p:spPr>
           <a:xfrm>
-            <a:off x="5943600" y="1737360"/>
-            <a:ext cx="2514600" cy="1234440"/>
+            <a:off x="8046719" y="4343400"/>
+            <a:ext cx="3520440" cy="1554480"/>
           </a:xfrm>
           <a:prstGeom prst="roundRect">
             <a:avLst>
@@ -7637,90 +7461,20 @@
       </p:sp>
       <p:sp>
         <p:nvSpPr>
-          <p:cNvPr id="15" name="TextBox 14"/>
-          <p:cNvSpPr txBox="1"/>
-          <p:nvPr/>
-        </p:nvSpPr>
-        <p:spPr>
-          <a:xfrm>
-            <a:off x="6126480" y="1874519"/>
-            <a:ext cx="2148840" cy="411480"/>
-          </a:xfrm>
-          <a:prstGeom prst="rect">
-            <a:avLst/>
-          </a:prstGeom>
-          <a:noFill/>
-        </p:spPr>
-        <p:txBody>
-          <a:bodyPr wrap="square" anchor="t" lIns="0" rIns="0" tIns="0" bIns="0">
-            <a:spAutoFit/>
-          </a:bodyPr>
-          <a:lstStyle/>
-          <a:p>
-            <a:pPr algn="l"/>
-            <a:r>
-              <a:rPr sz="1700" b="1" i="0">
-                <a:solidFill>
-                  <a:srgbClr val="0F1B2D"/>
-                </a:solidFill>
-                <a:latin typeface="Calibri"/>
-              </a:rPr>
-              <a:t>Human walks</a:t>
-            </a:r>
-          </a:p>
-        </p:txBody>
-      </p:sp>
-      <p:sp>
-        <p:nvSpPr>
-          <p:cNvPr id="16" name="TextBox 15"/>
-          <p:cNvSpPr txBox="1"/>
-          <p:nvPr/>
-        </p:nvSpPr>
-        <p:spPr>
-          <a:xfrm>
-            <a:off x="6126480" y="2331720"/>
-            <a:ext cx="2148840" cy="548640"/>
-          </a:xfrm>
-          <a:prstGeom prst="rect">
-            <a:avLst/>
-          </a:prstGeom>
-          <a:noFill/>
-        </p:spPr>
-        <p:txBody>
-          <a:bodyPr wrap="square" anchor="t" lIns="0" rIns="0" tIns="0" bIns="0">
-            <a:spAutoFit/>
-          </a:bodyPr>
-          <a:lstStyle/>
-          <a:p>
-            <a:pPr algn="l"/>
-            <a:r>
-              <a:rPr sz="1400" b="0" i="0">
-                <a:solidFill>
-                  <a:srgbClr val="555B66"/>
-                </a:solidFill>
-                <a:latin typeface="Calibri"/>
-              </a:rPr>
-              <a:t>body adapts</a:t>
-            </a:r>
-          </a:p>
-        </p:txBody>
-      </p:sp>
-      <p:sp>
-        <p:nvSpPr>
-          <p:cNvPr id="17" name="Right Arrow 16"/>
+          <p:cNvPr id="16" name="Oval 15"/>
           <p:cNvSpPr/>
           <p:nvPr/>
         </p:nvSpPr>
         <p:spPr>
           <a:xfrm>
-            <a:off x="8503920" y="2212848"/>
-            <a:ext cx="182880" cy="274320"/>
-          </a:xfrm>
-          <a:prstGeom prst="rightArrow">
+            <a:off x="8275319" y="4498848"/>
+            <a:ext cx="457200" cy="457200"/>
+          </a:xfrm>
+          <a:prstGeom prst="ellipse">
             <a:avLst/>
           </a:prstGeom>
           <a:solidFill>
-            <a:srgbClr val="555B66"/>
+            <a:srgbClr val="2A78D6"/>
           </a:solidFill>
           <a:ln>
             <a:noFill/>
@@ -7741,56 +7495,89 @@
           </a:fontRef>
         </p:style>
         <p:txBody>
-          <a:bodyPr rtlCol="0" anchor="ctr"/>
+          <a:bodyPr lIns="0" tIns="0" rIns="0" bIns="0" rtlCol="0" anchor="ctr"/>
           <a:lstStyle/>
           <a:p>
             <a:pPr algn="ctr"/>
-          </a:p>
-        </p:txBody>
-      </p:sp>
-      <p:sp>
-        <p:nvSpPr>
-          <p:cNvPr id="18" name="Rounded Rectangle 17"/>
-          <p:cNvSpPr/>
-          <p:nvPr/>
-        </p:nvSpPr>
-        <p:spPr>
-          <a:xfrm>
-            <a:off x="8641080" y="1737360"/>
-            <a:ext cx="2514600" cy="1234440"/>
-          </a:xfrm>
-          <a:prstGeom prst="roundRect">
-            <a:avLst>
-              <a:gd name="adj" fmla="val 8000"/>
-            </a:avLst>
-          </a:prstGeom>
-          <a:solidFill>
-            <a:srgbClr val="EB6834"/>
-          </a:solidFill>
-          <a:ln>
-            <a:noFill/>
-          </a:ln>
-          <a:effectLst/>
-        </p:spPr>
-        <p:style>
-          <a:lnRef idx="1">
-            <a:schemeClr val="accent1"/>
-          </a:lnRef>
-          <a:fillRef idx="3">
-            <a:schemeClr val="accent1"/>
-          </a:fillRef>
-          <a:effectRef idx="2">
-            <a:schemeClr val="accent1"/>
-          </a:effectRef>
-          <a:fontRef idx="minor">
-            <a:schemeClr val="lt1"/>
-          </a:fontRef>
-        </p:style>
-        <p:txBody>
-          <a:bodyPr rtlCol="0" anchor="ctr"/>
-          <a:lstStyle/>
-          <a:p>
-            <a:pPr algn="ctr"/>
+            <a:r>
+              <a:rPr sz="1600" b="1">
+                <a:solidFill>
+                  <a:srgbClr val="FFFFFF"/>
+                </a:solidFill>
+                <a:latin typeface="Calibri"/>
+              </a:rPr>
+              <a:t>3</a:t>
+            </a:r>
+          </a:p>
+        </p:txBody>
+      </p:sp>
+      <p:sp>
+        <p:nvSpPr>
+          <p:cNvPr id="17" name="TextBox 16"/>
+          <p:cNvSpPr txBox="1"/>
+          <p:nvPr/>
+        </p:nvSpPr>
+        <p:spPr>
+          <a:xfrm>
+            <a:off x="8869680" y="4526280"/>
+            <a:ext cx="2560320" cy="411480"/>
+          </a:xfrm>
+          <a:prstGeom prst="rect">
+            <a:avLst/>
+          </a:prstGeom>
+          <a:noFill/>
+        </p:spPr>
+        <p:txBody>
+          <a:bodyPr wrap="square" lIns="0" tIns="0" rIns="0" bIns="0" anchor="t">
+            <a:spAutoFit/>
+          </a:bodyPr>
+          <a:lstStyle/>
+          <a:p>
+            <a:pPr algn="l"/>
+            <a:r>
+              <a:rPr sz="1700" b="1" i="0">
+                <a:solidFill>
+                  <a:srgbClr val="0F1B2D"/>
+                </a:solidFill>
+                <a:latin typeface="Calibri"/>
+              </a:rPr>
+              <a:t>Two layers</a:t>
+            </a:r>
+          </a:p>
+        </p:txBody>
+      </p:sp>
+      <p:sp>
+        <p:nvSpPr>
+          <p:cNvPr id="18" name="TextBox 17"/>
+          <p:cNvSpPr txBox="1"/>
+          <p:nvPr/>
+        </p:nvSpPr>
+        <p:spPr>
+          <a:xfrm>
+            <a:off x="8275319" y="5029200"/>
+            <a:ext cx="3108960" cy="822960"/>
+          </a:xfrm>
+          <a:prstGeom prst="rect">
+            <a:avLst/>
+          </a:prstGeom>
+          <a:noFill/>
+        </p:spPr>
+        <p:txBody>
+          <a:bodyPr wrap="square" lIns="0" tIns="0" rIns="0" bIns="0" anchor="t">
+            <a:spAutoFit/>
+          </a:bodyPr>
+          <a:lstStyle/>
+          <a:p>
+            <a:pPr algn="l"/>
+            <a:r>
+              <a:rPr sz="1300" b="0" i="0">
+                <a:solidFill>
+                  <a:srgbClr val="555B66"/>
+                </a:solidFill>
+                <a:latin typeface="Calibri"/>
+              </a:rPr>
+              <a:t>A faithful 1:1 Python port of the paper's MATLAB scripts (baseline), plus the extended study: 12 experiments, 16 figures, 10 unit tests.</a:t>
+            </a:r>
           </a:p>
         </p:txBody>
       </p:sp>
@@ -7802,491 +7589,29 @@
         </p:nvSpPr>
         <p:spPr>
           <a:xfrm>
-            <a:off x="8823959" y="1874519"/>
-            <a:ext cx="2148840" cy="411480"/>
-          </a:xfrm>
-          <a:prstGeom prst="rect">
-            <a:avLst/>
-          </a:prstGeom>
-          <a:noFill/>
-        </p:spPr>
-        <p:txBody>
-          <a:bodyPr wrap="square" anchor="t" lIns="0" rIns="0" tIns="0" bIns="0">
-            <a:spAutoFit/>
-          </a:bodyPr>
-          <a:lstStyle/>
-          <a:p>
-            <a:pPr algn="l"/>
-            <a:r>
-              <a:rPr sz="1700" b="1" i="0">
-                <a:solidFill>
-                  <a:srgbClr val="FFFFFF"/>
-                </a:solidFill>
-                <a:latin typeface="Calibri"/>
-              </a:rPr>
-              <a:t>Metabolic cost</a:t>
-            </a:r>
-          </a:p>
-        </p:txBody>
-      </p:sp>
-      <p:sp>
-        <p:nvSpPr>
-          <p:cNvPr id="20" name="TextBox 19"/>
-          <p:cNvSpPr txBox="1"/>
-          <p:nvPr/>
-        </p:nvSpPr>
-        <p:spPr>
-          <a:xfrm>
-            <a:off x="8823959" y="2331720"/>
-            <a:ext cx="2148840" cy="548640"/>
-          </a:xfrm>
-          <a:prstGeom prst="rect">
-            <a:avLst/>
-          </a:prstGeom>
-          <a:noFill/>
-        </p:spPr>
-        <p:txBody>
-          <a:bodyPr wrap="square" anchor="t" lIns="0" rIns="0" tIns="0" bIns="0">
-            <a:spAutoFit/>
-          </a:bodyPr>
-          <a:lstStyle/>
-          <a:p>
-            <a:pPr algn="l"/>
-            <a:r>
-              <a:rPr sz="1400" b="0" i="0">
-                <a:solidFill>
-                  <a:srgbClr val="FFFFFF"/>
-                </a:solidFill>
-                <a:latin typeface="Calibri"/>
-              </a:rPr>
-              <a:t>measured via face mask</a:t>
-            </a:r>
-          </a:p>
-        </p:txBody>
-      </p:sp>
-      <p:sp>
-        <p:nvSpPr>
-          <p:cNvPr id="21" name="TextBox 20"/>
-          <p:cNvSpPr txBox="1"/>
-          <p:nvPr/>
-        </p:nvSpPr>
-        <p:spPr>
-          <a:xfrm>
-            <a:off x="548640" y="3090672"/>
-            <a:ext cx="10972800" cy="365760"/>
-          </a:xfrm>
-          <a:prstGeom prst="rect">
-            <a:avLst/>
-          </a:prstGeom>
-          <a:noFill/>
-        </p:spPr>
-        <p:txBody>
-          <a:bodyPr wrap="square" anchor="t" lIns="0" rIns="0" tIns="0" bIns="0">
-            <a:spAutoFit/>
-          </a:bodyPr>
-          <a:lstStyle/>
-          <a:p>
-            <a:pPr algn="l"/>
-            <a:r>
-              <a:rPr sz="1400" b="0" i="1">
-                <a:solidFill>
-                  <a:srgbClr val="555B66"/>
-                </a:solidFill>
-                <a:latin typeface="Calibri"/>
-              </a:rPr>
-              <a:t>↻  repeated 36× per 72-min session, feedback = metabolic cost</a:t>
-            </a:r>
-          </a:p>
-        </p:txBody>
-      </p:sp>
-      <p:sp>
-        <p:nvSpPr>
-          <p:cNvPr id="22" name="Rounded Rectangle 21"/>
-          <p:cNvSpPr/>
-          <p:nvPr/>
-        </p:nvSpPr>
-        <p:spPr>
-          <a:xfrm>
-            <a:off x="548640" y="3749039"/>
-            <a:ext cx="3520440" cy="1417320"/>
-          </a:xfrm>
-          <a:prstGeom prst="roundRect">
-            <a:avLst>
-              <a:gd name="adj" fmla="val 8000"/>
-            </a:avLst>
-          </a:prstGeom>
-          <a:solidFill>
-            <a:srgbClr val="F1F5FB"/>
-          </a:solidFill>
-          <a:ln>
-            <a:noFill/>
-          </a:ln>
-          <a:effectLst/>
-        </p:spPr>
-        <p:style>
-          <a:lnRef idx="1">
-            <a:schemeClr val="accent1"/>
-          </a:lnRef>
-          <a:fillRef idx="3">
-            <a:schemeClr val="accent1"/>
-          </a:fillRef>
-          <a:effectRef idx="2">
-            <a:schemeClr val="accent1"/>
-          </a:effectRef>
-          <a:fontRef idx="minor">
-            <a:schemeClr val="lt1"/>
-          </a:fontRef>
-        </p:style>
-        <p:txBody>
-          <a:bodyPr rtlCol="0" anchor="ctr"/>
-          <a:lstStyle/>
-          <a:p>
-            <a:pPr algn="ctr"/>
-          </a:p>
-        </p:txBody>
-      </p:sp>
-      <p:sp>
-        <p:nvSpPr>
-          <p:cNvPr id="23" name="TextBox 22"/>
-          <p:cNvSpPr txBox="1"/>
-          <p:nvPr/>
-        </p:nvSpPr>
-        <p:spPr>
-          <a:xfrm>
-            <a:off x="777240" y="3913631"/>
-            <a:ext cx="3063240" cy="685800"/>
-          </a:xfrm>
-          <a:prstGeom prst="rect">
-            <a:avLst/>
-          </a:prstGeom>
-          <a:noFill/>
-        </p:spPr>
-        <p:txBody>
-          <a:bodyPr wrap="square" anchor="t" lIns="0" rIns="0" tIns="0" bIns="0">
-            <a:spAutoFit/>
-          </a:bodyPr>
-          <a:lstStyle/>
-          <a:p>
-            <a:pPr algn="l"/>
-            <a:r>
-              <a:rPr sz="4000" b="1" i="0">
-                <a:solidFill>
-                  <a:srgbClr val="EB6834"/>
-                </a:solidFill>
-                <a:latin typeface="Cambria"/>
-              </a:rPr>
-              <a:t>~1 min</a:t>
-            </a:r>
-          </a:p>
-        </p:txBody>
-      </p:sp>
-      <p:sp>
-        <p:nvSpPr>
-          <p:cNvPr id="24" name="TextBox 23"/>
-          <p:cNvSpPr txBox="1"/>
-          <p:nvPr/>
-        </p:nvSpPr>
-        <p:spPr>
-          <a:xfrm>
-            <a:off x="777240" y="4617720"/>
-            <a:ext cx="3063240" cy="502920"/>
-          </a:xfrm>
-          <a:prstGeom prst="rect">
-            <a:avLst/>
-          </a:prstGeom>
-          <a:noFill/>
-        </p:spPr>
-        <p:txBody>
-          <a:bodyPr wrap="square" anchor="t" lIns="0" rIns="0" tIns="0" bIns="0">
-            <a:spAutoFit/>
-          </a:bodyPr>
-          <a:lstStyle/>
-          <a:p>
-            <a:pPr algn="l"/>
-            <a:r>
-              <a:rPr sz="1300" b="0" i="0">
-                <a:solidFill>
-                  <a:srgbClr val="555B66"/>
-                </a:solidFill>
-                <a:latin typeface="Calibri"/>
-              </a:rPr>
-              <a:t>to settle after every change in control law, so it is slow feedback</a:t>
-            </a:r>
-          </a:p>
-        </p:txBody>
-      </p:sp>
-      <p:sp>
-        <p:nvSpPr>
-          <p:cNvPr id="25" name="Rounded Rectangle 24"/>
-          <p:cNvSpPr/>
-          <p:nvPr/>
-        </p:nvSpPr>
-        <p:spPr>
-          <a:xfrm>
-            <a:off x="4343400" y="3749039"/>
-            <a:ext cx="3520440" cy="1417320"/>
-          </a:xfrm>
-          <a:prstGeom prst="roundRect">
-            <a:avLst>
-              <a:gd name="adj" fmla="val 8000"/>
-            </a:avLst>
-          </a:prstGeom>
-          <a:solidFill>
-            <a:srgbClr val="F1F5FB"/>
-          </a:solidFill>
-          <a:ln>
-            <a:noFill/>
-          </a:ln>
-          <a:effectLst/>
-        </p:spPr>
-        <p:style>
-          <a:lnRef idx="1">
-            <a:schemeClr val="accent1"/>
-          </a:lnRef>
-          <a:fillRef idx="3">
-            <a:schemeClr val="accent1"/>
-          </a:fillRef>
-          <a:effectRef idx="2">
-            <a:schemeClr val="accent1"/>
-          </a:effectRef>
-          <a:fontRef idx="minor">
-            <a:schemeClr val="lt1"/>
-          </a:fontRef>
-        </p:style>
-        <p:txBody>
-          <a:bodyPr rtlCol="0" anchor="ctr"/>
-          <a:lstStyle/>
-          <a:p>
-            <a:pPr algn="ctr"/>
-          </a:p>
-        </p:txBody>
-      </p:sp>
-      <p:sp>
-        <p:nvSpPr>
-          <p:cNvPr id="26" name="TextBox 25"/>
-          <p:cNvSpPr txBox="1"/>
-          <p:nvPr/>
-        </p:nvSpPr>
-        <p:spPr>
-          <a:xfrm>
-            <a:off x="4572000" y="3913631"/>
-            <a:ext cx="3063240" cy="685800"/>
-          </a:xfrm>
-          <a:prstGeom prst="rect">
-            <a:avLst/>
-          </a:prstGeom>
-          <a:noFill/>
-        </p:spPr>
-        <p:txBody>
-          <a:bodyPr wrap="square" anchor="t" lIns="0" rIns="0" tIns="0" bIns="0">
-            <a:spAutoFit/>
-          </a:bodyPr>
-          <a:lstStyle/>
-          <a:p>
-            <a:pPr algn="l"/>
-            <a:r>
-              <a:rPr sz="4000" b="1" i="0">
-                <a:solidFill>
-                  <a:srgbClr val="EB6834"/>
-                </a:solidFill>
-                <a:latin typeface="Cambria"/>
-              </a:rPr>
-              <a:t>≈ 5 %</a:t>
-            </a:r>
-          </a:p>
-        </p:txBody>
-      </p:sp>
-      <p:sp>
-        <p:nvSpPr>
-          <p:cNvPr id="27" name="TextBox 26"/>
-          <p:cNvSpPr txBox="1"/>
-          <p:nvPr/>
-        </p:nvSpPr>
-        <p:spPr>
-          <a:xfrm>
-            <a:off x="4572000" y="4617720"/>
-            <a:ext cx="3063240" cy="502920"/>
-          </a:xfrm>
-          <a:prstGeom prst="rect">
-            <a:avLst/>
-          </a:prstGeom>
-          <a:noFill/>
-        </p:spPr>
-        <p:txBody>
-          <a:bodyPr wrap="square" anchor="t" lIns="0" rIns="0" tIns="0" bIns="0">
-            <a:spAutoFit/>
-          </a:bodyPr>
-          <a:lstStyle/>
-          <a:p>
-            <a:pPr algn="l"/>
-            <a:r>
-              <a:rPr sz="1300" b="0" i="0">
-                <a:solidFill>
-                  <a:srgbClr val="555B66"/>
-                </a:solidFill>
-                <a:latin typeface="Calibri"/>
-              </a:rPr>
-              <a:t>irreducible noise in the measurement (MSE floor ≈ 0.0025)</a:t>
-            </a:r>
-          </a:p>
-        </p:txBody>
-      </p:sp>
-      <p:sp>
-        <p:nvSpPr>
-          <p:cNvPr id="28" name="Rounded Rectangle 27"/>
-          <p:cNvSpPr/>
-          <p:nvPr/>
-        </p:nvSpPr>
-        <p:spPr>
-          <a:xfrm>
-            <a:off x="8138160" y="3749039"/>
-            <a:ext cx="3520440" cy="1417320"/>
-          </a:xfrm>
-          <a:prstGeom prst="roundRect">
-            <a:avLst>
-              <a:gd name="adj" fmla="val 8000"/>
-            </a:avLst>
-          </a:prstGeom>
-          <a:solidFill>
-            <a:srgbClr val="F1F5FB"/>
-          </a:solidFill>
-          <a:ln>
-            <a:noFill/>
-          </a:ln>
-          <a:effectLst/>
-        </p:spPr>
-        <p:style>
-          <a:lnRef idx="1">
-            <a:schemeClr val="accent1"/>
-          </a:lnRef>
-          <a:fillRef idx="3">
-            <a:schemeClr val="accent1"/>
-          </a:fillRef>
-          <a:effectRef idx="2">
-            <a:schemeClr val="accent1"/>
-          </a:effectRef>
-          <a:fontRef idx="minor">
-            <a:schemeClr val="lt1"/>
-          </a:fontRef>
-        </p:style>
-        <p:txBody>
-          <a:bodyPr rtlCol="0" anchor="ctr"/>
-          <a:lstStyle/>
-          <a:p>
-            <a:pPr algn="ctr"/>
-          </a:p>
-        </p:txBody>
-      </p:sp>
-      <p:sp>
-        <p:nvSpPr>
-          <p:cNvPr id="29" name="TextBox 28"/>
-          <p:cNvSpPr txBox="1"/>
-          <p:nvPr/>
-        </p:nvSpPr>
-        <p:spPr>
-          <a:xfrm>
-            <a:off x="8366760" y="3913631"/>
-            <a:ext cx="3063240" cy="685800"/>
-          </a:xfrm>
-          <a:prstGeom prst="rect">
-            <a:avLst/>
-          </a:prstGeom>
-          <a:noFill/>
-        </p:spPr>
-        <p:txBody>
-          <a:bodyPr wrap="square" anchor="t" lIns="0" rIns="0" tIns="0" bIns="0">
-            <a:spAutoFit/>
-          </a:bodyPr>
-          <a:lstStyle/>
-          <a:p>
-            <a:pPr algn="l"/>
-            <a:r>
-              <a:rPr sz="4000" b="1" i="0">
-                <a:solidFill>
-                  <a:srgbClr val="EB6834"/>
-                </a:solidFill>
-                <a:latin typeface="Cambria"/>
-              </a:rPr>
-              <a:t>Lab only</a:t>
-            </a:r>
-          </a:p>
-        </p:txBody>
-      </p:sp>
-      <p:sp>
-        <p:nvSpPr>
-          <p:cNvPr id="30" name="TextBox 29"/>
-          <p:cNvSpPr txBox="1"/>
-          <p:nvPr/>
-        </p:nvSpPr>
-        <p:spPr>
-          <a:xfrm>
-            <a:off x="8366760" y="4617720"/>
-            <a:ext cx="3063240" cy="502920"/>
-          </a:xfrm>
-          <a:prstGeom prst="rect">
-            <a:avLst/>
-          </a:prstGeom>
-          <a:noFill/>
-        </p:spPr>
-        <p:txBody>
-          <a:bodyPr wrap="square" anchor="t" lIns="0" rIns="0" tIns="0" bIns="0">
-            <a:spAutoFit/>
-          </a:bodyPr>
-          <a:lstStyle/>
-          <a:p>
-            <a:pPr algn="l"/>
-            <a:r>
-              <a:rPr sz="1300" b="0" i="0">
-                <a:solidFill>
-                  <a:srgbClr val="555B66"/>
-                </a:solidFill>
-                <a:latin typeface="Calibri"/>
-              </a:rPr>
-              <a:t>needs a face mask, a metabolic cart and fasting subjects</a:t>
-            </a:r>
-          </a:p>
-        </p:txBody>
-      </p:sp>
-      <p:sp>
-        <p:nvSpPr>
-          <p:cNvPr id="31" name="TextBox 30"/>
-          <p:cNvSpPr txBox="1"/>
-          <p:nvPr/>
-        </p:nvSpPr>
-        <p:spPr>
-          <a:xfrm>
-            <a:off x="548640" y="5486400"/>
-            <a:ext cx="11064240" cy="731520"/>
-          </a:xfrm>
-          <a:prstGeom prst="rect">
-            <a:avLst/>
-          </a:prstGeom>
-          <a:noFill/>
-        </p:spPr>
-        <p:txBody>
-          <a:bodyPr wrap="square" anchor="t" lIns="0" rIns="0" tIns="0" bIns="0">
-            <a:spAutoFit/>
-          </a:bodyPr>
-          <a:lstStyle/>
-          <a:p>
-            <a:pPr algn="l"/>
-            <a:r>
-              <a:rPr sz="1700" b="1" i="0">
+            <a:off x="548640" y="5989320"/>
+            <a:ext cx="11064240" cy="320040"/>
+          </a:xfrm>
+          <a:prstGeom prst="rect">
+            <a:avLst/>
+          </a:prstGeom>
+          <a:noFill/>
+        </p:spPr>
+        <p:txBody>
+          <a:bodyPr wrap="square" lIns="0" tIns="0" rIns="0" bIns="0" anchor="t">
+            <a:spAutoFit/>
+          </a:bodyPr>
+          <a:lstStyle/>
+          <a:p>
+            <a:pPr algn="l"/>
+            <a:r>
+              <a:rPr sz="1500" b="1" i="1">
                 <a:solidFill>
                   <a:srgbClr val="0F1B2D"/>
                 </a:solidFill>
                 <a:latin typeface="Calibri"/>
               </a:rPr>
-              <a:t>Our goal: </a:t>
-            </a:r>
-            <a:r>
-              <a:rPr sz="1700" b="0" i="0">
-                <a:solidFill>
-                  <a:srgbClr val="14171C"/>
-                </a:solidFill>
-                <a:latin typeface="Calibri"/>
-              </a:rPr>
-              <a:t>learn  f(EMG, gait, controls) → metabolic cost  so the mask can eventually be replaced by sensors a person could wear anywhere.</a:t>
+              <a:t>We evaluate both predictive accuracy and whether it holds on a new day.</a:t>
             </a:r>
           </a:p>
         </p:txBody>
@@ -8300,7 +7625,7 @@
 </file>
 
 <file path=ppt/slides/slide3.xml><?xml version="1.0" encoding="utf-8"?>
-<p:sld xmlns:a="http://schemas.openxmlformats.org/drawingml/2006/main" xmlns:p="http://schemas.openxmlformats.org/presentationml/2006/main" xmlns:r="http://schemas.openxmlformats.org/officeDocument/2006/relationships">
+<p:sld xmlns:a="http://schemas.openxmlformats.org/drawingml/2006/main" xmlns:r="http://schemas.openxmlformats.org/officeDocument/2006/relationships" xmlns:p="http://schemas.openxmlformats.org/presentationml/2006/main">
   <p:cSld>
     <p:bg>
       <p:bgPr>
@@ -8316,7 +7641,14 @@
         <p:cNvGrpSpPr/>
         <p:nvPr/>
       </p:nvGrpSpPr>
-      <p:grpSpPr/>
+      <p:grpSpPr>
+        <a:xfrm>
+          <a:off x="0" y="0"/>
+          <a:ext cx="0" cy="0"/>
+          <a:chOff x="0" y="0"/>
+          <a:chExt cx="0" cy="0"/>
+        </a:xfrm>
+      </p:grpSpPr>
       <p:sp>
         <p:nvSpPr>
           <p:cNvPr id="2" name="TextBox 1"/>
@@ -8334,7 +7666,7 @@
           <a:noFill/>
         </p:spPr>
         <p:txBody>
-          <a:bodyPr wrap="square" anchor="t" lIns="0" rIns="0" tIns="0" bIns="0">
+          <a:bodyPr wrap="square" lIns="0" tIns="0" rIns="0" bIns="0" anchor="t">
             <a:spAutoFit/>
           </a:bodyPr>
           <a:lstStyle/>
@@ -8347,7 +7679,7 @@
                 </a:solidFill>
                 <a:latin typeface="Calibri"/>
               </a:rPr>
-              <a:t>DATASET</a:t>
+              <a:t>THE PROBLEM</a:t>
             </a:r>
           </a:p>
         </p:txBody>
@@ -8369,7 +7701,7 @@
           <a:noFill/>
         </p:spPr>
         <p:txBody>
-          <a:bodyPr wrap="square" anchor="t" lIns="0" rIns="0" tIns="0" bIns="0">
+          <a:bodyPr wrap="square" lIns="0" tIns="0" rIns="0" bIns="0" anchor="t">
             <a:spAutoFit/>
           </a:bodyPr>
           <a:lstStyle/>
@@ -8382,7 +7714,7 @@
                 </a:solidFill>
                 <a:latin typeface="Cambria"/>
               </a:rPr>
-              <a:t>Real lab data: 2 people, 5 days, 36 assistance conditions per day</a:t>
+              <a:t>Exoskeleton tuning is bottlenecked by a breathing mask</a:t>
             </a:r>
           </a:p>
         </p:txBody>
@@ -8404,7 +7736,7 @@
           <a:noFill/>
         </p:spPr>
         <p:txBody>
-          <a:bodyPr wrap="square" anchor="t" lIns="0" rIns="0" tIns="0" bIns="0">
+          <a:bodyPr wrap="square" lIns="0" tIns="0" rIns="0" bIns="0" anchor="t">
             <a:spAutoFit/>
           </a:bodyPr>
           <a:lstStyle/>
@@ -8439,7 +7771,7 @@
           <a:noFill/>
         </p:spPr>
         <p:txBody>
-          <a:bodyPr wrap="square" anchor="t" lIns="0" rIns="0" tIns="0" bIns="0">
+          <a:bodyPr wrap="square" lIns="0" tIns="0" rIns="0" bIns="0" anchor="t">
             <a:spAutoFit/>
           </a:bodyPr>
           <a:lstStyle/>
@@ -8452,7 +7784,7 @@
                 </a:solidFill>
                 <a:latin typeface="Calibri"/>
               </a:rPr>
-              <a:t>3</a:t>
+              <a:t>2</a:t>
             </a:r>
           </a:p>
         </p:txBody>
@@ -8465,8 +7797,8 @@
         </p:nvSpPr>
         <p:spPr>
           <a:xfrm>
-            <a:off x="548640" y="1508760"/>
-            <a:ext cx="1828800" cy="1417320"/>
+            <a:off x="548640" y="1737360"/>
+            <a:ext cx="2514600" cy="1234440"/>
           </a:xfrm>
           <a:prstGeom prst="roundRect">
             <a:avLst>
@@ -8511,29 +7843,29 @@
         </p:nvSpPr>
         <p:spPr>
           <a:xfrm>
-            <a:off x="777240" y="1673351"/>
-            <a:ext cx="1371600" cy="685800"/>
-          </a:xfrm>
-          <a:prstGeom prst="rect">
-            <a:avLst/>
-          </a:prstGeom>
-          <a:noFill/>
-        </p:spPr>
-        <p:txBody>
-          <a:bodyPr wrap="square" anchor="t" lIns="0" rIns="0" tIns="0" bIns="0">
-            <a:spAutoFit/>
-          </a:bodyPr>
-          <a:lstStyle/>
-          <a:p>
-            <a:pPr algn="l"/>
-            <a:r>
-              <a:rPr sz="3400" b="1" i="0">
-                <a:solidFill>
-                  <a:srgbClr val="2A78D6"/>
-                </a:solidFill>
-                <a:latin typeface="Cambria"/>
-              </a:rPr>
-              <a:t>359</a:t>
+            <a:off x="731520" y="1874519"/>
+            <a:ext cx="2148840" cy="411480"/>
+          </a:xfrm>
+          <a:prstGeom prst="rect">
+            <a:avLst/>
+          </a:prstGeom>
+          <a:noFill/>
+        </p:spPr>
+        <p:txBody>
+          <a:bodyPr wrap="square" lIns="0" tIns="0" rIns="0" bIns="0" anchor="t">
+            <a:spAutoFit/>
+          </a:bodyPr>
+          <a:lstStyle/>
+          <a:p>
+            <a:pPr algn="l"/>
+            <a:r>
+              <a:rPr sz="1700" b="1" i="0">
+                <a:solidFill>
+                  <a:srgbClr val="0F1B2D"/>
+                </a:solidFill>
+                <a:latin typeface="Calibri"/>
+              </a:rPr>
+              <a:t>CMA-ES optimiser</a:t>
             </a:r>
           </a:p>
         </p:txBody>
@@ -8546,44 +7878,86 @@
         </p:nvSpPr>
         <p:spPr>
           <a:xfrm>
-            <a:off x="777240" y="2377439"/>
-            <a:ext cx="1371600" cy="502920"/>
-          </a:xfrm>
-          <a:prstGeom prst="rect">
-            <a:avLst/>
-          </a:prstGeom>
-          <a:noFill/>
-        </p:spPr>
-        <p:txBody>
-          <a:bodyPr wrap="square" anchor="t" lIns="0" rIns="0" tIns="0" bIns="0">
-            <a:spAutoFit/>
-          </a:bodyPr>
-          <a:lstStyle/>
-          <a:p>
-            <a:pPr algn="l"/>
-            <a:r>
-              <a:rPr sz="1300" b="0" i="0">
+            <a:off x="731520" y="2331720"/>
+            <a:ext cx="2148840" cy="548640"/>
+          </a:xfrm>
+          <a:prstGeom prst="rect">
+            <a:avLst/>
+          </a:prstGeom>
+          <a:noFill/>
+        </p:spPr>
+        <p:txBody>
+          <a:bodyPr wrap="square" lIns="0" tIns="0" rIns="0" bIns="0" anchor="t">
+            <a:spAutoFit/>
+          </a:bodyPr>
+          <a:lstStyle/>
+          <a:p>
+            <a:pPr algn="l"/>
+            <a:r>
+              <a:rPr sz="1400" b="0" i="0">
                 <a:solidFill>
                   <a:srgbClr val="555B66"/>
                 </a:solidFill>
                 <a:latin typeface="Calibri"/>
               </a:rPr>
-              <a:t>samples
-(180 + 179)</a:t>
-            </a:r>
-          </a:p>
-        </p:txBody>
-      </p:sp>
-      <p:sp>
-        <p:nvSpPr>
-          <p:cNvPr id="9" name="Rounded Rectangle 8"/>
+              <a:t>proposes new torque profile</a:t>
+            </a:r>
+          </a:p>
+        </p:txBody>
+      </p:sp>
+      <p:sp>
+        <p:nvSpPr>
+          <p:cNvPr id="9" name="Right Arrow 8"/>
           <p:cNvSpPr/>
           <p:nvPr/>
         </p:nvSpPr>
         <p:spPr>
           <a:xfrm>
-            <a:off x="2560320" y="1508760"/>
-            <a:ext cx="1828800" cy="1417320"/>
+            <a:off x="3108960" y="2212848"/>
+            <a:ext cx="182880" cy="274320"/>
+          </a:xfrm>
+          <a:prstGeom prst="rightArrow">
+            <a:avLst/>
+          </a:prstGeom>
+          <a:solidFill>
+            <a:srgbClr val="555B66"/>
+          </a:solidFill>
+          <a:ln>
+            <a:noFill/>
+          </a:ln>
+        </p:spPr>
+        <p:style>
+          <a:lnRef idx="1">
+            <a:schemeClr val="accent1"/>
+          </a:lnRef>
+          <a:fillRef idx="3">
+            <a:schemeClr val="accent1"/>
+          </a:fillRef>
+          <a:effectRef idx="2">
+            <a:schemeClr val="accent1"/>
+          </a:effectRef>
+          <a:fontRef idx="minor">
+            <a:schemeClr val="lt1"/>
+          </a:fontRef>
+        </p:style>
+        <p:txBody>
+          <a:bodyPr rtlCol="0" anchor="ctr"/>
+          <a:lstStyle/>
+          <a:p>
+            <a:pPr algn="ctr"/>
+          </a:p>
+        </p:txBody>
+      </p:sp>
+      <p:sp>
+        <p:nvSpPr>
+          <p:cNvPr id="10" name="Rounded Rectangle 9"/>
+          <p:cNvSpPr/>
+          <p:nvPr/>
+        </p:nvSpPr>
+        <p:spPr>
+          <a:xfrm>
+            <a:off x="3246120" y="1737360"/>
+            <a:ext cx="2514600" cy="1234440"/>
           </a:xfrm>
           <a:prstGeom prst="roundRect">
             <a:avLst>
@@ -8622,85 +7996,127 @@
       </p:sp>
       <p:sp>
         <p:nvSpPr>
-          <p:cNvPr id="10" name="TextBox 9"/>
-          <p:cNvSpPr txBox="1"/>
-          <p:nvPr/>
-        </p:nvSpPr>
-        <p:spPr>
-          <a:xfrm>
-            <a:off x="2788920" y="1673351"/>
-            <a:ext cx="1371600" cy="685800"/>
-          </a:xfrm>
-          <a:prstGeom prst="rect">
-            <a:avLst/>
-          </a:prstGeom>
-          <a:noFill/>
-        </p:spPr>
-        <p:txBody>
-          <a:bodyPr wrap="square" anchor="t" lIns="0" rIns="0" tIns="0" bIns="0">
-            <a:spAutoFit/>
-          </a:bodyPr>
-          <a:lstStyle/>
-          <a:p>
-            <a:pPr algn="l"/>
-            <a:r>
-              <a:rPr sz="3400" b="1" i="0">
-                <a:solidFill>
-                  <a:srgbClr val="2A78D6"/>
-                </a:solidFill>
-                <a:latin typeface="Cambria"/>
-              </a:rPr>
-              <a:t>29</a:t>
-            </a:r>
-          </a:p>
-        </p:txBody>
-      </p:sp>
-      <p:sp>
-        <p:nvSpPr>
           <p:cNvPr id="11" name="TextBox 10"/>
           <p:cNvSpPr txBox="1"/>
           <p:nvPr/>
         </p:nvSpPr>
         <p:spPr>
           <a:xfrm>
-            <a:off x="2788920" y="2377439"/>
-            <a:ext cx="1371600" cy="502920"/>
-          </a:xfrm>
-          <a:prstGeom prst="rect">
-            <a:avLst/>
-          </a:prstGeom>
-          <a:noFill/>
-        </p:spPr>
-        <p:txBody>
-          <a:bodyPr wrap="square" anchor="t" lIns="0" rIns="0" tIns="0" bIns="0">
-            <a:spAutoFit/>
-          </a:bodyPr>
-          <a:lstStyle/>
-          <a:p>
-            <a:pPr algn="l"/>
-            <a:r>
-              <a:rPr sz="1300" b="0" i="0">
+            <a:off x="3429000" y="1874519"/>
+            <a:ext cx="2148840" cy="411480"/>
+          </a:xfrm>
+          <a:prstGeom prst="rect">
+            <a:avLst/>
+          </a:prstGeom>
+          <a:noFill/>
+        </p:spPr>
+        <p:txBody>
+          <a:bodyPr wrap="square" lIns="0" tIns="0" rIns="0" bIns="0" anchor="t">
+            <a:spAutoFit/>
+          </a:bodyPr>
+          <a:lstStyle/>
+          <a:p>
+            <a:pPr algn="l"/>
+            <a:r>
+              <a:rPr sz="1700" b="1" i="0">
+                <a:solidFill>
+                  <a:srgbClr val="0F1B2D"/>
+                </a:solidFill>
+                <a:latin typeface="Calibri"/>
+              </a:rPr>
+              <a:t>Exoskeleton</a:t>
+            </a:r>
+          </a:p>
+        </p:txBody>
+      </p:sp>
+      <p:sp>
+        <p:nvSpPr>
+          <p:cNvPr id="12" name="TextBox 11"/>
+          <p:cNvSpPr txBox="1"/>
+          <p:nvPr/>
+        </p:nvSpPr>
+        <p:spPr>
+          <a:xfrm>
+            <a:off x="3429000" y="2331720"/>
+            <a:ext cx="2148840" cy="548640"/>
+          </a:xfrm>
+          <a:prstGeom prst="rect">
+            <a:avLst/>
+          </a:prstGeom>
+          <a:noFill/>
+        </p:spPr>
+        <p:txBody>
+          <a:bodyPr wrap="square" lIns="0" tIns="0" rIns="0" bIns="0" anchor="t">
+            <a:spAutoFit/>
+          </a:bodyPr>
+          <a:lstStyle/>
+          <a:p>
+            <a:pPr algn="l"/>
+            <a:r>
+              <a:rPr sz="1400" b="0" i="0">
                 <a:solidFill>
                   <a:srgbClr val="555B66"/>
                 </a:solidFill>
                 <a:latin typeface="Calibri"/>
               </a:rPr>
-              <a:t>features per
-sample</a:t>
-            </a:r>
-          </a:p>
-        </p:txBody>
-      </p:sp>
-      <p:sp>
-        <p:nvSpPr>
-          <p:cNvPr id="12" name="Rounded Rectangle 11"/>
+              <a:t>applies it for 2 min</a:t>
+            </a:r>
+          </a:p>
+        </p:txBody>
+      </p:sp>
+      <p:sp>
+        <p:nvSpPr>
+          <p:cNvPr id="13" name="Right Arrow 12"/>
           <p:cNvSpPr/>
           <p:nvPr/>
         </p:nvSpPr>
         <p:spPr>
           <a:xfrm>
-            <a:off x="4572000" y="1508760"/>
-            <a:ext cx="1828800" cy="1417320"/>
+            <a:off x="5806440" y="2212848"/>
+            <a:ext cx="182880" cy="274320"/>
+          </a:xfrm>
+          <a:prstGeom prst="rightArrow">
+            <a:avLst/>
+          </a:prstGeom>
+          <a:solidFill>
+            <a:srgbClr val="555B66"/>
+          </a:solidFill>
+          <a:ln>
+            <a:noFill/>
+          </a:ln>
+        </p:spPr>
+        <p:style>
+          <a:lnRef idx="1">
+            <a:schemeClr val="accent1"/>
+          </a:lnRef>
+          <a:fillRef idx="3">
+            <a:schemeClr val="accent1"/>
+          </a:fillRef>
+          <a:effectRef idx="2">
+            <a:schemeClr val="accent1"/>
+          </a:effectRef>
+          <a:fontRef idx="minor">
+            <a:schemeClr val="lt1"/>
+          </a:fontRef>
+        </p:style>
+        <p:txBody>
+          <a:bodyPr rtlCol="0" anchor="ctr"/>
+          <a:lstStyle/>
+          <a:p>
+            <a:pPr algn="ctr"/>
+          </a:p>
+        </p:txBody>
+      </p:sp>
+      <p:sp>
+        <p:nvSpPr>
+          <p:cNvPr id="14" name="Rounded Rectangle 13"/>
+          <p:cNvSpPr/>
+          <p:nvPr/>
+        </p:nvSpPr>
+        <p:spPr>
+          <a:xfrm>
+            <a:off x="5943600" y="1737360"/>
+            <a:ext cx="2514600" cy="1234440"/>
           </a:xfrm>
           <a:prstGeom prst="roundRect">
             <a:avLst>
@@ -8739,91 +8155,90 @@
       </p:sp>
       <p:sp>
         <p:nvSpPr>
-          <p:cNvPr id="13" name="TextBox 12"/>
-          <p:cNvSpPr txBox="1"/>
-          <p:nvPr/>
-        </p:nvSpPr>
-        <p:spPr>
-          <a:xfrm>
-            <a:off x="4800600" y="1673351"/>
-            <a:ext cx="1371600" cy="685800"/>
-          </a:xfrm>
-          <a:prstGeom prst="rect">
-            <a:avLst/>
-          </a:prstGeom>
-          <a:noFill/>
-        </p:spPr>
-        <p:txBody>
-          <a:bodyPr wrap="square" anchor="t" lIns="0" rIns="0" tIns="0" bIns="0">
-            <a:spAutoFit/>
-          </a:bodyPr>
-          <a:lstStyle/>
-          <a:p>
-            <a:pPr algn="l"/>
-            <a:r>
-              <a:rPr sz="3000" b="1" i="0">
-                <a:solidFill>
-                  <a:srgbClr val="2A78D6"/>
-                </a:solidFill>
-                <a:latin typeface="Cambria"/>
-              </a:rPr>
-              <a:t>0.0025</a:t>
-            </a:r>
-          </a:p>
-        </p:txBody>
-      </p:sp>
-      <p:sp>
-        <p:nvSpPr>
-          <p:cNvPr id="14" name="TextBox 13"/>
-          <p:cNvSpPr txBox="1"/>
-          <p:nvPr/>
-        </p:nvSpPr>
-        <p:spPr>
-          <a:xfrm>
-            <a:off x="4800600" y="2377439"/>
-            <a:ext cx="1371600" cy="502920"/>
-          </a:xfrm>
-          <a:prstGeom prst="rect">
-            <a:avLst/>
-          </a:prstGeom>
-          <a:noFill/>
-        </p:spPr>
-        <p:txBody>
-          <a:bodyPr wrap="square" anchor="t" lIns="0" rIns="0" tIns="0" bIns="0">
-            <a:spAutoFit/>
-          </a:bodyPr>
-          <a:lstStyle/>
-          <a:p>
-            <a:pPr algn="l"/>
-            <a:r>
-              <a:rPr sz="1300" b="0" i="0">
+          <p:cNvPr id="15" name="TextBox 14"/>
+          <p:cNvSpPr txBox="1"/>
+          <p:nvPr/>
+        </p:nvSpPr>
+        <p:spPr>
+          <a:xfrm>
+            <a:off x="6126480" y="1874519"/>
+            <a:ext cx="2148840" cy="411480"/>
+          </a:xfrm>
+          <a:prstGeom prst="rect">
+            <a:avLst/>
+          </a:prstGeom>
+          <a:noFill/>
+        </p:spPr>
+        <p:txBody>
+          <a:bodyPr wrap="square" lIns="0" tIns="0" rIns="0" bIns="0" anchor="t">
+            <a:spAutoFit/>
+          </a:bodyPr>
+          <a:lstStyle/>
+          <a:p>
+            <a:pPr algn="l"/>
+            <a:r>
+              <a:rPr sz="1700" b="1" i="0">
+                <a:solidFill>
+                  <a:srgbClr val="0F1B2D"/>
+                </a:solidFill>
+                <a:latin typeface="Calibri"/>
+              </a:rPr>
+              <a:t>Human walks</a:t>
+            </a:r>
+          </a:p>
+        </p:txBody>
+      </p:sp>
+      <p:sp>
+        <p:nvSpPr>
+          <p:cNvPr id="16" name="TextBox 15"/>
+          <p:cNvSpPr txBox="1"/>
+          <p:nvPr/>
+        </p:nvSpPr>
+        <p:spPr>
+          <a:xfrm>
+            <a:off x="6126480" y="2331720"/>
+            <a:ext cx="2148840" cy="548640"/>
+          </a:xfrm>
+          <a:prstGeom prst="rect">
+            <a:avLst/>
+          </a:prstGeom>
+          <a:noFill/>
+        </p:spPr>
+        <p:txBody>
+          <a:bodyPr wrap="square" lIns="0" tIns="0" rIns="0" bIns="0" anchor="t">
+            <a:spAutoFit/>
+          </a:bodyPr>
+          <a:lstStyle/>
+          <a:p>
+            <a:pPr algn="l"/>
+            <a:r>
+              <a:rPr sz="1400" b="0" i="0">
                 <a:solidFill>
                   <a:srgbClr val="555B66"/>
                 </a:solidFill>
                 <a:latin typeface="Calibri"/>
               </a:rPr>
-              <a:t>noise-floor
-MSE</a:t>
-            </a:r>
-          </a:p>
-        </p:txBody>
-      </p:sp>
-      <p:sp>
-        <p:nvSpPr>
-          <p:cNvPr id="15" name="Oval 14"/>
+              <a:t>body adapts</a:t>
+            </a:r>
+          </a:p>
+        </p:txBody>
+      </p:sp>
+      <p:sp>
+        <p:nvSpPr>
+          <p:cNvPr id="17" name="Right Arrow 16"/>
           <p:cNvSpPr/>
           <p:nvPr/>
         </p:nvSpPr>
         <p:spPr>
           <a:xfrm>
-            <a:off x="548640" y="3273552"/>
-            <a:ext cx="256032" cy="256032"/>
-          </a:xfrm>
-          <a:prstGeom prst="ellipse">
+            <a:off x="8503920" y="2212848"/>
+            <a:ext cx="182880" cy="274320"/>
+          </a:xfrm>
+          <a:prstGeom prst="rightArrow">
             <a:avLst/>
           </a:prstGeom>
           <a:solidFill>
-            <a:srgbClr val="2A78D6"/>
+            <a:srgbClr val="555B66"/>
           </a:solidFill>
           <a:ln>
             <a:noFill/>
@@ -8853,244 +8268,19 @@
       </p:sp>
       <p:sp>
         <p:nvSpPr>
-          <p:cNvPr id="16" name="TextBox 15"/>
-          <p:cNvSpPr txBox="1"/>
-          <p:nvPr/>
-        </p:nvSpPr>
-        <p:spPr>
-          <a:xfrm>
-            <a:off x="960120" y="3200400"/>
-            <a:ext cx="5120640" cy="731520"/>
-          </a:xfrm>
-          <a:prstGeom prst="rect">
-            <a:avLst/>
-          </a:prstGeom>
-          <a:noFill/>
-        </p:spPr>
-        <p:txBody>
-          <a:bodyPr wrap="square" anchor="t" lIns="0" rIns="0" tIns="0" bIns="0">
-            <a:spAutoFit/>
-          </a:bodyPr>
-          <a:lstStyle/>
-          <a:p>
-            <a:pPr algn="l"/>
-            <a:r>
-              <a:rPr sz="1700" b="1" i="0">
-                <a:solidFill>
-                  <a:srgbClr val="0F1B2D"/>
-                </a:solidFill>
-                <a:latin typeface="Calibri"/>
-              </a:rPr>
-              <a:t>16  EMG</a:t>
-            </a:r>
-          </a:p>
-          <a:p>
-            <a:pPr algn="l"/>
-            <a:r>
-              <a:rPr sz="1300" b="0" i="0">
-                <a:solidFill>
-                  <a:srgbClr val="555B66"/>
-                </a:solidFill>
-                <a:latin typeface="Calibri"/>
-              </a:rPr>
-              <a:t>8 muscles per leg; band-pass → rectify → RMS, normalised each day</a:t>
-            </a:r>
-          </a:p>
-        </p:txBody>
-      </p:sp>
-      <p:sp>
-        <p:nvSpPr>
-          <p:cNvPr id="17" name="Oval 16"/>
+          <p:cNvPr id="18" name="Rounded Rectangle 17"/>
           <p:cNvSpPr/>
           <p:nvPr/>
         </p:nvSpPr>
         <p:spPr>
           <a:xfrm>
-            <a:off x="548640" y="4050791"/>
-            <a:ext cx="256032" cy="256032"/>
-          </a:xfrm>
-          <a:prstGeom prst="ellipse">
-            <a:avLst/>
-          </a:prstGeom>
-          <a:solidFill>
-            <a:srgbClr val="1BAF7A"/>
-          </a:solidFill>
-          <a:ln>
-            <a:noFill/>
-          </a:ln>
-        </p:spPr>
-        <p:style>
-          <a:lnRef idx="1">
-            <a:schemeClr val="accent1"/>
-          </a:lnRef>
-          <a:fillRef idx="3">
-            <a:schemeClr val="accent1"/>
-          </a:fillRef>
-          <a:effectRef idx="2">
-            <a:schemeClr val="accent1"/>
-          </a:effectRef>
-          <a:fontRef idx="minor">
-            <a:schemeClr val="lt1"/>
-          </a:fontRef>
-        </p:style>
-        <p:txBody>
-          <a:bodyPr rtlCol="0" anchor="ctr"/>
-          <a:lstStyle/>
-          <a:p>
-            <a:pPr algn="ctr"/>
-          </a:p>
-        </p:txBody>
-      </p:sp>
-      <p:sp>
-        <p:nvSpPr>
-          <p:cNvPr id="18" name="TextBox 17"/>
-          <p:cNvSpPr txBox="1"/>
-          <p:nvPr/>
-        </p:nvSpPr>
-        <p:spPr>
-          <a:xfrm>
-            <a:off x="960120" y="3977639"/>
-            <a:ext cx="5120640" cy="731520"/>
-          </a:xfrm>
-          <a:prstGeom prst="rect">
-            <a:avLst/>
-          </a:prstGeom>
-          <a:noFill/>
-        </p:spPr>
-        <p:txBody>
-          <a:bodyPr wrap="square" anchor="t" lIns="0" rIns="0" tIns="0" bIns="0">
-            <a:spAutoFit/>
-          </a:bodyPr>
-          <a:lstStyle/>
-          <a:p>
-            <a:pPr algn="l"/>
-            <a:r>
-              <a:rPr sz="1700" b="1" i="0">
-                <a:solidFill>
-                  <a:srgbClr val="0F1B2D"/>
-                </a:solidFill>
-                <a:latin typeface="Calibri"/>
-              </a:rPr>
-              <a:t>9  Step / gait</a:t>
-            </a:r>
-          </a:p>
-          <a:p>
-            <a:pPr algn="l"/>
-            <a:r>
-              <a:rPr sz="1300" b="0" i="0">
-                <a:solidFill>
-                  <a:srgbClr val="555B66"/>
-                </a:solidFill>
-                <a:latin typeface="Calibri"/>
-              </a:rPr>
-              <a:t>peak ground force, ankle dorsi/plantar-flexion, step time, step width</a:t>
-            </a:r>
-          </a:p>
-        </p:txBody>
-      </p:sp>
-      <p:sp>
-        <p:nvSpPr>
-          <p:cNvPr id="19" name="Oval 18"/>
-          <p:cNvSpPr/>
-          <p:nvPr/>
-        </p:nvSpPr>
-        <p:spPr>
-          <a:xfrm>
-            <a:off x="548640" y="4828032"/>
-            <a:ext cx="256032" cy="256032"/>
-          </a:xfrm>
-          <a:prstGeom prst="ellipse">
-            <a:avLst/>
-          </a:prstGeom>
-          <a:solidFill>
-            <a:srgbClr val="EDA100"/>
-          </a:solidFill>
-          <a:ln>
-            <a:noFill/>
-          </a:ln>
-        </p:spPr>
-        <p:style>
-          <a:lnRef idx="1">
-            <a:schemeClr val="accent1"/>
-          </a:lnRef>
-          <a:fillRef idx="3">
-            <a:schemeClr val="accent1"/>
-          </a:fillRef>
-          <a:effectRef idx="2">
-            <a:schemeClr val="accent1"/>
-          </a:effectRef>
-          <a:fontRef idx="minor">
-            <a:schemeClr val="lt1"/>
-          </a:fontRef>
-        </p:style>
-        <p:txBody>
-          <a:bodyPr rtlCol="0" anchor="ctr"/>
-          <a:lstStyle/>
-          <a:p>
-            <a:pPr algn="ctr"/>
-          </a:p>
-        </p:txBody>
-      </p:sp>
-      <p:sp>
-        <p:nvSpPr>
-          <p:cNvPr id="20" name="TextBox 19"/>
-          <p:cNvSpPr txBox="1"/>
-          <p:nvPr/>
-        </p:nvSpPr>
-        <p:spPr>
-          <a:xfrm>
-            <a:off x="960120" y="4754880"/>
-            <a:ext cx="5120640" cy="731520"/>
-          </a:xfrm>
-          <a:prstGeom prst="rect">
-            <a:avLst/>
-          </a:prstGeom>
-          <a:noFill/>
-        </p:spPr>
-        <p:txBody>
-          <a:bodyPr wrap="square" anchor="t" lIns="0" rIns="0" tIns="0" bIns="0">
-            <a:spAutoFit/>
-          </a:bodyPr>
-          <a:lstStyle/>
-          <a:p>
-            <a:pPr algn="l"/>
-            <a:r>
-              <a:rPr sz="1700" b="1" i="0">
-                <a:solidFill>
-                  <a:srgbClr val="0F1B2D"/>
-                </a:solidFill>
-                <a:latin typeface="Calibri"/>
-              </a:rPr>
-              <a:t>4  Control</a:t>
-            </a:r>
-          </a:p>
-          <a:p>
-            <a:pPr algn="l"/>
-            <a:r>
-              <a:rPr sz="1300" b="0" i="0">
-                <a:solidFill>
-                  <a:srgbClr val="555B66"/>
-                </a:solidFill>
-                <a:latin typeface="Calibri"/>
-              </a:rPr>
-              <a:t>exo torque profile: peak torque, peak time, rise time, fall time</a:t>
-            </a:r>
-          </a:p>
-        </p:txBody>
-      </p:sp>
-      <p:sp>
-        <p:nvSpPr>
-          <p:cNvPr id="21" name="Oval 20"/>
-          <p:cNvSpPr/>
-          <p:nvPr/>
-        </p:nvSpPr>
-        <p:spPr>
-          <a:xfrm>
-            <a:off x="548640" y="5605272"/>
-            <a:ext cx="256032" cy="256032"/>
-          </a:xfrm>
-          <a:prstGeom prst="ellipse">
-            <a:avLst/>
+            <a:off x="8641080" y="1737360"/>
+            <a:ext cx="2514600" cy="1234440"/>
+          </a:xfrm>
+          <a:prstGeom prst="roundRect">
+            <a:avLst>
+              <a:gd name="adj" fmla="val 8000"/>
+            </a:avLst>
           </a:prstGeom>
           <a:solidFill>
             <a:srgbClr val="EB6834"/>
@@ -9098,6 +8288,7 @@
           <a:ln>
             <a:noFill/>
           </a:ln>
+          <a:effectLst/>
         </p:spPr>
         <p:style>
           <a:lnRef idx="1">
@@ -9123,22 +8314,22 @@
       </p:sp>
       <p:sp>
         <p:nvSpPr>
-          <p:cNvPr id="22" name="TextBox 21"/>
-          <p:cNvSpPr txBox="1"/>
-          <p:nvPr/>
-        </p:nvSpPr>
-        <p:spPr>
-          <a:xfrm>
-            <a:off x="960120" y="5532120"/>
-            <a:ext cx="5120640" cy="731520"/>
-          </a:xfrm>
-          <a:prstGeom prst="rect">
-            <a:avLst/>
-          </a:prstGeom>
-          <a:noFill/>
-        </p:spPr>
-        <p:txBody>
-          <a:bodyPr wrap="square" anchor="t" lIns="0" rIns="0" tIns="0" bIns="0">
+          <p:cNvPr id="19" name="TextBox 18"/>
+          <p:cNvSpPr txBox="1"/>
+          <p:nvPr/>
+        </p:nvSpPr>
+        <p:spPr>
+          <a:xfrm>
+            <a:off x="8823959" y="1874519"/>
+            <a:ext cx="2148840" cy="411480"/>
+          </a:xfrm>
+          <a:prstGeom prst="rect">
+            <a:avLst/>
+          </a:prstGeom>
+          <a:noFill/>
+        </p:spPr>
+        <p:txBody>
+          <a:bodyPr wrap="square" lIns="0" tIns="0" rIns="0" bIns="0" anchor="t">
             <a:spAutoFit/>
           </a:bodyPr>
           <a:lstStyle/>
@@ -9147,51 +8338,477 @@
             <a:r>
               <a:rPr sz="1700" b="1" i="0">
                 <a:solidFill>
+                  <a:srgbClr val="FFFFFF"/>
+                </a:solidFill>
+                <a:latin typeface="Calibri"/>
+              </a:rPr>
+              <a:t>Metabolic cost</a:t>
+            </a:r>
+          </a:p>
+        </p:txBody>
+      </p:sp>
+      <p:sp>
+        <p:nvSpPr>
+          <p:cNvPr id="20" name="TextBox 19"/>
+          <p:cNvSpPr txBox="1"/>
+          <p:nvPr/>
+        </p:nvSpPr>
+        <p:spPr>
+          <a:xfrm>
+            <a:off x="8823959" y="2331720"/>
+            <a:ext cx="2148840" cy="548640"/>
+          </a:xfrm>
+          <a:prstGeom prst="rect">
+            <a:avLst/>
+          </a:prstGeom>
+          <a:noFill/>
+        </p:spPr>
+        <p:txBody>
+          <a:bodyPr wrap="square" lIns="0" tIns="0" rIns="0" bIns="0" anchor="t">
+            <a:spAutoFit/>
+          </a:bodyPr>
+          <a:lstStyle/>
+          <a:p>
+            <a:pPr algn="l"/>
+            <a:r>
+              <a:rPr sz="1400" b="0" i="0">
+                <a:solidFill>
+                  <a:srgbClr val="FFFFFF"/>
+                </a:solidFill>
+                <a:latin typeface="Calibri"/>
+              </a:rPr>
+              <a:t>measured via face mask</a:t>
+            </a:r>
+          </a:p>
+        </p:txBody>
+      </p:sp>
+      <p:sp>
+        <p:nvSpPr>
+          <p:cNvPr id="21" name="TextBox 20"/>
+          <p:cNvSpPr txBox="1"/>
+          <p:nvPr/>
+        </p:nvSpPr>
+        <p:spPr>
+          <a:xfrm>
+            <a:off x="548640" y="3090672"/>
+            <a:ext cx="10972800" cy="365760"/>
+          </a:xfrm>
+          <a:prstGeom prst="rect">
+            <a:avLst/>
+          </a:prstGeom>
+          <a:noFill/>
+        </p:spPr>
+        <p:txBody>
+          <a:bodyPr wrap="square" lIns="0" tIns="0" rIns="0" bIns="0" anchor="t">
+            <a:spAutoFit/>
+          </a:bodyPr>
+          <a:lstStyle/>
+          <a:p>
+            <a:pPr algn="l"/>
+            <a:r>
+              <a:rPr sz="1400" b="0" i="1">
+                <a:solidFill>
+                  <a:srgbClr val="555B66"/>
+                </a:solidFill>
+                <a:latin typeface="Calibri"/>
+              </a:rPr>
+              <a:t>↻  repeated 36× per 72-min session, feedback = metabolic cost</a:t>
+            </a:r>
+          </a:p>
+        </p:txBody>
+      </p:sp>
+      <p:sp>
+        <p:nvSpPr>
+          <p:cNvPr id="22" name="Rounded Rectangle 21"/>
+          <p:cNvSpPr/>
+          <p:nvPr/>
+        </p:nvSpPr>
+        <p:spPr>
+          <a:xfrm>
+            <a:off x="548640" y="3749039"/>
+            <a:ext cx="3520440" cy="1417320"/>
+          </a:xfrm>
+          <a:prstGeom prst="roundRect">
+            <a:avLst>
+              <a:gd name="adj" fmla="val 8000"/>
+            </a:avLst>
+          </a:prstGeom>
+          <a:solidFill>
+            <a:srgbClr val="F1F5FB"/>
+          </a:solidFill>
+          <a:ln>
+            <a:noFill/>
+          </a:ln>
+          <a:effectLst/>
+        </p:spPr>
+        <p:style>
+          <a:lnRef idx="1">
+            <a:schemeClr val="accent1"/>
+          </a:lnRef>
+          <a:fillRef idx="3">
+            <a:schemeClr val="accent1"/>
+          </a:fillRef>
+          <a:effectRef idx="2">
+            <a:schemeClr val="accent1"/>
+          </a:effectRef>
+          <a:fontRef idx="minor">
+            <a:schemeClr val="lt1"/>
+          </a:fontRef>
+        </p:style>
+        <p:txBody>
+          <a:bodyPr rtlCol="0" anchor="ctr"/>
+          <a:lstStyle/>
+          <a:p>
+            <a:pPr algn="ctr"/>
+          </a:p>
+        </p:txBody>
+      </p:sp>
+      <p:sp>
+        <p:nvSpPr>
+          <p:cNvPr id="23" name="TextBox 22"/>
+          <p:cNvSpPr txBox="1"/>
+          <p:nvPr/>
+        </p:nvSpPr>
+        <p:spPr>
+          <a:xfrm>
+            <a:off x="777240" y="3913631"/>
+            <a:ext cx="3063240" cy="685800"/>
+          </a:xfrm>
+          <a:prstGeom prst="rect">
+            <a:avLst/>
+          </a:prstGeom>
+          <a:noFill/>
+        </p:spPr>
+        <p:txBody>
+          <a:bodyPr wrap="square" lIns="0" tIns="0" rIns="0" bIns="0" anchor="t">
+            <a:spAutoFit/>
+          </a:bodyPr>
+          <a:lstStyle/>
+          <a:p>
+            <a:pPr algn="l"/>
+            <a:r>
+              <a:rPr sz="4000" b="1" i="0">
+                <a:solidFill>
+                  <a:srgbClr val="EB6834"/>
+                </a:solidFill>
+                <a:latin typeface="Cambria"/>
+              </a:rPr>
+              <a:t>~1 min</a:t>
+            </a:r>
+          </a:p>
+        </p:txBody>
+      </p:sp>
+      <p:sp>
+        <p:nvSpPr>
+          <p:cNvPr id="24" name="TextBox 23"/>
+          <p:cNvSpPr txBox="1"/>
+          <p:nvPr/>
+        </p:nvSpPr>
+        <p:spPr>
+          <a:xfrm>
+            <a:off x="777240" y="4617720"/>
+            <a:ext cx="3063240" cy="502920"/>
+          </a:xfrm>
+          <a:prstGeom prst="rect">
+            <a:avLst/>
+          </a:prstGeom>
+          <a:noFill/>
+        </p:spPr>
+        <p:txBody>
+          <a:bodyPr wrap="square" lIns="0" tIns="0" rIns="0" bIns="0" anchor="t">
+            <a:spAutoFit/>
+          </a:bodyPr>
+          <a:lstStyle/>
+          <a:p>
+            <a:pPr algn="l"/>
+            <a:r>
+              <a:rPr sz="1300" b="0" i="0">
+                <a:solidFill>
+                  <a:srgbClr val="555B66"/>
+                </a:solidFill>
+                <a:latin typeface="Calibri"/>
+              </a:rPr>
+              <a:t>to settle after every change in control law, so it is slow feedback</a:t>
+            </a:r>
+          </a:p>
+        </p:txBody>
+      </p:sp>
+      <p:sp>
+        <p:nvSpPr>
+          <p:cNvPr id="25" name="Rounded Rectangle 24"/>
+          <p:cNvSpPr/>
+          <p:nvPr/>
+        </p:nvSpPr>
+        <p:spPr>
+          <a:xfrm>
+            <a:off x="4343400" y="3749039"/>
+            <a:ext cx="3520440" cy="1417320"/>
+          </a:xfrm>
+          <a:prstGeom prst="roundRect">
+            <a:avLst>
+              <a:gd name="adj" fmla="val 8000"/>
+            </a:avLst>
+          </a:prstGeom>
+          <a:solidFill>
+            <a:srgbClr val="F1F5FB"/>
+          </a:solidFill>
+          <a:ln>
+            <a:noFill/>
+          </a:ln>
+          <a:effectLst/>
+        </p:spPr>
+        <p:style>
+          <a:lnRef idx="1">
+            <a:schemeClr val="accent1"/>
+          </a:lnRef>
+          <a:fillRef idx="3">
+            <a:schemeClr val="accent1"/>
+          </a:fillRef>
+          <a:effectRef idx="2">
+            <a:schemeClr val="accent1"/>
+          </a:effectRef>
+          <a:fontRef idx="minor">
+            <a:schemeClr val="lt1"/>
+          </a:fontRef>
+        </p:style>
+        <p:txBody>
+          <a:bodyPr rtlCol="0" anchor="ctr"/>
+          <a:lstStyle/>
+          <a:p>
+            <a:pPr algn="ctr"/>
+          </a:p>
+        </p:txBody>
+      </p:sp>
+      <p:sp>
+        <p:nvSpPr>
+          <p:cNvPr id="26" name="TextBox 25"/>
+          <p:cNvSpPr txBox="1"/>
+          <p:nvPr/>
+        </p:nvSpPr>
+        <p:spPr>
+          <a:xfrm>
+            <a:off x="4572000" y="3913631"/>
+            <a:ext cx="3063240" cy="685800"/>
+          </a:xfrm>
+          <a:prstGeom prst="rect">
+            <a:avLst/>
+          </a:prstGeom>
+          <a:noFill/>
+        </p:spPr>
+        <p:txBody>
+          <a:bodyPr wrap="square" lIns="0" tIns="0" rIns="0" bIns="0" anchor="t">
+            <a:spAutoFit/>
+          </a:bodyPr>
+          <a:lstStyle/>
+          <a:p>
+            <a:pPr algn="l"/>
+            <a:r>
+              <a:rPr sz="4000" b="1" i="0">
+                <a:solidFill>
+                  <a:srgbClr val="EB6834"/>
+                </a:solidFill>
+                <a:latin typeface="Cambria"/>
+              </a:rPr>
+              <a:t>≈ 5 %</a:t>
+            </a:r>
+          </a:p>
+        </p:txBody>
+      </p:sp>
+      <p:sp>
+        <p:nvSpPr>
+          <p:cNvPr id="27" name="TextBox 26"/>
+          <p:cNvSpPr txBox="1"/>
+          <p:nvPr/>
+        </p:nvSpPr>
+        <p:spPr>
+          <a:xfrm>
+            <a:off x="4572000" y="4617720"/>
+            <a:ext cx="3063240" cy="502920"/>
+          </a:xfrm>
+          <a:prstGeom prst="rect">
+            <a:avLst/>
+          </a:prstGeom>
+          <a:noFill/>
+        </p:spPr>
+        <p:txBody>
+          <a:bodyPr wrap="square" lIns="0" tIns="0" rIns="0" bIns="0" anchor="t">
+            <a:spAutoFit/>
+          </a:bodyPr>
+          <a:lstStyle/>
+          <a:p>
+            <a:pPr algn="l"/>
+            <a:r>
+              <a:rPr sz="1300" b="0" i="0">
+                <a:solidFill>
+                  <a:srgbClr val="555B66"/>
+                </a:solidFill>
+                <a:latin typeface="Calibri"/>
+              </a:rPr>
+              <a:t>irreducible noise in the measurement (MSE floor ≈ 0.0025)</a:t>
+            </a:r>
+          </a:p>
+        </p:txBody>
+      </p:sp>
+      <p:sp>
+        <p:nvSpPr>
+          <p:cNvPr id="28" name="Rounded Rectangle 27"/>
+          <p:cNvSpPr/>
+          <p:nvPr/>
+        </p:nvSpPr>
+        <p:spPr>
+          <a:xfrm>
+            <a:off x="8138160" y="3749039"/>
+            <a:ext cx="3520440" cy="1417320"/>
+          </a:xfrm>
+          <a:prstGeom prst="roundRect">
+            <a:avLst>
+              <a:gd name="adj" fmla="val 8000"/>
+            </a:avLst>
+          </a:prstGeom>
+          <a:solidFill>
+            <a:srgbClr val="F1F5FB"/>
+          </a:solidFill>
+          <a:ln>
+            <a:noFill/>
+          </a:ln>
+          <a:effectLst/>
+        </p:spPr>
+        <p:style>
+          <a:lnRef idx="1">
+            <a:schemeClr val="accent1"/>
+          </a:lnRef>
+          <a:fillRef idx="3">
+            <a:schemeClr val="accent1"/>
+          </a:fillRef>
+          <a:effectRef idx="2">
+            <a:schemeClr val="accent1"/>
+          </a:effectRef>
+          <a:fontRef idx="minor">
+            <a:schemeClr val="lt1"/>
+          </a:fontRef>
+        </p:style>
+        <p:txBody>
+          <a:bodyPr rtlCol="0" anchor="ctr"/>
+          <a:lstStyle/>
+          <a:p>
+            <a:pPr algn="ctr"/>
+          </a:p>
+        </p:txBody>
+      </p:sp>
+      <p:sp>
+        <p:nvSpPr>
+          <p:cNvPr id="29" name="TextBox 28"/>
+          <p:cNvSpPr txBox="1"/>
+          <p:nvPr/>
+        </p:nvSpPr>
+        <p:spPr>
+          <a:xfrm>
+            <a:off x="8366760" y="3913631"/>
+            <a:ext cx="3063240" cy="685800"/>
+          </a:xfrm>
+          <a:prstGeom prst="rect">
+            <a:avLst/>
+          </a:prstGeom>
+          <a:noFill/>
+        </p:spPr>
+        <p:txBody>
+          <a:bodyPr wrap="square" lIns="0" tIns="0" rIns="0" bIns="0" anchor="t">
+            <a:spAutoFit/>
+          </a:bodyPr>
+          <a:lstStyle/>
+          <a:p>
+            <a:pPr algn="l"/>
+            <a:r>
+              <a:rPr sz="4000" b="1" i="0">
+                <a:solidFill>
+                  <a:srgbClr val="EB6834"/>
+                </a:solidFill>
+                <a:latin typeface="Cambria"/>
+              </a:rPr>
+              <a:t>Lab only</a:t>
+            </a:r>
+          </a:p>
+        </p:txBody>
+      </p:sp>
+      <p:sp>
+        <p:nvSpPr>
+          <p:cNvPr id="30" name="TextBox 29"/>
+          <p:cNvSpPr txBox="1"/>
+          <p:nvPr/>
+        </p:nvSpPr>
+        <p:spPr>
+          <a:xfrm>
+            <a:off x="8366760" y="4617720"/>
+            <a:ext cx="3063240" cy="502920"/>
+          </a:xfrm>
+          <a:prstGeom prst="rect">
+            <a:avLst/>
+          </a:prstGeom>
+          <a:noFill/>
+        </p:spPr>
+        <p:txBody>
+          <a:bodyPr wrap="square" lIns="0" tIns="0" rIns="0" bIns="0" anchor="t">
+            <a:spAutoFit/>
+          </a:bodyPr>
+          <a:lstStyle/>
+          <a:p>
+            <a:pPr algn="l"/>
+            <a:r>
+              <a:rPr sz="1300" b="0" i="0">
+                <a:solidFill>
+                  <a:srgbClr val="555B66"/>
+                </a:solidFill>
+                <a:latin typeface="Calibri"/>
+              </a:rPr>
+              <a:t>needs a face mask, a metabolic cart and fasting subjects</a:t>
+            </a:r>
+          </a:p>
+        </p:txBody>
+      </p:sp>
+      <p:sp>
+        <p:nvSpPr>
+          <p:cNvPr id="31" name="TextBox 30"/>
+          <p:cNvSpPr txBox="1"/>
+          <p:nvPr/>
+        </p:nvSpPr>
+        <p:spPr>
+          <a:xfrm>
+            <a:off x="548640" y="5486400"/>
+            <a:ext cx="11064240" cy="731520"/>
+          </a:xfrm>
+          <a:prstGeom prst="rect">
+            <a:avLst/>
+          </a:prstGeom>
+          <a:noFill/>
+        </p:spPr>
+        <p:txBody>
+          <a:bodyPr wrap="square" lIns="0" tIns="0" rIns="0" bIns="0" anchor="t">
+            <a:spAutoFit/>
+          </a:bodyPr>
+          <a:lstStyle/>
+          <a:p>
+            <a:pPr algn="l"/>
+            <a:r>
+              <a:rPr sz="1700" b="1" i="0">
+                <a:solidFill>
                   <a:srgbClr val="0F1B2D"/>
                 </a:solidFill>
                 <a:latin typeface="Calibri"/>
               </a:rPr>
-              <a:t>1  Target</a:t>
-            </a:r>
-          </a:p>
-          <a:p>
-            <a:pPr algn="l"/>
-            <a:r>
-              <a:rPr sz="1300" b="0" i="0">
-                <a:solidFill>
-                  <a:srgbClr val="555B66"/>
-                </a:solidFill>
-                <a:latin typeface="Calibri"/>
-              </a:rPr>
-              <a:t>metabolic rate - standing baseline, ÷ normal walking (1.0 = no exo)</a:t>
-            </a:r>
-          </a:p>
-        </p:txBody>
-      </p:sp>
-      <p:pic>
-        <p:nvPicPr>
-          <p:cNvPr id="23" name="Picture 22" descr="F1_dataset_overview.png"/>
-          <p:cNvPicPr>
-            <a:picLocks noChangeAspect="1"/>
-          </p:cNvPicPr>
-          <p:nvPr/>
-        </p:nvPicPr>
-        <p:blipFill>
-          <a:blip r:embed="rId3"/>
-          <a:stretch>
-            <a:fillRect/>
-          </a:stretch>
-        </p:blipFill>
-        <p:spPr>
-          <a:xfrm>
-            <a:off x="6629400" y="2571750"/>
-            <a:ext cx="5074920" cy="2537460"/>
-          </a:xfrm>
-          <a:prstGeom prst="rect">
-            <a:avLst/>
-          </a:prstGeom>
-        </p:spPr>
-      </p:pic>
+              <a:t>Our goal: </a:t>
+            </a:r>
+            <a:r>
+              <a:rPr sz="1700" b="0" i="0">
+                <a:solidFill>
+                  <a:srgbClr val="14171C"/>
+                </a:solidFill>
+                <a:latin typeface="Calibri"/>
+              </a:rPr>
+              <a:t>learn  f(EMG, gait, controls) → metabolic cost  so the mask can eventually be replaced by sensors a person could wear anywhere.</a:t>
+            </a:r>
+          </a:p>
+        </p:txBody>
+      </p:sp>
     </p:spTree>
   </p:cSld>
   <p:clrMapOvr>
@@ -9201,7 +8818,7 @@
 </file>
 
 <file path=ppt/slides/slide4.xml><?xml version="1.0" encoding="utf-8"?>
-<p:sld xmlns:a="http://schemas.openxmlformats.org/drawingml/2006/main" xmlns:p="http://schemas.openxmlformats.org/presentationml/2006/main" xmlns:r="http://schemas.openxmlformats.org/officeDocument/2006/relationships">
+<p:sld xmlns:a="http://schemas.openxmlformats.org/drawingml/2006/main" xmlns:r="http://schemas.openxmlformats.org/officeDocument/2006/relationships" xmlns:p="http://schemas.openxmlformats.org/presentationml/2006/main">
   <p:cSld>
     <p:bg>
       <p:bgPr>
@@ -9217,7 +8834,14 @@
         <p:cNvGrpSpPr/>
         <p:nvPr/>
       </p:nvGrpSpPr>
-      <p:grpSpPr/>
+      <p:grpSpPr>
+        <a:xfrm>
+          <a:off x="0" y="0"/>
+          <a:ext cx="0" cy="0"/>
+          <a:chOff x="0" y="0"/>
+          <a:chExt cx="0" cy="0"/>
+        </a:xfrm>
+      </p:grpSpPr>
       <p:sp>
         <p:nvSpPr>
           <p:cNvPr id="2" name="TextBox 1"/>
@@ -9235,7 +8859,7 @@
           <a:noFill/>
         </p:spPr>
         <p:txBody>
-          <a:bodyPr wrap="square" anchor="t" lIns="0" rIns="0" tIns="0" bIns="0">
+          <a:bodyPr wrap="square" lIns="0" tIns="0" rIns="0" bIns="0" anchor="t">
             <a:spAutoFit/>
           </a:bodyPr>
           <a:lstStyle/>
@@ -9248,7 +8872,7 @@
                 </a:solidFill>
                 <a:latin typeface="Calibri"/>
               </a:rPr>
-              <a:t>METHODOLOGY</a:t>
+              <a:t>DATASET</a:t>
             </a:r>
           </a:p>
         </p:txBody>
@@ -9270,7 +8894,7 @@
           <a:noFill/>
         </p:spPr>
         <p:txBody>
-          <a:bodyPr wrap="square" anchor="t" lIns="0" rIns="0" tIns="0" bIns="0">
+          <a:bodyPr wrap="square" lIns="0" tIns="0" rIns="0" bIns="0" anchor="t">
             <a:spAutoFit/>
           </a:bodyPr>
           <a:lstStyle/>
@@ -9283,7 +8907,7 @@
                 </a:solidFill>
                 <a:latin typeface="Cambria"/>
               </a:rPr>
-              <a:t>End-to-end pipeline</a:t>
+              <a:t>Real lab data: 2 people, 5 days, 36 assistance conditions per day</a:t>
             </a:r>
           </a:p>
         </p:txBody>
@@ -9305,7 +8929,7 @@
           <a:noFill/>
         </p:spPr>
         <p:txBody>
-          <a:bodyPr wrap="square" anchor="t" lIns="0" rIns="0" tIns="0" bIns="0">
+          <a:bodyPr wrap="square" lIns="0" tIns="0" rIns="0" bIns="0" anchor="t">
             <a:spAutoFit/>
           </a:bodyPr>
           <a:lstStyle/>
@@ -9340,7 +8964,7 @@
           <a:noFill/>
         </p:spPr>
         <p:txBody>
-          <a:bodyPr wrap="square" anchor="t" lIns="0" rIns="0" tIns="0" bIns="0">
+          <a:bodyPr wrap="square" lIns="0" tIns="0" rIns="0" bIns="0" anchor="t">
             <a:spAutoFit/>
           </a:bodyPr>
           <a:lstStyle/>
@@ -9353,45 +8977,21 @@
                 </a:solidFill>
                 <a:latin typeface="Calibri"/>
               </a:rPr>
-              <a:t>4</a:t>
-            </a:r>
-          </a:p>
-        </p:txBody>
-      </p:sp>
-      <p:pic>
-        <p:nvPicPr>
-          <p:cNvPr id="6" name="Picture 5" descr="F13_pipeline.png"/>
-          <p:cNvPicPr>
-            <a:picLocks noChangeAspect="1"/>
-          </p:cNvPicPr>
-          <p:nvPr/>
-        </p:nvPicPr>
-        <p:blipFill>
-          <a:blip r:embed="rId3"/>
-          <a:stretch>
-            <a:fillRect/>
-          </a:stretch>
-        </p:blipFill>
-        <p:spPr>
-          <a:xfrm>
-            <a:off x="548640" y="1463040"/>
-            <a:ext cx="11064240" cy="2766060"/>
-          </a:xfrm>
-          <a:prstGeom prst="rect">
-            <a:avLst/>
-          </a:prstGeom>
-        </p:spPr>
-      </p:pic>
-      <p:sp>
-        <p:nvSpPr>
-          <p:cNvPr id="7" name="Rounded Rectangle 6"/>
+              <a:t>3</a:t>
+            </a:r>
+          </a:p>
+        </p:txBody>
+      </p:sp>
+      <p:sp>
+        <p:nvSpPr>
+          <p:cNvPr id="6" name="Rounded Rectangle 5"/>
           <p:cNvSpPr/>
           <p:nvPr/>
         </p:nvSpPr>
         <p:spPr>
           <a:xfrm>
-            <a:off x="548640" y="4343400"/>
-            <a:ext cx="3520440" cy="1554480"/>
+            <a:off x="548640" y="1508760"/>
+            <a:ext cx="1828800" cy="1417320"/>
           </a:xfrm>
           <a:prstGeom prst="roundRect">
             <a:avLst>
@@ -9430,136 +9030,101 @@
       </p:sp>
       <p:sp>
         <p:nvSpPr>
-          <p:cNvPr id="8" name="Oval 7"/>
+          <p:cNvPr id="7" name="TextBox 6"/>
+          <p:cNvSpPr txBox="1"/>
+          <p:nvPr/>
+        </p:nvSpPr>
+        <p:spPr>
+          <a:xfrm>
+            <a:off x="777240" y="1673351"/>
+            <a:ext cx="1371600" cy="685800"/>
+          </a:xfrm>
+          <a:prstGeom prst="rect">
+            <a:avLst/>
+          </a:prstGeom>
+          <a:noFill/>
+        </p:spPr>
+        <p:txBody>
+          <a:bodyPr wrap="square" lIns="0" tIns="0" rIns="0" bIns="0" anchor="t">
+            <a:spAutoFit/>
+          </a:bodyPr>
+          <a:lstStyle/>
+          <a:p>
+            <a:pPr algn="l"/>
+            <a:r>
+              <a:rPr sz="3400" b="1" i="0">
+                <a:solidFill>
+                  <a:srgbClr val="2A78D6"/>
+                </a:solidFill>
+                <a:latin typeface="Cambria"/>
+              </a:rPr>
+              <a:t>359</a:t>
+            </a:r>
+          </a:p>
+        </p:txBody>
+      </p:sp>
+      <p:sp>
+        <p:nvSpPr>
+          <p:cNvPr id="8" name="TextBox 7"/>
+          <p:cNvSpPr txBox="1"/>
+          <p:nvPr/>
+        </p:nvSpPr>
+        <p:spPr>
+          <a:xfrm>
+            <a:off x="777240" y="2377439"/>
+            <a:ext cx="1371600" cy="502920"/>
+          </a:xfrm>
+          <a:prstGeom prst="rect">
+            <a:avLst/>
+          </a:prstGeom>
+          <a:noFill/>
+        </p:spPr>
+        <p:txBody>
+          <a:bodyPr wrap="square" lIns="0" tIns="0" rIns="0" bIns="0" anchor="t">
+            <a:spAutoFit/>
+          </a:bodyPr>
+          <a:lstStyle/>
+          <a:p>
+            <a:pPr algn="l"/>
+            <a:r>
+              <a:rPr sz="1300" b="0" i="0">
+                <a:solidFill>
+                  <a:srgbClr val="555B66"/>
+                </a:solidFill>
+                <a:latin typeface="Calibri"/>
+              </a:rPr>
+              <a:t>samples</a:t>
+            </a:r>
+            <a:br>
+              <a:rPr sz="1300" b="0" i="0">
+                <a:solidFill>
+                  <a:srgbClr val="555B66"/>
+                </a:solidFill>
+                <a:latin typeface="Calibri"/>
+              </a:rPr>
+            </a:br>
+            <a:r>
+              <a:rPr sz="1300" b="0" i="0">
+                <a:solidFill>
+                  <a:srgbClr val="555B66"/>
+                </a:solidFill>
+                <a:latin typeface="Calibri"/>
+              </a:rPr>
+              <a:t>(180 + 179)</a:t>
+            </a:r>
+          </a:p>
+        </p:txBody>
+      </p:sp>
+      <p:sp>
+        <p:nvSpPr>
+          <p:cNvPr id="9" name="Rounded Rectangle 8"/>
           <p:cNvSpPr/>
           <p:nvPr/>
         </p:nvSpPr>
         <p:spPr>
           <a:xfrm>
-            <a:off x="777240" y="4498848"/>
-            <a:ext cx="457200" cy="457200"/>
-          </a:xfrm>
-          <a:prstGeom prst="ellipse">
-            <a:avLst/>
-          </a:prstGeom>
-          <a:solidFill>
-            <a:srgbClr val="2A78D6"/>
-          </a:solidFill>
-          <a:ln>
-            <a:noFill/>
-          </a:ln>
-        </p:spPr>
-        <p:style>
-          <a:lnRef idx="1">
-            <a:schemeClr val="accent1"/>
-          </a:lnRef>
-          <a:fillRef idx="3">
-            <a:schemeClr val="accent1"/>
-          </a:fillRef>
-          <a:effectRef idx="2">
-            <a:schemeClr val="accent1"/>
-          </a:effectRef>
-          <a:fontRef idx="minor">
-            <a:schemeClr val="lt1"/>
-          </a:fontRef>
-        </p:style>
-        <p:txBody>
-          <a:bodyPr rtlCol="0" anchor="ctr" lIns="0" rIns="0" tIns="0" bIns="0"/>
-          <a:lstStyle/>
-          <a:p>
-            <a:pPr algn="ctr"/>
-            <a:r>
-              <a:rPr sz="1600" b="1">
-                <a:solidFill>
-                  <a:srgbClr val="FFFFFF"/>
-                </a:solidFill>
-                <a:latin typeface="Calibri"/>
-              </a:rPr>
-              <a:t>1</a:t>
-            </a:r>
-          </a:p>
-        </p:txBody>
-      </p:sp>
-      <p:sp>
-        <p:nvSpPr>
-          <p:cNvPr id="9" name="TextBox 8"/>
-          <p:cNvSpPr txBox="1"/>
-          <p:nvPr/>
-        </p:nvSpPr>
-        <p:spPr>
-          <a:xfrm>
-            <a:off x="1371600" y="4526280"/>
-            <a:ext cx="2560320" cy="411480"/>
-          </a:xfrm>
-          <a:prstGeom prst="rect">
-            <a:avLst/>
-          </a:prstGeom>
-          <a:noFill/>
-        </p:spPr>
-        <p:txBody>
-          <a:bodyPr wrap="square" anchor="t" lIns="0" rIns="0" tIns="0" bIns="0">
-            <a:spAutoFit/>
-          </a:bodyPr>
-          <a:lstStyle/>
-          <a:p>
-            <a:pPr algn="l"/>
-            <a:r>
-              <a:rPr sz="1700" b="1" i="0">
-                <a:solidFill>
-                  <a:srgbClr val="0F1B2D"/>
-                </a:solidFill>
-                <a:latin typeface="Calibri"/>
-              </a:rPr>
-              <a:t>Leakage-free</a:t>
-            </a:r>
-          </a:p>
-        </p:txBody>
-      </p:sp>
-      <p:sp>
-        <p:nvSpPr>
-          <p:cNvPr id="10" name="TextBox 9"/>
-          <p:cNvSpPr txBox="1"/>
-          <p:nvPr/>
-        </p:nvSpPr>
-        <p:spPr>
-          <a:xfrm>
-            <a:off x="777240" y="5029200"/>
-            <a:ext cx="3108960" cy="822960"/>
-          </a:xfrm>
-          <a:prstGeom prst="rect">
-            <a:avLst/>
-          </a:prstGeom>
-          <a:noFill/>
-        </p:spPr>
-        <p:txBody>
-          <a:bodyPr wrap="square" anchor="t" lIns="0" rIns="0" tIns="0" bIns="0">
-            <a:spAutoFit/>
-          </a:bodyPr>
-          <a:lstStyle/>
-          <a:p>
-            <a:pPr algn="l"/>
-            <a:r>
-              <a:rPr sz="1300" b="0" i="0">
-                <a:solidFill>
-                  <a:srgbClr val="555B66"/>
-                </a:solidFill>
-                <a:latin typeface="Calibri"/>
-              </a:rPr>
-              <a:t>Scaling and every hyper-parameter search happen inside the training folds (nested CV), so no test data influences model selection.</a:t>
-            </a:r>
-          </a:p>
-        </p:txBody>
-      </p:sp>
-      <p:sp>
-        <p:nvSpPr>
-          <p:cNvPr id="11" name="Rounded Rectangle 10"/>
-          <p:cNvSpPr/>
-          <p:nvPr/>
-        </p:nvSpPr>
-        <p:spPr>
-          <a:xfrm>
-            <a:off x="4297679" y="4343400"/>
-            <a:ext cx="3520440" cy="1554480"/>
+            <a:off x="2560320" y="1508760"/>
+            <a:ext cx="1828800" cy="1417320"/>
           </a:xfrm>
           <a:prstGeom prst="roundRect">
             <a:avLst>
@@ -9598,136 +9163,101 @@
       </p:sp>
       <p:sp>
         <p:nvSpPr>
-          <p:cNvPr id="12" name="Oval 11"/>
+          <p:cNvPr id="10" name="TextBox 9"/>
+          <p:cNvSpPr txBox="1"/>
+          <p:nvPr/>
+        </p:nvSpPr>
+        <p:spPr>
+          <a:xfrm>
+            <a:off x="2788920" y="1673351"/>
+            <a:ext cx="1371600" cy="685800"/>
+          </a:xfrm>
+          <a:prstGeom prst="rect">
+            <a:avLst/>
+          </a:prstGeom>
+          <a:noFill/>
+        </p:spPr>
+        <p:txBody>
+          <a:bodyPr wrap="square" lIns="0" tIns="0" rIns="0" bIns="0" anchor="t">
+            <a:spAutoFit/>
+          </a:bodyPr>
+          <a:lstStyle/>
+          <a:p>
+            <a:pPr algn="l"/>
+            <a:r>
+              <a:rPr sz="3400" b="1" i="0">
+                <a:solidFill>
+                  <a:srgbClr val="2A78D6"/>
+                </a:solidFill>
+                <a:latin typeface="Cambria"/>
+              </a:rPr>
+              <a:t>29</a:t>
+            </a:r>
+          </a:p>
+        </p:txBody>
+      </p:sp>
+      <p:sp>
+        <p:nvSpPr>
+          <p:cNvPr id="11" name="TextBox 10"/>
+          <p:cNvSpPr txBox="1"/>
+          <p:nvPr/>
+        </p:nvSpPr>
+        <p:spPr>
+          <a:xfrm>
+            <a:off x="2788920" y="2377439"/>
+            <a:ext cx="1371600" cy="502920"/>
+          </a:xfrm>
+          <a:prstGeom prst="rect">
+            <a:avLst/>
+          </a:prstGeom>
+          <a:noFill/>
+        </p:spPr>
+        <p:txBody>
+          <a:bodyPr wrap="square" lIns="0" tIns="0" rIns="0" bIns="0" anchor="t">
+            <a:spAutoFit/>
+          </a:bodyPr>
+          <a:lstStyle/>
+          <a:p>
+            <a:pPr algn="l"/>
+            <a:r>
+              <a:rPr sz="1300" b="0" i="0">
+                <a:solidFill>
+                  <a:srgbClr val="555B66"/>
+                </a:solidFill>
+                <a:latin typeface="Calibri"/>
+              </a:rPr>
+              <a:t>features per</a:t>
+            </a:r>
+            <a:br>
+              <a:rPr sz="1300" b="0" i="0">
+                <a:solidFill>
+                  <a:srgbClr val="555B66"/>
+                </a:solidFill>
+                <a:latin typeface="Calibri"/>
+              </a:rPr>
+            </a:br>
+            <a:r>
+              <a:rPr sz="1300" b="0" i="0">
+                <a:solidFill>
+                  <a:srgbClr val="555B66"/>
+                </a:solidFill>
+                <a:latin typeface="Calibri"/>
+              </a:rPr>
+              <a:t>sample</a:t>
+            </a:r>
+          </a:p>
+        </p:txBody>
+      </p:sp>
+      <p:sp>
+        <p:nvSpPr>
+          <p:cNvPr id="12" name="Rounded Rectangle 11"/>
           <p:cNvSpPr/>
           <p:nvPr/>
         </p:nvSpPr>
         <p:spPr>
           <a:xfrm>
-            <a:off x="4526279" y="4498848"/>
-            <a:ext cx="457200" cy="457200"/>
-          </a:xfrm>
-          <a:prstGeom prst="ellipse">
-            <a:avLst/>
-          </a:prstGeom>
-          <a:solidFill>
-            <a:srgbClr val="2A78D6"/>
-          </a:solidFill>
-          <a:ln>
-            <a:noFill/>
-          </a:ln>
-        </p:spPr>
-        <p:style>
-          <a:lnRef idx="1">
-            <a:schemeClr val="accent1"/>
-          </a:lnRef>
-          <a:fillRef idx="3">
-            <a:schemeClr val="accent1"/>
-          </a:fillRef>
-          <a:effectRef idx="2">
-            <a:schemeClr val="accent1"/>
-          </a:effectRef>
-          <a:fontRef idx="minor">
-            <a:schemeClr val="lt1"/>
-          </a:fontRef>
-        </p:style>
-        <p:txBody>
-          <a:bodyPr rtlCol="0" anchor="ctr" lIns="0" rIns="0" tIns="0" bIns="0"/>
-          <a:lstStyle/>
-          <a:p>
-            <a:pPr algn="ctr"/>
-            <a:r>
-              <a:rPr sz="1600" b="1">
-                <a:solidFill>
-                  <a:srgbClr val="FFFFFF"/>
-                </a:solidFill>
-                <a:latin typeface="Calibri"/>
-              </a:rPr>
-              <a:t>2</a:t>
-            </a:r>
-          </a:p>
-        </p:txBody>
-      </p:sp>
-      <p:sp>
-        <p:nvSpPr>
-          <p:cNvPr id="13" name="TextBox 12"/>
-          <p:cNvSpPr txBox="1"/>
-          <p:nvPr/>
-        </p:nvSpPr>
-        <p:spPr>
-          <a:xfrm>
-            <a:off x="5120640" y="4526280"/>
-            <a:ext cx="2560320" cy="411480"/>
-          </a:xfrm>
-          <a:prstGeom prst="rect">
-            <a:avLst/>
-          </a:prstGeom>
-          <a:noFill/>
-        </p:spPr>
-        <p:txBody>
-          <a:bodyPr wrap="square" anchor="t" lIns="0" rIns="0" tIns="0" bIns="0">
-            <a:spAutoFit/>
-          </a:bodyPr>
-          <a:lstStyle/>
-          <a:p>
-            <a:pPr algn="l"/>
-            <a:r>
-              <a:rPr sz="1700" b="1" i="0">
-                <a:solidFill>
-                  <a:srgbClr val="0F1B2D"/>
-                </a:solidFill>
-                <a:latin typeface="Calibri"/>
-              </a:rPr>
-              <a:t>Two protocols</a:t>
-            </a:r>
-          </a:p>
-        </p:txBody>
-      </p:sp>
-      <p:sp>
-        <p:nvSpPr>
-          <p:cNvPr id="14" name="TextBox 13"/>
-          <p:cNvSpPr txBox="1"/>
-          <p:nvPr/>
-        </p:nvSpPr>
-        <p:spPr>
-          <a:xfrm>
-            <a:off x="4526279" y="5029200"/>
-            <a:ext cx="3108960" cy="822960"/>
-          </a:xfrm>
-          <a:prstGeom prst="rect">
-            <a:avLst/>
-          </a:prstGeom>
-          <a:noFill/>
-        </p:spPr>
-        <p:txBody>
-          <a:bodyPr wrap="square" anchor="t" lIns="0" rIns="0" tIns="0" bIns="0">
-            <a:spAutoFit/>
-          </a:bodyPr>
-          <a:lstStyle/>
-          <a:p>
-            <a:pPr algn="l"/>
-            <a:r>
-              <a:rPr sz="1300" b="0" i="0">
-                <a:solidFill>
-                  <a:srgbClr val="555B66"/>
-                </a:solidFill>
-                <a:latin typeface="Calibri"/>
-              </a:rPr>
-              <a:t>Repeated nested 5-fold CV for comparison, and leave-one-day-out to test generalisation to an unseen session.</a:t>
-            </a:r>
-          </a:p>
-        </p:txBody>
-      </p:sp>
-      <p:sp>
-        <p:nvSpPr>
-          <p:cNvPr id="15" name="Rounded Rectangle 14"/>
-          <p:cNvSpPr/>
-          <p:nvPr/>
-        </p:nvSpPr>
-        <p:spPr>
-          <a:xfrm>
-            <a:off x="8046719" y="4343400"/>
-            <a:ext cx="3520440" cy="1554480"/>
+            <a:off x="4572000" y="1508760"/>
+            <a:ext cx="1828800" cy="1417320"/>
           </a:xfrm>
           <a:prstGeom prst="roundRect">
             <a:avLst>
@@ -9766,14 +9296,101 @@
       </p:sp>
       <p:sp>
         <p:nvSpPr>
-          <p:cNvPr id="16" name="Oval 15"/>
+          <p:cNvPr id="13" name="TextBox 12"/>
+          <p:cNvSpPr txBox="1"/>
+          <p:nvPr/>
+        </p:nvSpPr>
+        <p:spPr>
+          <a:xfrm>
+            <a:off x="4800600" y="1673351"/>
+            <a:ext cx="1371600" cy="685800"/>
+          </a:xfrm>
+          <a:prstGeom prst="rect">
+            <a:avLst/>
+          </a:prstGeom>
+          <a:noFill/>
+        </p:spPr>
+        <p:txBody>
+          <a:bodyPr wrap="square" lIns="0" tIns="0" rIns="0" bIns="0" anchor="t">
+            <a:spAutoFit/>
+          </a:bodyPr>
+          <a:lstStyle/>
+          <a:p>
+            <a:pPr algn="l"/>
+            <a:r>
+              <a:rPr sz="3000" b="1" i="0">
+                <a:solidFill>
+                  <a:srgbClr val="2A78D6"/>
+                </a:solidFill>
+                <a:latin typeface="Cambria"/>
+              </a:rPr>
+              <a:t>0.0025</a:t>
+            </a:r>
+          </a:p>
+        </p:txBody>
+      </p:sp>
+      <p:sp>
+        <p:nvSpPr>
+          <p:cNvPr id="14" name="TextBox 13"/>
+          <p:cNvSpPr txBox="1"/>
+          <p:nvPr/>
+        </p:nvSpPr>
+        <p:spPr>
+          <a:xfrm>
+            <a:off x="4800600" y="2377439"/>
+            <a:ext cx="1371600" cy="502920"/>
+          </a:xfrm>
+          <a:prstGeom prst="rect">
+            <a:avLst/>
+          </a:prstGeom>
+          <a:noFill/>
+        </p:spPr>
+        <p:txBody>
+          <a:bodyPr wrap="square" lIns="0" tIns="0" rIns="0" bIns="0" anchor="t">
+            <a:spAutoFit/>
+          </a:bodyPr>
+          <a:lstStyle/>
+          <a:p>
+            <a:pPr algn="l"/>
+            <a:r>
+              <a:rPr sz="1300" b="0" i="0">
+                <a:solidFill>
+                  <a:srgbClr val="555B66"/>
+                </a:solidFill>
+                <a:latin typeface="Calibri"/>
+              </a:rPr>
+              <a:t>noise-floor</a:t>
+            </a:r>
+            <a:br>
+              <a:rPr sz="1300" b="0" i="0">
+                <a:solidFill>
+                  <a:srgbClr val="555B66"/>
+                </a:solidFill>
+                <a:latin typeface="Calibri"/>
+              </a:rPr>
+            </a:br>
+            <a:r>
+              <a:rPr sz="1300" b="0" i="0">
+                <a:solidFill>
+                  <a:srgbClr val="555B66"/>
+                </a:solidFill>
+                <a:latin typeface="Calibri"/>
+              </a:rPr>
+              <a:t>MSE</a:t>
+            </a:r>
+          </a:p>
+        </p:txBody>
+      </p:sp>
+      <p:sp>
+        <p:nvSpPr>
+          <p:cNvPr id="15" name="Oval 14"/>
           <p:cNvSpPr/>
           <p:nvPr/>
         </p:nvSpPr>
         <p:spPr>
           <a:xfrm>
-            <a:off x="8275319" y="4498848"/>
-            <a:ext cx="457200" cy="457200"/>
+            <a:off x="548640" y="3273552"/>
+            <a:ext cx="256032" cy="256032"/>
           </a:xfrm>
           <a:prstGeom prst="ellipse">
             <a:avLst/>
@@ -9800,40 +9417,31 @@
           </a:fontRef>
         </p:style>
         <p:txBody>
-          <a:bodyPr rtlCol="0" anchor="ctr" lIns="0" rIns="0" tIns="0" bIns="0"/>
+          <a:bodyPr rtlCol="0" anchor="ctr"/>
           <a:lstStyle/>
           <a:p>
             <a:pPr algn="ctr"/>
-            <a:r>
-              <a:rPr sz="1600" b="1">
-                <a:solidFill>
-                  <a:srgbClr val="FFFFFF"/>
-                </a:solidFill>
-                <a:latin typeface="Calibri"/>
-              </a:rPr>
-              <a:t>3</a:t>
-            </a:r>
-          </a:p>
-        </p:txBody>
-      </p:sp>
-      <p:sp>
-        <p:nvSpPr>
-          <p:cNvPr id="17" name="TextBox 16"/>
-          <p:cNvSpPr txBox="1"/>
-          <p:nvPr/>
-        </p:nvSpPr>
-        <p:spPr>
-          <a:xfrm>
-            <a:off x="8869680" y="4526280"/>
-            <a:ext cx="2560320" cy="411480"/>
-          </a:xfrm>
-          <a:prstGeom prst="rect">
-            <a:avLst/>
-          </a:prstGeom>
-          <a:noFill/>
-        </p:spPr>
-        <p:txBody>
-          <a:bodyPr wrap="square" anchor="t" lIns="0" rIns="0" tIns="0" bIns="0">
+          </a:p>
+        </p:txBody>
+      </p:sp>
+      <p:sp>
+        <p:nvSpPr>
+          <p:cNvPr id="16" name="TextBox 15"/>
+          <p:cNvSpPr txBox="1"/>
+          <p:nvPr/>
+        </p:nvSpPr>
+        <p:spPr>
+          <a:xfrm>
+            <a:off x="960120" y="3200400"/>
+            <a:ext cx="5120640" cy="731520"/>
+          </a:xfrm>
+          <a:prstGeom prst="rect">
+            <a:avLst/>
+          </a:prstGeom>
+          <a:noFill/>
+        </p:spPr>
+        <p:txBody>
+          <a:bodyPr wrap="square" lIns="0" tIns="0" rIns="0" bIns="0" anchor="t">
             <a:spAutoFit/>
           </a:bodyPr>
           <a:lstStyle/>
@@ -9846,8 +9454,63 @@
                 </a:solidFill>
                 <a:latin typeface="Calibri"/>
               </a:rPr>
-              <a:t>Two layers</a:t>
-            </a:r>
+              <a:t>16  EMG</a:t>
+            </a:r>
+          </a:p>
+          <a:p>
+            <a:pPr algn="l"/>
+            <a:r>
+              <a:rPr sz="1300" b="0" i="0">
+                <a:solidFill>
+                  <a:srgbClr val="555B66"/>
+                </a:solidFill>
+                <a:latin typeface="Calibri"/>
+              </a:rPr>
+              <a:t>8 muscles per leg; band-pass → rectify → RMS, normalised each day</a:t>
+            </a:r>
+          </a:p>
+        </p:txBody>
+      </p:sp>
+      <p:sp>
+        <p:nvSpPr>
+          <p:cNvPr id="17" name="Oval 16"/>
+          <p:cNvSpPr/>
+          <p:nvPr/>
+        </p:nvSpPr>
+        <p:spPr>
+          <a:xfrm>
+            <a:off x="548640" y="4050791"/>
+            <a:ext cx="256032" cy="256032"/>
+          </a:xfrm>
+          <a:prstGeom prst="ellipse">
+            <a:avLst/>
+          </a:prstGeom>
+          <a:solidFill>
+            <a:srgbClr val="1BAF7A"/>
+          </a:solidFill>
+          <a:ln>
+            <a:noFill/>
+          </a:ln>
+        </p:spPr>
+        <p:style>
+          <a:lnRef idx="1">
+            <a:schemeClr val="accent1"/>
+          </a:lnRef>
+          <a:fillRef idx="3">
+            <a:schemeClr val="accent1"/>
+          </a:fillRef>
+          <a:effectRef idx="2">
+            <a:schemeClr val="accent1"/>
+          </a:effectRef>
+          <a:fontRef idx="minor">
+            <a:schemeClr val="lt1"/>
+          </a:fontRef>
+        </p:style>
+        <p:txBody>
+          <a:bodyPr rtlCol="0" anchor="ctr"/>
+          <a:lstStyle/>
+          <a:p>
+            <a:pPr algn="ctr"/>
           </a:p>
         </p:txBody>
       </p:sp>
@@ -9859,19 +9522,31 @@
         </p:nvSpPr>
         <p:spPr>
           <a:xfrm>
-            <a:off x="8275319" y="5029200"/>
-            <a:ext cx="3108960" cy="822960"/>
-          </a:xfrm>
-          <a:prstGeom prst="rect">
-            <a:avLst/>
-          </a:prstGeom>
-          <a:noFill/>
-        </p:spPr>
-        <p:txBody>
-          <a:bodyPr wrap="square" anchor="t" lIns="0" rIns="0" tIns="0" bIns="0">
-            <a:spAutoFit/>
-          </a:bodyPr>
-          <a:lstStyle/>
+            <a:off x="960120" y="3977639"/>
+            <a:ext cx="5120640" cy="731520"/>
+          </a:xfrm>
+          <a:prstGeom prst="rect">
+            <a:avLst/>
+          </a:prstGeom>
+          <a:noFill/>
+        </p:spPr>
+        <p:txBody>
+          <a:bodyPr wrap="square" lIns="0" tIns="0" rIns="0" bIns="0" anchor="t">
+            <a:spAutoFit/>
+          </a:bodyPr>
+          <a:lstStyle/>
+          <a:p>
+            <a:pPr algn="l"/>
+            <a:r>
+              <a:rPr sz="1700" b="1" i="0">
+                <a:solidFill>
+                  <a:srgbClr val="0F1B2D"/>
+                </a:solidFill>
+                <a:latin typeface="Calibri"/>
+              </a:rPr>
+              <a:t>9  Step / gait</a:t>
+            </a:r>
+          </a:p>
           <a:p>
             <a:pPr algn="l"/>
             <a:r>
@@ -9881,46 +9556,215 @@
                 </a:solidFill>
                 <a:latin typeface="Calibri"/>
               </a:rPr>
-              <a:t>A faithful 1:1 Python port of the paper's MATLAB scripts (baseline), plus the extended study: 12 experiments, 16 figures, 10 unit tests.</a:t>
-            </a:r>
-          </a:p>
-        </p:txBody>
-      </p:sp>
-      <p:sp>
-        <p:nvSpPr>
-          <p:cNvPr id="19" name="TextBox 18"/>
-          <p:cNvSpPr txBox="1"/>
-          <p:nvPr/>
-        </p:nvSpPr>
-        <p:spPr>
-          <a:xfrm>
-            <a:off x="548640" y="5989320"/>
-            <a:ext cx="11064240" cy="320040"/>
-          </a:xfrm>
-          <a:prstGeom prst="rect">
-            <a:avLst/>
-          </a:prstGeom>
-          <a:noFill/>
-        </p:spPr>
-        <p:txBody>
-          <a:bodyPr wrap="square" anchor="t" lIns="0" rIns="0" tIns="0" bIns="0">
-            <a:spAutoFit/>
-          </a:bodyPr>
-          <a:lstStyle/>
-          <a:p>
-            <a:pPr algn="l"/>
-            <a:r>
-              <a:rPr sz="1500" b="1" i="1">
+              <a:t>peak ground force, ankle dorsi/plantar-flexion, step time, step width</a:t>
+            </a:r>
+          </a:p>
+        </p:txBody>
+      </p:sp>
+      <p:sp>
+        <p:nvSpPr>
+          <p:cNvPr id="19" name="Oval 18"/>
+          <p:cNvSpPr/>
+          <p:nvPr/>
+        </p:nvSpPr>
+        <p:spPr>
+          <a:xfrm>
+            <a:off x="548640" y="4828032"/>
+            <a:ext cx="256032" cy="256032"/>
+          </a:xfrm>
+          <a:prstGeom prst="ellipse">
+            <a:avLst/>
+          </a:prstGeom>
+          <a:solidFill>
+            <a:srgbClr val="EDA100"/>
+          </a:solidFill>
+          <a:ln>
+            <a:noFill/>
+          </a:ln>
+        </p:spPr>
+        <p:style>
+          <a:lnRef idx="1">
+            <a:schemeClr val="accent1"/>
+          </a:lnRef>
+          <a:fillRef idx="3">
+            <a:schemeClr val="accent1"/>
+          </a:fillRef>
+          <a:effectRef idx="2">
+            <a:schemeClr val="accent1"/>
+          </a:effectRef>
+          <a:fontRef idx="minor">
+            <a:schemeClr val="lt1"/>
+          </a:fontRef>
+        </p:style>
+        <p:txBody>
+          <a:bodyPr rtlCol="0" anchor="ctr"/>
+          <a:lstStyle/>
+          <a:p>
+            <a:pPr algn="ctr"/>
+          </a:p>
+        </p:txBody>
+      </p:sp>
+      <p:sp>
+        <p:nvSpPr>
+          <p:cNvPr id="20" name="TextBox 19"/>
+          <p:cNvSpPr txBox="1"/>
+          <p:nvPr/>
+        </p:nvSpPr>
+        <p:spPr>
+          <a:xfrm>
+            <a:off x="960120" y="4754880"/>
+            <a:ext cx="5120640" cy="731520"/>
+          </a:xfrm>
+          <a:prstGeom prst="rect">
+            <a:avLst/>
+          </a:prstGeom>
+          <a:noFill/>
+        </p:spPr>
+        <p:txBody>
+          <a:bodyPr wrap="square" lIns="0" tIns="0" rIns="0" bIns="0" anchor="t">
+            <a:spAutoFit/>
+          </a:bodyPr>
+          <a:lstStyle/>
+          <a:p>
+            <a:pPr algn="l"/>
+            <a:r>
+              <a:rPr sz="1700" b="1" i="0">
                 <a:solidFill>
                   <a:srgbClr val="0F1B2D"/>
                 </a:solidFill>
                 <a:latin typeface="Calibri"/>
               </a:rPr>
-              <a:t>We evaluate both predictive accuracy and whether it holds on a new day.</a:t>
-            </a:r>
-          </a:p>
-        </p:txBody>
-      </p:sp>
+              <a:t>4  Control</a:t>
+            </a:r>
+          </a:p>
+          <a:p>
+            <a:pPr algn="l"/>
+            <a:r>
+              <a:rPr sz="1300" b="0" i="0">
+                <a:solidFill>
+                  <a:srgbClr val="555B66"/>
+                </a:solidFill>
+                <a:latin typeface="Calibri"/>
+              </a:rPr>
+              <a:t>exo torque profile: peak torque, peak time, rise time, fall time</a:t>
+            </a:r>
+          </a:p>
+        </p:txBody>
+      </p:sp>
+      <p:sp>
+        <p:nvSpPr>
+          <p:cNvPr id="21" name="Oval 20"/>
+          <p:cNvSpPr/>
+          <p:nvPr/>
+        </p:nvSpPr>
+        <p:spPr>
+          <a:xfrm>
+            <a:off x="548640" y="5605272"/>
+            <a:ext cx="256032" cy="256032"/>
+          </a:xfrm>
+          <a:prstGeom prst="ellipse">
+            <a:avLst/>
+          </a:prstGeom>
+          <a:solidFill>
+            <a:srgbClr val="EB6834"/>
+          </a:solidFill>
+          <a:ln>
+            <a:noFill/>
+          </a:ln>
+        </p:spPr>
+        <p:style>
+          <a:lnRef idx="1">
+            <a:schemeClr val="accent1"/>
+          </a:lnRef>
+          <a:fillRef idx="3">
+            <a:schemeClr val="accent1"/>
+          </a:fillRef>
+          <a:effectRef idx="2">
+            <a:schemeClr val="accent1"/>
+          </a:effectRef>
+          <a:fontRef idx="minor">
+            <a:schemeClr val="lt1"/>
+          </a:fontRef>
+        </p:style>
+        <p:txBody>
+          <a:bodyPr rtlCol="0" anchor="ctr"/>
+          <a:lstStyle/>
+          <a:p>
+            <a:pPr algn="ctr"/>
+          </a:p>
+        </p:txBody>
+      </p:sp>
+      <p:sp>
+        <p:nvSpPr>
+          <p:cNvPr id="22" name="TextBox 21"/>
+          <p:cNvSpPr txBox="1"/>
+          <p:nvPr/>
+        </p:nvSpPr>
+        <p:spPr>
+          <a:xfrm>
+            <a:off x="960120" y="5532120"/>
+            <a:ext cx="5120640" cy="731520"/>
+          </a:xfrm>
+          <a:prstGeom prst="rect">
+            <a:avLst/>
+          </a:prstGeom>
+          <a:noFill/>
+        </p:spPr>
+        <p:txBody>
+          <a:bodyPr wrap="square" lIns="0" tIns="0" rIns="0" bIns="0" anchor="t">
+            <a:spAutoFit/>
+          </a:bodyPr>
+          <a:lstStyle/>
+          <a:p>
+            <a:pPr algn="l"/>
+            <a:r>
+              <a:rPr sz="1700" b="1" i="0">
+                <a:solidFill>
+                  <a:srgbClr val="0F1B2D"/>
+                </a:solidFill>
+                <a:latin typeface="Calibri"/>
+              </a:rPr>
+              <a:t>1  Target</a:t>
+            </a:r>
+          </a:p>
+          <a:p>
+            <a:pPr algn="l"/>
+            <a:r>
+              <a:rPr sz="1300" b="0" i="0">
+                <a:solidFill>
+                  <a:srgbClr val="555B66"/>
+                </a:solidFill>
+                <a:latin typeface="Calibri"/>
+              </a:rPr>
+              <a:t>metabolic rate - standing baseline, ÷ normal walking (1.0 = no exo)</a:t>
+            </a:r>
+          </a:p>
+        </p:txBody>
+      </p:sp>
+      <p:pic>
+        <p:nvPicPr>
+          <p:cNvPr id="23" name="Picture 22" descr="F1_dataset_overview.png"/>
+          <p:cNvPicPr>
+            <a:picLocks noChangeAspect="1"/>
+          </p:cNvPicPr>
+          <p:nvPr/>
+        </p:nvPicPr>
+        <p:blipFill rotWithShape="1">
+          <a:blip r:embed="rId3"/>
+          <a:stretch>
+            <a:fillRect/>
+          </a:stretch>
+        </p:blipFill>
+        <p:spPr>
+          <a:xfrm>
+            <a:off x="6629400" y="2571750"/>
+            <a:ext cx="5074920" cy="2537460"/>
+          </a:xfrm>
+          <a:prstGeom prst="rect">
+            <a:avLst/>
+          </a:prstGeom>
+        </p:spPr>
+      </p:pic>
     </p:spTree>
   </p:cSld>
   <p:clrMapOvr>
@@ -9930,7 +9774,7 @@
 </file>
 
 <file path=ppt/slides/slide5.xml><?xml version="1.0" encoding="utf-8"?>
-<p:sld xmlns:a="http://schemas.openxmlformats.org/drawingml/2006/main" xmlns:p="http://schemas.openxmlformats.org/presentationml/2006/main" xmlns:r="http://schemas.openxmlformats.org/officeDocument/2006/relationships">
+<p:sld xmlns:a="http://schemas.openxmlformats.org/drawingml/2006/main" xmlns:r="http://schemas.openxmlformats.org/officeDocument/2006/relationships" xmlns:p="http://schemas.openxmlformats.org/presentationml/2006/main">
   <p:cSld>
     <p:bg>
       <p:bgPr>
@@ -9946,7 +9790,14 @@
         <p:cNvGrpSpPr/>
         <p:nvPr/>
       </p:nvGrpSpPr>
-      <p:grpSpPr/>
+      <p:grpSpPr>
+        <a:xfrm>
+          <a:off x="0" y="0"/>
+          <a:ext cx="0" cy="0"/>
+          <a:chOff x="0" y="0"/>
+          <a:chExt cx="0" cy="0"/>
+        </a:xfrm>
+      </p:grpSpPr>
       <p:sp>
         <p:nvSpPr>
           <p:cNvPr id="2" name="TextBox 1"/>
@@ -9964,7 +9815,7 @@
           <a:noFill/>
         </p:spPr>
         <p:txBody>
-          <a:bodyPr wrap="square" anchor="t" lIns="0" rIns="0" tIns="0" bIns="0">
+          <a:bodyPr wrap="square" lIns="0" tIns="0" rIns="0" bIns="0" anchor="t">
             <a:spAutoFit/>
           </a:bodyPr>
           <a:lstStyle/>
@@ -9999,7 +9850,7 @@
           <a:noFill/>
         </p:spPr>
         <p:txBody>
-          <a:bodyPr wrap="square" anchor="t" lIns="0" rIns="0" tIns="0" bIns="0">
+          <a:bodyPr wrap="square" lIns="0" tIns="0" rIns="0" bIns="0" anchor="t">
             <a:spAutoFit/>
           </a:bodyPr>
           <a:lstStyle/>
@@ -10034,7 +9885,7 @@
           <a:noFill/>
         </p:spPr>
         <p:txBody>
-          <a:bodyPr wrap="square" anchor="t" lIns="0" rIns="0" tIns="0" bIns="0">
+          <a:bodyPr wrap="square" lIns="0" tIns="0" rIns="0" bIns="0" anchor="t">
             <a:spAutoFit/>
           </a:bodyPr>
           <a:lstStyle/>
@@ -10069,7 +9920,7 @@
           <a:noFill/>
         </p:spPr>
         <p:txBody>
-          <a:bodyPr wrap="square" anchor="t" lIns="0" rIns="0" tIns="0" bIns="0">
+          <a:bodyPr wrap="square" lIns="0" tIns="0" rIns="0" bIns="0" anchor="t">
             <a:spAutoFit/>
           </a:bodyPr>
           <a:lstStyle/>
@@ -10104,7 +9955,7 @@
           <a:noFill/>
         </p:spPr>
         <p:txBody>
-          <a:bodyPr wrap="square" anchor="t" lIns="0" rIns="0" tIns="0" bIns="0">
+          <a:bodyPr wrap="square" lIns="0" tIns="0" rIns="0" bIns="0" anchor="t">
             <a:spAutoFit/>
           </a:bodyPr>
           <a:lstStyle/>
@@ -10139,7 +9990,7 @@
           <a:noFill/>
         </p:spPr>
         <p:txBody>
-          <a:bodyPr wrap="square" anchor="t" lIns="0" rIns="0" tIns="0" bIns="0">
+          <a:bodyPr wrap="square" lIns="0" tIns="0" rIns="0" bIns="0" anchor="t">
             <a:spAutoFit/>
           </a:bodyPr>
           <a:lstStyle/>
@@ -10174,7 +10025,7 @@
           <a:noFill/>
         </p:spPr>
         <p:txBody>
-          <a:bodyPr wrap="square" anchor="t" lIns="0" rIns="0" tIns="0" bIns="0">
+          <a:bodyPr wrap="square" lIns="0" tIns="0" rIns="0" bIns="0" anchor="t">
             <a:spAutoFit/>
           </a:bodyPr>
           <a:lstStyle/>
@@ -10209,7 +10060,7 @@
           <a:noFill/>
         </p:spPr>
         <p:txBody>
-          <a:bodyPr wrap="square" anchor="t" lIns="0" rIns="0" tIns="0" bIns="0">
+          <a:bodyPr wrap="square" lIns="0" tIns="0" rIns="0" bIns="0" anchor="t">
             <a:spAutoFit/>
           </a:bodyPr>
           <a:lstStyle/>
@@ -10244,7 +10095,7 @@
           <a:noFill/>
         </p:spPr>
         <p:txBody>
-          <a:bodyPr wrap="square" anchor="t" lIns="0" rIns="0" tIns="0" bIns="0">
+          <a:bodyPr wrap="square" lIns="0" tIns="0" rIns="0" bIns="0" anchor="t">
             <a:spAutoFit/>
           </a:bodyPr>
           <a:lstStyle/>
@@ -10279,7 +10130,7 @@
           <a:noFill/>
         </p:spPr>
         <p:txBody>
-          <a:bodyPr wrap="square" anchor="t" lIns="0" rIns="0" tIns="0" bIns="0">
+          <a:bodyPr wrap="square" lIns="0" tIns="0" rIns="0" bIns="0" anchor="t">
             <a:spAutoFit/>
           </a:bodyPr>
           <a:lstStyle/>
@@ -10314,7 +10165,7 @@
           <a:noFill/>
         </p:spPr>
         <p:txBody>
-          <a:bodyPr wrap="square" anchor="t" lIns="0" rIns="0" tIns="0" bIns="0">
+          <a:bodyPr wrap="square" lIns="0" tIns="0" rIns="0" bIns="0" anchor="t">
             <a:spAutoFit/>
           </a:bodyPr>
           <a:lstStyle/>
@@ -10349,7 +10200,7 @@
           <a:noFill/>
         </p:spPr>
         <p:txBody>
-          <a:bodyPr wrap="square" anchor="t" lIns="0" rIns="0" tIns="0" bIns="0">
+          <a:bodyPr wrap="square" lIns="0" tIns="0" rIns="0" bIns="0" anchor="t">
             <a:spAutoFit/>
           </a:bodyPr>
           <a:lstStyle/>
@@ -10384,7 +10235,7 @@
           <a:noFill/>
         </p:spPr>
         <p:txBody>
-          <a:bodyPr wrap="square" anchor="t" lIns="0" rIns="0" tIns="0" bIns="0">
+          <a:bodyPr wrap="square" lIns="0" tIns="0" rIns="0" bIns="0" anchor="t">
             <a:spAutoFit/>
           </a:bodyPr>
           <a:lstStyle/>
@@ -10419,7 +10270,7 @@
           <a:noFill/>
         </p:spPr>
         <p:txBody>
-          <a:bodyPr wrap="square" anchor="t" lIns="0" rIns="0" tIns="0" bIns="0">
+          <a:bodyPr wrap="square" lIns="0" tIns="0" rIns="0" bIns="0" anchor="t">
             <a:spAutoFit/>
           </a:bodyPr>
           <a:lstStyle/>
@@ -10500,7 +10351,7 @@
           <a:noFill/>
         </p:spPr>
         <p:txBody>
-          <a:bodyPr wrap="square" anchor="t" lIns="0" rIns="0" tIns="0" bIns="0">
+          <a:bodyPr wrap="square" lIns="0" tIns="0" rIns="0" bIns="0" anchor="t">
             <a:spAutoFit/>
           </a:bodyPr>
           <a:lstStyle/>
@@ -10578,7 +10429,7 @@
           </p:cNvPicPr>
           <p:nvPr/>
         </p:nvPicPr>
-        <p:blipFill>
+        <p:blipFill rotWithShape="1">
           <a:blip r:embed="rId3"/>
           <a:stretch>
             <a:fillRect/>
@@ -10603,7 +10454,7 @@
 </file>
 
 <file path=ppt/slides/slide6.xml><?xml version="1.0" encoding="utf-8"?>
-<p:sld xmlns:a="http://schemas.openxmlformats.org/drawingml/2006/main" xmlns:p="http://schemas.openxmlformats.org/presentationml/2006/main" xmlns:r="http://schemas.openxmlformats.org/officeDocument/2006/relationships">
+<p:sld xmlns:a="http://schemas.openxmlformats.org/drawingml/2006/main" xmlns:r="http://schemas.openxmlformats.org/officeDocument/2006/relationships" xmlns:p="http://schemas.openxmlformats.org/presentationml/2006/main">
   <p:cSld>
     <p:bg>
       <p:bgPr>
@@ -10619,7 +10470,14 @@
         <p:cNvGrpSpPr/>
         <p:nvPr/>
       </p:nvGrpSpPr>
-      <p:grpSpPr/>
+      <p:grpSpPr>
+        <a:xfrm>
+          <a:off x="0" y="0"/>
+          <a:ext cx="0" cy="0"/>
+          <a:chOff x="0" y="0"/>
+          <a:chExt cx="0" cy="0"/>
+        </a:xfrm>
+      </p:grpSpPr>
       <p:sp>
         <p:nvSpPr>
           <p:cNvPr id="2" name="TextBox 1"/>
@@ -10637,7 +10495,7 @@
           <a:noFill/>
         </p:spPr>
         <p:txBody>
-          <a:bodyPr wrap="square" anchor="t" lIns="0" rIns="0" tIns="0" bIns="0">
+          <a:bodyPr wrap="square" lIns="0" tIns="0" rIns="0" bIns="0" anchor="t">
             <a:spAutoFit/>
           </a:bodyPr>
           <a:lstStyle/>
@@ -10672,7 +10530,7 @@
           <a:noFill/>
         </p:spPr>
         <p:txBody>
-          <a:bodyPr wrap="square" anchor="t" lIns="0" rIns="0" tIns="0" bIns="0">
+          <a:bodyPr wrap="square" lIns="0" tIns="0" rIns="0" bIns="0" anchor="t">
             <a:spAutoFit/>
           </a:bodyPr>
           <a:lstStyle/>
@@ -10707,7 +10565,7 @@
           <a:noFill/>
         </p:spPr>
         <p:txBody>
-          <a:bodyPr wrap="square" anchor="t" lIns="0" rIns="0" tIns="0" bIns="0">
+          <a:bodyPr wrap="square" lIns="0" tIns="0" rIns="0" bIns="0" anchor="t">
             <a:spAutoFit/>
           </a:bodyPr>
           <a:lstStyle/>
@@ -10742,7 +10600,7 @@
           <a:noFill/>
         </p:spPr>
         <p:txBody>
-          <a:bodyPr wrap="square" anchor="t" lIns="0" rIns="0" tIns="0" bIns="0">
+          <a:bodyPr wrap="square" lIns="0" tIns="0" rIns="0" bIns="0" anchor="t">
             <a:spAutoFit/>
           </a:bodyPr>
           <a:lstStyle/>
@@ -10823,7 +10681,7 @@
           <a:noFill/>
         </p:spPr>
         <p:txBody>
-          <a:bodyPr wrap="square" anchor="t" lIns="0" rIns="0" tIns="0" bIns="0">
+          <a:bodyPr wrap="square" lIns="0" tIns="0" rIns="0" bIns="0" anchor="t">
             <a:spAutoFit/>
           </a:bodyPr>
           <a:lstStyle/>
@@ -10858,7 +10716,7 @@
           <a:noFill/>
         </p:spPr>
         <p:txBody>
-          <a:bodyPr wrap="square" anchor="t" lIns="0" rIns="0" tIns="0" bIns="0">
+          <a:bodyPr wrap="square" lIns="0" tIns="0" rIns="0" bIns="0" anchor="t">
             <a:spAutoFit/>
           </a:bodyPr>
           <a:lstStyle/>
@@ -10871,8 +10729,24 @@
                 </a:solidFill>
                 <a:latin typeface="Calibri"/>
               </a:rPr>
-              <a:t>S1, ours (ensemble)
-paper ref.: 0.0089 (lin. reg.)</a:t>
+              <a:t>S1, ours (ensemble)</a:t>
+            </a:r>
+            <a:br>
+              <a:rPr sz="1300" b="0" i="0">
+                <a:solidFill>
+                  <a:srgbClr val="555B66"/>
+                </a:solidFill>
+                <a:latin typeface="Calibri"/>
+              </a:rPr>
+            </a:br>
+            <a:r>
+              <a:rPr sz="1300" b="0" i="0">
+                <a:solidFill>
+                  <a:srgbClr val="555B66"/>
+                </a:solidFill>
+                <a:latin typeface="Calibri"/>
+              </a:rPr>
+              <a:t>paper ref.: 0.0089 (lin. reg.)</a:t>
             </a:r>
           </a:p>
         </p:txBody>
@@ -10940,7 +10814,7 @@
           <a:noFill/>
         </p:spPr>
         <p:txBody>
-          <a:bodyPr wrap="square" anchor="t" lIns="0" rIns="0" tIns="0" bIns="0">
+          <a:bodyPr wrap="square" lIns="0" tIns="0" rIns="0" bIns="0" anchor="t">
             <a:spAutoFit/>
           </a:bodyPr>
           <a:lstStyle/>
@@ -10975,7 +10849,7 @@
           <a:noFill/>
         </p:spPr>
         <p:txBody>
-          <a:bodyPr wrap="square" anchor="t" lIns="0" rIns="0" tIns="0" bIns="0">
+          <a:bodyPr wrap="square" lIns="0" tIns="0" rIns="0" bIns="0" anchor="t">
             <a:spAutoFit/>
           </a:bodyPr>
           <a:lstStyle/>
@@ -10988,8 +10862,24 @@
                 </a:solidFill>
                 <a:latin typeface="Calibri"/>
               </a:rPr>
-              <a:t>S1 variance explained
-(out-of-fold)</a:t>
+              <a:t>S1 variance explained</a:t>
+            </a:r>
+            <a:br>
+              <a:rPr sz="1300" b="0" i="0">
+                <a:solidFill>
+                  <a:srgbClr val="555B66"/>
+                </a:solidFill>
+                <a:latin typeface="Calibri"/>
+              </a:rPr>
+            </a:br>
+            <a:r>
+              <a:rPr sz="1300" b="0" i="0">
+                <a:solidFill>
+                  <a:srgbClr val="555B66"/>
+                </a:solidFill>
+                <a:latin typeface="Calibri"/>
+              </a:rPr>
+              <a:t>(out-of-fold)</a:t>
             </a:r>
           </a:p>
         </p:txBody>
@@ -11057,7 +10947,7 @@
           <a:noFill/>
         </p:spPr>
         <p:txBody>
-          <a:bodyPr wrap="square" anchor="t" lIns="0" rIns="0" tIns="0" bIns="0">
+          <a:bodyPr wrap="square" lIns="0" tIns="0" rIns="0" bIns="0" anchor="t">
             <a:spAutoFit/>
           </a:bodyPr>
           <a:lstStyle/>
@@ -11092,7 +10982,7 @@
           <a:noFill/>
         </p:spPr>
         <p:txBody>
-          <a:bodyPr wrap="square" anchor="t" lIns="0" rIns="0" tIns="0" bIns="0">
+          <a:bodyPr wrap="square" lIns="0" tIns="0" rIns="0" bIns="0" anchor="t">
             <a:spAutoFit/>
           </a:bodyPr>
           <a:lstStyle/>
@@ -11105,8 +10995,24 @@
                 </a:solidFill>
                 <a:latin typeface="Calibri"/>
               </a:rPr>
-              <a:t>S2, ours (SVR)
-paper ref.: 0.0168 (lin. reg.)</a:t>
+              <a:t>S2, ours (SVR)</a:t>
+            </a:r>
+            <a:br>
+              <a:rPr sz="1300" b="0" i="0">
+                <a:solidFill>
+                  <a:srgbClr val="555B66"/>
+                </a:solidFill>
+                <a:latin typeface="Calibri"/>
+              </a:rPr>
+            </a:br>
+            <a:r>
+              <a:rPr sz="1300" b="0" i="0">
+                <a:solidFill>
+                  <a:srgbClr val="555B66"/>
+                </a:solidFill>
+                <a:latin typeface="Calibri"/>
+              </a:rPr>
+              <a:t>paper ref.: 0.0168 (lin. reg.)</a:t>
             </a:r>
           </a:p>
         </p:txBody>
@@ -11174,7 +11080,7 @@
           <a:noFill/>
         </p:spPr>
         <p:txBody>
-          <a:bodyPr wrap="square" anchor="t" lIns="0" rIns="0" tIns="0" bIns="0">
+          <a:bodyPr wrap="square" lIns="0" tIns="0" rIns="0" bIns="0" anchor="t">
             <a:spAutoFit/>
           </a:bodyPr>
           <a:lstStyle/>
@@ -11209,7 +11115,7 @@
           <a:noFill/>
         </p:spPr>
         <p:txBody>
-          <a:bodyPr wrap="square" anchor="t" lIns="0" rIns="0" tIns="0" bIns="0">
+          <a:bodyPr wrap="square" lIns="0" tIns="0" rIns="0" bIns="0" anchor="t">
             <a:spAutoFit/>
           </a:bodyPr>
           <a:lstStyle/>
@@ -11222,8 +11128,24 @@
                 </a:solidFill>
                 <a:latin typeface="Calibri"/>
               </a:rPr>
-              <a:t>S2 variance explained
-(out-of-fold)</a:t>
+              <a:t>S2 variance explained</a:t>
+            </a:r>
+            <a:br>
+              <a:rPr sz="1300" b="0" i="0">
+                <a:solidFill>
+                  <a:srgbClr val="555B66"/>
+                </a:solidFill>
+                <a:latin typeface="Calibri"/>
+              </a:rPr>
+            </a:br>
+            <a:r>
+              <a:rPr sz="1300" b="0" i="0">
+                <a:solidFill>
+                  <a:srgbClr val="555B66"/>
+                </a:solidFill>
+                <a:latin typeface="Calibri"/>
+              </a:rPr>
+              <a:t>(out-of-fold)</a:t>
             </a:r>
           </a:p>
         </p:txBody>
@@ -11291,7 +11213,7 @@
           <a:noFill/>
         </p:spPr>
         <p:txBody>
-          <a:bodyPr wrap="square" anchor="t" lIns="0" rIns="0" tIns="0" bIns="0">
+          <a:bodyPr wrap="square" lIns="0" tIns="0" rIns="0" bIns="0" anchor="t">
             <a:spAutoFit/>
           </a:bodyPr>
           <a:lstStyle/>
@@ -11326,7 +11248,7 @@
           </p:cNvPicPr>
           <p:nvPr/>
         </p:nvPicPr>
-        <p:blipFill>
+        <p:blipFill rotWithShape="1">
           <a:blip r:embed="rId3"/>
           <a:stretch>
             <a:fillRect/>
@@ -11351,7 +11273,7 @@
 </file>
 
 <file path=ppt/slides/slide7.xml><?xml version="1.0" encoding="utf-8"?>
-<p:sld xmlns:a="http://schemas.openxmlformats.org/drawingml/2006/main" xmlns:p="http://schemas.openxmlformats.org/presentationml/2006/main" xmlns:r="http://schemas.openxmlformats.org/officeDocument/2006/relationships">
+<p:sld xmlns:a="http://schemas.openxmlformats.org/drawingml/2006/main" xmlns:r="http://schemas.openxmlformats.org/officeDocument/2006/relationships" xmlns:p="http://schemas.openxmlformats.org/presentationml/2006/main">
   <p:cSld>
     <p:bg>
       <p:bgPr>
@@ -11367,7 +11289,14 @@
         <p:cNvGrpSpPr/>
         <p:nvPr/>
       </p:nvGrpSpPr>
-      <p:grpSpPr/>
+      <p:grpSpPr>
+        <a:xfrm>
+          <a:off x="0" y="0"/>
+          <a:ext cx="0" cy="0"/>
+          <a:chOff x="0" y="0"/>
+          <a:chExt cx="0" cy="0"/>
+        </a:xfrm>
+      </p:grpSpPr>
       <p:sp>
         <p:nvSpPr>
           <p:cNvPr id="2" name="TextBox 1"/>
@@ -11385,7 +11314,7 @@
           <a:noFill/>
         </p:spPr>
         <p:txBody>
-          <a:bodyPr wrap="square" anchor="t" lIns="0" rIns="0" tIns="0" bIns="0">
+          <a:bodyPr wrap="square" lIns="0" tIns="0" rIns="0" bIns="0" anchor="t">
             <a:spAutoFit/>
           </a:bodyPr>
           <a:lstStyle/>
@@ -11420,7 +11349,7 @@
           <a:noFill/>
         </p:spPr>
         <p:txBody>
-          <a:bodyPr wrap="square" anchor="t" lIns="0" rIns="0" tIns="0" bIns="0">
+          <a:bodyPr wrap="square" lIns="0" tIns="0" rIns="0" bIns="0" anchor="t">
             <a:spAutoFit/>
           </a:bodyPr>
           <a:lstStyle/>
@@ -11455,7 +11384,7 @@
           <a:noFill/>
         </p:spPr>
         <p:txBody>
-          <a:bodyPr wrap="square" anchor="t" lIns="0" rIns="0" tIns="0" bIns="0">
+          <a:bodyPr wrap="square" lIns="0" tIns="0" rIns="0" bIns="0" anchor="t">
             <a:spAutoFit/>
           </a:bodyPr>
           <a:lstStyle/>
@@ -11490,7 +11419,7 @@
           <a:noFill/>
         </p:spPr>
         <p:txBody>
-          <a:bodyPr wrap="square" anchor="t" lIns="0" rIns="0" tIns="0" bIns="0">
+          <a:bodyPr wrap="square" lIns="0" tIns="0" rIns="0" bIns="0" anchor="t">
             <a:spAutoFit/>
           </a:bodyPr>
           <a:lstStyle/>
@@ -11516,7 +11445,7 @@
           </p:cNvPicPr>
           <p:nvPr/>
         </p:nvPicPr>
-        <p:blipFill>
+        <p:blipFill rotWithShape="1">
           <a:blip r:embed="rId3"/>
           <a:stretch>
             <a:fillRect/>
@@ -11524,7 +11453,7 @@
         </p:blipFill>
         <p:spPr>
           <a:xfrm>
-            <a:off x="457200" y="1768532"/>
+            <a:off x="990600" y="2503794"/>
             <a:ext cx="7680960" cy="4189614"/>
           </a:xfrm>
           <a:prstGeom prst="rect">
@@ -11549,7 +11478,7 @@
           <a:noFill/>
         </p:spPr>
         <p:txBody>
-          <a:bodyPr wrap="square" lIns="0" rIns="0" tIns="0" bIns="0">
+          <a:bodyPr wrap="square" lIns="0" tIns="0" rIns="0" bIns="0">
             <a:spAutoFit/>
           </a:bodyPr>
           <a:lstStyle/>
@@ -11734,7 +11663,7 @@
 </file>
 
 <file path=ppt/slides/slide8.xml><?xml version="1.0" encoding="utf-8"?>
-<p:sld xmlns:a="http://schemas.openxmlformats.org/drawingml/2006/main" xmlns:p="http://schemas.openxmlformats.org/presentationml/2006/main" xmlns:r="http://schemas.openxmlformats.org/officeDocument/2006/relationships">
+<p:sld xmlns:a="http://schemas.openxmlformats.org/drawingml/2006/main" xmlns:r="http://schemas.openxmlformats.org/officeDocument/2006/relationships" xmlns:p="http://schemas.openxmlformats.org/presentationml/2006/main">
   <p:cSld>
     <p:bg>
       <p:bgPr>
@@ -11750,7 +11679,14 @@
         <p:cNvGrpSpPr/>
         <p:nvPr/>
       </p:nvGrpSpPr>
-      <p:grpSpPr/>
+      <p:grpSpPr>
+        <a:xfrm>
+          <a:off x="0" y="0"/>
+          <a:ext cx="0" cy="0"/>
+          <a:chOff x="0" y="0"/>
+          <a:chExt cx="0" cy="0"/>
+        </a:xfrm>
+      </p:grpSpPr>
       <p:sp>
         <p:nvSpPr>
           <p:cNvPr id="2" name="TextBox 1"/>
@@ -11768,7 +11704,7 @@
           <a:noFill/>
         </p:spPr>
         <p:txBody>
-          <a:bodyPr wrap="square" anchor="t" lIns="0" rIns="0" tIns="0" bIns="0">
+          <a:bodyPr wrap="square" lIns="0" tIns="0" rIns="0" bIns="0" anchor="t">
             <a:spAutoFit/>
           </a:bodyPr>
           <a:lstStyle/>
@@ -11803,7 +11739,7 @@
           <a:noFill/>
         </p:spPr>
         <p:txBody>
-          <a:bodyPr wrap="square" anchor="t" lIns="0" rIns="0" tIns="0" bIns="0">
+          <a:bodyPr wrap="square" lIns="0" tIns="0" rIns="0" bIns="0" anchor="t">
             <a:spAutoFit/>
           </a:bodyPr>
           <a:lstStyle/>
@@ -11838,7 +11774,7 @@
           <a:noFill/>
         </p:spPr>
         <p:txBody>
-          <a:bodyPr wrap="square" anchor="t" lIns="0" rIns="0" tIns="0" bIns="0">
+          <a:bodyPr wrap="square" lIns="0" tIns="0" rIns="0" bIns="0" anchor="t">
             <a:spAutoFit/>
           </a:bodyPr>
           <a:lstStyle/>
@@ -11873,7 +11809,7 @@
           <a:noFill/>
         </p:spPr>
         <p:txBody>
-          <a:bodyPr wrap="square" anchor="t" lIns="0" rIns="0" tIns="0" bIns="0">
+          <a:bodyPr wrap="square" lIns="0" tIns="0" rIns="0" bIns="0" anchor="t">
             <a:spAutoFit/>
           </a:bodyPr>
           <a:lstStyle/>
@@ -11899,7 +11835,7 @@
           </p:cNvPicPr>
           <p:nvPr/>
         </p:nvPicPr>
-        <p:blipFill>
+        <p:blipFill rotWithShape="1">
           <a:blip r:embed="rId3"/>
           <a:stretch>
             <a:fillRect/>
@@ -11978,7 +11914,7 @@
           <a:noFill/>
         </p:spPr>
         <p:txBody>
-          <a:bodyPr wrap="square" anchor="t" lIns="0" rIns="0" tIns="0" bIns="0">
+          <a:bodyPr wrap="square" lIns="0" tIns="0" rIns="0" bIns="0" anchor="t">
             <a:spAutoFit/>
           </a:bodyPr>
           <a:lstStyle/>
@@ -12013,7 +11949,7 @@
           <a:noFill/>
         </p:spPr>
         <p:txBody>
-          <a:bodyPr wrap="square" anchor="t" lIns="0" rIns="0" tIns="0" bIns="0">
+          <a:bodyPr wrap="square" lIns="0" tIns="0" rIns="0" bIns="0" anchor="t">
             <a:spAutoFit/>
           </a:bodyPr>
           <a:lstStyle/>
@@ -12094,7 +12030,7 @@
           <a:noFill/>
         </p:spPr>
         <p:txBody>
-          <a:bodyPr wrap="square" anchor="t" lIns="0" rIns="0" tIns="0" bIns="0">
+          <a:bodyPr wrap="square" lIns="0" tIns="0" rIns="0" bIns="0" anchor="t">
             <a:spAutoFit/>
           </a:bodyPr>
           <a:lstStyle/>
@@ -12129,7 +12065,7 @@
           <a:noFill/>
         </p:spPr>
         <p:txBody>
-          <a:bodyPr wrap="square" anchor="t" lIns="0" rIns="0" tIns="0" bIns="0">
+          <a:bodyPr wrap="square" lIns="0" tIns="0" rIns="0" bIns="0" anchor="t">
             <a:spAutoFit/>
           </a:bodyPr>
           <a:lstStyle/>
@@ -12210,7 +12146,7 @@
           <a:noFill/>
         </p:spPr>
         <p:txBody>
-          <a:bodyPr wrap="square" anchor="t" lIns="0" rIns="0" tIns="0" bIns="0">
+          <a:bodyPr wrap="square" lIns="0" tIns="0" rIns="0" bIns="0" anchor="t">
             <a:spAutoFit/>
           </a:bodyPr>
           <a:lstStyle/>
@@ -12245,7 +12181,7 @@
           <a:noFill/>
         </p:spPr>
         <p:txBody>
-          <a:bodyPr wrap="square" anchor="t" lIns="0" rIns="0" tIns="0" bIns="0">
+          <a:bodyPr wrap="square" lIns="0" tIns="0" rIns="0" bIns="0" anchor="t">
             <a:spAutoFit/>
           </a:bodyPr>
           <a:lstStyle/>
@@ -12272,7 +12208,7 @@
 </file>
 
 <file path=ppt/slides/slide9.xml><?xml version="1.0" encoding="utf-8"?>
-<p:sld xmlns:a="http://schemas.openxmlformats.org/drawingml/2006/main" xmlns:p="http://schemas.openxmlformats.org/presentationml/2006/main" xmlns:r="http://schemas.openxmlformats.org/officeDocument/2006/relationships">
+<p:sld xmlns:a="http://schemas.openxmlformats.org/drawingml/2006/main" xmlns:r="http://schemas.openxmlformats.org/officeDocument/2006/relationships" xmlns:p="http://schemas.openxmlformats.org/presentationml/2006/main">
   <p:cSld>
     <p:bg>
       <p:bgPr>
@@ -12288,7 +12224,14 @@
         <p:cNvGrpSpPr/>
         <p:nvPr/>
       </p:nvGrpSpPr>
-      <p:grpSpPr/>
+      <p:grpSpPr>
+        <a:xfrm>
+          <a:off x="0" y="0"/>
+          <a:ext cx="0" cy="0"/>
+          <a:chOff x="0" y="0"/>
+          <a:chExt cx="0" cy="0"/>
+        </a:xfrm>
+      </p:grpSpPr>
       <p:sp>
         <p:nvSpPr>
           <p:cNvPr id="2" name="TextBox 1"/>
@@ -12306,7 +12249,7 @@
           <a:noFill/>
         </p:spPr>
         <p:txBody>
-          <a:bodyPr wrap="square" anchor="t" lIns="0" rIns="0" tIns="0" bIns="0">
+          <a:bodyPr wrap="square" lIns="0" tIns="0" rIns="0" bIns="0" anchor="t">
             <a:spAutoFit/>
           </a:bodyPr>
           <a:lstStyle/>
@@ -12341,7 +12284,7 @@
           <a:noFill/>
         </p:spPr>
         <p:txBody>
-          <a:bodyPr wrap="square" anchor="t" lIns="0" rIns="0" tIns="0" bIns="0">
+          <a:bodyPr wrap="square" lIns="0" tIns="0" rIns="0" bIns="0" anchor="t">
             <a:spAutoFit/>
           </a:bodyPr>
           <a:lstStyle/>
@@ -12376,7 +12319,7 @@
           <a:noFill/>
         </p:spPr>
         <p:txBody>
-          <a:bodyPr wrap="square" anchor="t" lIns="0" rIns="0" tIns="0" bIns="0">
+          <a:bodyPr wrap="square" lIns="0" tIns="0" rIns="0" bIns="0" anchor="t">
             <a:spAutoFit/>
           </a:bodyPr>
           <a:lstStyle/>
@@ -12411,7 +12354,7 @@
           <a:noFill/>
         </p:spPr>
         <p:txBody>
-          <a:bodyPr wrap="square" anchor="t" lIns="0" rIns="0" tIns="0" bIns="0">
+          <a:bodyPr wrap="square" lIns="0" tIns="0" rIns="0" bIns="0" anchor="t">
             <a:spAutoFit/>
           </a:bodyPr>
           <a:lstStyle/>
@@ -12437,7 +12380,7 @@
           </p:cNvPicPr>
           <p:nvPr/>
         </p:nvPicPr>
-        <p:blipFill>
+        <p:blipFill rotWithShape="1">
           <a:blip r:embed="rId3"/>
           <a:stretch>
             <a:fillRect/>
@@ -12837,7 +12780,7 @@
           <a:noFill/>
         </p:spPr>
         <p:txBody>
-          <a:bodyPr wrap="square" anchor="t" lIns="0" rIns="0" tIns="0" bIns="0">
+          <a:bodyPr wrap="square" lIns="0" tIns="0" rIns="0" bIns="0" anchor="t">
             <a:spAutoFit/>
           </a:bodyPr>
           <a:lstStyle/>
@@ -12872,7 +12815,7 @@
           <a:noFill/>
         </p:spPr>
         <p:txBody>
-          <a:bodyPr wrap="square" lIns="0" rIns="0" tIns="0" bIns="0">
+          <a:bodyPr wrap="square" lIns="0" tIns="0" rIns="0" bIns="0">
             <a:spAutoFit/>
           </a:bodyPr>
           <a:lstStyle/>
@@ -12921,14 +12864,14 @@
 </file>
 
 <file path=ppt/theme/theme1.xml><?xml version="1.0" encoding="utf-8"?>
-<a:theme xmlns:a="http://schemas.openxmlformats.org/drawingml/2006/main" name="Office Theme">
+<a:theme xmlns:a="http://schemas.openxmlformats.org/drawingml/2006/main" xmlns:r="http://schemas.openxmlformats.org/officeDocument/2006/relationships" name="Office Theme">
   <a:themeElements>
     <a:clrScheme name="Office">
       <a:dk1>
-        <a:sysClr val="windowText" lastClr="000000"/>
+        <a:srgbClr val="000000"/>
       </a:dk1>
       <a:lt1>
-        <a:sysClr val="window" lastClr="FFFFFF"/>
+        <a:srgbClr val="FFFFFF"/>
       </a:lt1>
       <a:dk2>
         <a:srgbClr val="1F497D"/>
@@ -13082,7 +13025,7 @@
         </a:gradFill>
       </a:fillStyleLst>
       <a:lnStyleLst>
-        <a:ln w="9525" cap="flat" cmpd="sng" algn="ctr">
+        <a:ln w="9525" cap="flat" cmpd="sng">
           <a:solidFill>
             <a:schemeClr val="phClr">
               <a:shade val="95000"/>
@@ -13091,13 +13034,13 @@
           </a:solidFill>
           <a:prstDash val="solid"/>
         </a:ln>
-        <a:ln w="25400" cap="flat" cmpd="sng" algn="ctr">
+        <a:ln w="25400" cap="flat" cmpd="sng">
           <a:solidFill>
             <a:schemeClr val="phClr"/>
           </a:solidFill>
           <a:prstDash val="solid"/>
         </a:ln>
-        <a:ln w="38100" cap="flat" cmpd="sng" algn="ctr">
+        <a:ln w="38100" cap="flat" cmpd="sng">
           <a:solidFill>
             <a:schemeClr val="phClr"/>
           </a:solidFill>
@@ -13107,7 +13050,7 @@
       <a:effectStyleLst>
         <a:effectStyle>
           <a:effectLst>
-            <a:outerShdw blurRad="40000" dist="20000" dir="5400000" rotWithShape="0">
+            <a:outerShdw blurRad="40000" dist="20000" dir="5400000" algn="b" rotWithShape="0">
               <a:srgbClr val="000000">
                 <a:alpha val="38000"/>
               </a:srgbClr>
@@ -13116,7 +13059,7 @@
         </a:effectStyle>
         <a:effectStyle>
           <a:effectLst>
-            <a:outerShdw blurRad="40000" dist="23000" dir="5400000" rotWithShape="0">
+            <a:outerShdw blurRad="40000" dist="23000" dir="5400000" algn="b" rotWithShape="0">
               <a:srgbClr val="000000">
                 <a:alpha val="35000"/>
               </a:srgbClr>
@@ -13125,13 +13068,13 @@
         </a:effectStyle>
         <a:effectStyle>
           <a:effectLst>
-            <a:outerShdw blurRad="40000" dist="23000" dir="5400000" rotWithShape="0">
+            <a:outerShdw blurRad="40000" dist="23000" dir="5400000" algn="b" rotWithShape="0">
               <a:srgbClr val="000000">
                 <a:alpha val="35000"/>
               </a:srgbClr>
             </a:outerShdw>
           </a:effectLst>
-          <a:scene3d>
+          <a:scene3d xmlns:a="http://schemas.openxmlformats.org/drawingml/2006/main">
             <a:camera prst="orthographicFront">
               <a:rot lat="0" lon="0" rev="0"/>
             </a:camera>
@@ -13139,7 +13082,7 @@
               <a:rot lat="0" lon="0" rev="1200000"/>
             </a:lightRig>
           </a:scene3d>
-          <a:sp3d>
+          <a:sp3d xmlns:a="http://schemas.openxmlformats.org/drawingml/2006/main">
             <a:bevelT w="63500" h="25400"/>
           </a:sp3d>
         </a:effectStyle>
@@ -13196,7 +13139,7 @@
       </a:bgFillStyleLst>
     </a:fmtScheme>
   </a:themeElements>
-  <a:objectDefaults>
+  <a:objectDefaults xmlns:a="http://schemas.openxmlformats.org/drawingml/2006/main">
     <a:spDef>
       <a:spPr/>
       <a:bodyPr/>
@@ -13236,19 +13179,19 @@
       </a:style>
     </a:lnDef>
   </a:objectDefaults>
-  <a:extraClrSchemeLst/>
+  <a:extraClrSchemeLst xmlns:a="http://schemas.openxmlformats.org/drawingml/2006/main"/>
 </a:theme>
 </file>
 
 <file path=ppt/theme/theme2.xml><?xml version="1.0" encoding="utf-8"?>
-<a:theme xmlns:a="http://schemas.openxmlformats.org/drawingml/2006/main" name="Office Theme">
+<a:theme xmlns:a="http://schemas.openxmlformats.org/drawingml/2006/main" xmlns:r="http://schemas.openxmlformats.org/officeDocument/2006/relationships" name="Office Theme">
   <a:themeElements>
     <a:clrScheme name="Office">
       <a:dk1>
-        <a:sysClr val="windowText" lastClr="000000"/>
+        <a:srgbClr val="000000"/>
       </a:dk1>
       <a:lt1>
-        <a:sysClr val="window" lastClr="FFFFFF"/>
+        <a:srgbClr val="FFFFFF"/>
       </a:lt1>
       <a:dk2>
         <a:srgbClr val="1F497D"/>
@@ -13402,7 +13345,7 @@
         </a:gradFill>
       </a:fillStyleLst>
       <a:lnStyleLst>
-        <a:ln w="9525" cap="flat" cmpd="sng" algn="ctr">
+        <a:ln w="9525" cap="flat" cmpd="sng">
           <a:solidFill>
             <a:schemeClr val="phClr">
               <a:shade val="95000"/>
@@ -13411,13 +13354,13 @@
           </a:solidFill>
           <a:prstDash val="solid"/>
         </a:ln>
-        <a:ln w="25400" cap="flat" cmpd="sng" algn="ctr">
+        <a:ln w="25400" cap="flat" cmpd="sng">
           <a:solidFill>
             <a:schemeClr val="phClr"/>
           </a:solidFill>
           <a:prstDash val="solid"/>
         </a:ln>
-        <a:ln w="38100" cap="flat" cmpd="sng" algn="ctr">
+        <a:ln w="38100" cap="flat" cmpd="sng">
           <a:solidFill>
             <a:schemeClr val="phClr"/>
           </a:solidFill>
@@ -13427,7 +13370,7 @@
       <a:effectStyleLst>
         <a:effectStyle>
           <a:effectLst>
-            <a:outerShdw blurRad="40000" dist="20000" dir="5400000" rotWithShape="0">
+            <a:outerShdw blurRad="40000" dist="20000" dir="5400000" algn="b" rotWithShape="0">
               <a:srgbClr val="000000">
                 <a:alpha val="38000"/>
               </a:srgbClr>
@@ -13436,7 +13379,7 @@
         </a:effectStyle>
         <a:effectStyle>
           <a:effectLst>
-            <a:outerShdw blurRad="40000" dist="23000" dir="5400000" rotWithShape="0">
+            <a:outerShdw blurRad="40000" dist="23000" dir="5400000" algn="b" rotWithShape="0">
               <a:srgbClr val="000000">
                 <a:alpha val="35000"/>
               </a:srgbClr>
@@ -13445,13 +13388,13 @@
         </a:effectStyle>
         <a:effectStyle>
           <a:effectLst>
-            <a:outerShdw blurRad="40000" dist="23000" dir="5400000" rotWithShape="0">
+            <a:outerShdw blurRad="40000" dist="23000" dir="5400000" algn="b" rotWithShape="0">
               <a:srgbClr val="000000">
                 <a:alpha val="35000"/>
               </a:srgbClr>
             </a:outerShdw>
           </a:effectLst>
-          <a:scene3d>
+          <a:scene3d xmlns:a="http://schemas.openxmlformats.org/drawingml/2006/main">
             <a:camera prst="orthographicFront">
               <a:rot lat="0" lon="0" rev="0"/>
             </a:camera>
@@ -13459,7 +13402,7 @@
               <a:rot lat="0" lon="0" rev="1200000"/>
             </a:lightRig>
           </a:scene3d>
-          <a:sp3d>
+          <a:sp3d xmlns:a="http://schemas.openxmlformats.org/drawingml/2006/main">
             <a:bevelT w="63500" h="25400"/>
           </a:sp3d>
         </a:effectStyle>
@@ -13516,7 +13459,7 @@
       </a:bgFillStyleLst>
     </a:fmtScheme>
   </a:themeElements>
-  <a:objectDefaults>
+  <a:objectDefaults xmlns:a="http://schemas.openxmlformats.org/drawingml/2006/main">
     <a:spDef>
       <a:spPr/>
       <a:bodyPr/>
@@ -13556,6 +13499,6 @@
       </a:style>
     </a:lnDef>
   </a:objectDefaults>
-  <a:extraClrSchemeLst/>
+  <a:extraClrSchemeLst xmlns:a="http://schemas.openxmlformats.org/drawingml/2006/main"/>
 </a:theme>
 </file>